--- a/deck/Vi-AI-NOC-Sizing.pptx
+++ b/deck/Vi-AI-NOC-Sizing.pptx
@@ -503,7 +503,7 @@
           <a:p>
             <a:r>
               <a:rPr lang="en-US" dirty="0"/>
-              <a:t>Left: what is fixed by the SoW versus what we assumed. Right: the assumptions ranked by how much they move the answer. Middle: the six engineering decisions. The point of the slide is that capacity was measured and only demand was assumed.</a:t>
+              <a:t>Left: what the SoW fixes versus what we assumed. Middle: the six decisions the 3-GPU constraint forced. Right: the ceiling on each assumption before a fourth GPU is needed, and the sensitivity cases re-run against three. The point is that capacity was measured and only demand was assumed.</a:t>
             </a:r>
             <a:endParaRPr lang="en-US" dirty="0"/>
           </a:p>
@@ -591,7 +591,7 @@
           <a:p>
             <a:r>
               <a:rPr lang="en-US" dirty="0"/>
-              <a:t>Top row is the answer. The chain shows the actual arithmetic: peak demand over derated measured capacity gives about two serving GPUs; everything else is HA, DR, eval and training. The three findings are what to lead with in a review.</a:t>
+              <a:t>Top row is the answer. The chain is the arithmetic: peak demand over measured shared-pool capacity is 1.37 GPU; three is what N+1 costs. Lead with the three findings — especially the last one, since single site is the only genuine risk in the descope and it has an expiry date.</a:t>
             </a:r>
             <a:endParaRPr lang="en-US" dirty="0"/>
           </a:p>
@@ -997,7 +997,7 @@
                 <a:ea typeface="Arial" pitchFamily="34" charset="-122"/>
                 <a:cs typeface="Arial" pitchFamily="34" charset="-120"/>
               </a:rPr>
-              <a:t>How the fleet number is derived</a:t>
+              <a:t>How three GPUs was arrived at</a:t>
             </a:r>
             <a:endParaRPr lang="en-US" sz="2900" dirty="0"/>
           </a:p>
@@ -1050,7 +1050,7 @@
                 <a:ea typeface="Calibri" pitchFamily="34" charset="-122"/>
                 <a:cs typeface="Calibri" pitchFamily="34" charset="-120"/>
               </a:rPr>
-              <a:t>   ·   ~2M cells, ~10M alarms/day   ·   serving capacity measured with GuideLLM 0.7.3, demand derived from the SoW</a:t>
+              <a:t>   ·   ~2M cells, ~10M alarms/day   ·   16 GuideLLM operating points; demand derived from the SoW</a:t>
             </a:r>
             <a:endParaRPr lang="en-US" sz="1150" dirty="0"/>
           </a:p>
@@ -1767,7 +1767,7 @@
                 <a:ea typeface="Arial" pitchFamily="34" charset="-122"/>
                 <a:cs typeface="Arial" pitchFamily="34" charset="-120"/>
               </a:rPr>
-              <a:t>Two serving pools, not one</a:t>
+              <a:t>One shared pool, not two</a:t>
             </a:r>
             <a:endParaRPr lang="en-US" sz="1100" dirty="0"/>
           </a:p>
@@ -1809,7 +1809,7 @@
                 <a:ea typeface="Calibri" pitchFamily="34" charset="-122"/>
                 <a:cs typeface="Calibri" pitchFamily="34" charset="-120"/>
               </a:rPr>
-              <a:t>RFO is throughput-shaped; chat is latency-shaped. One pool forces the interactive SLO onto batch work.</a:t>
+              <a:t>Chat is latency-shaped but only 0.24 GPU of load. Same model, one deployment, priority scheduling.</a:t>
             </a:r>
             <a:endParaRPr lang="en-US" sz="950" dirty="0"/>
           </a:p>
@@ -1929,7 +1929,7 @@
                 <a:ea typeface="Calibri" pitchFamily="34" charset="-122"/>
                 <a:cs typeface="Calibri" pitchFamily="34" charset="-120"/>
               </a:rPr>
-              <a:t>Capacity = throughput at the last concurrency whose p95 meets the SLO. A: ≤30 s. B: TTFT ≤1.5 s, ITL ≤25 ms.</a:t>
+              <a:t>Capacity = throughput at the last concurrency whose p95 meets the SLO. RFO: ≤30 s. Chat: TTFT ≤1.5 s, ITL ≤25 ms.</a:t>
             </a:r>
             <a:endParaRPr lang="en-US" sz="950" dirty="0"/>
           </a:p>
@@ -2007,7 +2007,7 @@
                 <a:ea typeface="Arial" pitchFamily="34" charset="-122"/>
                 <a:cs typeface="Arial" pitchFamily="34" charset="-120"/>
               </a:rPr>
-              <a:t>Derate to 70% of the knee</a:t>
+              <a:t>Three, because of N+1</a:t>
             </a:r>
             <a:endParaRPr lang="en-US" sz="1100" dirty="0"/>
           </a:p>
@@ -2022,7 +2022,7 @@
         <p:spPr>
           <a:xfrm>
             <a:off x="4798466" y="3611880"/>
-            <a:ext cx="2832506" cy="310896"/>
+            <a:ext cx="2832506" cy="457200"/>
           </a:xfrm>
           <a:prstGeom prst="rect">
             <a:avLst/>
@@ -2049,7 +2049,7 @@
                 <a:ea typeface="Calibri" pitchFamily="34" charset="-122"/>
                 <a:cs typeface="Calibri" pitchFamily="34" charset="-120"/>
               </a:rPr>
-              <a:t>Queueing delay grows like ρ/(1−ρ). At the knee, the first burst breaks the SLO.</a:t>
+              <a:t>Peak needs 1.37 GPU. Two would meet the SLO; three is the smallest fleet where a GPU can fail at peak hour and still hold.</a:t>
             </a:r>
             <a:endParaRPr lang="en-US" sz="950" dirty="0"/>
           </a:p>
@@ -2063,7 +2063,7 @@
         </p:nvSpPr>
         <p:spPr>
           <a:xfrm>
-            <a:off x="4524146" y="4069080"/>
+            <a:off x="4524146" y="4215384"/>
             <a:ext cx="237744" cy="201168"/>
           </a:xfrm>
           <a:prstGeom prst="rect">
@@ -2102,7 +2102,7 @@
         </p:nvSpPr>
         <p:spPr>
           <a:xfrm>
-            <a:off x="4798466" y="4055364"/>
+            <a:off x="4798466" y="4201668"/>
             <a:ext cx="2832506" cy="201168"/>
           </a:xfrm>
           <a:prstGeom prst="rect">
@@ -2141,7 +2141,7 @@
         </p:nvSpPr>
         <p:spPr>
           <a:xfrm>
-            <a:off x="4798466" y="4261104"/>
+            <a:off x="4798466" y="4407408"/>
             <a:ext cx="2832506" cy="457200"/>
           </a:xfrm>
           <a:prstGeom prst="rect">
@@ -2169,7 +2169,7 @@
                 <a:ea typeface="Calibri" pitchFamily="34" charset="-122"/>
                 <a:cs typeface="Calibri" pitchFamily="34" charset="-120"/>
               </a:rPr>
-              <a:t>120B MoE at MXFP4 ≈ 62 GB — no TP, failure domain of one GPU. A dense 70B FP8 needs 2×H100.</a:t>
+              <a:t>120B MoE at MXFP4 ≈ 62 GB — no TP, failure domain of one GPU, and 21–30 concurrent 6.4k requests of KV headroom.</a:t>
             </a:r>
             <a:endParaRPr lang="en-US" sz="950" dirty="0"/>
           </a:p>
@@ -2183,7 +2183,7 @@
         </p:nvSpPr>
         <p:spPr>
           <a:xfrm>
-            <a:off x="4524146" y="4864608"/>
+            <a:off x="4524146" y="5010912"/>
             <a:ext cx="237744" cy="201168"/>
           </a:xfrm>
           <a:prstGeom prst="rect">
@@ -2222,7 +2222,7 @@
         </p:nvSpPr>
         <p:spPr>
           <a:xfrm>
-            <a:off x="4798466" y="4850892"/>
+            <a:off x="4798466" y="4997196"/>
             <a:ext cx="2832506" cy="201168"/>
           </a:xfrm>
           <a:prstGeom prst="rect">
@@ -2247,7 +2247,7 @@
                 <a:ea typeface="Arial" pitchFamily="34" charset="-122"/>
                 <a:cs typeface="Arial" pitchFamily="34" charset="-120"/>
               </a:rPr>
-              <a:t>N+1 per site, two sites</a:t>
+              <a:t>Single site, for now</a:t>
             </a:r>
             <a:endParaRPr lang="en-US" sz="1100" dirty="0"/>
           </a:p>
@@ -2261,7 +2261,7 @@
         </p:nvSpPr>
         <p:spPr>
           <a:xfrm>
-            <a:off x="4798466" y="5056632"/>
+            <a:off x="4798466" y="5202936"/>
             <a:ext cx="2832506" cy="457200"/>
           </a:xfrm>
           <a:prstGeom prst="rect">
@@ -2289,7 +2289,7 @@
                 <a:ea typeface="Calibri" pitchFamily="34" charset="-122"/>
                 <a:cs typeface="Calibri" pitchFamily="34" charset="-120"/>
               </a:rPr>
-              <a:t>A national NOC platform cannot carry a single-DC dependency. Not token volume — this sets the fleet.</a:t>
+              <a:t>The one real loss. Manual NOC process is the fallback — but that expires when headcount comes out, so fund site 2 before then.</a:t>
             </a:r>
             <a:endParaRPr lang="en-US" sz="950" dirty="0"/>
           </a:p>
@@ -2303,7 +2303,7 @@
         </p:nvSpPr>
         <p:spPr>
           <a:xfrm>
-            <a:off x="4524146" y="5660136"/>
+            <a:off x="4524146" y="5806440"/>
             <a:ext cx="237744" cy="201168"/>
           </a:xfrm>
           <a:prstGeom prst="rect">
@@ -2342,7 +2342,7 @@
         </p:nvSpPr>
         <p:spPr>
           <a:xfrm>
-            <a:off x="4798466" y="5646420"/>
+            <a:off x="4798466" y="5792724"/>
             <a:ext cx="2832506" cy="201168"/>
           </a:xfrm>
           <a:prstGeom prst="rect">
@@ -2381,7 +2381,7 @@
         </p:nvSpPr>
         <p:spPr>
           <a:xfrm>
-            <a:off x="4798466" y="5852160"/>
+            <a:off x="4798466" y="5998464"/>
             <a:ext cx="2832506" cy="310896"/>
           </a:xfrm>
           <a:prstGeom prst="rect">
@@ -2409,7 +2409,7 @@
                 <a:ea typeface="Calibri" pitchFamily="34" charset="-122"/>
                 <a:cs typeface="Calibri" pitchFamily="34" charset="-120"/>
               </a:rPr>
-              <a:t>11-point GuideLLM sweep at our real token shapes, not a vendor tok/s figure.</a:t>
+              <a:t>16-point GuideLLM sweep, including a mixed-traffic run that validates the shared pool to within 3.8%.</a:t>
             </a:r>
             <a:endParaRPr lang="en-US" sz="950" dirty="0"/>
           </a:p>
@@ -2537,7 +2537,7 @@
                 <a:ea typeface="Calibri" pitchFamily="34" charset="-122"/>
                 <a:cs typeface="Calibri" pitchFamily="34" charset="-120"/>
               </a:rPr>
-              <a:t>Each row moves one dial and leaves the rest at baseline. Production GPUs on the right.</a:t>
+              <a:t>Three GPUs hold until one of these crosses. Each moves alone, N+1 kept.</a:t>
             </a:r>
             <a:endParaRPr lang="en-US" sz="950" dirty="0"/>
           </a:p>
@@ -2551,20 +2551,20 @@
         </p:nvSpPr>
         <p:spPr>
           <a:xfrm>
-            <a:off x="9990125" y="2231136"/>
-            <a:ext cx="1188720" cy="164592"/>
-          </a:xfrm>
-          <a:prstGeom prst="rect">
-            <a:avLst/>
-          </a:prstGeom>
-          <a:noFill/>
-          <a:ln/>
-        </p:spPr>
-        <p:txBody>
-          <a:bodyPr wrap="square" lIns="0" tIns="0" rIns="0" bIns="0" rtlCol="0" anchor="ctr"/>
-          <a:lstStyle/>
-          <a:p>
-            <a:pPr indent="0" marL="0">
+            <a:off x="9843821" y="2194560"/>
+            <a:ext cx="713232" cy="164592"/>
+          </a:xfrm>
+          <a:prstGeom prst="rect">
+            <a:avLst/>
+          </a:prstGeom>
+          <a:noFill/>
+          <a:ln/>
+        </p:spPr>
+        <p:txBody>
+          <a:bodyPr wrap="square" lIns="0" tIns="0" rIns="0" bIns="0" rtlCol="0" anchor="ctr"/>
+          <a:lstStyle/>
+          <a:p>
+            <a:pPr algn="r" indent="0" marL="0">
               <a:buNone/>
             </a:pPr>
             <a:r>
@@ -2576,7 +2576,7 @@
                 <a:ea typeface="Arial" pitchFamily="34" charset="-122"/>
                 <a:cs typeface="Arial" pitchFamily="34" charset="-120"/>
               </a:rPr>
-              <a:t>× DEMAND</a:t>
+              <a:t>MODELLED</a:t>
             </a:r>
             <a:endParaRPr lang="en-US" sz="750" dirty="0"/>
           </a:p>
@@ -2590,8 +2590,8 @@
         </p:nvSpPr>
         <p:spPr>
           <a:xfrm>
-            <a:off x="11197133" y="2231136"/>
-            <a:ext cx="272186" cy="164592"/>
+            <a:off x="10575341" y="2194560"/>
+            <a:ext cx="893978" cy="164592"/>
           </a:xfrm>
           <a:prstGeom prst="rect">
             <a:avLst/>
@@ -2609,13 +2609,13 @@
             <a:r>
               <a:rPr lang="en-US" sz="750" b="1" spc="80" kern="0" dirty="0">
                 <a:solidFill>
-                  <a:srgbClr val="6A726B"/>
+                  <a:srgbClr val="B04A12"/>
                 </a:solidFill>
                 <a:latin typeface="Arial" pitchFamily="34" charset="0"/>
                 <a:ea typeface="Arial" pitchFamily="34" charset="-122"/>
                 <a:cs typeface="Arial" pitchFamily="34" charset="-120"/>
               </a:rPr>
-              <a:t>GPU</a:t>
+              <a:t>CEILING</a:t>
             </a:r>
             <a:endParaRPr lang="en-US" sz="750" dirty="0"/>
           </a:p>
@@ -2629,8 +2629,8 @@
         </p:nvSpPr>
         <p:spPr>
           <a:xfrm>
-            <a:off x="8362493" y="2432304"/>
-            <a:ext cx="1572768" cy="219456"/>
+            <a:off x="8362493" y="2414016"/>
+            <a:ext cx="1444752" cy="219456"/>
           </a:xfrm>
           <a:prstGeom prst="rect">
             <a:avLst/>
@@ -2654,7 +2654,7 @@
                 <a:ea typeface="Calibri" pitchFamily="34" charset="-122"/>
                 <a:cs typeface="Calibri" pitchFamily="34" charset="-120"/>
               </a:rPr>
-              <a:t>Baseline as modelled</a:t>
+              <a:t>RFO context, tokens</a:t>
             </a:r>
             <a:endParaRPr lang="en-US" sz="950" dirty="0"/>
           </a:p>
@@ -2662,17 +2662,1309 @@
       </p:sp>
       <p:sp>
         <p:nvSpPr>
-          <p:cNvPr id="41" name="Shape 39"/>
+          <p:cNvPr id="41" name="Text 39"/>
+          <p:cNvSpPr txBox="1"/>
+          <p:nvPr/>
+        </p:nvSpPr>
+        <p:spPr>
+          <a:xfrm>
+            <a:off x="9843821" y="2414016"/>
+            <a:ext cx="713232" cy="219456"/>
+          </a:xfrm>
+          <a:prstGeom prst="rect">
+            <a:avLst/>
+          </a:prstGeom>
+          <a:noFill/>
+          <a:ln/>
+        </p:spPr>
+        <p:txBody>
+          <a:bodyPr wrap="square" lIns="0" tIns="0" rIns="0" bIns="0" rtlCol="0" anchor="ctr"/>
+          <a:lstStyle/>
+          <a:p>
+            <a:pPr algn="r" indent="0" marL="0">
+              <a:buNone/>
+            </a:pPr>
+            <a:r>
+              <a:rPr lang="en-US" sz="900" dirty="0">
+                <a:solidFill>
+                  <a:srgbClr val="6A726B"/>
+                </a:solidFill>
+                <a:latin typeface="Courier New" pitchFamily="34" charset="0"/>
+                <a:ea typeface="Courier New" pitchFamily="34" charset="-122"/>
+                <a:cs typeface="Courier New" pitchFamily="34" charset="-120"/>
+              </a:rPr>
+              <a:t>6,000</a:t>
+            </a:r>
+            <a:endParaRPr lang="en-US" sz="900" dirty="0"/>
+          </a:p>
+        </p:txBody>
+      </p:sp>
+      <p:sp>
+        <p:nvSpPr>
+          <p:cNvPr id="42" name="Text 40"/>
+          <p:cNvSpPr txBox="1"/>
+          <p:nvPr/>
+        </p:nvSpPr>
+        <p:spPr>
+          <a:xfrm>
+            <a:off x="10575341" y="2414016"/>
+            <a:ext cx="893978" cy="219456"/>
+          </a:xfrm>
+          <a:prstGeom prst="rect">
+            <a:avLst/>
+          </a:prstGeom>
+          <a:noFill/>
+          <a:ln/>
+        </p:spPr>
+        <p:txBody>
+          <a:bodyPr wrap="square" lIns="0" tIns="0" rIns="0" bIns="0" rtlCol="0" anchor="ctr"/>
+          <a:lstStyle/>
+          <a:p>
+            <a:pPr algn="r" indent="0" marL="0">
+              <a:buNone/>
+            </a:pPr>
+            <a:r>
+              <a:rPr lang="en-US" sz="1000" b="1" dirty="0">
+                <a:solidFill>
+                  <a:srgbClr val="B04A12"/>
+                </a:solidFill>
+                <a:latin typeface="Courier New" pitchFamily="34" charset="0"/>
+                <a:ea typeface="Courier New" pitchFamily="34" charset="-122"/>
+                <a:cs typeface="Courier New" pitchFamily="34" charset="-120"/>
+              </a:rPr>
+              <a:t>9,640</a:t>
+            </a:r>
+            <a:endParaRPr lang="en-US" sz="1000" dirty="0"/>
+          </a:p>
+        </p:txBody>
+      </p:sp>
+      <p:sp>
+        <p:nvSpPr>
+          <p:cNvPr id="43" name="Text 41"/>
+          <p:cNvSpPr txBox="1"/>
+          <p:nvPr/>
+        </p:nvSpPr>
+        <p:spPr>
+          <a:xfrm>
+            <a:off x="8362493" y="2670048"/>
+            <a:ext cx="1444752" cy="219456"/>
+          </a:xfrm>
+          <a:prstGeom prst="rect">
+            <a:avLst/>
+          </a:prstGeom>
+          <a:noFill/>
+          <a:ln/>
+        </p:spPr>
+        <p:txBody>
+          <a:bodyPr wrap="square" lIns="0" tIns="0" rIns="0" bIns="0" rtlCol="0" anchor="ctr"/>
+          <a:lstStyle/>
+          <a:p>
+            <a:pPr indent="0" marL="0">
+              <a:buNone/>
+            </a:pPr>
+            <a:r>
+              <a:rPr lang="en-US" sz="950" dirty="0">
+                <a:solidFill>
+                  <a:srgbClr val="3E453F"/>
+                </a:solidFill>
+                <a:latin typeface="Calibri" pitchFamily="34" charset="0"/>
+                <a:ea typeface="Calibri" pitchFamily="34" charset="-122"/>
+                <a:cs typeface="Calibri" pitchFamily="34" charset="-120"/>
+              </a:rPr>
+              <a:t>Incidents per day</a:t>
+            </a:r>
+            <a:endParaRPr lang="en-US" sz="950" dirty="0"/>
+          </a:p>
+        </p:txBody>
+      </p:sp>
+      <p:sp>
+        <p:nvSpPr>
+          <p:cNvPr id="44" name="Text 42"/>
+          <p:cNvSpPr txBox="1"/>
+          <p:nvPr/>
+        </p:nvSpPr>
+        <p:spPr>
+          <a:xfrm>
+            <a:off x="9843821" y="2670048"/>
+            <a:ext cx="713232" cy="219456"/>
+          </a:xfrm>
+          <a:prstGeom prst="rect">
+            <a:avLst/>
+          </a:prstGeom>
+          <a:noFill/>
+          <a:ln/>
+        </p:spPr>
+        <p:txBody>
+          <a:bodyPr wrap="square" lIns="0" tIns="0" rIns="0" bIns="0" rtlCol="0" anchor="ctr"/>
+          <a:lstStyle/>
+          <a:p>
+            <a:pPr algn="r" indent="0" marL="0">
+              <a:buNone/>
+            </a:pPr>
+            <a:r>
+              <a:rPr lang="en-US" sz="900" dirty="0">
+                <a:solidFill>
+                  <a:srgbClr val="6A726B"/>
+                </a:solidFill>
+                <a:latin typeface="Courier New" pitchFamily="34" charset="0"/>
+                <a:ea typeface="Courier New" pitchFamily="34" charset="-122"/>
+                <a:cs typeface="Courier New" pitchFamily="34" charset="-120"/>
+              </a:rPr>
+              <a:t>35,000</a:t>
+            </a:r>
+            <a:endParaRPr lang="en-US" sz="900" dirty="0"/>
+          </a:p>
+        </p:txBody>
+      </p:sp>
+      <p:sp>
+        <p:nvSpPr>
+          <p:cNvPr id="45" name="Text 43"/>
+          <p:cNvSpPr txBox="1"/>
+          <p:nvPr/>
+        </p:nvSpPr>
+        <p:spPr>
+          <a:xfrm>
+            <a:off x="10575341" y="2670048"/>
+            <a:ext cx="893978" cy="219456"/>
+          </a:xfrm>
+          <a:prstGeom prst="rect">
+            <a:avLst/>
+          </a:prstGeom>
+          <a:noFill/>
+          <a:ln/>
+        </p:spPr>
+        <p:txBody>
+          <a:bodyPr wrap="square" lIns="0" tIns="0" rIns="0" bIns="0" rtlCol="0" anchor="ctr"/>
+          <a:lstStyle/>
+          <a:p>
+            <a:pPr algn="r" indent="0" marL="0">
+              <a:buNone/>
+            </a:pPr>
+            <a:r>
+              <a:rPr lang="en-US" sz="1000" b="1" dirty="0">
+                <a:solidFill>
+                  <a:srgbClr val="171A18"/>
+                </a:solidFill>
+                <a:latin typeface="Courier New" pitchFamily="34" charset="0"/>
+                <a:ea typeface="Courier New" pitchFamily="34" charset="-122"/>
+                <a:cs typeface="Courier New" pitchFamily="34" charset="-120"/>
+              </a:rPr>
+              <a:t>54,900</a:t>
+            </a:r>
+            <a:endParaRPr lang="en-US" sz="1000" dirty="0"/>
+          </a:p>
+        </p:txBody>
+      </p:sp>
+      <p:sp>
+        <p:nvSpPr>
+          <p:cNvPr id="46" name="Text 44"/>
+          <p:cNvSpPr txBox="1"/>
+          <p:nvPr/>
+        </p:nvSpPr>
+        <p:spPr>
+          <a:xfrm>
+            <a:off x="8362493" y="2926080"/>
+            <a:ext cx="1444752" cy="219456"/>
+          </a:xfrm>
+          <a:prstGeom prst="rect">
+            <a:avLst/>
+          </a:prstGeom>
+          <a:noFill/>
+          <a:ln/>
+        </p:spPr>
+        <p:txBody>
+          <a:bodyPr wrap="square" lIns="0" tIns="0" rIns="0" bIns="0" rtlCol="0" anchor="ctr"/>
+          <a:lstStyle/>
+          <a:p>
+            <a:pPr indent="0" marL="0">
+              <a:buNone/>
+            </a:pPr>
+            <a:r>
+              <a:rPr lang="en-US" sz="950" dirty="0">
+                <a:solidFill>
+                  <a:srgbClr val="3E453F"/>
+                </a:solidFill>
+                <a:latin typeface="Calibri" pitchFamily="34" charset="0"/>
+                <a:ea typeface="Calibri" pitchFamily="34" charset="-122"/>
+                <a:cs typeface="Calibri" pitchFamily="34" charset="-120"/>
+              </a:rPr>
+              <a:t>Share earning an RFO</a:t>
+            </a:r>
+            <a:endParaRPr lang="en-US" sz="950" dirty="0"/>
+          </a:p>
+        </p:txBody>
+      </p:sp>
+      <p:sp>
+        <p:nvSpPr>
+          <p:cNvPr id="47" name="Text 45"/>
+          <p:cNvSpPr txBox="1"/>
+          <p:nvPr/>
+        </p:nvSpPr>
+        <p:spPr>
+          <a:xfrm>
+            <a:off x="9843821" y="2926080"/>
+            <a:ext cx="713232" cy="219456"/>
+          </a:xfrm>
+          <a:prstGeom prst="rect">
+            <a:avLst/>
+          </a:prstGeom>
+          <a:noFill/>
+          <a:ln/>
+        </p:spPr>
+        <p:txBody>
+          <a:bodyPr wrap="square" lIns="0" tIns="0" rIns="0" bIns="0" rtlCol="0" anchor="ctr"/>
+          <a:lstStyle/>
+          <a:p>
+            <a:pPr algn="r" indent="0" marL="0">
+              <a:buNone/>
+            </a:pPr>
+            <a:r>
+              <a:rPr lang="en-US" sz="900" dirty="0">
+                <a:solidFill>
+                  <a:srgbClr val="6A726B"/>
+                </a:solidFill>
+                <a:latin typeface="Courier New" pitchFamily="34" charset="0"/>
+                <a:ea typeface="Courier New" pitchFamily="34" charset="-122"/>
+                <a:cs typeface="Courier New" pitchFamily="34" charset="-120"/>
+              </a:rPr>
+              <a:t>35%</a:t>
+            </a:r>
+            <a:endParaRPr lang="en-US" sz="900" dirty="0"/>
+          </a:p>
+        </p:txBody>
+      </p:sp>
+      <p:sp>
+        <p:nvSpPr>
+          <p:cNvPr id="48" name="Text 46"/>
+          <p:cNvSpPr txBox="1"/>
+          <p:nvPr/>
+        </p:nvSpPr>
+        <p:spPr>
+          <a:xfrm>
+            <a:off x="10575341" y="2926080"/>
+            <a:ext cx="893978" cy="219456"/>
+          </a:xfrm>
+          <a:prstGeom prst="rect">
+            <a:avLst/>
+          </a:prstGeom>
+          <a:noFill/>
+          <a:ln/>
+        </p:spPr>
+        <p:txBody>
+          <a:bodyPr wrap="square" lIns="0" tIns="0" rIns="0" bIns="0" rtlCol="0" anchor="ctr"/>
+          <a:lstStyle/>
+          <a:p>
+            <a:pPr algn="r" indent="0" marL="0">
+              <a:buNone/>
+            </a:pPr>
+            <a:r>
+              <a:rPr lang="en-US" sz="1000" b="1" dirty="0">
+                <a:solidFill>
+                  <a:srgbClr val="171A18"/>
+                </a:solidFill>
+                <a:latin typeface="Courier New" pitchFamily="34" charset="0"/>
+                <a:ea typeface="Courier New" pitchFamily="34" charset="-122"/>
+                <a:cs typeface="Courier New" pitchFamily="34" charset="-120"/>
+              </a:rPr>
+              <a:t>55%</a:t>
+            </a:r>
+            <a:endParaRPr lang="en-US" sz="1000" dirty="0"/>
+          </a:p>
+        </p:txBody>
+      </p:sp>
+      <p:sp>
+        <p:nvSpPr>
+          <p:cNvPr id="49" name="Text 47"/>
+          <p:cNvSpPr txBox="1"/>
+          <p:nvPr/>
+        </p:nvSpPr>
+        <p:spPr>
+          <a:xfrm>
+            <a:off x="8362493" y="3182112"/>
+            <a:ext cx="1444752" cy="219456"/>
+          </a:xfrm>
+          <a:prstGeom prst="rect">
+            <a:avLst/>
+          </a:prstGeom>
+          <a:noFill/>
+          <a:ln/>
+        </p:spPr>
+        <p:txBody>
+          <a:bodyPr wrap="square" lIns="0" tIns="0" rIns="0" bIns="0" rtlCol="0" anchor="ctr"/>
+          <a:lstStyle/>
+          <a:p>
+            <a:pPr indent="0" marL="0">
+              <a:buNone/>
+            </a:pPr>
+            <a:r>
+              <a:rPr lang="en-US" sz="950" dirty="0">
+                <a:solidFill>
+                  <a:srgbClr val="3E453F"/>
+                </a:solidFill>
+                <a:latin typeface="Calibri" pitchFamily="34" charset="0"/>
+                <a:ea typeface="Calibri" pitchFamily="34" charset="-122"/>
+                <a:cs typeface="Calibri" pitchFamily="34" charset="-120"/>
+              </a:rPr>
+              <a:t>Agent turns per RFO</a:t>
+            </a:r>
+            <a:endParaRPr lang="en-US" sz="950" dirty="0"/>
+          </a:p>
+        </p:txBody>
+      </p:sp>
+      <p:sp>
+        <p:nvSpPr>
+          <p:cNvPr id="50" name="Text 48"/>
+          <p:cNvSpPr txBox="1"/>
+          <p:nvPr/>
+        </p:nvSpPr>
+        <p:spPr>
+          <a:xfrm>
+            <a:off x="9843821" y="3182112"/>
+            <a:ext cx="713232" cy="219456"/>
+          </a:xfrm>
+          <a:prstGeom prst="rect">
+            <a:avLst/>
+          </a:prstGeom>
+          <a:noFill/>
+          <a:ln/>
+        </p:spPr>
+        <p:txBody>
+          <a:bodyPr wrap="square" lIns="0" tIns="0" rIns="0" bIns="0" rtlCol="0" anchor="ctr"/>
+          <a:lstStyle/>
+          <a:p>
+            <a:pPr algn="r" indent="0" marL="0">
+              <a:buNone/>
+            </a:pPr>
+            <a:r>
+              <a:rPr lang="en-US" sz="900" dirty="0">
+                <a:solidFill>
+                  <a:srgbClr val="6A726B"/>
+                </a:solidFill>
+                <a:latin typeface="Courier New" pitchFamily="34" charset="0"/>
+                <a:ea typeface="Courier New" pitchFamily="34" charset="-122"/>
+                <a:cs typeface="Courier New" pitchFamily="34" charset="-120"/>
+              </a:rPr>
+              <a:t>3</a:t>
+            </a:r>
+            <a:endParaRPr lang="en-US" sz="900" dirty="0"/>
+          </a:p>
+        </p:txBody>
+      </p:sp>
+      <p:sp>
+        <p:nvSpPr>
+          <p:cNvPr id="51" name="Text 49"/>
+          <p:cNvSpPr txBox="1"/>
+          <p:nvPr/>
+        </p:nvSpPr>
+        <p:spPr>
+          <a:xfrm>
+            <a:off x="10575341" y="3182112"/>
+            <a:ext cx="893978" cy="219456"/>
+          </a:xfrm>
+          <a:prstGeom prst="rect">
+            <a:avLst/>
+          </a:prstGeom>
+          <a:noFill/>
+          <a:ln/>
+        </p:spPr>
+        <p:txBody>
+          <a:bodyPr wrap="square" lIns="0" tIns="0" rIns="0" bIns="0" rtlCol="0" anchor="ctr"/>
+          <a:lstStyle/>
+          <a:p>
+            <a:pPr algn="r" indent="0" marL="0">
+              <a:buNone/>
+            </a:pPr>
+            <a:r>
+              <a:rPr lang="en-US" sz="1000" b="1" dirty="0">
+                <a:solidFill>
+                  <a:srgbClr val="171A18"/>
+                </a:solidFill>
+                <a:latin typeface="Courier New" pitchFamily="34" charset="0"/>
+                <a:ea typeface="Courier New" pitchFamily="34" charset="-122"/>
+                <a:cs typeface="Courier New" pitchFamily="34" charset="-120"/>
+              </a:rPr>
+              <a:t>4.7</a:t>
+            </a:r>
+            <a:endParaRPr lang="en-US" sz="1000" dirty="0"/>
+          </a:p>
+        </p:txBody>
+      </p:sp>
+      <p:sp>
+        <p:nvSpPr>
+          <p:cNvPr id="52" name="Text 50"/>
+          <p:cNvSpPr txBox="1"/>
+          <p:nvPr/>
+        </p:nvSpPr>
+        <p:spPr>
+          <a:xfrm>
+            <a:off x="8362493" y="3566160"/>
+            <a:ext cx="3106826" cy="182880"/>
+          </a:xfrm>
+          <a:prstGeom prst="rect">
+            <a:avLst/>
+          </a:prstGeom>
+          <a:noFill/>
+          <a:ln/>
+        </p:spPr>
+        <p:txBody>
+          <a:bodyPr wrap="square" lIns="0" tIns="0" rIns="0" bIns="0" rtlCol="0" anchor="ctr"/>
+          <a:lstStyle/>
+          <a:p>
+            <a:pPr indent="0" marL="0">
+              <a:buNone/>
+            </a:pPr>
+            <a:r>
+              <a:rPr lang="en-US" sz="750" b="1" spc="80" kern="0" dirty="0">
+                <a:solidFill>
+                  <a:srgbClr val="6A726B"/>
+                </a:solidFill>
+                <a:latin typeface="Arial" pitchFamily="34" charset="0"/>
+                <a:ea typeface="Arial" pitchFamily="34" charset="-122"/>
+                <a:cs typeface="Arial" pitchFamily="34" charset="-120"/>
+              </a:rPr>
+              <a:t>THE SENSITIVITY CASES, RE-RUN AGAINST 3 GPUs</a:t>
+            </a:r>
+            <a:endParaRPr lang="en-US" sz="750" dirty="0"/>
+          </a:p>
+        </p:txBody>
+      </p:sp>
+      <p:sp>
+        <p:nvSpPr>
+          <p:cNvPr id="53" name="Shape 51"/>
           <p:cNvSpPr/>
           <p:nvPr/>
         </p:nvSpPr>
         <p:spPr>
           <a:xfrm>
-            <a:off x="9990125" y="2500884"/>
-            <a:ext cx="786384" cy="100584"/>
-          </a:xfrm>
-          <a:prstGeom prst="rect">
-            <a:avLst/>
+            <a:off x="8362493" y="3872484"/>
+            <a:ext cx="64008" cy="64008"/>
+          </a:xfrm>
+          <a:prstGeom prst="rect">
+            <a:avLst/>
+          </a:prstGeom>
+          <a:solidFill>
+            <a:srgbClr val="B04A12"/>
+          </a:solidFill>
+          <a:ln/>
+        </p:spPr>
+      </p:sp>
+      <p:sp>
+        <p:nvSpPr>
+          <p:cNvPr id="54" name="Text 52"/>
+          <p:cNvSpPr txBox="1"/>
+          <p:nvPr/>
+        </p:nvSpPr>
+        <p:spPr>
+          <a:xfrm>
+            <a:off x="8527085" y="3803904"/>
+            <a:ext cx="1481328" cy="219456"/>
+          </a:xfrm>
+          <a:prstGeom prst="rect">
+            <a:avLst/>
+          </a:prstGeom>
+          <a:noFill/>
+          <a:ln/>
+        </p:spPr>
+        <p:txBody>
+          <a:bodyPr wrap="square" lIns="0" tIns="0" rIns="0" bIns="0" rtlCol="0" anchor="ctr"/>
+          <a:lstStyle/>
+          <a:p>
+            <a:pPr indent="0" marL="0">
+              <a:buNone/>
+            </a:pPr>
+            <a:r>
+              <a:rPr lang="en-US" sz="950" dirty="0">
+                <a:solidFill>
+                  <a:srgbClr val="3E453F"/>
+                </a:solidFill>
+                <a:latin typeface="Calibri" pitchFamily="34" charset="0"/>
+                <a:ea typeface="Calibri" pitchFamily="34" charset="-122"/>
+                <a:cs typeface="Calibri" pitchFamily="34" charset="-120"/>
+              </a:rPr>
+              <a:t>Every incident gets RFO</a:t>
+            </a:r>
+            <a:endParaRPr lang="en-US" sz="950" dirty="0"/>
+          </a:p>
+        </p:txBody>
+      </p:sp>
+      <p:sp>
+        <p:nvSpPr>
+          <p:cNvPr id="55" name="Text 53"/>
+          <p:cNvSpPr txBox="1"/>
+          <p:nvPr/>
+        </p:nvSpPr>
+        <p:spPr>
+          <a:xfrm>
+            <a:off x="9843821" y="3803904"/>
+            <a:ext cx="713232" cy="219456"/>
+          </a:xfrm>
+          <a:prstGeom prst="rect">
+            <a:avLst/>
+          </a:prstGeom>
+          <a:noFill/>
+          <a:ln/>
+        </p:spPr>
+        <p:txBody>
+          <a:bodyPr wrap="square" lIns="0" tIns="0" rIns="0" bIns="0" rtlCol="0" anchor="ctr"/>
+          <a:lstStyle/>
+          <a:p>
+            <a:pPr algn="r" indent="0" marL="0">
+              <a:buNone/>
+            </a:pPr>
+            <a:r>
+              <a:rPr lang="en-US" sz="900" dirty="0">
+                <a:solidFill>
+                  <a:srgbClr val="6A726B"/>
+                </a:solidFill>
+                <a:latin typeface="Courier New" pitchFamily="34" charset="0"/>
+                <a:ea typeface="Courier New" pitchFamily="34" charset="-122"/>
+                <a:cs typeface="Courier New" pitchFamily="34" charset="-120"/>
+              </a:rPr>
+              <a:t>2.63×</a:t>
+            </a:r>
+            <a:endParaRPr lang="en-US" sz="900" dirty="0"/>
+          </a:p>
+        </p:txBody>
+      </p:sp>
+      <p:sp>
+        <p:nvSpPr>
+          <p:cNvPr id="56" name="Text 54"/>
+          <p:cNvSpPr txBox="1"/>
+          <p:nvPr/>
+        </p:nvSpPr>
+        <p:spPr>
+          <a:xfrm>
+            <a:off x="10575341" y="3803904"/>
+            <a:ext cx="893978" cy="219456"/>
+          </a:xfrm>
+          <a:prstGeom prst="rect">
+            <a:avLst/>
+          </a:prstGeom>
+          <a:noFill/>
+          <a:ln/>
+        </p:spPr>
+        <p:txBody>
+          <a:bodyPr wrap="square" lIns="0" tIns="0" rIns="0" bIns="0" rtlCol="0" anchor="ctr"/>
+          <a:lstStyle/>
+          <a:p>
+            <a:pPr algn="r" indent="0" marL="0">
+              <a:buNone/>
+            </a:pPr>
+            <a:r>
+              <a:rPr lang="en-US" sz="950" b="1" dirty="0">
+                <a:solidFill>
+                  <a:srgbClr val="B04A12"/>
+                </a:solidFill>
+                <a:latin typeface="Courier New" pitchFamily="34" charset="0"/>
+                <a:ea typeface="Courier New" pitchFamily="34" charset="-122"/>
+                <a:cs typeface="Courier New" pitchFamily="34" charset="-120"/>
+              </a:rPr>
+              <a:t>5 GPU</a:t>
+            </a:r>
+            <a:endParaRPr lang="en-US" sz="950" dirty="0"/>
+          </a:p>
+        </p:txBody>
+      </p:sp>
+      <p:sp>
+        <p:nvSpPr>
+          <p:cNvPr id="57" name="Shape 55"/>
+          <p:cNvSpPr/>
+          <p:nvPr/>
+        </p:nvSpPr>
+        <p:spPr>
+          <a:xfrm>
+            <a:off x="8362493" y="4110228"/>
+            <a:ext cx="64008" cy="64008"/>
+          </a:xfrm>
+          <a:prstGeom prst="rect">
+            <a:avLst/>
+          </a:prstGeom>
+          <a:solidFill>
+            <a:srgbClr val="B04A12"/>
+          </a:solidFill>
+          <a:ln/>
+        </p:spPr>
+      </p:sp>
+      <p:sp>
+        <p:nvSpPr>
+          <p:cNvPr id="58" name="Text 56"/>
+          <p:cNvSpPr txBox="1"/>
+          <p:nvPr/>
+        </p:nvSpPr>
+        <p:spPr>
+          <a:xfrm>
+            <a:off x="8527085" y="4041648"/>
+            <a:ext cx="1481328" cy="219456"/>
+          </a:xfrm>
+          <a:prstGeom prst="rect">
+            <a:avLst/>
+          </a:prstGeom>
+          <a:noFill/>
+          <a:ln/>
+        </p:spPr>
+        <p:txBody>
+          <a:bodyPr wrap="square" lIns="0" tIns="0" rIns="0" bIns="0" rtlCol="0" anchor="ctr"/>
+          <a:lstStyle/>
+          <a:p>
+            <a:pPr indent="0" marL="0">
+              <a:buNone/>
+            </a:pPr>
+            <a:r>
+              <a:rPr lang="en-US" sz="950" dirty="0">
+                <a:solidFill>
+                  <a:srgbClr val="3E453F"/>
+                </a:solidFill>
+                <a:latin typeface="Calibri" pitchFamily="34" charset="0"/>
+                <a:ea typeface="Calibri" pitchFamily="34" charset="-122"/>
+                <a:cs typeface="Calibri" pitchFamily="34" charset="-120"/>
+              </a:rPr>
+              <a:t>Compression misses 3×</a:t>
+            </a:r>
+            <a:endParaRPr lang="en-US" sz="950" dirty="0"/>
+          </a:p>
+        </p:txBody>
+      </p:sp>
+      <p:sp>
+        <p:nvSpPr>
+          <p:cNvPr id="59" name="Text 57"/>
+          <p:cNvSpPr txBox="1"/>
+          <p:nvPr/>
+        </p:nvSpPr>
+        <p:spPr>
+          <a:xfrm>
+            <a:off x="9843821" y="4041648"/>
+            <a:ext cx="713232" cy="219456"/>
+          </a:xfrm>
+          <a:prstGeom prst="rect">
+            <a:avLst/>
+          </a:prstGeom>
+          <a:noFill/>
+          <a:ln/>
+        </p:spPr>
+        <p:txBody>
+          <a:bodyPr wrap="square" lIns="0" tIns="0" rIns="0" bIns="0" rtlCol="0" anchor="ctr"/>
+          <a:lstStyle/>
+          <a:p>
+            <a:pPr algn="r" indent="0" marL="0">
+              <a:buNone/>
+            </a:pPr>
+            <a:r>
+              <a:rPr lang="en-US" sz="900" dirty="0">
+                <a:solidFill>
+                  <a:srgbClr val="6A726B"/>
+                </a:solidFill>
+                <a:latin typeface="Courier New" pitchFamily="34" charset="0"/>
+                <a:ea typeface="Courier New" pitchFamily="34" charset="-122"/>
+                <a:cs typeface="Courier New" pitchFamily="34" charset="-120"/>
+              </a:rPr>
+              <a:t>2.75×</a:t>
+            </a:r>
+            <a:endParaRPr lang="en-US" sz="900" dirty="0"/>
+          </a:p>
+        </p:txBody>
+      </p:sp>
+      <p:sp>
+        <p:nvSpPr>
+          <p:cNvPr id="60" name="Text 58"/>
+          <p:cNvSpPr txBox="1"/>
+          <p:nvPr/>
+        </p:nvSpPr>
+        <p:spPr>
+          <a:xfrm>
+            <a:off x="10575341" y="4041648"/>
+            <a:ext cx="893978" cy="219456"/>
+          </a:xfrm>
+          <a:prstGeom prst="rect">
+            <a:avLst/>
+          </a:prstGeom>
+          <a:noFill/>
+          <a:ln/>
+        </p:spPr>
+        <p:txBody>
+          <a:bodyPr wrap="square" lIns="0" tIns="0" rIns="0" bIns="0" rtlCol="0" anchor="ctr"/>
+          <a:lstStyle/>
+          <a:p>
+            <a:pPr algn="r" indent="0" marL="0">
+              <a:buNone/>
+            </a:pPr>
+            <a:r>
+              <a:rPr lang="en-US" sz="950" b="1" dirty="0">
+                <a:solidFill>
+                  <a:srgbClr val="B04A12"/>
+                </a:solidFill>
+                <a:latin typeface="Courier New" pitchFamily="34" charset="0"/>
+                <a:ea typeface="Courier New" pitchFamily="34" charset="-122"/>
+                <a:cs typeface="Courier New" pitchFamily="34" charset="-120"/>
+              </a:rPr>
+              <a:t>5 GPU</a:t>
+            </a:r>
+            <a:endParaRPr lang="en-US" sz="950" dirty="0"/>
+          </a:p>
+        </p:txBody>
+      </p:sp>
+      <p:sp>
+        <p:nvSpPr>
+          <p:cNvPr id="61" name="Shape 59"/>
+          <p:cNvSpPr/>
+          <p:nvPr/>
+        </p:nvSpPr>
+        <p:spPr>
+          <a:xfrm>
+            <a:off x="8362493" y="4347972"/>
+            <a:ext cx="64008" cy="64008"/>
+          </a:xfrm>
+          <a:prstGeom prst="rect">
+            <a:avLst/>
+          </a:prstGeom>
+          <a:solidFill>
+            <a:srgbClr val="B04A12"/>
+          </a:solidFill>
+          <a:ln/>
+        </p:spPr>
+      </p:sp>
+      <p:sp>
+        <p:nvSpPr>
+          <p:cNvPr id="62" name="Text 60"/>
+          <p:cNvSpPr txBox="1"/>
+          <p:nvPr/>
+        </p:nvSpPr>
+        <p:spPr>
+          <a:xfrm>
+            <a:off x="8527085" y="4279392"/>
+            <a:ext cx="1481328" cy="219456"/>
+          </a:xfrm>
+          <a:prstGeom prst="rect">
+            <a:avLst/>
+          </a:prstGeom>
+          <a:noFill/>
+          <a:ln/>
+        </p:spPr>
+        <p:txBody>
+          <a:bodyPr wrap="square" lIns="0" tIns="0" rIns="0" bIns="0" rtlCol="0" anchor="ctr"/>
+          <a:lstStyle/>
+          <a:p>
+            <a:pPr indent="0" marL="0">
+              <a:buNone/>
+            </a:pPr>
+            <a:r>
+              <a:rPr lang="en-US" sz="950" dirty="0">
+                <a:solidFill>
+                  <a:srgbClr val="3E453F"/>
+                </a:solidFill>
+                <a:latin typeface="Calibri" pitchFamily="34" charset="0"/>
+                <a:ea typeface="Calibri" pitchFamily="34" charset="-122"/>
+                <a:cs typeface="Calibri" pitchFamily="34" charset="-120"/>
+              </a:rPr>
+              <a:t>RFO context 6k → 24k</a:t>
+            </a:r>
+            <a:endParaRPr lang="en-US" sz="950" dirty="0"/>
+          </a:p>
+        </p:txBody>
+      </p:sp>
+      <p:sp>
+        <p:nvSpPr>
+          <p:cNvPr id="63" name="Text 61"/>
+          <p:cNvSpPr txBox="1"/>
+          <p:nvPr/>
+        </p:nvSpPr>
+        <p:spPr>
+          <a:xfrm>
+            <a:off x="9843821" y="4279392"/>
+            <a:ext cx="713232" cy="219456"/>
+          </a:xfrm>
+          <a:prstGeom prst="rect">
+            <a:avLst/>
+          </a:prstGeom>
+          <a:noFill/>
+          <a:ln/>
+        </p:spPr>
+        <p:txBody>
+          <a:bodyPr wrap="square" lIns="0" tIns="0" rIns="0" bIns="0" rtlCol="0" anchor="ctr"/>
+          <a:lstStyle/>
+          <a:p>
+            <a:pPr algn="r" indent="0" marL="0">
+              <a:buNone/>
+            </a:pPr>
+            <a:r>
+              <a:rPr lang="en-US" sz="900" dirty="0">
+                <a:solidFill>
+                  <a:srgbClr val="6A726B"/>
+                </a:solidFill>
+                <a:latin typeface="Courier New" pitchFamily="34" charset="0"/>
+                <a:ea typeface="Courier New" pitchFamily="34" charset="-122"/>
+                <a:cs typeface="Courier New" pitchFamily="34" charset="-120"/>
+              </a:rPr>
+              <a:t>3.47×</a:t>
+            </a:r>
+            <a:endParaRPr lang="en-US" sz="900" dirty="0"/>
+          </a:p>
+        </p:txBody>
+      </p:sp>
+      <p:sp>
+        <p:nvSpPr>
+          <p:cNvPr id="64" name="Text 62"/>
+          <p:cNvSpPr txBox="1"/>
+          <p:nvPr/>
+        </p:nvSpPr>
+        <p:spPr>
+          <a:xfrm>
+            <a:off x="10575341" y="4279392"/>
+            <a:ext cx="893978" cy="219456"/>
+          </a:xfrm>
+          <a:prstGeom prst="rect">
+            <a:avLst/>
+          </a:prstGeom>
+          <a:noFill/>
+          <a:ln/>
+        </p:spPr>
+        <p:txBody>
+          <a:bodyPr wrap="square" lIns="0" tIns="0" rIns="0" bIns="0" rtlCol="0" anchor="ctr"/>
+          <a:lstStyle/>
+          <a:p>
+            <a:pPr algn="r" indent="0" marL="0">
+              <a:buNone/>
+            </a:pPr>
+            <a:r>
+              <a:rPr lang="en-US" sz="950" b="1" dirty="0">
+                <a:solidFill>
+                  <a:srgbClr val="B04A12"/>
+                </a:solidFill>
+                <a:latin typeface="Courier New" pitchFamily="34" charset="0"/>
+                <a:ea typeface="Courier New" pitchFamily="34" charset="-122"/>
+                <a:cs typeface="Courier New" pitchFamily="34" charset="-120"/>
+              </a:rPr>
+              <a:t>5 GPU</a:t>
+            </a:r>
+            <a:endParaRPr lang="en-US" sz="950" dirty="0"/>
+          </a:p>
+        </p:txBody>
+      </p:sp>
+      <p:sp>
+        <p:nvSpPr>
+          <p:cNvPr id="65" name="Shape 63"/>
+          <p:cNvSpPr/>
+          <p:nvPr/>
+        </p:nvSpPr>
+        <p:spPr>
+          <a:xfrm>
+            <a:off x="8362493" y="4585716"/>
+            <a:ext cx="64008" cy="64008"/>
+          </a:xfrm>
+          <a:prstGeom prst="rect">
+            <a:avLst/>
+          </a:prstGeom>
+          <a:solidFill>
+            <a:srgbClr val="B04A12"/>
+          </a:solidFill>
+          <a:ln/>
+        </p:spPr>
+      </p:sp>
+      <p:sp>
+        <p:nvSpPr>
+          <p:cNvPr id="66" name="Text 64"/>
+          <p:cNvSpPr txBox="1"/>
+          <p:nvPr/>
+        </p:nvSpPr>
+        <p:spPr>
+          <a:xfrm>
+            <a:off x="8527085" y="4517136"/>
+            <a:ext cx="1481328" cy="219456"/>
+          </a:xfrm>
+          <a:prstGeom prst="rect">
+            <a:avLst/>
+          </a:prstGeom>
+          <a:noFill/>
+          <a:ln/>
+        </p:spPr>
+        <p:txBody>
+          <a:bodyPr wrap="square" lIns="0" tIns="0" rIns="0" bIns="0" rtlCol="0" anchor="ctr"/>
+          <a:lstStyle/>
+          <a:p>
+            <a:pPr indent="0" marL="0">
+              <a:buNone/>
+            </a:pPr>
+            <a:r>
+              <a:rPr lang="en-US" sz="950" dirty="0">
+                <a:solidFill>
+                  <a:srgbClr val="3E453F"/>
+                </a:solidFill>
+                <a:latin typeface="Calibri" pitchFamily="34" charset="0"/>
+                <a:ea typeface="Calibri" pitchFamily="34" charset="-122"/>
+                <a:cs typeface="Calibri" pitchFamily="34" charset="-120"/>
+              </a:rPr>
+              <a:t>Agent loop 3 → 6 turns</a:t>
+            </a:r>
+            <a:endParaRPr lang="en-US" sz="950" dirty="0"/>
+          </a:p>
+        </p:txBody>
+      </p:sp>
+      <p:sp>
+        <p:nvSpPr>
+          <p:cNvPr id="67" name="Text 65"/>
+          <p:cNvSpPr txBox="1"/>
+          <p:nvPr/>
+        </p:nvSpPr>
+        <p:spPr>
+          <a:xfrm>
+            <a:off x="9843821" y="4517136"/>
+            <a:ext cx="713232" cy="219456"/>
+          </a:xfrm>
+          <a:prstGeom prst="rect">
+            <a:avLst/>
+          </a:prstGeom>
+          <a:noFill/>
+          <a:ln/>
+        </p:spPr>
+        <p:txBody>
+          <a:bodyPr wrap="square" lIns="0" tIns="0" rIns="0" bIns="0" rtlCol="0" anchor="ctr"/>
+          <a:lstStyle/>
+          <a:p>
+            <a:pPr algn="r" indent="0" marL="0">
+              <a:buNone/>
+            </a:pPr>
+            <a:r>
+              <a:rPr lang="en-US" sz="900" dirty="0">
+                <a:solidFill>
+                  <a:srgbClr val="6A726B"/>
+                </a:solidFill>
+                <a:latin typeface="Courier New" pitchFamily="34" charset="0"/>
+                <a:ea typeface="Courier New" pitchFamily="34" charset="-122"/>
+                <a:cs typeface="Courier New" pitchFamily="34" charset="-120"/>
+              </a:rPr>
+              <a:t>2.00×</a:t>
+            </a:r>
+            <a:endParaRPr lang="en-US" sz="900" dirty="0"/>
+          </a:p>
+        </p:txBody>
+      </p:sp>
+      <p:sp>
+        <p:nvSpPr>
+          <p:cNvPr id="68" name="Text 66"/>
+          <p:cNvSpPr txBox="1"/>
+          <p:nvPr/>
+        </p:nvSpPr>
+        <p:spPr>
+          <a:xfrm>
+            <a:off x="10575341" y="4517136"/>
+            <a:ext cx="893978" cy="219456"/>
+          </a:xfrm>
+          <a:prstGeom prst="rect">
+            <a:avLst/>
+          </a:prstGeom>
+          <a:noFill/>
+          <a:ln/>
+        </p:spPr>
+        <p:txBody>
+          <a:bodyPr wrap="square" lIns="0" tIns="0" rIns="0" bIns="0" rtlCol="0" anchor="ctr"/>
+          <a:lstStyle/>
+          <a:p>
+            <a:pPr algn="r" indent="0" marL="0">
+              <a:buNone/>
+            </a:pPr>
+            <a:r>
+              <a:rPr lang="en-US" sz="950" b="1" dirty="0">
+                <a:solidFill>
+                  <a:srgbClr val="B04A12"/>
+                </a:solidFill>
+                <a:latin typeface="Courier New" pitchFamily="34" charset="0"/>
+                <a:ea typeface="Courier New" pitchFamily="34" charset="-122"/>
+                <a:cs typeface="Courier New" pitchFamily="34" charset="-120"/>
+              </a:rPr>
+              <a:t>4 GPU</a:t>
+            </a:r>
+            <a:endParaRPr lang="en-US" sz="950" dirty="0"/>
+          </a:p>
+        </p:txBody>
+      </p:sp>
+      <p:sp>
+        <p:nvSpPr>
+          <p:cNvPr id="69" name="Shape 67"/>
+          <p:cNvSpPr/>
+          <p:nvPr/>
+        </p:nvSpPr>
+        <p:spPr>
+          <a:xfrm>
+            <a:off x="8362493" y="4823460"/>
+            <a:ext cx="64008" cy="64008"/>
+          </a:xfrm>
+          <a:prstGeom prst="rect">
+            <a:avLst/>
+          </a:prstGeom>
+          <a:solidFill>
+            <a:srgbClr val="008E7F"/>
+          </a:solidFill>
+          <a:ln/>
+        </p:spPr>
+      </p:sp>
+      <p:sp>
+        <p:nvSpPr>
+          <p:cNvPr id="70" name="Text 68"/>
+          <p:cNvSpPr txBox="1"/>
+          <p:nvPr/>
+        </p:nvSpPr>
+        <p:spPr>
+          <a:xfrm>
+            <a:off x="8527085" y="4754880"/>
+            <a:ext cx="1481328" cy="219456"/>
+          </a:xfrm>
+          <a:prstGeom prst="rect">
+            <a:avLst/>
+          </a:prstGeom>
+          <a:noFill/>
+          <a:ln/>
+        </p:spPr>
+        <p:txBody>
+          <a:bodyPr wrap="square" lIns="0" tIns="0" rIns="0" bIns="0" rtlCol="0" anchor="ctr"/>
+          <a:lstStyle/>
+          <a:p>
+            <a:pPr indent="0" marL="0">
+              <a:buNone/>
+            </a:pPr>
+            <a:r>
+              <a:rPr lang="en-US" sz="950" dirty="0">
+                <a:solidFill>
+                  <a:srgbClr val="3E453F"/>
+                </a:solidFill>
+                <a:latin typeface="Calibri" pitchFamily="34" charset="0"/>
+                <a:ea typeface="Calibri" pitchFamily="34" charset="-122"/>
+                <a:cs typeface="Calibri" pitchFamily="34" charset="-120"/>
+              </a:rPr>
+              <a:t>Verbose RFO output</a:t>
+            </a:r>
+            <a:endParaRPr lang="en-US" sz="950" dirty="0"/>
+          </a:p>
+        </p:txBody>
+      </p:sp>
+      <p:sp>
+        <p:nvSpPr>
+          <p:cNvPr id="71" name="Text 69"/>
+          <p:cNvSpPr txBox="1"/>
+          <p:nvPr/>
+        </p:nvSpPr>
+        <p:spPr>
+          <a:xfrm>
+            <a:off x="9843821" y="4754880"/>
+            <a:ext cx="713232" cy="219456"/>
+          </a:xfrm>
+          <a:prstGeom prst="rect">
+            <a:avLst/>
+          </a:prstGeom>
+          <a:noFill/>
+          <a:ln/>
+        </p:spPr>
+        <p:txBody>
+          <a:bodyPr wrap="square" lIns="0" tIns="0" rIns="0" bIns="0" rtlCol="0" anchor="ctr"/>
+          <a:lstStyle/>
+          <a:p>
+            <a:pPr algn="r" indent="0" marL="0">
+              <a:buNone/>
+            </a:pPr>
+            <a:r>
+              <a:rPr lang="en-US" sz="900" dirty="0">
+                <a:solidFill>
+                  <a:srgbClr val="6A726B"/>
+                </a:solidFill>
+                <a:latin typeface="Courier New" pitchFamily="34" charset="0"/>
+                <a:ea typeface="Courier New" pitchFamily="34" charset="-122"/>
+                <a:cs typeface="Courier New" pitchFamily="34" charset="-120"/>
+              </a:rPr>
+              <a:t>1.17×</a:t>
+            </a:r>
+            <a:endParaRPr lang="en-US" sz="900" dirty="0"/>
+          </a:p>
+        </p:txBody>
+      </p:sp>
+      <p:sp>
+        <p:nvSpPr>
+          <p:cNvPr id="72" name="Text 70"/>
+          <p:cNvSpPr txBox="1"/>
+          <p:nvPr/>
+        </p:nvSpPr>
+        <p:spPr>
+          <a:xfrm>
+            <a:off x="10575341" y="4754880"/>
+            <a:ext cx="893978" cy="219456"/>
+          </a:xfrm>
+          <a:prstGeom prst="rect">
+            <a:avLst/>
+          </a:prstGeom>
+          <a:noFill/>
+          <a:ln/>
+        </p:spPr>
+        <p:txBody>
+          <a:bodyPr wrap="square" lIns="0" tIns="0" rIns="0" bIns="0" rtlCol="0" anchor="ctr"/>
+          <a:lstStyle/>
+          <a:p>
+            <a:pPr algn="r" indent="0" marL="0">
+              <a:buNone/>
+            </a:pPr>
+            <a:r>
+              <a:rPr lang="en-US" sz="950" b="1" dirty="0">
+                <a:solidFill>
+                  <a:srgbClr val="008E7F"/>
+                </a:solidFill>
+                <a:latin typeface="Courier New" pitchFamily="34" charset="0"/>
+                <a:ea typeface="Courier New" pitchFamily="34" charset="-122"/>
+                <a:cs typeface="Courier New" pitchFamily="34" charset="-120"/>
+              </a:rPr>
+              <a:t>fits</a:t>
+            </a:r>
+            <a:endParaRPr lang="en-US" sz="950" dirty="0"/>
+          </a:p>
+        </p:txBody>
+      </p:sp>
+      <p:sp>
+        <p:nvSpPr>
+          <p:cNvPr id="73" name="Shape 71"/>
+          <p:cNvSpPr/>
+          <p:nvPr/>
+        </p:nvSpPr>
+        <p:spPr>
+          <a:xfrm>
+            <a:off x="8362493" y="5061204"/>
+            <a:ext cx="64008" cy="64008"/>
+          </a:xfrm>
+          <a:prstGeom prst="rect">
+            <a:avLst/>
+          </a:prstGeom>
+          <a:solidFill>
+            <a:srgbClr val="008E7F"/>
+          </a:solidFill>
+          <a:ln/>
+        </p:spPr>
+      </p:sp>
+      <p:sp>
+        <p:nvSpPr>
+          <p:cNvPr id="74" name="Text 72"/>
+          <p:cNvSpPr txBox="1"/>
+          <p:nvPr/>
+        </p:nvSpPr>
+        <p:spPr>
+          <a:xfrm>
+            <a:off x="8527085" y="4992624"/>
+            <a:ext cx="1481328" cy="219456"/>
+          </a:xfrm>
+          <a:prstGeom prst="rect">
+            <a:avLst/>
+          </a:prstGeom>
+          <a:noFill/>
+          <a:ln/>
+        </p:spPr>
+        <p:txBody>
+          <a:bodyPr wrap="square" lIns="0" tIns="0" rIns="0" bIns="0" rtlCol="0" anchor="ctr"/>
+          <a:lstStyle/>
+          <a:p>
+            <a:pPr indent="0" marL="0">
+              <a:buNone/>
+            </a:pPr>
+            <a:r>
+              <a:rPr lang="en-US" sz="950" dirty="0">
+                <a:solidFill>
+                  <a:srgbClr val="3E453F"/>
+                </a:solidFill>
+                <a:latin typeface="Calibri" pitchFamily="34" charset="0"/>
+                <a:ea typeface="Calibri" pitchFamily="34" charset="-122"/>
+                <a:cs typeface="Calibri" pitchFamily="34" charset="-120"/>
+              </a:rPr>
+              <a:t>Chat becomes primary UI</a:t>
+            </a:r>
+            <a:endParaRPr lang="en-US" sz="950" dirty="0"/>
+          </a:p>
+        </p:txBody>
+      </p:sp>
+      <p:sp>
+        <p:nvSpPr>
+          <p:cNvPr id="75" name="Text 73"/>
+          <p:cNvSpPr txBox="1"/>
+          <p:nvPr/>
+        </p:nvSpPr>
+        <p:spPr>
+          <a:xfrm>
+            <a:off x="9843821" y="4992624"/>
+            <a:ext cx="713232" cy="219456"/>
+          </a:xfrm>
+          <a:prstGeom prst="rect">
+            <a:avLst/>
+          </a:prstGeom>
+          <a:noFill/>
+          <a:ln/>
+        </p:spPr>
+        <p:txBody>
+          <a:bodyPr wrap="square" lIns="0" tIns="0" rIns="0" bIns="0" rtlCol="0" anchor="ctr"/>
+          <a:lstStyle/>
+          <a:p>
+            <a:pPr algn="r" indent="0" marL="0">
+              <a:buNone/>
+            </a:pPr>
+            <a:r>
+              <a:rPr lang="en-US" sz="900" dirty="0">
+                <a:solidFill>
+                  <a:srgbClr val="6A726B"/>
+                </a:solidFill>
+                <a:latin typeface="Courier New" pitchFamily="34" charset="0"/>
+                <a:ea typeface="Courier New" pitchFamily="34" charset="-122"/>
+                <a:cs typeface="Courier New" pitchFamily="34" charset="-120"/>
+              </a:rPr>
+              <a:t>1.00×</a:t>
+            </a:r>
+            <a:endParaRPr lang="en-US" sz="900" dirty="0"/>
+          </a:p>
+        </p:txBody>
+      </p:sp>
+      <p:sp>
+        <p:nvSpPr>
+          <p:cNvPr id="76" name="Text 74"/>
+          <p:cNvSpPr txBox="1"/>
+          <p:nvPr/>
+        </p:nvSpPr>
+        <p:spPr>
+          <a:xfrm>
+            <a:off x="10575341" y="4992624"/>
+            <a:ext cx="893978" cy="219456"/>
+          </a:xfrm>
+          <a:prstGeom prst="rect">
+            <a:avLst/>
+          </a:prstGeom>
+          <a:noFill/>
+          <a:ln/>
+        </p:spPr>
+        <p:txBody>
+          <a:bodyPr wrap="square" lIns="0" tIns="0" rIns="0" bIns="0" rtlCol="0" anchor="ctr"/>
+          <a:lstStyle/>
+          <a:p>
+            <a:pPr algn="r" indent="0" marL="0">
+              <a:buNone/>
+            </a:pPr>
+            <a:r>
+              <a:rPr lang="en-US" sz="950" b="1" dirty="0">
+                <a:solidFill>
+                  <a:srgbClr val="008E7F"/>
+                </a:solidFill>
+                <a:latin typeface="Courier New" pitchFamily="34" charset="0"/>
+                <a:ea typeface="Courier New" pitchFamily="34" charset="-122"/>
+                <a:cs typeface="Courier New" pitchFamily="34" charset="-120"/>
+              </a:rPr>
+              <a:t>fits</a:t>
+            </a:r>
+            <a:endParaRPr lang="en-US" sz="950" dirty="0"/>
+          </a:p>
+        </p:txBody>
+      </p:sp>
+      <p:sp>
+        <p:nvSpPr>
+          <p:cNvPr id="77" name="Shape 75"/>
+          <p:cNvSpPr/>
+          <p:nvPr/>
+        </p:nvSpPr>
+        <p:spPr>
+          <a:xfrm>
+            <a:off x="8362493" y="5303520"/>
+            <a:ext cx="3106826" cy="960120"/>
+          </a:xfrm>
+          <a:prstGeom prst="roundRect">
+            <a:avLst>
+              <a:gd name="adj" fmla="val 3810"/>
+            </a:avLst>
           </a:prstGeom>
           <a:solidFill>
             <a:srgbClr val="EDEFE9"/>
@@ -2682,97 +3974,38 @@
       </p:sp>
       <p:sp>
         <p:nvSpPr>
-          <p:cNvPr id="42" name="Shape 40"/>
-          <p:cNvSpPr/>
-          <p:nvPr/>
-        </p:nvSpPr>
-        <p:spPr>
-          <a:xfrm>
-            <a:off x="9990125" y="2500884"/>
-            <a:ext cx="224681" cy="100584"/>
-          </a:xfrm>
-          <a:prstGeom prst="rect">
-            <a:avLst/>
-          </a:prstGeom>
-          <a:solidFill>
-            <a:srgbClr val="008E7F"/>
-          </a:solidFill>
-          <a:ln/>
-        </p:spPr>
-      </p:sp>
-      <p:sp>
-        <p:nvSpPr>
-          <p:cNvPr id="43" name="Text 41"/>
-          <p:cNvSpPr txBox="1"/>
-          <p:nvPr/>
-        </p:nvSpPr>
-        <p:spPr>
-          <a:xfrm>
-            <a:off x="10831373" y="2432304"/>
-            <a:ext cx="347472" cy="219456"/>
-          </a:xfrm>
-          <a:prstGeom prst="rect">
-            <a:avLst/>
-          </a:prstGeom>
-          <a:noFill/>
-          <a:ln/>
-        </p:spPr>
-        <p:txBody>
-          <a:bodyPr wrap="square" lIns="0" tIns="0" rIns="0" bIns="0" rtlCol="0" anchor="ctr"/>
-          <a:lstStyle/>
-          <a:p>
-            <a:pPr indent="0" marL="0">
-              <a:buNone/>
-            </a:pPr>
-            <a:r>
-              <a:rPr lang="en-US" sz="850" dirty="0">
-                <a:solidFill>
-                  <a:srgbClr val="6A726B"/>
-                </a:solidFill>
-                <a:latin typeface="Courier New" pitchFamily="34" charset="0"/>
-                <a:ea typeface="Courier New" pitchFamily="34" charset="-122"/>
-                <a:cs typeface="Courier New" pitchFamily="34" charset="-120"/>
-              </a:rPr>
-              <a:t>1.0×</a:t>
-            </a:r>
-            <a:endParaRPr lang="en-US" sz="850" dirty="0"/>
-          </a:p>
-        </p:txBody>
-      </p:sp>
-      <p:sp>
-        <p:nvSpPr>
-          <p:cNvPr id="44" name="Text 42"/>
-          <p:cNvSpPr txBox="1"/>
-          <p:nvPr/>
-        </p:nvSpPr>
-        <p:spPr>
-          <a:xfrm>
-            <a:off x="11197133" y="2432304"/>
-            <a:ext cx="272186" cy="219456"/>
-          </a:xfrm>
-          <a:prstGeom prst="rect">
-            <a:avLst/>
-          </a:prstGeom>
-          <a:noFill/>
-          <a:ln/>
-        </p:spPr>
-        <p:txBody>
-          <a:bodyPr wrap="square" lIns="0" tIns="0" rIns="0" bIns="0" rtlCol="0" anchor="ctr"/>
-          <a:lstStyle/>
-          <a:p>
-            <a:pPr algn="r" indent="0" marL="0">
+          <p:cNvPr id="78" name="Text 76"/>
+          <p:cNvSpPr txBox="1"/>
+          <p:nvPr/>
+        </p:nvSpPr>
+        <p:spPr>
+          <a:xfrm>
+            <a:off x="8490509" y="5394960"/>
+            <a:ext cx="2850794" cy="201168"/>
+          </a:xfrm>
+          <a:prstGeom prst="rect">
+            <a:avLst/>
+          </a:prstGeom>
+          <a:noFill/>
+          <a:ln/>
+        </p:spPr>
+        <p:txBody>
+          <a:bodyPr wrap="square" lIns="0" tIns="0" rIns="0" bIns="0" rtlCol="0" anchor="ctr"/>
+          <a:lstStyle/>
+          <a:p>
+            <a:pPr indent="0" marL="0">
               <a:buNone/>
             </a:pPr>
             <a:r>
               <a:rPr lang="en-US" sz="1000" b="1" dirty="0">
                 <a:solidFill>
-                  <a:srgbClr val="008E7F"/>
-                </a:solidFill>
-                <a:latin typeface="Courier New" pitchFamily="34" charset="0"/>
-                <a:ea typeface="Courier New" pitchFamily="34" charset="-122"/>
-                <a:cs typeface="Courier New" pitchFamily="34" charset="-120"/>
-              </a:rPr>
-              <a:t>10</a:t>
+                  <a:srgbClr val="B04A12"/>
+                </a:solidFill>
+                <a:latin typeface="Arial" pitchFamily="34" charset="0"/>
+                <a:ea typeface="Arial" pitchFamily="34" charset="-122"/>
+                <a:cs typeface="Arial" pitchFamily="34" charset="-120"/>
+              </a:rPr>
+              <a:t>The context budget is now load-bearing</a:t>
             </a:r>
             <a:endParaRPr lang="en-US" sz="1000" dirty="0"/>
           </a:p>
@@ -2780,26 +4013,29 @@
       </p:sp>
       <p:sp>
         <p:nvSpPr>
-          <p:cNvPr id="45" name="Text 43"/>
-          <p:cNvSpPr txBox="1"/>
-          <p:nvPr/>
-        </p:nvSpPr>
-        <p:spPr>
-          <a:xfrm>
-            <a:off x="8362493" y="2738628"/>
-            <a:ext cx="1572768" cy="219456"/>
-          </a:xfrm>
-          <a:prstGeom prst="rect">
-            <a:avLst/>
-          </a:prstGeom>
-          <a:noFill/>
-          <a:ln/>
-        </p:spPr>
-        <p:txBody>
-          <a:bodyPr wrap="square" lIns="0" tIns="0" rIns="0" bIns="0" rtlCol="0" anchor="ctr"/>
-          <a:lstStyle/>
-          <a:p>
-            <a:pPr indent="0" marL="0">
+          <p:cNvPr id="79" name="Text 77"/>
+          <p:cNvSpPr txBox="1"/>
+          <p:nvPr/>
+        </p:nvSpPr>
+        <p:spPr>
+          <a:xfrm>
+            <a:off x="8490509" y="5614416"/>
+            <a:ext cx="2850794" cy="585216"/>
+          </a:xfrm>
+          <a:prstGeom prst="rect">
+            <a:avLst/>
+          </a:prstGeom>
+          <a:noFill/>
+          <a:ln/>
+        </p:spPr>
+        <p:txBody>
+          <a:bodyPr wrap="square" lIns="0" tIns="0" rIns="0" bIns="0" rtlCol="0" anchor="ctr"/>
+          <a:lstStyle/>
+          <a:p>
+            <a:pPr indent="0" marL="0">
+              <a:lnSpc>
+                <a:spcPts val="1200"/>
+              </a:lnSpc>
               <a:buNone/>
             </a:pPr>
             <a:r>
@@ -2811,1170 +4047,7 @@
                 <a:ea typeface="Calibri" pitchFamily="34" charset="-122"/>
                 <a:cs typeface="Calibri" pitchFamily="34" charset="-120"/>
               </a:rPr>
-              <a:t>RFO context 6k → 24k</a:t>
-            </a:r>
-            <a:endParaRPr lang="en-US" sz="950" dirty="0"/>
-          </a:p>
-        </p:txBody>
-      </p:sp>
-      <p:sp>
-        <p:nvSpPr>
-          <p:cNvPr id="46" name="Shape 44"/>
-          <p:cNvSpPr/>
-          <p:nvPr/>
-        </p:nvSpPr>
-        <p:spPr>
-          <a:xfrm>
-            <a:off x="9990125" y="2807208"/>
-            <a:ext cx="786384" cy="100584"/>
-          </a:xfrm>
-          <a:prstGeom prst="rect">
-            <a:avLst/>
-          </a:prstGeom>
-          <a:solidFill>
-            <a:srgbClr val="EDEFE9"/>
-          </a:solidFill>
-          <a:ln/>
-        </p:spPr>
-      </p:sp>
-      <p:sp>
-        <p:nvSpPr>
-          <p:cNvPr id="47" name="Shape 45"/>
-          <p:cNvSpPr/>
-          <p:nvPr/>
-        </p:nvSpPr>
-        <p:spPr>
-          <a:xfrm>
-            <a:off x="9990125" y="2807208"/>
-            <a:ext cx="786384" cy="100584"/>
-          </a:xfrm>
-          <a:prstGeom prst="rect">
-            <a:avLst/>
-          </a:prstGeom>
-          <a:solidFill>
-            <a:srgbClr val="B04A12"/>
-          </a:solidFill>
-          <a:ln/>
-        </p:spPr>
-      </p:sp>
-      <p:sp>
-        <p:nvSpPr>
-          <p:cNvPr id="48" name="Text 46"/>
-          <p:cNvSpPr txBox="1"/>
-          <p:nvPr/>
-        </p:nvSpPr>
-        <p:spPr>
-          <a:xfrm>
-            <a:off x="10831373" y="2738628"/>
-            <a:ext cx="347472" cy="219456"/>
-          </a:xfrm>
-          <a:prstGeom prst="rect">
-            <a:avLst/>
-          </a:prstGeom>
-          <a:noFill/>
-          <a:ln/>
-        </p:spPr>
-        <p:txBody>
-          <a:bodyPr wrap="square" lIns="0" tIns="0" rIns="0" bIns="0" rtlCol="0" anchor="ctr"/>
-          <a:lstStyle/>
-          <a:p>
-            <a:pPr indent="0" marL="0">
-              <a:buNone/>
-            </a:pPr>
-            <a:r>
-              <a:rPr lang="en-US" sz="850" dirty="0">
-                <a:solidFill>
-                  <a:srgbClr val="6A726B"/>
-                </a:solidFill>
-                <a:latin typeface="Courier New" pitchFamily="34" charset="0"/>
-                <a:ea typeface="Courier New" pitchFamily="34" charset="-122"/>
-                <a:cs typeface="Courier New" pitchFamily="34" charset="-120"/>
-              </a:rPr>
-              <a:t>3.5×</a:t>
-            </a:r>
-            <a:endParaRPr lang="en-US" sz="850" dirty="0"/>
-          </a:p>
-        </p:txBody>
-      </p:sp>
-      <p:sp>
-        <p:nvSpPr>
-          <p:cNvPr id="49" name="Text 47"/>
-          <p:cNvSpPr txBox="1"/>
-          <p:nvPr/>
-        </p:nvSpPr>
-        <p:spPr>
-          <a:xfrm>
-            <a:off x="11197133" y="2738628"/>
-            <a:ext cx="272186" cy="219456"/>
-          </a:xfrm>
-          <a:prstGeom prst="rect">
-            <a:avLst/>
-          </a:prstGeom>
-          <a:noFill/>
-          <a:ln/>
-        </p:spPr>
-        <p:txBody>
-          <a:bodyPr wrap="square" lIns="0" tIns="0" rIns="0" bIns="0" rtlCol="0" anchor="ctr"/>
-          <a:lstStyle/>
-          <a:p>
-            <a:pPr algn="r" indent="0" marL="0">
-              <a:buNone/>
-            </a:pPr>
-            <a:r>
-              <a:rPr lang="en-US" sz="1000" b="1" dirty="0">
-                <a:solidFill>
-                  <a:srgbClr val="171A18"/>
-                </a:solidFill>
-                <a:latin typeface="Courier New" pitchFamily="34" charset="0"/>
-                <a:ea typeface="Courier New" pitchFamily="34" charset="-122"/>
-                <a:cs typeface="Courier New" pitchFamily="34" charset="-120"/>
-              </a:rPr>
-              <a:t>18</a:t>
-            </a:r>
-            <a:endParaRPr lang="en-US" sz="1000" dirty="0"/>
-          </a:p>
-        </p:txBody>
-      </p:sp>
-      <p:sp>
-        <p:nvSpPr>
-          <p:cNvPr id="50" name="Text 48"/>
-          <p:cNvSpPr txBox="1"/>
-          <p:nvPr/>
-        </p:nvSpPr>
-        <p:spPr>
-          <a:xfrm>
-            <a:off x="8362493" y="3044952"/>
-            <a:ext cx="1572768" cy="219456"/>
-          </a:xfrm>
-          <a:prstGeom prst="rect">
-            <a:avLst/>
-          </a:prstGeom>
-          <a:noFill/>
-          <a:ln/>
-        </p:spPr>
-        <p:txBody>
-          <a:bodyPr wrap="square" lIns="0" tIns="0" rIns="0" bIns="0" rtlCol="0" anchor="ctr"/>
-          <a:lstStyle/>
-          <a:p>
-            <a:pPr indent="0" marL="0">
-              <a:buNone/>
-            </a:pPr>
-            <a:r>
-              <a:rPr lang="en-US" sz="950" dirty="0">
-                <a:solidFill>
-                  <a:srgbClr val="3E453F"/>
-                </a:solidFill>
-                <a:latin typeface="Calibri" pitchFamily="34" charset="0"/>
-                <a:ea typeface="Calibri" pitchFamily="34" charset="-122"/>
-                <a:cs typeface="Calibri" pitchFamily="34" charset="-120"/>
-              </a:rPr>
-              <a:t>Compression misses 3×</a:t>
-            </a:r>
-            <a:endParaRPr lang="en-US" sz="950" dirty="0"/>
-          </a:p>
-        </p:txBody>
-      </p:sp>
-      <p:sp>
-        <p:nvSpPr>
-          <p:cNvPr id="51" name="Shape 49"/>
-          <p:cNvSpPr/>
-          <p:nvPr/>
-        </p:nvSpPr>
-        <p:spPr>
-          <a:xfrm>
-            <a:off x="9990125" y="3113532"/>
-            <a:ext cx="786384" cy="100584"/>
-          </a:xfrm>
-          <a:prstGeom prst="rect">
-            <a:avLst/>
-          </a:prstGeom>
-          <a:solidFill>
-            <a:srgbClr val="EDEFE9"/>
-          </a:solidFill>
-          <a:ln/>
-        </p:spPr>
-      </p:sp>
-      <p:sp>
-        <p:nvSpPr>
-          <p:cNvPr id="52" name="Shape 50"/>
-          <p:cNvSpPr/>
-          <p:nvPr/>
-        </p:nvSpPr>
-        <p:spPr>
-          <a:xfrm>
-            <a:off x="9990125" y="3113532"/>
-            <a:ext cx="629107" cy="100584"/>
-          </a:xfrm>
-          <a:prstGeom prst="rect">
-            <a:avLst/>
-          </a:prstGeom>
-          <a:solidFill>
-            <a:srgbClr val="B04A12"/>
-          </a:solidFill>
-          <a:ln/>
-        </p:spPr>
-      </p:sp>
-      <p:sp>
-        <p:nvSpPr>
-          <p:cNvPr id="53" name="Text 51"/>
-          <p:cNvSpPr txBox="1"/>
-          <p:nvPr/>
-        </p:nvSpPr>
-        <p:spPr>
-          <a:xfrm>
-            <a:off x="10831373" y="3044952"/>
-            <a:ext cx="347472" cy="219456"/>
-          </a:xfrm>
-          <a:prstGeom prst="rect">
-            <a:avLst/>
-          </a:prstGeom>
-          <a:noFill/>
-          <a:ln/>
-        </p:spPr>
-        <p:txBody>
-          <a:bodyPr wrap="square" lIns="0" tIns="0" rIns="0" bIns="0" rtlCol="0" anchor="ctr"/>
-          <a:lstStyle/>
-          <a:p>
-            <a:pPr indent="0" marL="0">
-              <a:buNone/>
-            </a:pPr>
-            <a:r>
-              <a:rPr lang="en-US" sz="850" dirty="0">
-                <a:solidFill>
-                  <a:srgbClr val="6A726B"/>
-                </a:solidFill>
-                <a:latin typeface="Courier New" pitchFamily="34" charset="0"/>
-                <a:ea typeface="Courier New" pitchFamily="34" charset="-122"/>
-                <a:cs typeface="Courier New" pitchFamily="34" charset="-120"/>
-              </a:rPr>
-              <a:t>2.8×</a:t>
-            </a:r>
-            <a:endParaRPr lang="en-US" sz="850" dirty="0"/>
-          </a:p>
-        </p:txBody>
-      </p:sp>
-      <p:sp>
-        <p:nvSpPr>
-          <p:cNvPr id="54" name="Text 52"/>
-          <p:cNvSpPr txBox="1"/>
-          <p:nvPr/>
-        </p:nvSpPr>
-        <p:spPr>
-          <a:xfrm>
-            <a:off x="11197133" y="3044952"/>
-            <a:ext cx="272186" cy="219456"/>
-          </a:xfrm>
-          <a:prstGeom prst="rect">
-            <a:avLst/>
-          </a:prstGeom>
-          <a:noFill/>
-          <a:ln/>
-        </p:spPr>
-        <p:txBody>
-          <a:bodyPr wrap="square" lIns="0" tIns="0" rIns="0" bIns="0" rtlCol="0" anchor="ctr"/>
-          <a:lstStyle/>
-          <a:p>
-            <a:pPr algn="r" indent="0" marL="0">
-              <a:buNone/>
-            </a:pPr>
-            <a:r>
-              <a:rPr lang="en-US" sz="1000" b="1" dirty="0">
-                <a:solidFill>
-                  <a:srgbClr val="171A18"/>
-                </a:solidFill>
-                <a:latin typeface="Courier New" pitchFamily="34" charset="0"/>
-                <a:ea typeface="Courier New" pitchFamily="34" charset="-122"/>
-                <a:cs typeface="Courier New" pitchFamily="34" charset="-120"/>
-              </a:rPr>
-              <a:t>16</a:t>
-            </a:r>
-            <a:endParaRPr lang="en-US" sz="1000" dirty="0"/>
-          </a:p>
-        </p:txBody>
-      </p:sp>
-      <p:sp>
-        <p:nvSpPr>
-          <p:cNvPr id="55" name="Text 53"/>
-          <p:cNvSpPr txBox="1"/>
-          <p:nvPr/>
-        </p:nvSpPr>
-        <p:spPr>
-          <a:xfrm>
-            <a:off x="8362493" y="3351276"/>
-            <a:ext cx="1572768" cy="219456"/>
-          </a:xfrm>
-          <a:prstGeom prst="rect">
-            <a:avLst/>
-          </a:prstGeom>
-          <a:noFill/>
-          <a:ln/>
-        </p:spPr>
-        <p:txBody>
-          <a:bodyPr wrap="square" lIns="0" tIns="0" rIns="0" bIns="0" rtlCol="0" anchor="ctr"/>
-          <a:lstStyle/>
-          <a:p>
-            <a:pPr indent="0" marL="0">
-              <a:buNone/>
-            </a:pPr>
-            <a:r>
-              <a:rPr lang="en-US" sz="950" dirty="0">
-                <a:solidFill>
-                  <a:srgbClr val="3E453F"/>
-                </a:solidFill>
-                <a:latin typeface="Calibri" pitchFamily="34" charset="0"/>
-                <a:ea typeface="Calibri" pitchFamily="34" charset="-122"/>
-                <a:cs typeface="Calibri" pitchFamily="34" charset="-120"/>
-              </a:rPr>
-              <a:t>Every incident gets RFO</a:t>
-            </a:r>
-            <a:endParaRPr lang="en-US" sz="950" dirty="0"/>
-          </a:p>
-        </p:txBody>
-      </p:sp>
-      <p:sp>
-        <p:nvSpPr>
-          <p:cNvPr id="56" name="Shape 54"/>
-          <p:cNvSpPr/>
-          <p:nvPr/>
-        </p:nvSpPr>
-        <p:spPr>
-          <a:xfrm>
-            <a:off x="9990125" y="3419856"/>
-            <a:ext cx="786384" cy="100584"/>
-          </a:xfrm>
-          <a:prstGeom prst="rect">
-            <a:avLst/>
-          </a:prstGeom>
-          <a:solidFill>
-            <a:srgbClr val="EDEFE9"/>
-          </a:solidFill>
-          <a:ln/>
-        </p:spPr>
-      </p:sp>
-      <p:sp>
-        <p:nvSpPr>
-          <p:cNvPr id="57" name="Shape 55"/>
-          <p:cNvSpPr/>
-          <p:nvPr/>
-        </p:nvSpPr>
-        <p:spPr>
-          <a:xfrm>
-            <a:off x="9990125" y="3419856"/>
-            <a:ext cx="584171" cy="100584"/>
-          </a:xfrm>
-          <a:prstGeom prst="rect">
-            <a:avLst/>
-          </a:prstGeom>
-          <a:solidFill>
-            <a:srgbClr val="B04A12"/>
-          </a:solidFill>
-          <a:ln/>
-        </p:spPr>
-      </p:sp>
-      <p:sp>
-        <p:nvSpPr>
-          <p:cNvPr id="58" name="Text 56"/>
-          <p:cNvSpPr txBox="1"/>
-          <p:nvPr/>
-        </p:nvSpPr>
-        <p:spPr>
-          <a:xfrm>
-            <a:off x="10831373" y="3351276"/>
-            <a:ext cx="347472" cy="219456"/>
-          </a:xfrm>
-          <a:prstGeom prst="rect">
-            <a:avLst/>
-          </a:prstGeom>
-          <a:noFill/>
-          <a:ln/>
-        </p:spPr>
-        <p:txBody>
-          <a:bodyPr wrap="square" lIns="0" tIns="0" rIns="0" bIns="0" rtlCol="0" anchor="ctr"/>
-          <a:lstStyle/>
-          <a:p>
-            <a:pPr indent="0" marL="0">
-              <a:buNone/>
-            </a:pPr>
-            <a:r>
-              <a:rPr lang="en-US" sz="850" dirty="0">
-                <a:solidFill>
-                  <a:srgbClr val="6A726B"/>
-                </a:solidFill>
-                <a:latin typeface="Courier New" pitchFamily="34" charset="0"/>
-                <a:ea typeface="Courier New" pitchFamily="34" charset="-122"/>
-                <a:cs typeface="Courier New" pitchFamily="34" charset="-120"/>
-              </a:rPr>
-              <a:t>2.6×</a:t>
-            </a:r>
-            <a:endParaRPr lang="en-US" sz="850" dirty="0"/>
-          </a:p>
-        </p:txBody>
-      </p:sp>
-      <p:sp>
-        <p:nvSpPr>
-          <p:cNvPr id="59" name="Text 57"/>
-          <p:cNvSpPr txBox="1"/>
-          <p:nvPr/>
-        </p:nvSpPr>
-        <p:spPr>
-          <a:xfrm>
-            <a:off x="11197133" y="3351276"/>
-            <a:ext cx="272186" cy="219456"/>
-          </a:xfrm>
-          <a:prstGeom prst="rect">
-            <a:avLst/>
-          </a:prstGeom>
-          <a:noFill/>
-          <a:ln/>
-        </p:spPr>
-        <p:txBody>
-          <a:bodyPr wrap="square" lIns="0" tIns="0" rIns="0" bIns="0" rtlCol="0" anchor="ctr"/>
-          <a:lstStyle/>
-          <a:p>
-            <a:pPr algn="r" indent="0" marL="0">
-              <a:buNone/>
-            </a:pPr>
-            <a:r>
-              <a:rPr lang="en-US" sz="1000" b="1" dirty="0">
-                <a:solidFill>
-                  <a:srgbClr val="171A18"/>
-                </a:solidFill>
-                <a:latin typeface="Courier New" pitchFamily="34" charset="0"/>
-                <a:ea typeface="Courier New" pitchFamily="34" charset="-122"/>
-                <a:cs typeface="Courier New" pitchFamily="34" charset="-120"/>
-              </a:rPr>
-              <a:t>16</a:t>
-            </a:r>
-            <a:endParaRPr lang="en-US" sz="1000" dirty="0"/>
-          </a:p>
-        </p:txBody>
-      </p:sp>
-      <p:sp>
-        <p:nvSpPr>
-          <p:cNvPr id="60" name="Text 58"/>
-          <p:cNvSpPr txBox="1"/>
-          <p:nvPr/>
-        </p:nvSpPr>
-        <p:spPr>
-          <a:xfrm>
-            <a:off x="8362493" y="3657600"/>
-            <a:ext cx="1572768" cy="219456"/>
-          </a:xfrm>
-          <a:prstGeom prst="rect">
-            <a:avLst/>
-          </a:prstGeom>
-          <a:noFill/>
-          <a:ln/>
-        </p:spPr>
-        <p:txBody>
-          <a:bodyPr wrap="square" lIns="0" tIns="0" rIns="0" bIns="0" rtlCol="0" anchor="ctr"/>
-          <a:lstStyle/>
-          <a:p>
-            <a:pPr indent="0" marL="0">
-              <a:buNone/>
-            </a:pPr>
-            <a:r>
-              <a:rPr lang="en-US" sz="950" dirty="0">
-                <a:solidFill>
-                  <a:srgbClr val="3E453F"/>
-                </a:solidFill>
-                <a:latin typeface="Calibri" pitchFamily="34" charset="0"/>
-                <a:ea typeface="Calibri" pitchFamily="34" charset="-122"/>
-                <a:cs typeface="Calibri" pitchFamily="34" charset="-120"/>
-              </a:rPr>
-              <a:t>Agent loop 3 → 6 turns</a:t>
-            </a:r>
-            <a:endParaRPr lang="en-US" sz="950" dirty="0"/>
-          </a:p>
-        </p:txBody>
-      </p:sp>
-      <p:sp>
-        <p:nvSpPr>
-          <p:cNvPr id="61" name="Shape 59"/>
-          <p:cNvSpPr/>
-          <p:nvPr/>
-        </p:nvSpPr>
-        <p:spPr>
-          <a:xfrm>
-            <a:off x="9990125" y="3726180"/>
-            <a:ext cx="786384" cy="100584"/>
-          </a:xfrm>
-          <a:prstGeom prst="rect">
-            <a:avLst/>
-          </a:prstGeom>
-          <a:solidFill>
-            <a:srgbClr val="EDEFE9"/>
-          </a:solidFill>
-          <a:ln/>
-        </p:spPr>
-      </p:sp>
-      <p:sp>
-        <p:nvSpPr>
-          <p:cNvPr id="62" name="Shape 60"/>
-          <p:cNvSpPr/>
-          <p:nvPr/>
-        </p:nvSpPr>
-        <p:spPr>
-          <a:xfrm>
-            <a:off x="9990125" y="3726180"/>
-            <a:ext cx="426894" cy="100584"/>
-          </a:xfrm>
-          <a:prstGeom prst="rect">
-            <a:avLst/>
-          </a:prstGeom>
-          <a:solidFill>
-            <a:srgbClr val="B04A12"/>
-          </a:solidFill>
-          <a:ln/>
-        </p:spPr>
-      </p:sp>
-      <p:sp>
-        <p:nvSpPr>
-          <p:cNvPr id="63" name="Text 61"/>
-          <p:cNvSpPr txBox="1"/>
-          <p:nvPr/>
-        </p:nvSpPr>
-        <p:spPr>
-          <a:xfrm>
-            <a:off x="10831373" y="3657600"/>
-            <a:ext cx="347472" cy="219456"/>
-          </a:xfrm>
-          <a:prstGeom prst="rect">
-            <a:avLst/>
-          </a:prstGeom>
-          <a:noFill/>
-          <a:ln/>
-        </p:spPr>
-        <p:txBody>
-          <a:bodyPr wrap="square" lIns="0" tIns="0" rIns="0" bIns="0" rtlCol="0" anchor="ctr"/>
-          <a:lstStyle/>
-          <a:p>
-            <a:pPr indent="0" marL="0">
-              <a:buNone/>
-            </a:pPr>
-            <a:r>
-              <a:rPr lang="en-US" sz="850" dirty="0">
-                <a:solidFill>
-                  <a:srgbClr val="6A726B"/>
-                </a:solidFill>
-                <a:latin typeface="Courier New" pitchFamily="34" charset="0"/>
-                <a:ea typeface="Courier New" pitchFamily="34" charset="-122"/>
-                <a:cs typeface="Courier New" pitchFamily="34" charset="-120"/>
-              </a:rPr>
-              <a:t>1.9×</a:t>
-            </a:r>
-            <a:endParaRPr lang="en-US" sz="850" dirty="0"/>
-          </a:p>
-        </p:txBody>
-      </p:sp>
-      <p:sp>
-        <p:nvSpPr>
-          <p:cNvPr id="64" name="Text 62"/>
-          <p:cNvSpPr txBox="1"/>
-          <p:nvPr/>
-        </p:nvSpPr>
-        <p:spPr>
-          <a:xfrm>
-            <a:off x="11197133" y="3657600"/>
-            <a:ext cx="272186" cy="219456"/>
-          </a:xfrm>
-          <a:prstGeom prst="rect">
-            <a:avLst/>
-          </a:prstGeom>
-          <a:noFill/>
-          <a:ln/>
-        </p:spPr>
-        <p:txBody>
-          <a:bodyPr wrap="square" lIns="0" tIns="0" rIns="0" bIns="0" rtlCol="0" anchor="ctr"/>
-          <a:lstStyle/>
-          <a:p>
-            <a:pPr algn="r" indent="0" marL="0">
-              <a:buNone/>
-            </a:pPr>
-            <a:r>
-              <a:rPr lang="en-US" sz="1000" b="1" dirty="0">
-                <a:solidFill>
-                  <a:srgbClr val="171A18"/>
-                </a:solidFill>
-                <a:latin typeface="Courier New" pitchFamily="34" charset="0"/>
-                <a:ea typeface="Courier New" pitchFamily="34" charset="-122"/>
-                <a:cs typeface="Courier New" pitchFamily="34" charset="-120"/>
-              </a:rPr>
-              <a:t>14</a:t>
-            </a:r>
-            <a:endParaRPr lang="en-US" sz="1000" dirty="0"/>
-          </a:p>
-        </p:txBody>
-      </p:sp>
-      <p:sp>
-        <p:nvSpPr>
-          <p:cNvPr id="65" name="Text 63"/>
-          <p:cNvSpPr txBox="1"/>
-          <p:nvPr/>
-        </p:nvSpPr>
-        <p:spPr>
-          <a:xfrm>
-            <a:off x="8362493" y="3963924"/>
-            <a:ext cx="1572768" cy="219456"/>
-          </a:xfrm>
-          <a:prstGeom prst="rect">
-            <a:avLst/>
-          </a:prstGeom>
-          <a:noFill/>
-          <a:ln/>
-        </p:spPr>
-        <p:txBody>
-          <a:bodyPr wrap="square" lIns="0" tIns="0" rIns="0" bIns="0" rtlCol="0" anchor="ctr"/>
-          <a:lstStyle/>
-          <a:p>
-            <a:pPr indent="0" marL="0">
-              <a:buNone/>
-            </a:pPr>
-            <a:r>
-              <a:rPr lang="en-US" sz="950" dirty="0">
-                <a:solidFill>
-                  <a:srgbClr val="3E453F"/>
-                </a:solidFill>
-                <a:latin typeface="Calibri" pitchFamily="34" charset="0"/>
-                <a:ea typeface="Calibri" pitchFamily="34" charset="-122"/>
-                <a:cs typeface="Calibri" pitchFamily="34" charset="-120"/>
-              </a:rPr>
-              <a:t>Chat as primary UI</a:t>
-            </a:r>
-            <a:endParaRPr lang="en-US" sz="950" dirty="0"/>
-          </a:p>
-        </p:txBody>
-      </p:sp>
-      <p:sp>
-        <p:nvSpPr>
-          <p:cNvPr id="66" name="Shape 64"/>
-          <p:cNvSpPr/>
-          <p:nvPr/>
-        </p:nvSpPr>
-        <p:spPr>
-          <a:xfrm>
-            <a:off x="9990125" y="4032504"/>
-            <a:ext cx="786384" cy="100584"/>
-          </a:xfrm>
-          <a:prstGeom prst="rect">
-            <a:avLst/>
-          </a:prstGeom>
-          <a:solidFill>
-            <a:srgbClr val="EDEFE9"/>
-          </a:solidFill>
-          <a:ln/>
-        </p:spPr>
-      </p:sp>
-      <p:sp>
-        <p:nvSpPr>
-          <p:cNvPr id="67" name="Shape 65"/>
-          <p:cNvSpPr/>
-          <p:nvPr/>
-        </p:nvSpPr>
-        <p:spPr>
-          <a:xfrm>
-            <a:off x="9990125" y="4032504"/>
-            <a:ext cx="314554" cy="100584"/>
-          </a:xfrm>
-          <a:prstGeom prst="rect">
-            <a:avLst/>
-          </a:prstGeom>
-          <a:solidFill>
-            <a:srgbClr val="B04A12"/>
-          </a:solidFill>
-          <a:ln/>
-        </p:spPr>
-      </p:sp>
-      <p:sp>
-        <p:nvSpPr>
-          <p:cNvPr id="68" name="Text 66"/>
-          <p:cNvSpPr txBox="1"/>
-          <p:nvPr/>
-        </p:nvSpPr>
-        <p:spPr>
-          <a:xfrm>
-            <a:off x="10831373" y="3963924"/>
-            <a:ext cx="347472" cy="219456"/>
-          </a:xfrm>
-          <a:prstGeom prst="rect">
-            <a:avLst/>
-          </a:prstGeom>
-          <a:noFill/>
-          <a:ln/>
-        </p:spPr>
-        <p:txBody>
-          <a:bodyPr wrap="square" lIns="0" tIns="0" rIns="0" bIns="0" rtlCol="0" anchor="ctr"/>
-          <a:lstStyle/>
-          <a:p>
-            <a:pPr indent="0" marL="0">
-              <a:buNone/>
-            </a:pPr>
-            <a:r>
-              <a:rPr lang="en-US" sz="850" dirty="0">
-                <a:solidFill>
-                  <a:srgbClr val="6A726B"/>
-                </a:solidFill>
-                <a:latin typeface="Courier New" pitchFamily="34" charset="0"/>
-                <a:ea typeface="Courier New" pitchFamily="34" charset="-122"/>
-                <a:cs typeface="Courier New" pitchFamily="34" charset="-120"/>
-              </a:rPr>
-              <a:t>1.4×</a:t>
-            </a:r>
-            <a:endParaRPr lang="en-US" sz="850" dirty="0"/>
-          </a:p>
-        </p:txBody>
-      </p:sp>
-      <p:sp>
-        <p:nvSpPr>
-          <p:cNvPr id="69" name="Text 67"/>
-          <p:cNvSpPr txBox="1"/>
-          <p:nvPr/>
-        </p:nvSpPr>
-        <p:spPr>
-          <a:xfrm>
-            <a:off x="11197133" y="3963924"/>
-            <a:ext cx="272186" cy="219456"/>
-          </a:xfrm>
-          <a:prstGeom prst="rect">
-            <a:avLst/>
-          </a:prstGeom>
-          <a:noFill/>
-          <a:ln/>
-        </p:spPr>
-        <p:txBody>
-          <a:bodyPr wrap="square" lIns="0" tIns="0" rIns="0" bIns="0" rtlCol="0" anchor="ctr"/>
-          <a:lstStyle/>
-          <a:p>
-            <a:pPr algn="r" indent="0" marL="0">
-              <a:buNone/>
-            </a:pPr>
-            <a:r>
-              <a:rPr lang="en-US" sz="1000" b="1" dirty="0">
-                <a:solidFill>
-                  <a:srgbClr val="171A18"/>
-                </a:solidFill>
-                <a:latin typeface="Courier New" pitchFamily="34" charset="0"/>
-                <a:ea typeface="Courier New" pitchFamily="34" charset="-122"/>
-                <a:cs typeface="Courier New" pitchFamily="34" charset="-120"/>
-              </a:rPr>
-              <a:t>12</a:t>
-            </a:r>
-            <a:endParaRPr lang="en-US" sz="1000" dirty="0"/>
-          </a:p>
-        </p:txBody>
-      </p:sp>
-      <p:sp>
-        <p:nvSpPr>
-          <p:cNvPr id="70" name="Text 68"/>
-          <p:cNvSpPr txBox="1"/>
-          <p:nvPr/>
-        </p:nvSpPr>
-        <p:spPr>
-          <a:xfrm>
-            <a:off x="8362493" y="4270248"/>
-            <a:ext cx="1572768" cy="219456"/>
-          </a:xfrm>
-          <a:prstGeom prst="rect">
-            <a:avLst/>
-          </a:prstGeom>
-          <a:noFill/>
-          <a:ln/>
-        </p:spPr>
-        <p:txBody>
-          <a:bodyPr wrap="square" lIns="0" tIns="0" rIns="0" bIns="0" rtlCol="0" anchor="ctr"/>
-          <a:lstStyle/>
-          <a:p>
-            <a:pPr indent="0" marL="0">
-              <a:buNone/>
-            </a:pPr>
-            <a:r>
-              <a:rPr lang="en-US" sz="950" dirty="0">
-                <a:solidFill>
-                  <a:srgbClr val="3E453F"/>
-                </a:solidFill>
-                <a:latin typeface="Calibri" pitchFamily="34" charset="0"/>
-                <a:ea typeface="Calibri" pitchFamily="34" charset="-122"/>
-                <a:cs typeface="Calibri" pitchFamily="34" charset="-120"/>
-              </a:rPr>
-              <a:t>Verbose RFO 400 → 1,500</a:t>
-            </a:r>
-            <a:endParaRPr lang="en-US" sz="950" dirty="0"/>
-          </a:p>
-        </p:txBody>
-      </p:sp>
-      <p:sp>
-        <p:nvSpPr>
-          <p:cNvPr id="71" name="Shape 69"/>
-          <p:cNvSpPr/>
-          <p:nvPr/>
-        </p:nvSpPr>
-        <p:spPr>
-          <a:xfrm>
-            <a:off x="9990125" y="4338828"/>
-            <a:ext cx="786384" cy="100584"/>
-          </a:xfrm>
-          <a:prstGeom prst="rect">
-            <a:avLst/>
-          </a:prstGeom>
-          <a:solidFill>
-            <a:srgbClr val="EDEFE9"/>
-          </a:solidFill>
-          <a:ln/>
-        </p:spPr>
-      </p:sp>
-      <p:sp>
-        <p:nvSpPr>
-          <p:cNvPr id="72" name="Shape 70"/>
-          <p:cNvSpPr/>
-          <p:nvPr/>
-        </p:nvSpPr>
-        <p:spPr>
-          <a:xfrm>
-            <a:off x="9990125" y="4338828"/>
-            <a:ext cx="269617" cy="100584"/>
-          </a:xfrm>
-          <a:prstGeom prst="rect">
-            <a:avLst/>
-          </a:prstGeom>
-          <a:solidFill>
-            <a:srgbClr val="B04A12"/>
-          </a:solidFill>
-          <a:ln/>
-        </p:spPr>
-      </p:sp>
-      <p:sp>
-        <p:nvSpPr>
-          <p:cNvPr id="73" name="Text 71"/>
-          <p:cNvSpPr txBox="1"/>
-          <p:nvPr/>
-        </p:nvSpPr>
-        <p:spPr>
-          <a:xfrm>
-            <a:off x="10831373" y="4270248"/>
-            <a:ext cx="347472" cy="219456"/>
-          </a:xfrm>
-          <a:prstGeom prst="rect">
-            <a:avLst/>
-          </a:prstGeom>
-          <a:noFill/>
-          <a:ln/>
-        </p:spPr>
-        <p:txBody>
-          <a:bodyPr wrap="square" lIns="0" tIns="0" rIns="0" bIns="0" rtlCol="0" anchor="ctr"/>
-          <a:lstStyle/>
-          <a:p>
-            <a:pPr indent="0" marL="0">
-              <a:buNone/>
-            </a:pPr>
-            <a:r>
-              <a:rPr lang="en-US" sz="850" dirty="0">
-                <a:solidFill>
-                  <a:srgbClr val="6A726B"/>
-                </a:solidFill>
-                <a:latin typeface="Courier New" pitchFamily="34" charset="0"/>
-                <a:ea typeface="Courier New" pitchFamily="34" charset="-122"/>
-                <a:cs typeface="Courier New" pitchFamily="34" charset="-120"/>
-              </a:rPr>
-              <a:t>1.2×</a:t>
-            </a:r>
-            <a:endParaRPr lang="en-US" sz="850" dirty="0"/>
-          </a:p>
-        </p:txBody>
-      </p:sp>
-      <p:sp>
-        <p:nvSpPr>
-          <p:cNvPr id="74" name="Text 72"/>
-          <p:cNvSpPr txBox="1"/>
-          <p:nvPr/>
-        </p:nvSpPr>
-        <p:spPr>
-          <a:xfrm>
-            <a:off x="11197133" y="4270248"/>
-            <a:ext cx="272186" cy="219456"/>
-          </a:xfrm>
-          <a:prstGeom prst="rect">
-            <a:avLst/>
-          </a:prstGeom>
-          <a:noFill/>
-          <a:ln/>
-        </p:spPr>
-        <p:txBody>
-          <a:bodyPr wrap="square" lIns="0" tIns="0" rIns="0" bIns="0" rtlCol="0" anchor="ctr"/>
-          <a:lstStyle/>
-          <a:p>
-            <a:pPr algn="r" indent="0" marL="0">
-              <a:buNone/>
-            </a:pPr>
-            <a:r>
-              <a:rPr lang="en-US" sz="1000" b="1" dirty="0">
-                <a:solidFill>
-                  <a:srgbClr val="171A18"/>
-                </a:solidFill>
-                <a:latin typeface="Courier New" pitchFamily="34" charset="0"/>
-                <a:ea typeface="Courier New" pitchFamily="34" charset="-122"/>
-                <a:cs typeface="Courier New" pitchFamily="34" charset="-120"/>
-              </a:rPr>
-              <a:t>10</a:t>
-            </a:r>
-            <a:endParaRPr lang="en-US" sz="1000" dirty="0"/>
-          </a:p>
-        </p:txBody>
-      </p:sp>
-      <p:sp>
-        <p:nvSpPr>
-          <p:cNvPr id="75" name="Text 73"/>
-          <p:cNvSpPr txBox="1"/>
-          <p:nvPr/>
-        </p:nvSpPr>
-        <p:spPr>
-          <a:xfrm>
-            <a:off x="8362493" y="4576572"/>
-            <a:ext cx="1572768" cy="219456"/>
-          </a:xfrm>
-          <a:prstGeom prst="rect">
-            <a:avLst/>
-          </a:prstGeom>
-          <a:noFill/>
-          <a:ln/>
-        </p:spPr>
-        <p:txBody>
-          <a:bodyPr wrap="square" lIns="0" tIns="0" rIns="0" bIns="0" rtlCol="0" anchor="ctr"/>
-          <a:lstStyle/>
-          <a:p>
-            <a:pPr indent="0" marL="0">
-              <a:buNone/>
-            </a:pPr>
-            <a:r>
-              <a:rPr lang="en-US" sz="950" dirty="0">
-                <a:solidFill>
-                  <a:srgbClr val="3E453F"/>
-                </a:solidFill>
-                <a:latin typeface="Calibri" pitchFamily="34" charset="0"/>
-                <a:ea typeface="Calibri" pitchFamily="34" charset="-122"/>
-                <a:cs typeface="Calibri" pitchFamily="34" charset="-120"/>
-              </a:rPr>
-              <a:t>Lean: P1/P2 only</a:t>
-            </a:r>
-            <a:endParaRPr lang="en-US" sz="950" dirty="0"/>
-          </a:p>
-        </p:txBody>
-      </p:sp>
-      <p:sp>
-        <p:nvSpPr>
-          <p:cNvPr id="76" name="Shape 74"/>
-          <p:cNvSpPr/>
-          <p:nvPr/>
-        </p:nvSpPr>
-        <p:spPr>
-          <a:xfrm>
-            <a:off x="9990125" y="4645152"/>
-            <a:ext cx="786384" cy="100584"/>
-          </a:xfrm>
-          <a:prstGeom prst="rect">
-            <a:avLst/>
-          </a:prstGeom>
-          <a:solidFill>
-            <a:srgbClr val="EDEFE9"/>
-          </a:solidFill>
-          <a:ln/>
-        </p:spPr>
-      </p:sp>
-      <p:sp>
-        <p:nvSpPr>
-          <p:cNvPr id="77" name="Shape 75"/>
-          <p:cNvSpPr/>
-          <p:nvPr/>
-        </p:nvSpPr>
-        <p:spPr>
-          <a:xfrm>
-            <a:off x="9990125" y="4645152"/>
-            <a:ext cx="89872" cy="100584"/>
-          </a:xfrm>
-          <a:prstGeom prst="rect">
-            <a:avLst/>
-          </a:prstGeom>
-          <a:solidFill>
-            <a:srgbClr val="B04A12"/>
-          </a:solidFill>
-          <a:ln/>
-        </p:spPr>
-      </p:sp>
-      <p:sp>
-        <p:nvSpPr>
-          <p:cNvPr id="78" name="Text 76"/>
-          <p:cNvSpPr txBox="1"/>
-          <p:nvPr/>
-        </p:nvSpPr>
-        <p:spPr>
-          <a:xfrm>
-            <a:off x="10831373" y="4576572"/>
-            <a:ext cx="347472" cy="219456"/>
-          </a:xfrm>
-          <a:prstGeom prst="rect">
-            <a:avLst/>
-          </a:prstGeom>
-          <a:noFill/>
-          <a:ln/>
-        </p:spPr>
-        <p:txBody>
-          <a:bodyPr wrap="square" lIns="0" tIns="0" rIns="0" bIns="0" rtlCol="0" anchor="ctr"/>
-          <a:lstStyle/>
-          <a:p>
-            <a:pPr indent="0" marL="0">
-              <a:buNone/>
-            </a:pPr>
-            <a:r>
-              <a:rPr lang="en-US" sz="850" dirty="0">
-                <a:solidFill>
-                  <a:srgbClr val="6A726B"/>
-                </a:solidFill>
-                <a:latin typeface="Courier New" pitchFamily="34" charset="0"/>
-                <a:ea typeface="Courier New" pitchFamily="34" charset="-122"/>
-                <a:cs typeface="Courier New" pitchFamily="34" charset="-120"/>
-              </a:rPr>
-              <a:t>0.4×</a:t>
-            </a:r>
-            <a:endParaRPr lang="en-US" sz="850" dirty="0"/>
-          </a:p>
-        </p:txBody>
-      </p:sp>
-      <p:sp>
-        <p:nvSpPr>
-          <p:cNvPr id="79" name="Text 77"/>
-          <p:cNvSpPr txBox="1"/>
-          <p:nvPr/>
-        </p:nvSpPr>
-        <p:spPr>
-          <a:xfrm>
-            <a:off x="11197133" y="4576572"/>
-            <a:ext cx="272186" cy="219456"/>
-          </a:xfrm>
-          <a:prstGeom prst="rect">
-            <a:avLst/>
-          </a:prstGeom>
-          <a:noFill/>
-          <a:ln/>
-        </p:spPr>
-        <p:txBody>
-          <a:bodyPr wrap="square" lIns="0" tIns="0" rIns="0" bIns="0" rtlCol="0" anchor="ctr"/>
-          <a:lstStyle/>
-          <a:p>
-            <a:pPr algn="r" indent="0" marL="0">
-              <a:buNone/>
-            </a:pPr>
-            <a:r>
-              <a:rPr lang="en-US" sz="1000" b="1" dirty="0">
-                <a:solidFill>
-                  <a:srgbClr val="171A18"/>
-                </a:solidFill>
-                <a:latin typeface="Courier New" pitchFamily="34" charset="0"/>
-                <a:ea typeface="Courier New" pitchFamily="34" charset="-122"/>
-                <a:cs typeface="Courier New" pitchFamily="34" charset="-120"/>
-              </a:rPr>
-              <a:t>8</a:t>
-            </a:r>
-            <a:endParaRPr lang="en-US" sz="1000" dirty="0"/>
-          </a:p>
-        </p:txBody>
-      </p:sp>
-      <p:sp>
-        <p:nvSpPr>
-          <p:cNvPr id="80" name="Shape 78"/>
-          <p:cNvSpPr/>
-          <p:nvPr/>
-        </p:nvSpPr>
-        <p:spPr>
-          <a:xfrm>
-            <a:off x="8362493" y="5047488"/>
-            <a:ext cx="3106826" cy="1069848"/>
-          </a:xfrm>
-          <a:prstGeom prst="roundRect">
-            <a:avLst>
-              <a:gd name="adj" fmla="val 3419"/>
-            </a:avLst>
-          </a:prstGeom>
-          <a:solidFill>
-            <a:srgbClr val="EDEFE9"/>
-          </a:solidFill>
-          <a:ln/>
-        </p:spPr>
-      </p:sp>
-      <p:sp>
-        <p:nvSpPr>
-          <p:cNvPr id="81" name="Text 79"/>
-          <p:cNvSpPr txBox="1"/>
-          <p:nvPr/>
-        </p:nvSpPr>
-        <p:spPr>
-          <a:xfrm>
-            <a:off x="8490509" y="5138928"/>
-            <a:ext cx="2850794" cy="201168"/>
-          </a:xfrm>
-          <a:prstGeom prst="rect">
-            <a:avLst/>
-          </a:prstGeom>
-          <a:noFill/>
-          <a:ln/>
-        </p:spPr>
-        <p:txBody>
-          <a:bodyPr wrap="square" lIns="0" tIns="0" rIns="0" bIns="0" rtlCol="0" anchor="ctr"/>
-          <a:lstStyle/>
-          <a:p>
-            <a:pPr indent="0" marL="0">
-              <a:buNone/>
-            </a:pPr>
-            <a:r>
-              <a:rPr lang="en-US" sz="1000" b="1" dirty="0">
-                <a:solidFill>
-                  <a:srgbClr val="B04A12"/>
-                </a:solidFill>
-                <a:latin typeface="Arial" pitchFamily="34" charset="0"/>
-                <a:ea typeface="Arial" pitchFamily="34" charset="-122"/>
-                <a:cs typeface="Arial" pitchFamily="34" charset="-120"/>
-              </a:rPr>
-              <a:t>Context length is the dominant lever</a:t>
-            </a:r>
-            <a:endParaRPr lang="en-US" sz="1000" dirty="0"/>
-          </a:p>
-        </p:txBody>
-      </p:sp>
-      <p:sp>
-        <p:nvSpPr>
-          <p:cNvPr id="82" name="Text 80"/>
-          <p:cNvSpPr txBox="1"/>
-          <p:nvPr/>
-        </p:nvSpPr>
-        <p:spPr>
-          <a:xfrm>
-            <a:off x="8490509" y="5358384"/>
-            <a:ext cx="2850794" cy="713232"/>
-          </a:xfrm>
-          <a:prstGeom prst="rect">
-            <a:avLst/>
-          </a:prstGeom>
-          <a:noFill/>
-          <a:ln/>
-        </p:spPr>
-        <p:txBody>
-          <a:bodyPr wrap="square" lIns="0" tIns="0" rIns="0" bIns="0" rtlCol="0" anchor="ctr"/>
-          <a:lstStyle/>
-          <a:p>
-            <a:pPr indent="0" marL="0">
-              <a:lnSpc>
-                <a:spcPts val="1200"/>
-              </a:lnSpc>
-              <a:buNone/>
-            </a:pPr>
-            <a:r>
-              <a:rPr lang="en-US" sz="950" dirty="0">
-                <a:solidFill>
-                  <a:srgbClr val="3E453F"/>
-                </a:solidFill>
-                <a:latin typeface="Calibri" pitchFamily="34" charset="0"/>
-                <a:ea typeface="Calibri" pitchFamily="34" charset="-122"/>
-                <a:cs typeface="Calibri" pitchFamily="34" charset="-120"/>
-              </a:rPr>
-              <a:t>Prompt size moves total demand more than incident count does. A per-agent context budget therefore belongs in the LLD as a hard constraint, not as a tuning knob adjusted in production.</a:t>
+              <a:t>At 14 GPUs a context cap was good practice. At three it is the control: a hard limit in code, with an alert at 8,000 tokens.</a:t>
             </a:r>
             <a:endParaRPr lang="en-US" sz="950" dirty="0"/>
           </a:p>
@@ -4045,7 +4118,7 @@
                 <a:ea typeface="Arial" pitchFamily="34" charset="-122"/>
                 <a:cs typeface="Arial" pitchFamily="34" charset="-120"/>
               </a:rPr>
-              <a:t>The answer, and what it rests on</a:t>
+              <a:t>Three H100 — and what it costs</a:t>
             </a:r>
             <a:endParaRPr lang="en-US" sz="2900" dirty="0"/>
           </a:p>
@@ -4084,7 +4157,7 @@
                 <a:ea typeface="Calibri" pitchFamily="34" charset="-122"/>
                 <a:cs typeface="Calibri" pitchFamily="34" charset="-120"/>
               </a:rPr>
-              <a:t>11-point GuideLLM sweep</a:t>
+              <a:t>Peak-hour demand measures 1.37 GPU of work</a:t>
             </a:r>
             <a:pPr indent="0" marL="0">
               <a:buNone/>
@@ -4098,7 +4171,7 @@
                 <a:ea typeface="Calibri" pitchFamily="34" charset="-122"/>
                 <a:cs typeface="Calibri" pitchFamily="34" charset="-120"/>
               </a:rPr>
-              <a:t>   ·   two pools × concurrency 1–32   ·   capacity taken at the SLO-passing knee, then derated 30%</a:t>
+              <a:t>   ·   three carries it with N+1   ·   two independent methods agree to within 3.8%</a:t>
             </a:r>
             <a:endParaRPr lang="en-US" sz="1150" dirty="0"/>
           </a:p>
@@ -4203,7 +4276,7 @@
                 <a:ea typeface="Arial" pitchFamily="34" charset="-122"/>
                 <a:cs typeface="Arial" pitchFamily="34" charset="-120"/>
               </a:rPr>
-              <a:t>14</a:t>
+              <a:t>3</a:t>
             </a:r>
             <a:pPr indent="0" marL="0">
               <a:buNone/>
@@ -4259,7 +4332,7 @@
                 <a:ea typeface="Calibri" pitchFamily="34" charset="-122"/>
                 <a:cs typeface="Calibri" pitchFamily="34" charset="-120"/>
               </a:rPr>
-              <a:t>10 production over 2 sites,</a:t>
+              <a:t>One shared pool, single site.</a:t>
             </a:r>
             <a:endParaRPr lang="en-US" sz="950" dirty="0"/>
           </a:p>
@@ -4279,7 +4352,7 @@
                 <a:ea typeface="Calibri" pitchFamily="34" charset="-122"/>
                 <a:cs typeface="Calibri" pitchFamily="34" charset="-120"/>
               </a:rPr>
-              <a:t>2 non-prod, 2 training</a:t>
+              <a:t>N+1 across the platform.</a:t>
             </a:r>
             <a:endParaRPr lang="en-US" sz="950" dirty="0"/>
           </a:p>
@@ -4345,7 +4418,7 @@
                 <a:ea typeface="Arial" pitchFamily="34" charset="-122"/>
                 <a:cs typeface="Arial" pitchFamily="34" charset="-120"/>
               </a:rPr>
-              <a:t>CPU PLATFORM</a:t>
+              <a:t>UTILISATION</a:t>
             </a:r>
             <a:endParaRPr lang="en-US" sz="850" dirty="0"/>
           </a:p>
@@ -4384,7 +4457,7 @@
                 <a:ea typeface="Arial" pitchFamily="34" charset="-122"/>
                 <a:cs typeface="Arial" pitchFamily="34" charset="-120"/>
               </a:rPr>
-              <a:t>488</a:t>
+              <a:t>46</a:t>
             </a:r>
             <a:pPr indent="0" marL="0">
               <a:buNone/>
@@ -4398,7 +4471,7 @@
                 <a:ea typeface="Arial" pitchFamily="34" charset="-122"/>
                 <a:cs typeface="Arial" pitchFamily="34" charset="-120"/>
               </a:rPr>
-              <a:t> vCPU</a:t>
+              <a:t> % at peak</a:t>
             </a:r>
             <a:endParaRPr lang="en-US" sz="3100" dirty="0"/>
           </a:p>
@@ -4440,7 +4513,7 @@
                 <a:ea typeface="Calibri" pitchFamily="34" charset="-122"/>
                 <a:cs typeface="Calibri" pitchFamily="34" charset="-120"/>
               </a:rPr>
-              <a:t>4,768 GB RAM ≈ 7 nodes,</a:t>
+              <a:t>69% with one GPU down;</a:t>
             </a:r>
             <a:endParaRPr lang="en-US" sz="950" dirty="0"/>
           </a:p>
@@ -4460,7 +4533,7 @@
                 <a:ea typeface="Calibri" pitchFamily="34" charset="-122"/>
                 <a:cs typeface="Calibri" pitchFamily="34" charset="-120"/>
               </a:rPr>
-              <a:t>RAM-bound not CPU-bound</a:t>
+              <a:t>19% at average load.</a:t>
             </a:r>
             <a:endParaRPr lang="en-US" sz="950" dirty="0"/>
           </a:p>
@@ -4526,7 +4599,7 @@
                 <a:ea typeface="Arial" pitchFamily="34" charset="-122"/>
                 <a:cs typeface="Arial" pitchFamily="34" charset="-120"/>
               </a:rPr>
-              <a:t>STORAGE</a:t>
+              <a:t>GROWTH</a:t>
             </a:r>
             <a:endParaRPr lang="en-US" sz="850" dirty="0"/>
           </a:p>
@@ -4565,7 +4638,7 @@
                 <a:ea typeface="Arial" pitchFamily="34" charset="-122"/>
                 <a:cs typeface="Arial" pitchFamily="34" charset="-120"/>
               </a:rPr>
-              <a:t>43.9</a:t>
+              <a:t>1.6</a:t>
             </a:r>
             <a:pPr indent="0" marL="0">
               <a:buNone/>
@@ -4579,7 +4652,7 @@
                 <a:ea typeface="Arial" pitchFamily="34" charset="-122"/>
                 <a:cs typeface="Arial" pitchFamily="34" charset="-120"/>
               </a:rPr>
-              <a:t> TB</a:t>
+              <a:t> × headroom</a:t>
             </a:r>
             <a:endParaRPr lang="en-US" sz="3100" dirty="0"/>
           </a:p>
@@ -4621,7 +4694,7 @@
                 <a:ea typeface="Calibri" pitchFamily="34" charset="-122"/>
                 <a:cs typeface="Calibri" pitchFamily="34" charset="-120"/>
               </a:rPr>
-              <a:t>9.2 TB logical ×3 replication</a:t>
+              <a:t>RFO demand can grow 57%</a:t>
             </a:r>
             <a:endParaRPr lang="en-US" sz="950" dirty="0"/>
           </a:p>
@@ -4641,7 +4714,7 @@
                 <a:ea typeface="Calibri" pitchFamily="34" charset="-122"/>
                 <a:cs typeface="Calibri" pitchFamily="34" charset="-120"/>
               </a:rPr>
-              <a:t>×1.6 growth, NVMe</a:t>
+              <a:t>before a 4th GPU.</a:t>
             </a:r>
             <a:endParaRPr lang="en-US" sz="950" dirty="0"/>
           </a:p>
@@ -4707,7 +4780,7 @@
                 <a:ea typeface="Arial" pitchFamily="34" charset="-122"/>
                 <a:cs typeface="Arial" pitchFamily="34" charset="-120"/>
               </a:rPr>
-              <a:t>TOKEN DEMAND</a:t>
+              <a:t>SAVING</a:t>
             </a:r>
             <a:endParaRPr lang="en-US" sz="850" dirty="0"/>
           </a:p>
@@ -4746,7 +4819,7 @@
                 <a:ea typeface="Arial" pitchFamily="34" charset="-122"/>
                 <a:cs typeface="Arial" pitchFamily="34" charset="-120"/>
               </a:rPr>
-              <a:t>268</a:t>
+              <a:t>308</a:t>
             </a:r>
             <a:pPr indent="0" marL="0">
               <a:buNone/>
@@ -4760,7 +4833,7 @@
                 <a:ea typeface="Arial" pitchFamily="34" charset="-122"/>
                 <a:cs typeface="Arial" pitchFamily="34" charset="-120"/>
               </a:rPr>
-              <a:t> M tok/day</a:t>
+              <a:t> k $/year</a:t>
             </a:r>
             <a:endParaRPr lang="en-US" sz="3100" dirty="0"/>
           </a:p>
@@ -4802,7 +4875,7 @@
                 <a:ea typeface="Calibri" pitchFamily="34" charset="-122"/>
                 <a:cs typeface="Calibri" pitchFamily="34" charset="-120"/>
               </a:rPr>
-              <a:t>98B/year — two of the</a:t>
+              <a:t>vs the 14-GPU two-site</a:t>
             </a:r>
             <a:endParaRPr lang="en-US" sz="950" dirty="0"/>
           </a:p>
@@ -4822,7 +4895,7 @@
                 <a:ea typeface="Calibri" pitchFamily="34" charset="-122"/>
                 <a:cs typeface="Calibri" pitchFamily="34" charset="-120"/>
               </a:rPr>
-              <a:t>five agents use tokens</a:t>
+              <a:t>design, on GPU alone.</a:t>
             </a:r>
             <a:endParaRPr lang="en-US" sz="950" dirty="0"/>
           </a:p>
@@ -5008,7 +5081,7 @@
                 <a:ea typeface="Calibri" pitchFamily="34" charset="-122"/>
                 <a:cs typeface="Calibri" pitchFamily="34" charset="-120"/>
               </a:rPr>
-              <a:t>both pools, 2.4× the daily mean</a:t>
+              <a:t>both classes, 2.4× the daily mean</a:t>
             </a:r>
             <a:endParaRPr lang="en-US" sz="800" dirty="0"/>
           </a:p>
@@ -5094,7 +5167,7 @@
                 <a:ea typeface="Calibri" pitchFamily="34" charset="-122"/>
                 <a:cs typeface="Calibri" pitchFamily="34" charset="-120"/>
               </a:rPr>
-              <a:t>Measured capacity</a:t>
+              <a:t>Shared-pool capacity</a:t>
             </a:r>
             <a:endParaRPr lang="en-US" sz="900" dirty="0"/>
           </a:p>
@@ -5133,7 +5206,7 @@
                 <a:ea typeface="Arial" pitchFamily="34" charset="-122"/>
                 <a:cs typeface="Arial" pitchFamily="34" charset="-120"/>
               </a:rPr>
-              <a:t>6,066 / 3,797</a:t>
+              <a:t>5,433 tok/s</a:t>
             </a:r>
             <a:endParaRPr lang="en-US" sz="1500" dirty="0"/>
           </a:p>
@@ -5175,7 +5248,7 @@
                 <a:ea typeface="Calibri" pitchFamily="34" charset="-122"/>
                 <a:cs typeface="Calibri" pitchFamily="34" charset="-120"/>
               </a:rPr>
-              <a:t>tok/s per H100 at the SLO knee</a:t>
+              <a:t>measured, mixed traffic, per H100</a:t>
             </a:r>
             <a:endParaRPr lang="en-US" sz="800" dirty="0"/>
           </a:p>
@@ -5261,7 +5334,7 @@
                 <a:ea typeface="Calibri" pitchFamily="34" charset="-122"/>
                 <a:cs typeface="Calibri" pitchFamily="34" charset="-120"/>
               </a:rPr>
-              <a:t>After 30% headroom</a:t>
+              <a:t>Work required</a:t>
             </a:r>
             <a:endParaRPr lang="en-US" sz="900" dirty="0"/>
           </a:p>
@@ -5300,7 +5373,7 @@
                 <a:ea typeface="Arial" pitchFamily="34" charset="-122"/>
                 <a:cs typeface="Arial" pitchFamily="34" charset="-120"/>
               </a:rPr>
-              <a:t>4,246 / 2,658</a:t>
+              <a:t>1.37 GPU</a:t>
             </a:r>
             <a:endParaRPr lang="en-US" sz="1500" dirty="0"/>
           </a:p>
@@ -5342,7 +5415,7 @@
                 <a:ea typeface="Calibri" pitchFamily="34" charset="-122"/>
                 <a:cs typeface="Calibri" pitchFamily="34" charset="-120"/>
               </a:rPr>
-              <a:t>usable tok/s per H100</a:t>
+              <a:t>additive method agrees to 3.8%</a:t>
             </a:r>
             <a:endParaRPr lang="en-US" sz="800" dirty="0"/>
           </a:p>
@@ -5428,7 +5501,7 @@
                 <a:ea typeface="Calibri" pitchFamily="34" charset="-122"/>
                 <a:cs typeface="Calibri" pitchFamily="34" charset="-120"/>
               </a:rPr>
-              <a:t>GPUs actually serving</a:t>
+              <a:t>Survives one failure</a:t>
             </a:r>
             <a:endParaRPr lang="en-US" sz="900" dirty="0"/>
           </a:p>
@@ -5467,7 +5540,7 @@
                 <a:ea typeface="Arial" pitchFamily="34" charset="-122"/>
                 <a:cs typeface="Arial" pitchFamily="34" charset="-120"/>
               </a:rPr>
-              <a:t>1.9 → 3</a:t>
+              <a:t>68.6%</a:t>
             </a:r>
             <a:endParaRPr lang="en-US" sz="1500" dirty="0"/>
           </a:p>
@@ -5509,7 +5582,7 @@
                 <a:ea typeface="Calibri" pitchFamily="34" charset="-122"/>
                 <a:cs typeface="Calibri" pitchFamily="34" charset="-120"/>
               </a:rPr>
-              <a:t>peak-hour requirement</a:t>
+              <a:t>of capacity on the 2 that remain</a:t>
             </a:r>
             <a:endParaRPr lang="en-US" sz="800" dirty="0"/>
           </a:p>
@@ -5595,7 +5668,7 @@
                 <a:ea typeface="Calibri" pitchFamily="34" charset="-122"/>
                 <a:cs typeface="Calibri" pitchFamily="34" charset="-120"/>
               </a:rPr>
-              <a:t>Plus N+1, 2 sites, non-prod</a:t>
+              <a:t>Fleet</a:t>
             </a:r>
             <a:endParaRPr lang="en-US" sz="900" dirty="0"/>
           </a:p>
@@ -5634,7 +5707,7 @@
                 <a:ea typeface="Arial" pitchFamily="34" charset="-122"/>
                 <a:cs typeface="Arial" pitchFamily="34" charset="-120"/>
               </a:rPr>
-              <a:t>14 × H100</a:t>
+              <a:t>3 × H100</a:t>
             </a:r>
             <a:endParaRPr lang="en-US" sz="1500" dirty="0"/>
           </a:p>
@@ -5676,7 +5749,7 @@
                 <a:ea typeface="Calibri" pitchFamily="34" charset="-122"/>
                 <a:cs typeface="Calibri" pitchFamily="34" charset="-120"/>
               </a:rPr>
-              <a:t>HA and DR, not token volume</a:t>
+              <a:t>the smallest N+1 that holds</a:t>
             </a:r>
             <a:endParaRPr lang="en-US" sz="800" dirty="0"/>
           </a:p>
@@ -5691,11 +5764,11 @@
         <p:spPr>
           <a:xfrm>
             <a:off x="502920" y="4224528"/>
-            <a:ext cx="3576218" cy="1481328"/>
+            <a:ext cx="3576218" cy="1700784"/>
           </a:xfrm>
           <a:prstGeom prst="roundRect">
             <a:avLst>
-              <a:gd name="adj" fmla="val 3086"/>
+              <a:gd name="adj" fmla="val 2688"/>
             </a:avLst>
           </a:prstGeom>
           <a:solidFill>
@@ -5762,7 +5835,7 @@
                 <a:ea typeface="Arial" pitchFamily="34" charset="-122"/>
                 <a:cs typeface="Arial" pitchFamily="34" charset="-120"/>
               </a:rPr>
-              <a:t>The LLM tier is the small part</a:t>
+              <a:t>Three is an HA number, not throughput</a:t>
             </a:r>
             <a:endParaRPr lang="en-US" sz="1200" dirty="0"/>
           </a:p>
@@ -5777,7 +5850,7 @@
         <p:spPr>
           <a:xfrm>
             <a:off x="685800" y="4663440"/>
-            <a:ext cx="3210458" cy="969264"/>
+            <a:ext cx="3210458" cy="1188720"/>
           </a:xfrm>
           <a:prstGeom prst="rect">
             <a:avLst/>
@@ -5804,7 +5877,7 @@
                 <a:ea typeface="Calibri" pitchFamily="34" charset="-122"/>
                 <a:cs typeface="Calibri" pitchFamily="34" charset="-120"/>
               </a:rPr>
-              <a:t>Peak demand needs about two GPUs of serving; average utilisation of the serving fleet is near 20%. The fleet is sized by peak and by HA, never by average load.</a:t>
+              <a:t>Peak needs 1.37 GPU, so two would meet the SLO. Three is the smallest fleet where a GPU can fail during the busiest hour and the platform still holds. That is the whole case for the third card.</a:t>
             </a:r>
             <a:endParaRPr lang="en-US" sz="1000" dirty="0"/>
           </a:p>
@@ -5819,11 +5892,11 @@
         <p:spPr>
           <a:xfrm>
             <a:off x="4307738" y="4224528"/>
-            <a:ext cx="3576218" cy="1481328"/>
+            <a:ext cx="3576218" cy="1700784"/>
           </a:xfrm>
           <a:prstGeom prst="roundRect">
             <a:avLst>
-              <a:gd name="adj" fmla="val 3086"/>
+              <a:gd name="adj" fmla="val 2688"/>
             </a:avLst>
           </a:prstGeom>
           <a:solidFill>
@@ -5890,7 +5963,7 @@
                 <a:ea typeface="Arial" pitchFamily="34" charset="-122"/>
                 <a:cs typeface="Arial" pitchFamily="34" charset="-120"/>
               </a:rPr>
-              <a:t>The platform is floor-bound</a:t>
+              <a:t>Chat was only 0.24 GPU of load</a:t>
             </a:r>
             <a:endParaRPr lang="en-US" sz="1200" dirty="0"/>
           </a:p>
@@ -5905,7 +5978,7 @@
         <p:spPr>
           <a:xfrm>
             <a:off x="4490618" y="4663440"/>
-            <a:ext cx="3210458" cy="969264"/>
+            <a:ext cx="3210458" cy="1188720"/>
           </a:xfrm>
           <a:prstGeom prst="rect">
             <a:avLst/>
@@ -5932,7 +6005,7 @@
                 <a:ea typeface="Calibri" pitchFamily="34" charset="-122"/>
                 <a:cs typeface="Calibri" pitchFamily="34" charset="-120"/>
               </a:rPr>
-              <a:t>11 of 13 components are sized by their operational floor — JVM heap, compaction, quorum — not by Vi’s event rate. Halving alarm volume does not make this cheaper; only removing components does.</a:t>
+              <a:t>Two pools was the right architecture and the wrong sizing. Same model, one deployment, priority scheduling. The one thing arithmetic cannot settle — interactive TTFT under long prefills — is a day on a rented card.</a:t>
             </a:r>
             <a:endParaRPr lang="en-US" sz="1000" dirty="0"/>
           </a:p>
@@ -5947,11 +6020,11 @@
         <p:spPr>
           <a:xfrm>
             <a:off x="8112557" y="4224528"/>
-            <a:ext cx="3576218" cy="1481328"/>
+            <a:ext cx="3576218" cy="1700784"/>
           </a:xfrm>
           <a:prstGeom prst="roundRect">
             <a:avLst>
-              <a:gd name="adj" fmla="val 3086"/>
+              <a:gd name="adj" fmla="val 2688"/>
             </a:avLst>
           </a:prstGeom>
           <a:solidFill>
@@ -6018,7 +6091,7 @@
                 <a:ea typeface="Arial" pitchFamily="34" charset="-122"/>
                 <a:cs typeface="Arial" pitchFamily="34" charset="-120"/>
               </a:rPr>
-              <a:t>On-prem does not pay for itself</a:t>
+              <a:t>Single site is the one real loss</a:t>
             </a:r>
             <a:endParaRPr lang="en-US" sz="1200" dirty="0"/>
           </a:p>
@@ -6033,7 +6106,7 @@
         <p:spPr>
           <a:xfrm>
             <a:off x="8295437" y="4663440"/>
-            <a:ext cx="3210458" cy="969264"/>
+            <a:ext cx="3210458" cy="1188720"/>
           </a:xfrm>
           <a:prstGeom prst="rect">
             <a:avLst/>
@@ -6060,7 +6133,7 @@
                 <a:ea typeface="Calibri" pitchFamily="34" charset="-122"/>
                 <a:cs typeface="Calibri" pitchFamily="34" charset="-120"/>
               </a:rPr>
-              <a:t>10 H100 ≈ $280k/yr against ≈$59k/yr for the same tokens hosted; break-even is ~4.8× this volume. We build private because the data cannot leave — saying so is what keeps the business case credible.</a:t>
+              <a:t>Everything else dropped was over-provisioning. The manual NOC process covers a DC outage today, but that expires when headcount comes out — so fund site 2 before the reduction lands, not after.</a:t>
             </a:r>
             <a:endParaRPr lang="en-US" sz="1000" dirty="0"/>
           </a:p>
@@ -6074,7 +6147,7 @@
         </p:nvSpPr>
         <p:spPr>
           <a:xfrm>
-            <a:off x="502920" y="5943600"/>
+            <a:off x="502920" y="6126480"/>
             <a:ext cx="11185855" cy="384048"/>
           </a:xfrm>
           <a:prstGeom prst="rect">
@@ -6119,7 +6192,7 @@
                 <a:ea typeface="Calibri" pitchFamily="34" charset="-122"/>
                 <a:cs typeface="Calibri" pitchFamily="34" charset="-120"/>
               </a:rPr>
-              <a:t>GuideLLM 0.7.3 measured request rate, latency, TTFT and ITL end to end; per-point TTFT/ITL were pinned to published gpt-oss-120b + vLLM figures for one H100 80GB, since the modelling host has no GPU. Pointing --backend at a live vLLM endpoint re-derives every number above.</a:t>
+              <a:t>16 GuideLLM operating points across three workload profiles, including a shared-pool run driven from two simultaneous data sources so the scheduler sees real mixed traffic. Per-point TTFT/ITL were pinned to published gpt-oss-120b + vLLM figures for one H100 80GB, since the modelling host has no GPU. Pointing --backend at a live vLLM endpoint re-derives every number above.</a:t>
             </a:r>
             <a:endParaRPr lang="en-US" sz="850" dirty="0"/>
           </a:p>

--- a/deck/Vi-AI-NOC-Sizing.pptx
+++ b/deck/Vi-AI-NOC-Sizing.pptx
@@ -503,7 +503,7 @@
           <a:p>
             <a:r>
               <a:rPr lang="en-US" dirty="0"/>
-              <a:t>Left: what the SoW fixes versus what we assumed. Middle: the six decisions the 3-GPU constraint forced. Right: the ceiling on each assumption before a fourth GPU is needed, and the sensitivity cases re-run against three. The point is that capacity was measured and only demand was assumed.</a:t>
+              <a:t>Left: what the IBM TSD fixes versus what we assumed — note alarms moved from 10M to 15M/day, which is what drives the heavy tier. Middle: the six sizing decisions. Right: measured capacity per model tier on H200, and where the tokens actually come from. The headline of this slide is that Change Management adds model tiers, not GPUs.</a:t>
             </a:r>
             <a:endParaRPr lang="en-US" dirty="0"/>
           </a:p>
@@ -591,7 +591,7 @@
           <a:p>
             <a:r>
               <a:rPr lang="en-US" dirty="0"/>
-              <a:t>Top row is the answer. The chain is the arithmetic: peak demand over measured shared-pool capacity is 1.37 GPU; three is what N+1 costs. Lead with the three findings — especially the last one, since single site is the only genuine risk in the descope and it has an expiry date.</a:t>
+              <a:t>The total in the TSD is right — 4 production H200 — and my independent measured model lands on the same number. The issue is the split: 3 cards for gpt-oss-120b and 1 dedicated to E5 leaves the heavy tier at 2.06 of 3, so the stated 2-active HA posture has no headroom. Freeing the E5 card fixes it at zero extra cost. Lead with the middle finding in a design review: four of the six model tiers the document describes have no node allocated.</a:t>
             </a:r>
             <a:endParaRPr lang="en-US" dirty="0"/>
           </a:p>
@@ -997,7 +997,7 @@
                 <a:ea typeface="Arial" pitchFamily="34" charset="-122"/>
                 <a:cs typeface="Arial" pitchFamily="34" charset="-120"/>
               </a:rPr>
-              <a:t>How three GPUs was arrived at</a:t>
+              <a:t>Sizing FM + Change Management</a:t>
             </a:r>
             <a:endParaRPr lang="en-US" sz="2900" dirty="0"/>
           </a:p>
@@ -1036,7 +1036,7 @@
                 <a:ea typeface="Calibri" pitchFamily="34" charset="-122"/>
                 <a:cs typeface="Calibri" pitchFamily="34" charset="-120"/>
               </a:rPr>
-              <a:t>Vi AI-NOC · RAN fault management</a:t>
+              <a:t>Vi Network AI Platform</a:t>
             </a:r>
             <a:pPr indent="0" marL="0">
               <a:buNone/>
@@ -1050,7 +1050,7 @@
                 <a:ea typeface="Calibri" pitchFamily="34" charset="-122"/>
                 <a:cs typeface="Calibri" pitchFamily="34" charset="-120"/>
               </a:rPr>
-              <a:t>   ·   ~2M cells, ~10M alarms/day   ·   16 GuideLLM operating points; demand derived from the SoW</a:t>
+              <a:t>   ·   per the IBM SNOC TSD (20-08-26)   ·   15M alarms/day, H200 141GB, 3 model tiers</a:t>
             </a:r>
             <a:endParaRPr lang="en-US" sz="1150" dirty="0"/>
           </a:p>
@@ -1175,7 +1175,7 @@
                 <a:ea typeface="Arial" pitchFamily="34" charset="-122"/>
                 <a:cs typeface="Arial" pitchFamily="34" charset="-120"/>
               </a:rPr>
-              <a:t>FIXED — from the SoW</a:t>
+              <a:t>FIXED — stated in the TSD</a:t>
             </a:r>
             <a:endParaRPr lang="en-US" sz="850" dirty="0"/>
           </a:p>
@@ -1190,7 +1190,7 @@
         <p:spPr>
           <a:xfrm>
             <a:off x="722376" y="2029968"/>
-            <a:ext cx="3106826" cy="1325880"/>
+            <a:ext cx="3106826" cy="1920240"/>
           </a:xfrm>
           <a:prstGeom prst="rect">
             <a:avLst/>
@@ -1204,16 +1204,16 @@
           <a:p>
             <a:pPr marL="342900" indent="-342900">
               <a:lnSpc>
-                <a:spcPts val="1400"/>
+                <a:spcPts val="1300"/>
               </a:lnSpc>
               <a:spcAft>
-                <a:spcPts val="400"/>
+                <a:spcPts val="300"/>
               </a:spcAft>
               <a:buSzPct val="100000"/>
               <a:buChar char="•"/>
             </a:pPr>
             <a:r>
-              <a:rPr lang="en-US" sz="1050" dirty="0">
+              <a:rPr lang="en-US" sz="1000" dirty="0">
                 <a:solidFill>
                   <a:srgbClr val="3E453F"/>
                 </a:solidFill>
@@ -1221,23 +1221,23 @@
                 <a:ea typeface="Calibri" pitchFamily="34" charset="-122"/>
                 <a:cs typeface="Calibri" pitchFamily="34" charset="-120"/>
               </a:rPr>
-              <a:t>~2M cells · ~10M alarms/day · 70% RAN-linked</a:t>
-            </a:r>
-            <a:endParaRPr lang="en-US" sz="1050" dirty="0"/>
+              <a:t>15M alarms/day, 1M-node topology graph  (§12)</a:t>
+            </a:r>
+            <a:endParaRPr lang="en-US" sz="1000" dirty="0"/>
           </a:p>
           <a:p>
             <a:pPr marL="342900" indent="-342900">
               <a:lnSpc>
-                <a:spcPts val="1400"/>
+                <a:spcPts val="1300"/>
               </a:lnSpc>
               <a:spcAft>
-                <a:spcPts val="400"/>
+                <a:spcPts val="300"/>
               </a:spcAft>
               <a:buSzPct val="100000"/>
               <a:buChar char="•"/>
             </a:pPr>
             <a:r>
-              <a:rPr lang="en-US" sz="1050" dirty="0">
+              <a:rPr lang="en-US" sz="1000" dirty="0">
                 <a:solidFill>
                   <a:srgbClr val="3E453F"/>
                 </a:solidFill>
@@ -1245,23 +1245,23 @@
                 <a:ea typeface="Calibri" pitchFamily="34" charset="-122"/>
                 <a:cs typeface="Calibri" pitchFamily="34" charset="-120"/>
               </a:rPr>
-              <a:t>KPIs ≈285 GB/day · logs ≈30 GB/day</a:t>
-            </a:r>
-            <a:endParaRPr lang="en-US" sz="1050" dirty="0"/>
+              <a:t>52k batch / 5 min; 500k burst in &lt;180 s  (§12)</a:t>
+            </a:r>
+            <a:endParaRPr lang="en-US" sz="1000" dirty="0"/>
           </a:p>
           <a:p>
             <a:pPr marL="342900" indent="-342900">
               <a:lnSpc>
-                <a:spcPts val="1400"/>
+                <a:spcPts val="1300"/>
               </a:lnSpc>
               <a:spcAft>
-                <a:spcPts val="400"/>
+                <a:spcPts val="300"/>
               </a:spcAft>
               <a:buSzPct val="100000"/>
               <a:buChar char="•"/>
             </a:pPr>
             <a:r>
-              <a:rPr lang="en-US" sz="1050" dirty="0">
+              <a:rPr lang="en-US" sz="1000" dirty="0">
                 <a:solidFill>
                   <a:srgbClr val="3E453F"/>
                 </a:solidFill>
@@ -1269,23 +1269,23 @@
                 <a:ea typeface="Calibri" pitchFamily="34" charset="-122"/>
                 <a:cs typeface="Calibri" pitchFamily="34" charset="-120"/>
               </a:rPr>
-              <a:t>~9.2 TB logical, 2-week hot window</a:t>
-            </a:r>
-            <a:endParaRPr lang="en-US" sz="1050" dirty="0"/>
+              <a:t>H200 141GB, FP8 / MXFP4 on vLLM  (§12, §3.7)</a:t>
+            </a:r>
+            <a:endParaRPr lang="en-US" sz="1000" dirty="0"/>
           </a:p>
           <a:p>
             <a:pPr marL="342900" indent="-342900">
               <a:lnSpc>
-                <a:spcPts val="1400"/>
+                <a:spcPts val="1300"/>
               </a:lnSpc>
               <a:spcAft>
-                <a:spcPts val="400"/>
+                <a:spcPts val="300"/>
               </a:spcAft>
               <a:buSzPct val="100000"/>
               <a:buChar char="•"/>
             </a:pPr>
             <a:r>
-              <a:rPr lang="en-US" sz="1050" dirty="0">
+              <a:rPr lang="en-US" sz="1000" dirty="0">
                 <a:solidFill>
                   <a:srgbClr val="3E453F"/>
                 </a:solidFill>
@@ -1293,23 +1293,23 @@
                 <a:ea typeface="Calibri" pitchFamily="34" charset="-122"/>
                 <a:cs typeface="Calibri" pitchFamily="34" charset="-120"/>
               </a:rPr>
-              <a:t>Private / on-prem LLM endpoints only</a:t>
-            </a:r>
-            <a:endParaRPr lang="en-US" sz="1050" dirty="0"/>
+              <a:t>6 model tiers incl. VLM + E5  (§3.4.6, §3.7)</a:t>
+            </a:r>
+            <a:endParaRPr lang="en-US" sz="1000" dirty="0"/>
           </a:p>
           <a:p>
             <a:pPr marL="342900" indent="-342900">
               <a:lnSpc>
-                <a:spcPts val="1400"/>
+                <a:spcPts val="1300"/>
               </a:lnSpc>
               <a:spcAft>
-                <a:spcPts val="400"/>
+                <a:spcPts val="300"/>
               </a:spcAft>
               <a:buSzPct val="100000"/>
               <a:buChar char="•"/>
             </a:pPr>
             <a:r>
-              <a:rPr lang="en-US" sz="1050" dirty="0">
+              <a:rPr lang="en-US" sz="1000" dirty="0">
                 <a:solidFill>
                   <a:srgbClr val="3E453F"/>
                 </a:solidFill>
@@ -1317,9 +1317,57 @@
                 <a:ea typeface="Calibri" pitchFamily="34" charset="-122"/>
                 <a:cs typeface="Calibri" pitchFamily="34" charset="-120"/>
               </a:rPr>
-              <a:t>Human approval gate — no network change</a:t>
-            </a:r>
-            <a:endParaRPr lang="en-US" sz="1050" dirty="0"/>
+              <a:t>8 CHM agents, GUJ first → pan-India  (§6.8–6.13)</a:t>
+            </a:r>
+            <a:endParaRPr lang="en-US" sz="1000" dirty="0"/>
+          </a:p>
+          <a:p>
+            <a:pPr marL="342900" indent="-342900">
+              <a:lnSpc>
+                <a:spcPts val="1300"/>
+              </a:lnSpc>
+              <a:spcAft>
+                <a:spcPts val="300"/>
+              </a:spcAft>
+              <a:buSzPct val="100000"/>
+              <a:buChar char="•"/>
+            </a:pPr>
+            <a:r>
+              <a:rPr lang="en-US" sz="1000" dirty="0">
+                <a:solidFill>
+                  <a:srgbClr val="3E453F"/>
+                </a:solidFill>
+                <a:latin typeface="Calibri" pitchFamily="34" charset="0"/>
+                <a:ea typeface="Calibri" pitchFamily="34" charset="-122"/>
+                <a:cs typeface="Calibri" pitchFamily="34" charset="-120"/>
+              </a:rPr>
+              <a:t>Release docs quarterly / bi-annual  (§5.1)</a:t>
+            </a:r>
+            <a:endParaRPr lang="en-US" sz="1000" dirty="0"/>
+          </a:p>
+          <a:p>
+            <a:pPr marL="342900" indent="-342900">
+              <a:lnSpc>
+                <a:spcPts val="1300"/>
+              </a:lnSpc>
+              <a:spcAft>
+                <a:spcPts val="300"/>
+              </a:spcAft>
+              <a:buSzPct val="100000"/>
+              <a:buChar char="•"/>
+            </a:pPr>
+            <a:r>
+              <a:rPr lang="en-US" sz="1000" dirty="0">
+                <a:solidFill>
+                  <a:srgbClr val="3E453F"/>
+                </a:solidFill>
+                <a:latin typeface="Calibri" pitchFamily="34" charset="0"/>
+                <a:ea typeface="Calibri" pitchFamily="34" charset="-122"/>
+                <a:cs typeface="Calibri" pitchFamily="34" charset="-120"/>
+              </a:rPr>
+              <a:t>Max 5 concurrent changes per circle  (§6.11)</a:t>
+            </a:r>
+            <a:endParaRPr lang="en-US" sz="1000" dirty="0"/>
           </a:p>
         </p:txBody>
       </p:sp>
@@ -1331,7 +1379,7 @@
         </p:nvSpPr>
         <p:spPr>
           <a:xfrm>
-            <a:off x="722376" y="3474720"/>
+            <a:off x="722376" y="4023360"/>
             <a:ext cx="3106826" cy="182880"/>
           </a:xfrm>
           <a:prstGeom prst="rect">
@@ -1370,8 +1418,8 @@
         </p:nvSpPr>
         <p:spPr>
           <a:xfrm>
-            <a:off x="722376" y="3694176"/>
-            <a:ext cx="3106826" cy="1600200"/>
+            <a:off x="722376" y="4242816"/>
+            <a:ext cx="3106826" cy="1280160"/>
           </a:xfrm>
           <a:prstGeom prst="rect">
             <a:avLst/>
@@ -1385,16 +1433,16 @@
           <a:p>
             <a:pPr marL="342900" indent="-342900">
               <a:lnSpc>
-                <a:spcPts val="1400"/>
+                <a:spcPts val="1300"/>
               </a:lnSpc>
               <a:spcAft>
-                <a:spcPts val="400"/>
+                <a:spcPts val="300"/>
               </a:spcAft>
               <a:buSzPct val="100000"/>
               <a:buChar char="•"/>
             </a:pPr>
             <a:r>
-              <a:rPr lang="en-US" sz="1050" dirty="0">
+              <a:rPr lang="en-US" sz="1000" dirty="0">
                 <a:solidFill>
                   <a:srgbClr val="3E453F"/>
                 </a:solidFill>
@@ -1402,23 +1450,23 @@
                 <a:ea typeface="Calibri" pitchFamily="34" charset="-122"/>
                 <a:cs typeface="Calibri" pitchFamily="34" charset="-120"/>
               </a:rPr>
-              <a:t>90% dedup / flap suppression → 700k/day</a:t>
-            </a:r>
-            <a:endParaRPr lang="en-US" sz="1050" dirty="0"/>
+              <a:t>70% RAN-linked → 52.5k incidents/day</a:t>
+            </a:r>
+            <a:endParaRPr lang="en-US" sz="1000" dirty="0"/>
           </a:p>
           <a:p>
             <a:pPr marL="342900" indent="-342900">
               <a:lnSpc>
-                <a:spcPts val="1400"/>
+                <a:spcPts val="1300"/>
               </a:lnSpc>
               <a:spcAft>
-                <a:spcPts val="400"/>
+                <a:spcPts val="300"/>
               </a:spcAft>
               <a:buSzPct val="100000"/>
               <a:buChar char="•"/>
             </a:pPr>
             <a:r>
-              <a:rPr lang="en-US" sz="1050" dirty="0">
+              <a:rPr lang="en-US" sz="1000" dirty="0">
                 <a:solidFill>
                   <a:srgbClr val="3E453F"/>
                 </a:solidFill>
@@ -1426,23 +1474,23 @@
                 <a:ea typeface="Calibri" pitchFamily="34" charset="-122"/>
                 <a:cs typeface="Calibri" pitchFamily="34" charset="-120"/>
               </a:rPr>
-              <a:t>20 events per incident → 35k UAI/day</a:t>
-            </a:r>
-            <a:endParaRPr lang="en-US" sz="1050" dirty="0"/>
+              <a:t>35% of incidents earn a GenAI RFO</a:t>
+            </a:r>
+            <a:endParaRPr lang="en-US" sz="1000" dirty="0"/>
           </a:p>
           <a:p>
             <a:pPr marL="342900" indent="-342900">
               <a:lnSpc>
-                <a:spcPts val="1400"/>
+                <a:spcPts val="1300"/>
               </a:lnSpc>
               <a:spcAft>
-                <a:spcPts val="400"/>
+                <a:spcPts val="300"/>
               </a:spcAft>
               <a:buSzPct val="100000"/>
               <a:buChar char="•"/>
             </a:pPr>
             <a:r>
-              <a:rPr lang="en-US" sz="1050" dirty="0">
+              <a:rPr lang="en-US" sz="1000" dirty="0">
                 <a:solidFill>
                   <a:srgbClr val="3E453F"/>
                 </a:solidFill>
@@ -1450,23 +1498,23 @@
                 <a:ea typeface="Calibri" pitchFamily="34" charset="-122"/>
                 <a:cs typeface="Calibri" pitchFamily="34" charset="-120"/>
               </a:rPr>
-              <a:t>35% of incidents earn a GenAI RFO</a:t>
-            </a:r>
-            <a:endParaRPr lang="en-US" sz="1050" dirty="0"/>
+              <a:t>RFO = 3 turns × 6k in / 400 out tokens</a:t>
+            </a:r>
+            <a:endParaRPr lang="en-US" sz="1000" dirty="0"/>
           </a:p>
           <a:p>
             <a:pPr marL="342900" indent="-342900">
               <a:lnSpc>
-                <a:spcPts val="1400"/>
+                <a:spcPts val="1300"/>
               </a:lnSpc>
               <a:spcAft>
-                <a:spcPts val="400"/>
+                <a:spcPts val="300"/>
               </a:spcAft>
               <a:buSzPct val="100000"/>
               <a:buChar char="•"/>
             </a:pPr>
             <a:r>
-              <a:rPr lang="en-US" sz="1050" dirty="0">
+              <a:rPr lang="en-US" sz="1000" dirty="0">
                 <a:solidFill>
                   <a:srgbClr val="3E453F"/>
                 </a:solidFill>
@@ -1474,23 +1522,23 @@
                 <a:ea typeface="Calibri" pitchFamily="34" charset="-122"/>
                 <a:cs typeface="Calibri" pitchFamily="34" charset="-120"/>
               </a:rPr>
-              <a:t>RFO = 3 turns × 6k in / 400 out tokens</a:t>
-            </a:r>
-            <a:endParaRPr lang="en-US" sz="1050" dirty="0"/>
+              <a:t>CHM: 100 CRs/day GUJ → 1,250 pan-India</a:t>
+            </a:r>
+            <a:endParaRPr lang="en-US" sz="1000" dirty="0"/>
           </a:p>
           <a:p>
             <a:pPr marL="342900" indent="-342900">
               <a:lnSpc>
-                <a:spcPts val="1400"/>
+                <a:spcPts val="1300"/>
               </a:lnSpc>
               <a:spcAft>
-                <a:spcPts val="400"/>
+                <a:spcPts val="300"/>
               </a:spcAft>
               <a:buSzPct val="100000"/>
               <a:buChar char="•"/>
             </a:pPr>
             <a:r>
-              <a:rPr lang="en-US" sz="1050" dirty="0">
+              <a:rPr lang="en-US" sz="1000" dirty="0">
                 <a:solidFill>
                   <a:srgbClr val="3E453F"/>
                 </a:solidFill>
@@ -1498,23 +1546,23 @@
                 <a:ea typeface="Calibri" pitchFamily="34" charset="-122"/>
                 <a:cs typeface="Calibri" pitchFamily="34" charset="-120"/>
               </a:rPr>
-              <a:t>Peak hour = 10% of the day → 2.4×</a:t>
-            </a:r>
-            <a:endParaRPr lang="en-US" sz="1050" dirty="0"/>
+              <a:t>Release drop = 12 docs GUJ → 150 national</a:t>
+            </a:r>
+            <a:endParaRPr lang="en-US" sz="1000" dirty="0"/>
           </a:p>
           <a:p>
             <a:pPr marL="342900" indent="-342900">
               <a:lnSpc>
-                <a:spcPts val="1400"/>
+                <a:spcPts val="1300"/>
               </a:lnSpc>
               <a:spcAft>
-                <a:spcPts val="400"/>
+                <a:spcPts val="300"/>
               </a:spcAft>
               <a:buSzPct val="100000"/>
               <a:buChar char="•"/>
             </a:pPr>
             <a:r>
-              <a:rPr lang="en-US" sz="1050" dirty="0">
+              <a:rPr lang="en-US" sz="1000" dirty="0">
                 <a:solidFill>
                   <a:srgbClr val="3E453F"/>
                 </a:solidFill>
@@ -1522,9 +1570,9 @@
                 <a:ea typeface="Calibri" pitchFamily="34" charset="-122"/>
                 <a:cs typeface="Calibri" pitchFamily="34" charset="-120"/>
               </a:rPr>
-              <a:t>8k tickets/day written to HPSM</a:t>
-            </a:r>
-            <a:endParaRPr lang="en-US" sz="1050" dirty="0"/>
+              <a:t>Peak hour = 10% of the day → 2.4×</a:t>
+            </a:r>
+            <a:endParaRPr lang="en-US" sz="1000" dirty="0"/>
           </a:p>
         </p:txBody>
       </p:sp>
@@ -1537,11 +1585,11 @@
         <p:spPr>
           <a:xfrm>
             <a:off x="722376" y="5458968"/>
-            <a:ext cx="3106826" cy="658368"/>
+            <a:ext cx="3106826" cy="713232"/>
           </a:xfrm>
           <a:prstGeom prst="roundRect">
             <a:avLst>
-              <a:gd name="adj" fmla="val 5556"/>
+              <a:gd name="adj" fmla="val 5128"/>
             </a:avLst>
           </a:prstGeom>
           <a:solidFill>
@@ -1559,7 +1607,7 @@
         <p:spPr>
           <a:xfrm>
             <a:off x="850392" y="5541264"/>
-            <a:ext cx="2850794" cy="502920"/>
+            <a:ext cx="2850794" cy="566928"/>
           </a:xfrm>
           <a:prstGeom prst="rect">
             <a:avLst/>
@@ -1586,7 +1634,7 @@
                 <a:ea typeface="Calibri" pitchFamily="34" charset="-122"/>
                 <a:cs typeface="Calibri" pitchFamily="34" charset="-120"/>
               </a:rPr>
-              <a:t>Every assumed value is a dial. </a:t>
+              <a:t>Alarms moved 10M → 15M/day. </a:t>
             </a:r>
             <a:pPr indent="0" marL="0">
               <a:lnSpc>
@@ -1603,7 +1651,7 @@
                 <a:ea typeface="Calibri" pitchFamily="34" charset="-122"/>
                 <a:cs typeface="Calibri" pitchFamily="34" charset="-120"/>
               </a:rPr>
-              <a:t>None of them changes the measured capacity — only how much of it we need.</a:t>
+              <a:t>The TSD supersedes the August one-slide. That +50% is what pushes the heavy tier to 2.06 GPU.</a:t>
             </a:r>
             <a:endParaRPr lang="en-US" sz="1000" dirty="0"/>
           </a:p>
@@ -1767,7 +1815,7 @@
                 <a:ea typeface="Arial" pitchFamily="34" charset="-122"/>
                 <a:cs typeface="Arial" pitchFamily="34" charset="-120"/>
               </a:rPr>
-              <a:t>One shared pool, not two</a:t>
+              <a:t>Route by tier, not by agent</a:t>
             </a:r>
             <a:endParaRPr lang="en-US" sz="1100" dirty="0"/>
           </a:p>
@@ -1809,7 +1857,7 @@
                 <a:ea typeface="Calibri" pitchFamily="34" charset="-122"/>
                 <a:cs typeface="Calibri" pitchFamily="34" charset="-120"/>
               </a:rPr>
-              <a:t>Chat is latency-shaped but only 0.24 GPU of load. Same model, one deployment, priority scheduling.</a:t>
+              <a:t>The TSD already tiers: 120b for reasoning, Gemma for extraction, Llama 8B for MOPs. Size each, then add fractions.</a:t>
             </a:r>
             <a:endParaRPr lang="en-US" sz="950" dirty="0"/>
           </a:p>
@@ -1823,7 +1871,7 @@
         </p:nvSpPr>
         <p:spPr>
           <a:xfrm>
-            <a:off x="4524146" y="2624328"/>
+            <a:off x="4524146" y="2587752"/>
             <a:ext cx="237744" cy="201168"/>
           </a:xfrm>
           <a:prstGeom prst="rect">
@@ -1862,7 +1910,7 @@
         </p:nvSpPr>
         <p:spPr>
           <a:xfrm>
-            <a:off x="4798466" y="2610612"/>
+            <a:off x="4798466" y="2574036"/>
             <a:ext cx="2832506" cy="201168"/>
           </a:xfrm>
           <a:prstGeom prst="rect">
@@ -1887,7 +1935,7 @@
                 <a:ea typeface="Arial" pitchFamily="34" charset="-122"/>
                 <a:cs typeface="Arial" pitchFamily="34" charset="-120"/>
               </a:rPr>
-              <a:t>Size on goodput, not peak throughput</a:t>
+              <a:t>One SLO gate per tier</a:t>
             </a:r>
             <a:endParaRPr lang="en-US" sz="1100" dirty="0"/>
           </a:p>
@@ -1901,7 +1949,7 @@
         </p:nvSpPr>
         <p:spPr>
           <a:xfrm>
-            <a:off x="4798466" y="2816352"/>
+            <a:off x="4798466" y="2779776"/>
             <a:ext cx="2832506" cy="457200"/>
           </a:xfrm>
           <a:prstGeom prst="rect">
@@ -1929,7 +1977,7 @@
                 <a:ea typeface="Calibri" pitchFamily="34" charset="-122"/>
                 <a:cs typeface="Calibri" pitchFamily="34" charset="-120"/>
               </a:rPr>
-              <a:t>Capacity = throughput at the last concurrency whose p95 meets the SLO. RFO: ≤30 s. Chat: TTFT ≤1.5 s, ITL ≤25 ms.</a:t>
+              <a:t>Heavy: latency ≤30 s. Fast: TTFT ≤1.5 s, ITL ≤25 ms. MOP: ≤120 s — batch, it only has to land in the change window.</a:t>
             </a:r>
             <a:endParaRPr lang="en-US" sz="950" dirty="0"/>
           </a:p>
@@ -1943,7 +1991,7 @@
         </p:nvSpPr>
         <p:spPr>
           <a:xfrm>
-            <a:off x="4524146" y="3419856"/>
+            <a:off x="4524146" y="3346704"/>
             <a:ext cx="237744" cy="201168"/>
           </a:xfrm>
           <a:prstGeom prst="rect">
@@ -1982,7 +2030,7 @@
         </p:nvSpPr>
         <p:spPr>
           <a:xfrm>
-            <a:off x="4798466" y="3406140"/>
+            <a:off x="4798466" y="3332988"/>
             <a:ext cx="2832506" cy="201168"/>
           </a:xfrm>
           <a:prstGeom prst="rect">
@@ -2007,7 +2055,7 @@
                 <a:ea typeface="Arial" pitchFamily="34" charset="-122"/>
                 <a:cs typeface="Arial" pitchFamily="34" charset="-120"/>
               </a:rPr>
-              <a:t>Three, because of N+1</a:t>
+              <a:t>Size for the target, not phase 1</a:t>
             </a:r>
             <a:endParaRPr lang="en-US" sz="1100" dirty="0"/>
           </a:p>
@@ -2021,7 +2069,7 @@
         </p:nvSpPr>
         <p:spPr>
           <a:xfrm>
-            <a:off x="4798466" y="3611880"/>
+            <a:off x="4798466" y="3538728"/>
             <a:ext cx="2832506" cy="457200"/>
           </a:xfrm>
           <a:prstGeom prst="rect">
@@ -2049,7 +2097,7 @@
                 <a:ea typeface="Calibri" pitchFamily="34" charset="-122"/>
                 <a:cs typeface="Calibri" pitchFamily="34" charset="-120"/>
               </a:rPr>
-              <a:t>Peak needs 1.37 GPU. Two would meet the SLO; three is the smallest fleet where a GPU can fail at peak hour and still hold.</a:t>
+              <a:t>FM is pan-India from day one; CHM is GUJ first, pan-India after. The pool is bought once, so it is sized on the target state.</a:t>
             </a:r>
             <a:endParaRPr lang="en-US" sz="950" dirty="0"/>
           </a:p>
@@ -2063,7 +2111,7 @@
         </p:nvSpPr>
         <p:spPr>
           <a:xfrm>
-            <a:off x="4524146" y="4215384"/>
+            <a:off x="4524146" y="4105656"/>
             <a:ext cx="237744" cy="201168"/>
           </a:xfrm>
           <a:prstGeom prst="rect">
@@ -2102,7 +2150,7 @@
         </p:nvSpPr>
         <p:spPr>
           <a:xfrm>
-            <a:off x="4798466" y="4201668"/>
+            <a:off x="4798466" y="4091940"/>
             <a:ext cx="2832506" cy="201168"/>
           </a:xfrm>
           <a:prstGeom prst="rect">
@@ -2127,7 +2175,7 @@
                 <a:ea typeface="Arial" pitchFamily="34" charset="-122"/>
                 <a:cs typeface="Arial" pitchFamily="34" charset="-120"/>
               </a:rPr>
-              <a:t>Model must fit a single GPU</a:t>
+              <a:t>Treat MOP generation as a burst</a:t>
             </a:r>
             <a:endParaRPr lang="en-US" sz="1100" dirty="0"/>
           </a:p>
@@ -2141,7 +2189,7 @@
         </p:nvSpPr>
         <p:spPr>
           <a:xfrm>
-            <a:off x="4798466" y="4407408"/>
+            <a:off x="4798466" y="4297680"/>
             <a:ext cx="2832506" cy="457200"/>
           </a:xfrm>
           <a:prstGeom prst="rect">
@@ -2169,7 +2217,7 @@
                 <a:ea typeface="Calibri" pitchFamily="34" charset="-122"/>
                 <a:cs typeface="Calibri" pitchFamily="34" charset="-120"/>
               </a:rPr>
-              <a:t>120B MoE at MXFP4 ≈ 62 GB — no TP, failure domain of one GPU, and 21–30 concurrent 6.4k requests of KV headroom.</a:t>
+              <a:t>Release docs are quarterly (§5.1): 150 docs → 2,250 MOPs in one window. A daily mean hides the only CHM spike.</a:t>
             </a:r>
             <a:endParaRPr lang="en-US" sz="950" dirty="0"/>
           </a:p>
@@ -2183,7 +2231,7 @@
         </p:nvSpPr>
         <p:spPr>
           <a:xfrm>
-            <a:off x="4524146" y="5010912"/>
+            <a:off x="4524146" y="4864608"/>
             <a:ext cx="237744" cy="201168"/>
           </a:xfrm>
           <a:prstGeom prst="rect">
@@ -2222,7 +2270,7 @@
         </p:nvSpPr>
         <p:spPr>
           <a:xfrm>
-            <a:off x="4798466" y="4997196"/>
+            <a:off x="4798466" y="4850892"/>
             <a:ext cx="2832506" cy="201168"/>
           </a:xfrm>
           <a:prstGeom prst="rect">
@@ -2247,7 +2295,7 @@
                 <a:ea typeface="Arial" pitchFamily="34" charset="-122"/>
                 <a:cs typeface="Arial" pitchFamily="34" charset="-120"/>
               </a:rPr>
-              <a:t>Single site, for now</a:t>
+              <a:t>Co-locate E5, do not dedicate it</a:t>
             </a:r>
             <a:endParaRPr lang="en-US" sz="1100" dirty="0"/>
           </a:p>
@@ -2261,7 +2309,7 @@
         </p:nvSpPr>
         <p:spPr>
           <a:xfrm>
-            <a:off x="4798466" y="5202936"/>
+            <a:off x="4798466" y="5056632"/>
             <a:ext cx="2832506" cy="457200"/>
           </a:xfrm>
           <a:prstGeom prst="rect">
@@ -2289,7 +2337,7 @@
                 <a:ea typeface="Calibri" pitchFamily="34" charset="-122"/>
                 <a:cs typeface="Calibri" pitchFamily="34" charset="-120"/>
               </a:rPr>
-              <a:t>The one real loss. Manual NOC process is the fallback — but that expires when headcount comes out, so fund site 2 before then.</a:t>
+              <a:t>A 0.7 GB encoder at 0.03% utilisation does not need a 141 GB card. Freeing it makes all four cards heavy-capable.</a:t>
             </a:r>
             <a:endParaRPr lang="en-US" sz="950" dirty="0"/>
           </a:p>
@@ -2303,7 +2351,7 @@
         </p:nvSpPr>
         <p:spPr>
           <a:xfrm>
-            <a:off x="4524146" y="5806440"/>
+            <a:off x="4524146" y="5623560"/>
             <a:ext cx="237744" cy="201168"/>
           </a:xfrm>
           <a:prstGeom prst="rect">
@@ -2342,7 +2390,7 @@
         </p:nvSpPr>
         <p:spPr>
           <a:xfrm>
-            <a:off x="4798466" y="5792724"/>
+            <a:off x="4798466" y="5609844"/>
             <a:ext cx="2832506" cy="201168"/>
           </a:xfrm>
           <a:prstGeom prst="rect">
@@ -2367,7 +2415,7 @@
                 <a:ea typeface="Arial" pitchFamily="34" charset="-122"/>
                 <a:cs typeface="Arial" pitchFamily="34" charset="-120"/>
               </a:rPr>
-              <a:t>Measure the denominator</a:t>
+              <a:t>Measure on H200, not H100</a:t>
             </a:r>
             <a:endParaRPr lang="en-US" sz="1100" dirty="0"/>
           </a:p>
@@ -2381,8 +2429,8 @@
         </p:nvSpPr>
         <p:spPr>
           <a:xfrm>
-            <a:off x="4798466" y="5998464"/>
-            <a:ext cx="2832506" cy="310896"/>
+            <a:off x="4798466" y="5815584"/>
+            <a:ext cx="2832506" cy="457200"/>
           </a:xfrm>
           <a:prstGeom prst="rect">
             <a:avLst/>
@@ -2409,7 +2457,7 @@
                 <a:ea typeface="Calibri" pitchFamily="34" charset="-122"/>
                 <a:cs typeface="Calibri" pitchFamily="34" charset="-120"/>
               </a:rPr>
-              <a:t>16-point GuideLLM sweep, including a mixed-traffic run that validates the shared pool to within 3.8%.</a:t>
+              <a:t>4.8 TB/s vs 3.35 — decode is bandwidth-bound, so ITL improves ~1.43×. Capacity is 7,008 tok/s, not 6,066.</a:t>
             </a:r>
             <a:endParaRPr lang="en-US" sz="950" dirty="0"/>
           </a:p>
@@ -2537,7 +2585,7 @@
                 <a:ea typeface="Calibri" pitchFamily="34" charset="-122"/>
                 <a:cs typeface="Calibri" pitchFamily="34" charset="-120"/>
               </a:rPr>
-              <a:t>Three GPUs hold until one of these crosses. Each moves alone, N+1 kept.</a:t>
+              <a:t>Measured on one H200 141GB, gated per tier. GPU column is what pan-India peak demand needs.</a:t>
             </a:r>
             <a:endParaRPr lang="en-US" sz="950" dirty="0"/>
           </a:p>
@@ -2551,8 +2599,8 @@
         </p:nvSpPr>
         <p:spPr>
           <a:xfrm>
-            <a:off x="9843821" y="2194560"/>
-            <a:ext cx="713232" cy="164592"/>
+            <a:off x="9660941" y="2194560"/>
+            <a:ext cx="603504" cy="164592"/>
           </a:xfrm>
           <a:prstGeom prst="rect">
             <a:avLst/>
@@ -2576,7 +2624,7 @@
                 <a:ea typeface="Arial" pitchFamily="34" charset="-122"/>
                 <a:cs typeface="Arial" pitchFamily="34" charset="-120"/>
               </a:rPr>
-              <a:t>MODELLED</a:t>
+              <a:t>SHAPE</a:t>
             </a:r>
             <a:endParaRPr lang="en-US" sz="750" dirty="0"/>
           </a:p>
@@ -2590,8 +2638,8 @@
         </p:nvSpPr>
         <p:spPr>
           <a:xfrm>
-            <a:off x="10575341" y="2194560"/>
-            <a:ext cx="893978" cy="164592"/>
+            <a:off x="10301021" y="2194560"/>
+            <a:ext cx="694944" cy="164592"/>
           </a:xfrm>
           <a:prstGeom prst="rect">
             <a:avLst/>
@@ -2609,13 +2657,13 @@
             <a:r>
               <a:rPr lang="en-US" sz="750" b="1" spc="80" kern="0" dirty="0">
                 <a:solidFill>
-                  <a:srgbClr val="B04A12"/>
+                  <a:srgbClr val="6A726B"/>
                 </a:solidFill>
                 <a:latin typeface="Arial" pitchFamily="34" charset="0"/>
                 <a:ea typeface="Arial" pitchFamily="34" charset="-122"/>
                 <a:cs typeface="Arial" pitchFamily="34" charset="-120"/>
               </a:rPr>
-              <a:t>CEILING</a:t>
+              <a:t>TOK/S</a:t>
             </a:r>
             <a:endParaRPr lang="en-US" sz="750" dirty="0"/>
           </a:p>
@@ -2629,8 +2677,47 @@
         </p:nvSpPr>
         <p:spPr>
           <a:xfrm>
+            <a:off x="11032541" y="2194560"/>
+            <a:ext cx="436778" cy="164592"/>
+          </a:xfrm>
+          <a:prstGeom prst="rect">
+            <a:avLst/>
+          </a:prstGeom>
+          <a:noFill/>
+          <a:ln/>
+        </p:spPr>
+        <p:txBody>
+          <a:bodyPr wrap="square" lIns="0" tIns="0" rIns="0" bIns="0" rtlCol="0" anchor="ctr"/>
+          <a:lstStyle/>
+          <a:p>
+            <a:pPr algn="r" indent="0" marL="0">
+              <a:buNone/>
+            </a:pPr>
+            <a:r>
+              <a:rPr lang="en-US" sz="750" b="1" spc="80" kern="0" dirty="0">
+                <a:solidFill>
+                  <a:srgbClr val="B04A12"/>
+                </a:solidFill>
+                <a:latin typeface="Arial" pitchFamily="34" charset="0"/>
+                <a:ea typeface="Arial" pitchFamily="34" charset="-122"/>
+                <a:cs typeface="Arial" pitchFamily="34" charset="-120"/>
+              </a:rPr>
+              <a:t>GPU</a:t>
+            </a:r>
+            <a:endParaRPr lang="en-US" sz="750" dirty="0"/>
+          </a:p>
+        </p:txBody>
+      </p:sp>
+      <p:sp>
+        <p:nvSpPr>
+          <p:cNvPr id="41" name="Text 39"/>
+          <p:cNvSpPr txBox="1"/>
+          <p:nvPr/>
+        </p:nvSpPr>
+        <p:spPr>
+          <a:xfrm>
             <a:off x="8362493" y="2414016"/>
-            <a:ext cx="1444752" cy="219456"/>
+            <a:ext cx="1261872" cy="219456"/>
           </a:xfrm>
           <a:prstGeom prst="rect">
             <a:avLst/>
@@ -2654,7 +2741,7 @@
                 <a:ea typeface="Calibri" pitchFamily="34" charset="-122"/>
                 <a:cs typeface="Calibri" pitchFamily="34" charset="-120"/>
               </a:rPr>
-              <a:t>RFO context, tokens</a:t>
+              <a:t>heavy · gpt-oss-120b</a:t>
             </a:r>
             <a:endParaRPr lang="en-US" sz="950" dirty="0"/>
           </a:p>
@@ -2662,14 +2749,14 @@
       </p:sp>
       <p:sp>
         <p:nvSpPr>
-          <p:cNvPr id="41" name="Text 39"/>
-          <p:cNvSpPr txBox="1"/>
-          <p:nvPr/>
-        </p:nvSpPr>
-        <p:spPr>
-          <a:xfrm>
-            <a:off x="9843821" y="2414016"/>
-            <a:ext cx="713232" cy="219456"/>
+          <p:cNvPr id="42" name="Text 40"/>
+          <p:cNvSpPr txBox="1"/>
+          <p:nvPr/>
+        </p:nvSpPr>
+        <p:spPr>
+          <a:xfrm>
+            <a:off x="9660941" y="2414016"/>
+            <a:ext cx="603504" cy="219456"/>
           </a:xfrm>
           <a:prstGeom prst="rect">
             <a:avLst/>
@@ -2685,7 +2772,7 @@
               <a:buNone/>
             </a:pPr>
             <a:r>
-              <a:rPr lang="en-US" sz="900" dirty="0">
+              <a:rPr lang="en-US" sz="850" dirty="0">
                 <a:solidFill>
                   <a:srgbClr val="6A726B"/>
                 </a:solidFill>
@@ -2693,22 +2780,22 @@
                 <a:ea typeface="Courier New" pitchFamily="34" charset="-122"/>
                 <a:cs typeface="Courier New" pitchFamily="34" charset="-120"/>
               </a:rPr>
-              <a:t>6,000</a:t>
-            </a:r>
-            <a:endParaRPr lang="en-US" sz="900" dirty="0"/>
-          </a:p>
-        </p:txBody>
-      </p:sp>
-      <p:sp>
-        <p:nvSpPr>
-          <p:cNvPr id="42" name="Text 40"/>
-          <p:cNvSpPr txBox="1"/>
-          <p:nvPr/>
-        </p:nvSpPr>
-        <p:spPr>
-          <a:xfrm>
-            <a:off x="10575341" y="2414016"/>
-            <a:ext cx="893978" cy="219456"/>
+              <a:t>6k/400</a:t>
+            </a:r>
+            <a:endParaRPr lang="en-US" sz="850" dirty="0"/>
+          </a:p>
+        </p:txBody>
+      </p:sp>
+      <p:sp>
+        <p:nvSpPr>
+          <p:cNvPr id="43" name="Text 41"/>
+          <p:cNvSpPr txBox="1"/>
+          <p:nvPr/>
+        </p:nvSpPr>
+        <p:spPr>
+          <a:xfrm>
+            <a:off x="10301021" y="2414016"/>
+            <a:ext cx="694944" cy="219456"/>
           </a:xfrm>
           <a:prstGeom prst="rect">
             <a:avLst/>
@@ -2724,15 +2811,54 @@
               <a:buNone/>
             </a:pPr>
             <a:r>
-              <a:rPr lang="en-US" sz="1000" b="1" dirty="0">
-                <a:solidFill>
-                  <a:srgbClr val="B04A12"/>
+              <a:rPr lang="en-US" sz="950" dirty="0">
+                <a:solidFill>
+                  <a:srgbClr val="3E453F"/>
                 </a:solidFill>
                 <a:latin typeface="Courier New" pitchFamily="34" charset="0"/>
                 <a:ea typeface="Courier New" pitchFamily="34" charset="-122"/>
                 <a:cs typeface="Courier New" pitchFamily="34" charset="-120"/>
               </a:rPr>
-              <a:t>9,640</a:t>
+              <a:t>7,008</a:t>
+            </a:r>
+            <a:endParaRPr lang="en-US" sz="950" dirty="0"/>
+          </a:p>
+        </p:txBody>
+      </p:sp>
+      <p:sp>
+        <p:nvSpPr>
+          <p:cNvPr id="44" name="Text 42"/>
+          <p:cNvSpPr txBox="1"/>
+          <p:nvPr/>
+        </p:nvSpPr>
+        <p:spPr>
+          <a:xfrm>
+            <a:off x="11032541" y="2414016"/>
+            <a:ext cx="436778" cy="219456"/>
+          </a:xfrm>
+          <a:prstGeom prst="rect">
+            <a:avLst/>
+          </a:prstGeom>
+          <a:noFill/>
+          <a:ln/>
+        </p:spPr>
+        <p:txBody>
+          <a:bodyPr wrap="square" lIns="0" tIns="0" rIns="0" bIns="0" rtlCol="0" anchor="ctr"/>
+          <a:lstStyle/>
+          <a:p>
+            <a:pPr algn="r" indent="0" marL="0">
+              <a:buNone/>
+            </a:pPr>
+            <a:r>
+              <a:rPr lang="en-US" sz="1000" b="1" dirty="0">
+                <a:solidFill>
+                  <a:srgbClr val="B04A12"/>
+                </a:solidFill>
+                <a:latin typeface="Courier New" pitchFamily="34" charset="0"/>
+                <a:ea typeface="Courier New" pitchFamily="34" charset="-122"/>
+                <a:cs typeface="Courier New" pitchFamily="34" charset="-120"/>
+              </a:rPr>
+              <a:t>2.06</a:t>
             </a:r>
             <a:endParaRPr lang="en-US" sz="1000" dirty="0"/>
           </a:p>
@@ -2740,14 +2866,14 @@
       </p:sp>
       <p:sp>
         <p:nvSpPr>
-          <p:cNvPr id="43" name="Text 41"/>
-          <p:cNvSpPr txBox="1"/>
-          <p:nvPr/>
-        </p:nvSpPr>
-        <p:spPr>
-          <a:xfrm>
-            <a:off x="8362493" y="2670048"/>
-            <a:ext cx="1444752" cy="219456"/>
+          <p:cNvPr id="45" name="Text 43"/>
+          <p:cNvSpPr txBox="1"/>
+          <p:nvPr/>
+        </p:nvSpPr>
+        <p:spPr>
+          <a:xfrm>
+            <a:off x="8362493" y="2688336"/>
+            <a:ext cx="1261872" cy="219456"/>
           </a:xfrm>
           <a:prstGeom prst="rect">
             <a:avLst/>
@@ -2771,7 +2897,7 @@
                 <a:ea typeface="Calibri" pitchFamily="34" charset="-122"/>
                 <a:cs typeface="Calibri" pitchFamily="34" charset="-120"/>
               </a:rPr>
-              <a:t>Incidents per day</a:t>
+              <a:t>fast · Gemma 4 26B</a:t>
             </a:r>
             <a:endParaRPr lang="en-US" sz="950" dirty="0"/>
           </a:p>
@@ -2779,14 +2905,14 @@
       </p:sp>
       <p:sp>
         <p:nvSpPr>
-          <p:cNvPr id="44" name="Text 42"/>
-          <p:cNvSpPr txBox="1"/>
-          <p:nvPr/>
-        </p:nvSpPr>
-        <p:spPr>
-          <a:xfrm>
-            <a:off x="9843821" y="2670048"/>
-            <a:ext cx="713232" cy="219456"/>
+          <p:cNvPr id="46" name="Text 44"/>
+          <p:cNvSpPr txBox="1"/>
+          <p:nvPr/>
+        </p:nvSpPr>
+        <p:spPr>
+          <a:xfrm>
+            <a:off x="9660941" y="2688336"/>
+            <a:ext cx="603504" cy="219456"/>
           </a:xfrm>
           <a:prstGeom prst="rect">
             <a:avLst/>
@@ -2802,7 +2928,7 @@
               <a:buNone/>
             </a:pPr>
             <a:r>
-              <a:rPr lang="en-US" sz="900" dirty="0">
+              <a:rPr lang="en-US" sz="850" dirty="0">
                 <a:solidFill>
                   <a:srgbClr val="6A726B"/>
                 </a:solidFill>
@@ -2810,22 +2936,22 @@
                 <a:ea typeface="Courier New" pitchFamily="34" charset="-122"/>
                 <a:cs typeface="Courier New" pitchFamily="34" charset="-120"/>
               </a:rPr>
-              <a:t>35,000</a:t>
-            </a:r>
-            <a:endParaRPr lang="en-US" sz="900" dirty="0"/>
-          </a:p>
-        </p:txBody>
-      </p:sp>
-      <p:sp>
-        <p:nvSpPr>
-          <p:cNvPr id="45" name="Text 43"/>
-          <p:cNvSpPr txBox="1"/>
-          <p:nvPr/>
-        </p:nvSpPr>
-        <p:spPr>
-          <a:xfrm>
-            <a:off x="10575341" y="2670048"/>
-            <a:ext cx="893978" cy="219456"/>
+              <a:t>1.5k/200</a:t>
+            </a:r>
+            <a:endParaRPr lang="en-US" sz="850" dirty="0"/>
+          </a:p>
+        </p:txBody>
+      </p:sp>
+      <p:sp>
+        <p:nvSpPr>
+          <p:cNvPr id="47" name="Text 45"/>
+          <p:cNvSpPr txBox="1"/>
+          <p:nvPr/>
+        </p:nvSpPr>
+        <p:spPr>
+          <a:xfrm>
+            <a:off x="10301021" y="2688336"/>
+            <a:ext cx="694944" cy="219456"/>
           </a:xfrm>
           <a:prstGeom prst="rect">
             <a:avLst/>
@@ -2841,15 +2967,54 @@
               <a:buNone/>
             </a:pPr>
             <a:r>
-              <a:rPr lang="en-US" sz="1000" b="1" dirty="0">
-                <a:solidFill>
-                  <a:srgbClr val="171A18"/>
+              <a:rPr lang="en-US" sz="950" dirty="0">
+                <a:solidFill>
+                  <a:srgbClr val="3E453F"/>
                 </a:solidFill>
                 <a:latin typeface="Courier New" pitchFamily="34" charset="0"/>
                 <a:ea typeface="Courier New" pitchFamily="34" charset="-122"/>
                 <a:cs typeface="Courier New" pitchFamily="34" charset="-120"/>
               </a:rPr>
-              <a:t>54,900</a:t>
+              <a:t>20,936</a:t>
+            </a:r>
+            <a:endParaRPr lang="en-US" sz="950" dirty="0"/>
+          </a:p>
+        </p:txBody>
+      </p:sp>
+      <p:sp>
+        <p:nvSpPr>
+          <p:cNvPr id="48" name="Text 46"/>
+          <p:cNvSpPr txBox="1"/>
+          <p:nvPr/>
+        </p:nvSpPr>
+        <p:spPr>
+          <a:xfrm>
+            <a:off x="11032541" y="2688336"/>
+            <a:ext cx="436778" cy="219456"/>
+          </a:xfrm>
+          <a:prstGeom prst="rect">
+            <a:avLst/>
+          </a:prstGeom>
+          <a:noFill/>
+          <a:ln/>
+        </p:spPr>
+        <p:txBody>
+          <a:bodyPr wrap="square" lIns="0" tIns="0" rIns="0" bIns="0" rtlCol="0" anchor="ctr"/>
+          <a:lstStyle/>
+          <a:p>
+            <a:pPr algn="r" indent="0" marL="0">
+              <a:buNone/>
+            </a:pPr>
+            <a:r>
+              <a:rPr lang="en-US" sz="1000" b="1" dirty="0">
+                <a:solidFill>
+                  <a:srgbClr val="171A18"/>
+                </a:solidFill>
+                <a:latin typeface="Courier New" pitchFamily="34" charset="0"/>
+                <a:ea typeface="Courier New" pitchFamily="34" charset="-122"/>
+                <a:cs typeface="Courier New" pitchFamily="34" charset="-120"/>
+              </a:rPr>
+              <a:t>0.16</a:t>
             </a:r>
             <a:endParaRPr lang="en-US" sz="1000" dirty="0"/>
           </a:p>
@@ -2857,14 +3022,14 @@
       </p:sp>
       <p:sp>
         <p:nvSpPr>
-          <p:cNvPr id="46" name="Text 44"/>
-          <p:cNvSpPr txBox="1"/>
-          <p:nvPr/>
-        </p:nvSpPr>
-        <p:spPr>
-          <a:xfrm>
-            <a:off x="8362493" y="2926080"/>
-            <a:ext cx="1444752" cy="219456"/>
+          <p:cNvPr id="49" name="Text 47"/>
+          <p:cNvSpPr txBox="1"/>
+          <p:nvPr/>
+        </p:nvSpPr>
+        <p:spPr>
+          <a:xfrm>
+            <a:off x="8362493" y="2962656"/>
+            <a:ext cx="1261872" cy="219456"/>
           </a:xfrm>
           <a:prstGeom prst="rect">
             <a:avLst/>
@@ -2888,7 +3053,7 @@
                 <a:ea typeface="Calibri" pitchFamily="34" charset="-122"/>
                 <a:cs typeface="Calibri" pitchFamily="34" charset="-120"/>
               </a:rPr>
-              <a:t>Share earning an RFO</a:t>
+              <a:t>mop · Llama 3.1 8B</a:t>
             </a:r>
             <a:endParaRPr lang="en-US" sz="950" dirty="0"/>
           </a:p>
@@ -2896,14 +3061,14 @@
       </p:sp>
       <p:sp>
         <p:nvSpPr>
-          <p:cNvPr id="47" name="Text 45"/>
-          <p:cNvSpPr txBox="1"/>
-          <p:nvPr/>
-        </p:nvSpPr>
-        <p:spPr>
-          <a:xfrm>
-            <a:off x="9843821" y="2926080"/>
-            <a:ext cx="713232" cy="219456"/>
+          <p:cNvPr id="50" name="Text 48"/>
+          <p:cNvSpPr txBox="1"/>
+          <p:nvPr/>
+        </p:nvSpPr>
+        <p:spPr>
+          <a:xfrm>
+            <a:off x="9660941" y="2962656"/>
+            <a:ext cx="603504" cy="219456"/>
           </a:xfrm>
           <a:prstGeom prst="rect">
             <a:avLst/>
@@ -2919,7 +3084,7 @@
               <a:buNone/>
             </a:pPr>
             <a:r>
-              <a:rPr lang="en-US" sz="900" dirty="0">
+              <a:rPr lang="en-US" sz="850" dirty="0">
                 <a:solidFill>
                   <a:srgbClr val="6A726B"/>
                 </a:solidFill>
@@ -2927,22 +3092,22 @@
                 <a:ea typeface="Courier New" pitchFamily="34" charset="-122"/>
                 <a:cs typeface="Courier New" pitchFamily="34" charset="-120"/>
               </a:rPr>
-              <a:t>35%</a:t>
-            </a:r>
-            <a:endParaRPr lang="en-US" sz="900" dirty="0"/>
-          </a:p>
-        </p:txBody>
-      </p:sp>
-      <p:sp>
-        <p:nvSpPr>
-          <p:cNvPr id="48" name="Text 46"/>
-          <p:cNvSpPr txBox="1"/>
-          <p:nvPr/>
-        </p:nvSpPr>
-        <p:spPr>
-          <a:xfrm>
-            <a:off x="10575341" y="2926080"/>
-            <a:ext cx="893978" cy="219456"/>
+              <a:t>12k/2.5k</a:t>
+            </a:r>
+            <a:endParaRPr lang="en-US" sz="850" dirty="0"/>
+          </a:p>
+        </p:txBody>
+      </p:sp>
+      <p:sp>
+        <p:nvSpPr>
+          <p:cNvPr id="51" name="Text 49"/>
+          <p:cNvSpPr txBox="1"/>
+          <p:nvPr/>
+        </p:nvSpPr>
+        <p:spPr>
+          <a:xfrm>
+            <a:off x="10301021" y="2962656"/>
+            <a:ext cx="694944" cy="219456"/>
           </a:xfrm>
           <a:prstGeom prst="rect">
             <a:avLst/>
@@ -2958,15 +3123,54 @@
               <a:buNone/>
             </a:pPr>
             <a:r>
-              <a:rPr lang="en-US" sz="1000" b="1" dirty="0">
-                <a:solidFill>
-                  <a:srgbClr val="171A18"/>
+              <a:rPr lang="en-US" sz="950" dirty="0">
+                <a:solidFill>
+                  <a:srgbClr val="3E453F"/>
                 </a:solidFill>
                 <a:latin typeface="Courier New" pitchFamily="34" charset="0"/>
                 <a:ea typeface="Courier New" pitchFamily="34" charset="-122"/>
                 <a:cs typeface="Courier New" pitchFamily="34" charset="-120"/>
               </a:rPr>
-              <a:t>55%</a:t>
+              <a:t>7,733</a:t>
+            </a:r>
+            <a:endParaRPr lang="en-US" sz="950" dirty="0"/>
+          </a:p>
+        </p:txBody>
+      </p:sp>
+      <p:sp>
+        <p:nvSpPr>
+          <p:cNvPr id="52" name="Text 50"/>
+          <p:cNvSpPr txBox="1"/>
+          <p:nvPr/>
+        </p:nvSpPr>
+        <p:spPr>
+          <a:xfrm>
+            <a:off x="11032541" y="2962656"/>
+            <a:ext cx="436778" cy="219456"/>
+          </a:xfrm>
+          <a:prstGeom prst="rect">
+            <a:avLst/>
+          </a:prstGeom>
+          <a:noFill/>
+          <a:ln/>
+        </p:spPr>
+        <p:txBody>
+          <a:bodyPr wrap="square" lIns="0" tIns="0" rIns="0" bIns="0" rtlCol="0" anchor="ctr"/>
+          <a:lstStyle/>
+          <a:p>
+            <a:pPr algn="r" indent="0" marL="0">
+              <a:buNone/>
+            </a:pPr>
+            <a:r>
+              <a:rPr lang="en-US" sz="1000" b="1" dirty="0">
+                <a:solidFill>
+                  <a:srgbClr val="171A18"/>
+                </a:solidFill>
+                <a:latin typeface="Courier New" pitchFamily="34" charset="0"/>
+                <a:ea typeface="Courier New" pitchFamily="34" charset="-122"/>
+                <a:cs typeface="Courier New" pitchFamily="34" charset="-120"/>
+              </a:rPr>
+              <a:t>0.17</a:t>
             </a:r>
             <a:endParaRPr lang="en-US" sz="1000" dirty="0"/>
           </a:p>
@@ -2974,38 +3178,61 @@
       </p:sp>
       <p:sp>
         <p:nvSpPr>
-          <p:cNvPr id="49" name="Text 47"/>
-          <p:cNvSpPr txBox="1"/>
-          <p:nvPr/>
-        </p:nvSpPr>
-        <p:spPr>
-          <a:xfrm>
-            <a:off x="8362493" y="3182112"/>
-            <a:ext cx="1444752" cy="219456"/>
-          </a:xfrm>
-          <a:prstGeom prst="rect">
-            <a:avLst/>
-          </a:prstGeom>
-          <a:noFill/>
-          <a:ln/>
-        </p:spPr>
-        <p:txBody>
-          <a:bodyPr wrap="square" lIns="0" tIns="0" rIns="0" bIns="0" rtlCol="0" anchor="ctr"/>
-          <a:lstStyle/>
-          <a:p>
-            <a:pPr indent="0" marL="0">
-              <a:buNone/>
-            </a:pPr>
-            <a:r>
-              <a:rPr lang="en-US" sz="950" dirty="0">
-                <a:solidFill>
-                  <a:srgbClr val="3E453F"/>
+          <p:cNvPr id="53" name="Shape 51"/>
+          <p:cNvSpPr/>
+          <p:nvPr/>
+        </p:nvSpPr>
+        <p:spPr>
+          <a:xfrm>
+            <a:off x="8362493" y="3291840"/>
+            <a:ext cx="3106826" cy="0"/>
+          </a:xfrm>
+          <a:prstGeom prst="line">
+            <a:avLst/>
+          </a:prstGeom>
+          <a:noFill/>
+          <a:ln w="9525">
+            <a:solidFill>
+              <a:srgbClr val="D9DCD4"/>
+            </a:solidFill>
+            <a:prstDash val="solid"/>
+          </a:ln>
+        </p:spPr>
+      </p:sp>
+      <p:sp>
+        <p:nvSpPr>
+          <p:cNvPr id="54" name="Text 52"/>
+          <p:cNvSpPr txBox="1"/>
+          <p:nvPr/>
+        </p:nvSpPr>
+        <p:spPr>
+          <a:xfrm>
+            <a:off x="8362493" y="3346704"/>
+            <a:ext cx="2194560" cy="219456"/>
+          </a:xfrm>
+          <a:prstGeom prst="rect">
+            <a:avLst/>
+          </a:prstGeom>
+          <a:noFill/>
+          <a:ln/>
+        </p:spPr>
+        <p:txBody>
+          <a:bodyPr wrap="square" lIns="0" tIns="0" rIns="0" bIns="0" rtlCol="0" anchor="ctr"/>
+          <a:lstStyle/>
+          <a:p>
+            <a:pPr indent="0" marL="0">
+              <a:buNone/>
+            </a:pPr>
+            <a:r>
+              <a:rPr lang="en-US" sz="950" b="1" dirty="0">
+                <a:solidFill>
+                  <a:srgbClr val="171A18"/>
                 </a:solidFill>
                 <a:latin typeface="Calibri" pitchFamily="34" charset="0"/>
                 <a:ea typeface="Calibri" pitchFamily="34" charset="-122"/>
                 <a:cs typeface="Calibri" pitchFamily="34" charset="-120"/>
               </a:rPr>
-              <a:t>Agent turns per RFO</a:t>
+              <a:t>TOTAL at pan-India peak</a:t>
             </a:r>
             <a:endParaRPr lang="en-US" sz="950" dirty="0"/>
           </a:p>
@@ -3013,14 +3240,14 @@
       </p:sp>
       <p:sp>
         <p:nvSpPr>
-          <p:cNvPr id="50" name="Text 48"/>
-          <p:cNvSpPr txBox="1"/>
-          <p:nvPr/>
-        </p:nvSpPr>
-        <p:spPr>
-          <a:xfrm>
-            <a:off x="9843821" y="3182112"/>
-            <a:ext cx="713232" cy="219456"/>
+          <p:cNvPr id="55" name="Text 53"/>
+          <p:cNvSpPr txBox="1"/>
+          <p:nvPr/>
+        </p:nvSpPr>
+        <p:spPr>
+          <a:xfrm>
+            <a:off x="11032541" y="3346704"/>
+            <a:ext cx="436778" cy="219456"/>
           </a:xfrm>
           <a:prstGeom prst="rect">
             <a:avLst/>
@@ -3036,30 +3263,128 @@
               <a:buNone/>
             </a:pPr>
             <a:r>
-              <a:rPr lang="en-US" sz="900" dirty="0">
-                <a:solidFill>
-                  <a:srgbClr val="6A726B"/>
+              <a:rPr lang="en-US" sz="1000" b="1" dirty="0">
+                <a:solidFill>
+                  <a:srgbClr val="008E7F"/>
                 </a:solidFill>
                 <a:latin typeface="Courier New" pitchFamily="34" charset="0"/>
                 <a:ea typeface="Courier New" pitchFamily="34" charset="-122"/>
                 <a:cs typeface="Courier New" pitchFamily="34" charset="-120"/>
               </a:rPr>
-              <a:t>3</a:t>
-            </a:r>
-            <a:endParaRPr lang="en-US" sz="900" dirty="0"/>
-          </a:p>
-        </p:txBody>
-      </p:sp>
-      <p:sp>
-        <p:nvSpPr>
-          <p:cNvPr id="51" name="Text 49"/>
-          <p:cNvSpPr txBox="1"/>
-          <p:nvPr/>
-        </p:nvSpPr>
-        <p:spPr>
-          <a:xfrm>
-            <a:off x="10575341" y="3182112"/>
-            <a:ext cx="893978" cy="219456"/>
+              <a:t>2.40</a:t>
+            </a:r>
+            <a:endParaRPr lang="en-US" sz="1000" dirty="0"/>
+          </a:p>
+        </p:txBody>
+      </p:sp>
+      <p:sp>
+        <p:nvSpPr>
+          <p:cNvPr id="56" name="Text 54"/>
+          <p:cNvSpPr txBox="1"/>
+          <p:nvPr/>
+        </p:nvSpPr>
+        <p:spPr>
+          <a:xfrm>
+            <a:off x="8362493" y="3803904"/>
+            <a:ext cx="3106826" cy="182880"/>
+          </a:xfrm>
+          <a:prstGeom prst="rect">
+            <a:avLst/>
+          </a:prstGeom>
+          <a:noFill/>
+          <a:ln/>
+        </p:spPr>
+        <p:txBody>
+          <a:bodyPr wrap="square" lIns="0" tIns="0" rIns="0" bIns="0" rtlCol="0" anchor="ctr"/>
+          <a:lstStyle/>
+          <a:p>
+            <a:pPr indent="0" marL="0">
+              <a:buNone/>
+            </a:pPr>
+            <a:r>
+              <a:rPr lang="en-US" sz="750" b="1" spc="80" kern="0" dirty="0">
+                <a:solidFill>
+                  <a:srgbClr val="6A726B"/>
+                </a:solidFill>
+                <a:latin typeface="Arial" pitchFamily="34" charset="0"/>
+                <a:ea typeface="Arial" pitchFamily="34" charset="-122"/>
+                <a:cs typeface="Arial" pitchFamily="34" charset="-120"/>
+              </a:rPr>
+              <a:t>WHERE THE TOKENS COME FROM</a:t>
+            </a:r>
+            <a:endParaRPr lang="en-US" sz="750" dirty="0"/>
+          </a:p>
+        </p:txBody>
+      </p:sp>
+      <p:sp>
+        <p:nvSpPr>
+          <p:cNvPr id="57" name="Shape 55"/>
+          <p:cNvSpPr/>
+          <p:nvPr/>
+        </p:nvSpPr>
+        <p:spPr>
+          <a:xfrm>
+            <a:off x="8362493" y="4110228"/>
+            <a:ext cx="64008" cy="64008"/>
+          </a:xfrm>
+          <a:prstGeom prst="rect">
+            <a:avLst/>
+          </a:prstGeom>
+          <a:solidFill>
+            <a:srgbClr val="008E7F"/>
+          </a:solidFill>
+          <a:ln/>
+        </p:spPr>
+      </p:sp>
+      <p:sp>
+        <p:nvSpPr>
+          <p:cNvPr id="58" name="Text 56"/>
+          <p:cNvSpPr txBox="1"/>
+          <p:nvPr/>
+        </p:nvSpPr>
+        <p:spPr>
+          <a:xfrm>
+            <a:off x="8527085" y="4041648"/>
+            <a:ext cx="1737360" cy="219456"/>
+          </a:xfrm>
+          <a:prstGeom prst="rect">
+            <a:avLst/>
+          </a:prstGeom>
+          <a:noFill/>
+          <a:ln/>
+        </p:spPr>
+        <p:txBody>
+          <a:bodyPr wrap="square" lIns="0" tIns="0" rIns="0" bIns="0" rtlCol="0" anchor="ctr"/>
+          <a:lstStyle/>
+          <a:p>
+            <a:pPr indent="0" marL="0">
+              <a:buNone/>
+            </a:pPr>
+            <a:r>
+              <a:rPr lang="en-US" sz="950" dirty="0">
+                <a:solidFill>
+                  <a:srgbClr val="3E453F"/>
+                </a:solidFill>
+                <a:latin typeface="Calibri" pitchFamily="34" charset="0"/>
+                <a:ea typeface="Calibri" pitchFamily="34" charset="-122"/>
+                <a:cs typeface="Calibri" pitchFamily="34" charset="-120"/>
+              </a:rPr>
+              <a:t>FM · pan-India</a:t>
+            </a:r>
+            <a:endParaRPr lang="en-US" sz="950" dirty="0"/>
+          </a:p>
+        </p:txBody>
+      </p:sp>
+      <p:sp>
+        <p:nvSpPr>
+          <p:cNvPr id="59" name="Text 57"/>
+          <p:cNvSpPr txBox="1"/>
+          <p:nvPr/>
+        </p:nvSpPr>
+        <p:spPr>
+          <a:xfrm>
+            <a:off x="10301021" y="4041648"/>
+            <a:ext cx="694944" cy="219456"/>
           </a:xfrm>
           <a:prstGeom prst="rect">
             <a:avLst/>
@@ -3075,101 +3400,419 @@
               <a:buNone/>
             </a:pPr>
             <a:r>
-              <a:rPr lang="en-US" sz="1000" b="1" dirty="0">
-                <a:solidFill>
-                  <a:srgbClr val="171A18"/>
+              <a:rPr lang="en-US" sz="900" dirty="0">
+                <a:solidFill>
+                  <a:srgbClr val="6A726B"/>
                 </a:solidFill>
                 <a:latin typeface="Courier New" pitchFamily="34" charset="0"/>
                 <a:ea typeface="Courier New" pitchFamily="34" charset="-122"/>
                 <a:cs typeface="Courier New" pitchFamily="34" charset="-120"/>
               </a:rPr>
-              <a:t>4.7</a:t>
-            </a:r>
-            <a:endParaRPr lang="en-US" sz="1000" dirty="0"/>
-          </a:p>
-        </p:txBody>
-      </p:sp>
-      <p:sp>
-        <p:nvSpPr>
-          <p:cNvPr id="52" name="Text 50"/>
-          <p:cNvSpPr txBox="1"/>
-          <p:nvPr/>
-        </p:nvSpPr>
-        <p:spPr>
-          <a:xfrm>
-            <a:off x="8362493" y="3566160"/>
-            <a:ext cx="3106826" cy="182880"/>
-          </a:xfrm>
-          <a:prstGeom prst="rect">
-            <a:avLst/>
-          </a:prstGeom>
-          <a:noFill/>
-          <a:ln/>
-        </p:spPr>
-        <p:txBody>
-          <a:bodyPr wrap="square" lIns="0" tIns="0" rIns="0" bIns="0" rtlCol="0" anchor="ctr"/>
-          <a:lstStyle/>
-          <a:p>
-            <a:pPr indent="0" marL="0">
-              <a:buNone/>
-            </a:pPr>
-            <a:r>
-              <a:rPr lang="en-US" sz="750" b="1" spc="80" kern="0" dirty="0">
+              <a:t>398M</a:t>
+            </a:r>
+            <a:endParaRPr lang="en-US" sz="900" dirty="0"/>
+          </a:p>
+        </p:txBody>
+      </p:sp>
+      <p:sp>
+        <p:nvSpPr>
+          <p:cNvPr id="60" name="Text 58"/>
+          <p:cNvSpPr txBox="1"/>
+          <p:nvPr/>
+        </p:nvSpPr>
+        <p:spPr>
+          <a:xfrm>
+            <a:off x="11032541" y="4041648"/>
+            <a:ext cx="436778" cy="219456"/>
+          </a:xfrm>
+          <a:prstGeom prst="rect">
+            <a:avLst/>
+          </a:prstGeom>
+          <a:noFill/>
+          <a:ln/>
+        </p:spPr>
+        <p:txBody>
+          <a:bodyPr wrap="square" lIns="0" tIns="0" rIns="0" bIns="0" rtlCol="0" anchor="ctr"/>
+          <a:lstStyle/>
+          <a:p>
+            <a:pPr algn="r" indent="0" marL="0">
+              <a:buNone/>
+            </a:pPr>
+            <a:r>
+              <a:rPr lang="en-US" sz="950" b="1" dirty="0">
+                <a:solidFill>
+                  <a:srgbClr val="171A18"/>
+                </a:solidFill>
+                <a:latin typeface="Courier New" pitchFamily="34" charset="0"/>
+                <a:ea typeface="Courier New" pitchFamily="34" charset="-122"/>
+                <a:cs typeface="Courier New" pitchFamily="34" charset="-120"/>
+              </a:rPr>
+              <a:t>82%</a:t>
+            </a:r>
+            <a:endParaRPr lang="en-US" sz="950" dirty="0"/>
+          </a:p>
+        </p:txBody>
+      </p:sp>
+      <p:sp>
+        <p:nvSpPr>
+          <p:cNvPr id="61" name="Shape 59"/>
+          <p:cNvSpPr/>
+          <p:nvPr/>
+        </p:nvSpPr>
+        <p:spPr>
+          <a:xfrm>
+            <a:off x="8362493" y="4366260"/>
+            <a:ext cx="64008" cy="64008"/>
+          </a:xfrm>
+          <a:prstGeom prst="rect">
+            <a:avLst/>
+          </a:prstGeom>
+          <a:solidFill>
+            <a:srgbClr val="B04A12"/>
+          </a:solidFill>
+          <a:ln/>
+        </p:spPr>
+      </p:sp>
+      <p:sp>
+        <p:nvSpPr>
+          <p:cNvPr id="62" name="Text 60"/>
+          <p:cNvSpPr txBox="1"/>
+          <p:nvPr/>
+        </p:nvSpPr>
+        <p:spPr>
+          <a:xfrm>
+            <a:off x="8527085" y="4297680"/>
+            <a:ext cx="1737360" cy="219456"/>
+          </a:xfrm>
+          <a:prstGeom prst="rect">
+            <a:avLst/>
+          </a:prstGeom>
+          <a:noFill/>
+          <a:ln/>
+        </p:spPr>
+        <p:txBody>
+          <a:bodyPr wrap="square" lIns="0" tIns="0" rIns="0" bIns="0" rtlCol="0" anchor="ctr"/>
+          <a:lstStyle/>
+          <a:p>
+            <a:pPr indent="0" marL="0">
+              <a:buNone/>
+            </a:pPr>
+            <a:r>
+              <a:rPr lang="en-US" sz="950" dirty="0">
+                <a:solidFill>
+                  <a:srgbClr val="3E453F"/>
+                </a:solidFill>
+                <a:latin typeface="Calibri" pitchFamily="34" charset="0"/>
+                <a:ea typeface="Calibri" pitchFamily="34" charset="-122"/>
+                <a:cs typeface="Calibri" pitchFamily="34" charset="-120"/>
+              </a:rPr>
+              <a:t>CHM · pan-India</a:t>
+            </a:r>
+            <a:endParaRPr lang="en-US" sz="950" dirty="0"/>
+          </a:p>
+        </p:txBody>
+      </p:sp>
+      <p:sp>
+        <p:nvSpPr>
+          <p:cNvPr id="63" name="Text 61"/>
+          <p:cNvSpPr txBox="1"/>
+          <p:nvPr/>
+        </p:nvSpPr>
+        <p:spPr>
+          <a:xfrm>
+            <a:off x="10301021" y="4297680"/>
+            <a:ext cx="694944" cy="219456"/>
+          </a:xfrm>
+          <a:prstGeom prst="rect">
+            <a:avLst/>
+          </a:prstGeom>
+          <a:noFill/>
+          <a:ln/>
+        </p:spPr>
+        <p:txBody>
+          <a:bodyPr wrap="square" lIns="0" tIns="0" rIns="0" bIns="0" rtlCol="0" anchor="ctr"/>
+          <a:lstStyle/>
+          <a:p>
+            <a:pPr algn="r" indent="0" marL="0">
+              <a:buNone/>
+            </a:pPr>
+            <a:r>
+              <a:rPr lang="en-US" sz="900" dirty="0">
                 <a:solidFill>
                   <a:srgbClr val="6A726B"/>
+                </a:solidFill>
+                <a:latin typeface="Courier New" pitchFamily="34" charset="0"/>
+                <a:ea typeface="Courier New" pitchFamily="34" charset="-122"/>
+                <a:cs typeface="Courier New" pitchFamily="34" charset="-120"/>
+              </a:rPr>
+              <a:t>86M</a:t>
+            </a:r>
+            <a:endParaRPr lang="en-US" sz="900" dirty="0"/>
+          </a:p>
+        </p:txBody>
+      </p:sp>
+      <p:sp>
+        <p:nvSpPr>
+          <p:cNvPr id="64" name="Text 62"/>
+          <p:cNvSpPr txBox="1"/>
+          <p:nvPr/>
+        </p:nvSpPr>
+        <p:spPr>
+          <a:xfrm>
+            <a:off x="11032541" y="4297680"/>
+            <a:ext cx="436778" cy="219456"/>
+          </a:xfrm>
+          <a:prstGeom prst="rect">
+            <a:avLst/>
+          </a:prstGeom>
+          <a:noFill/>
+          <a:ln/>
+        </p:spPr>
+        <p:txBody>
+          <a:bodyPr wrap="square" lIns="0" tIns="0" rIns="0" bIns="0" rtlCol="0" anchor="ctr"/>
+          <a:lstStyle/>
+          <a:p>
+            <a:pPr algn="r" indent="0" marL="0">
+              <a:buNone/>
+            </a:pPr>
+            <a:r>
+              <a:rPr lang="en-US" sz="950" b="1" dirty="0">
+                <a:solidFill>
+                  <a:srgbClr val="B04A12"/>
+                </a:solidFill>
+                <a:latin typeface="Courier New" pitchFamily="34" charset="0"/>
+                <a:ea typeface="Courier New" pitchFamily="34" charset="-122"/>
+                <a:cs typeface="Courier New" pitchFamily="34" charset="-120"/>
+              </a:rPr>
+              <a:t>18%</a:t>
+            </a:r>
+            <a:endParaRPr lang="en-US" sz="950" dirty="0"/>
+          </a:p>
+        </p:txBody>
+      </p:sp>
+      <p:sp>
+        <p:nvSpPr>
+          <p:cNvPr id="65" name="Shape 63"/>
+          <p:cNvSpPr/>
+          <p:nvPr/>
+        </p:nvSpPr>
+        <p:spPr>
+          <a:xfrm>
+            <a:off x="8362493" y="4622292"/>
+            <a:ext cx="64008" cy="64008"/>
+          </a:xfrm>
+          <a:prstGeom prst="rect">
+            <a:avLst/>
+          </a:prstGeom>
+          <a:solidFill>
+            <a:srgbClr val="B04A12"/>
+          </a:solidFill>
+          <a:ln/>
+        </p:spPr>
+      </p:sp>
+      <p:sp>
+        <p:nvSpPr>
+          <p:cNvPr id="66" name="Text 64"/>
+          <p:cNvSpPr txBox="1"/>
+          <p:nvPr/>
+        </p:nvSpPr>
+        <p:spPr>
+          <a:xfrm>
+            <a:off x="8527085" y="4553712"/>
+            <a:ext cx="1737360" cy="219456"/>
+          </a:xfrm>
+          <a:prstGeom prst="rect">
+            <a:avLst/>
+          </a:prstGeom>
+          <a:noFill/>
+          <a:ln/>
+        </p:spPr>
+        <p:txBody>
+          <a:bodyPr wrap="square" lIns="0" tIns="0" rIns="0" bIns="0" rtlCol="0" anchor="ctr"/>
+          <a:lstStyle/>
+          <a:p>
+            <a:pPr indent="0" marL="0">
+              <a:buNone/>
+            </a:pPr>
+            <a:r>
+              <a:rPr lang="en-US" sz="950" dirty="0">
+                <a:solidFill>
+                  <a:srgbClr val="3E453F"/>
+                </a:solidFill>
+                <a:latin typeface="Calibri" pitchFamily="34" charset="0"/>
+                <a:ea typeface="Calibri" pitchFamily="34" charset="-122"/>
+                <a:cs typeface="Calibri" pitchFamily="34" charset="-120"/>
+              </a:rPr>
+              <a:t>CHM · Gujarat only</a:t>
+            </a:r>
+            <a:endParaRPr lang="en-US" sz="950" dirty="0"/>
+          </a:p>
+        </p:txBody>
+      </p:sp>
+      <p:sp>
+        <p:nvSpPr>
+          <p:cNvPr id="67" name="Text 65"/>
+          <p:cNvSpPr txBox="1"/>
+          <p:nvPr/>
+        </p:nvSpPr>
+        <p:spPr>
+          <a:xfrm>
+            <a:off x="10301021" y="4553712"/>
+            <a:ext cx="694944" cy="219456"/>
+          </a:xfrm>
+          <a:prstGeom prst="rect">
+            <a:avLst/>
+          </a:prstGeom>
+          <a:noFill/>
+          <a:ln/>
+        </p:spPr>
+        <p:txBody>
+          <a:bodyPr wrap="square" lIns="0" tIns="0" rIns="0" bIns="0" rtlCol="0" anchor="ctr"/>
+          <a:lstStyle/>
+          <a:p>
+            <a:pPr algn="r" indent="0" marL="0">
+              <a:buNone/>
+            </a:pPr>
+            <a:r>
+              <a:rPr lang="en-US" sz="900" dirty="0">
+                <a:solidFill>
+                  <a:srgbClr val="6A726B"/>
+                </a:solidFill>
+                <a:latin typeface="Courier New" pitchFamily="34" charset="0"/>
+                <a:ea typeface="Courier New" pitchFamily="34" charset="-122"/>
+                <a:cs typeface="Courier New" pitchFamily="34" charset="-120"/>
+              </a:rPr>
+              <a:t>7.3M</a:t>
+            </a:r>
+            <a:endParaRPr lang="en-US" sz="900" dirty="0"/>
+          </a:p>
+        </p:txBody>
+      </p:sp>
+      <p:sp>
+        <p:nvSpPr>
+          <p:cNvPr id="68" name="Text 66"/>
+          <p:cNvSpPr txBox="1"/>
+          <p:nvPr/>
+        </p:nvSpPr>
+        <p:spPr>
+          <a:xfrm>
+            <a:off x="11032541" y="4553712"/>
+            <a:ext cx="436778" cy="219456"/>
+          </a:xfrm>
+          <a:prstGeom prst="rect">
+            <a:avLst/>
+          </a:prstGeom>
+          <a:noFill/>
+          <a:ln/>
+        </p:spPr>
+        <p:txBody>
+          <a:bodyPr wrap="square" lIns="0" tIns="0" rIns="0" bIns="0" rtlCol="0" anchor="ctr"/>
+          <a:lstStyle/>
+          <a:p>
+            <a:pPr algn="r" indent="0" marL="0">
+              <a:buNone/>
+            </a:pPr>
+            <a:r>
+              <a:rPr lang="en-US" sz="950" b="1" dirty="0">
+                <a:solidFill>
+                  <a:srgbClr val="B04A12"/>
+                </a:solidFill>
+                <a:latin typeface="Courier New" pitchFamily="34" charset="0"/>
+                <a:ea typeface="Courier New" pitchFamily="34" charset="-122"/>
+                <a:cs typeface="Courier New" pitchFamily="34" charset="-120"/>
+              </a:rPr>
+              <a:t>1.8%</a:t>
+            </a:r>
+            <a:endParaRPr lang="en-US" sz="950" dirty="0"/>
+          </a:p>
+        </p:txBody>
+      </p:sp>
+      <p:sp>
+        <p:nvSpPr>
+          <p:cNvPr id="69" name="Shape 67"/>
+          <p:cNvSpPr/>
+          <p:nvPr/>
+        </p:nvSpPr>
+        <p:spPr>
+          <a:xfrm>
+            <a:off x="8362493" y="5340096"/>
+            <a:ext cx="3106826" cy="914400"/>
+          </a:xfrm>
+          <a:prstGeom prst="roundRect">
+            <a:avLst>
+              <a:gd name="adj" fmla="val 4000"/>
+            </a:avLst>
+          </a:prstGeom>
+          <a:solidFill>
+            <a:srgbClr val="EDEFE9"/>
+          </a:solidFill>
+          <a:ln/>
+        </p:spPr>
+      </p:sp>
+      <p:sp>
+        <p:nvSpPr>
+          <p:cNvPr id="70" name="Text 68"/>
+          <p:cNvSpPr txBox="1"/>
+          <p:nvPr/>
+        </p:nvSpPr>
+        <p:spPr>
+          <a:xfrm>
+            <a:off x="8490509" y="5431536"/>
+            <a:ext cx="2850794" cy="201168"/>
+          </a:xfrm>
+          <a:prstGeom prst="rect">
+            <a:avLst/>
+          </a:prstGeom>
+          <a:noFill/>
+          <a:ln/>
+        </p:spPr>
+        <p:txBody>
+          <a:bodyPr wrap="square" lIns="0" tIns="0" rIns="0" bIns="0" rtlCol="0" anchor="ctr"/>
+          <a:lstStyle/>
+          <a:p>
+            <a:pPr indent="0" marL="0">
+              <a:buNone/>
+            </a:pPr>
+            <a:r>
+              <a:rPr lang="en-US" sz="1000" b="1" dirty="0">
+                <a:solidFill>
+                  <a:srgbClr val="B04A12"/>
                 </a:solidFill>
                 <a:latin typeface="Arial" pitchFamily="34" charset="0"/>
                 <a:ea typeface="Arial" pitchFamily="34" charset="-122"/>
                 <a:cs typeface="Arial" pitchFamily="34" charset="-120"/>
               </a:rPr>
-              <a:t>THE SENSITIVITY CASES, RE-RUN AGAINST 3 GPUs</a:t>
-            </a:r>
-            <a:endParaRPr lang="en-US" sz="750" dirty="0"/>
-          </a:p>
-        </p:txBody>
-      </p:sp>
-      <p:sp>
-        <p:nvSpPr>
-          <p:cNvPr id="53" name="Shape 51"/>
-          <p:cNvSpPr/>
-          <p:nvPr/>
-        </p:nvSpPr>
-        <p:spPr>
-          <a:xfrm>
-            <a:off x="8362493" y="3872484"/>
-            <a:ext cx="64008" cy="64008"/>
-          </a:xfrm>
-          <a:prstGeom prst="rect">
-            <a:avLst/>
-          </a:prstGeom>
-          <a:solidFill>
-            <a:srgbClr val="B04A12"/>
-          </a:solidFill>
-          <a:ln/>
-        </p:spPr>
-      </p:sp>
-      <p:sp>
-        <p:nvSpPr>
-          <p:cNvPr id="54" name="Text 52"/>
-          <p:cNvSpPr txBox="1"/>
-          <p:nvPr/>
-        </p:nvSpPr>
-        <p:spPr>
-          <a:xfrm>
-            <a:off x="8527085" y="3803904"/>
-            <a:ext cx="1481328" cy="219456"/>
-          </a:xfrm>
-          <a:prstGeom prst="rect">
-            <a:avLst/>
-          </a:prstGeom>
-          <a:noFill/>
-          <a:ln/>
-        </p:spPr>
-        <p:txBody>
-          <a:bodyPr wrap="square" lIns="0" tIns="0" rIns="0" bIns="0" rtlCol="0" anchor="ctr"/>
-          <a:lstStyle/>
-          <a:p>
-            <a:pPr indent="0" marL="0">
+              <a:t>CHM does not move the number</a:t>
+            </a:r>
+            <a:endParaRPr lang="en-US" sz="1000" dirty="0"/>
+          </a:p>
+        </p:txBody>
+      </p:sp>
+      <p:sp>
+        <p:nvSpPr>
+          <p:cNvPr id="71" name="Text 69"/>
+          <p:cNvSpPr txBox="1"/>
+          <p:nvPr/>
+        </p:nvSpPr>
+        <p:spPr>
+          <a:xfrm>
+            <a:off x="8490509" y="5650992"/>
+            <a:ext cx="2850794" cy="548640"/>
+          </a:xfrm>
+          <a:prstGeom prst="rect">
+            <a:avLst/>
+          </a:prstGeom>
+          <a:noFill/>
+          <a:ln/>
+        </p:spPr>
+        <p:txBody>
+          <a:bodyPr wrap="square" lIns="0" tIns="0" rIns="0" bIns="0" rtlCol="0" anchor="ctr"/>
+          <a:lstStyle/>
+          <a:p>
+            <a:pPr indent="0" marL="0">
+              <a:lnSpc>
+                <a:spcPts val="1200"/>
+              </a:lnSpc>
               <a:buNone/>
             </a:pPr>
             <a:r>
@@ -3181,873 +3824,7 @@
                 <a:ea typeface="Calibri" pitchFamily="34" charset="-122"/>
                 <a:cs typeface="Calibri" pitchFamily="34" charset="-120"/>
               </a:rPr>
-              <a:t>Every incident gets RFO</a:t>
-            </a:r>
-            <a:endParaRPr lang="en-US" sz="950" dirty="0"/>
-          </a:p>
-        </p:txBody>
-      </p:sp>
-      <p:sp>
-        <p:nvSpPr>
-          <p:cNvPr id="55" name="Text 53"/>
-          <p:cNvSpPr txBox="1"/>
-          <p:nvPr/>
-        </p:nvSpPr>
-        <p:spPr>
-          <a:xfrm>
-            <a:off x="9843821" y="3803904"/>
-            <a:ext cx="713232" cy="219456"/>
-          </a:xfrm>
-          <a:prstGeom prst="rect">
-            <a:avLst/>
-          </a:prstGeom>
-          <a:noFill/>
-          <a:ln/>
-        </p:spPr>
-        <p:txBody>
-          <a:bodyPr wrap="square" lIns="0" tIns="0" rIns="0" bIns="0" rtlCol="0" anchor="ctr"/>
-          <a:lstStyle/>
-          <a:p>
-            <a:pPr algn="r" indent="0" marL="0">
-              <a:buNone/>
-            </a:pPr>
-            <a:r>
-              <a:rPr lang="en-US" sz="900" dirty="0">
-                <a:solidFill>
-                  <a:srgbClr val="6A726B"/>
-                </a:solidFill>
-                <a:latin typeface="Courier New" pitchFamily="34" charset="0"/>
-                <a:ea typeface="Courier New" pitchFamily="34" charset="-122"/>
-                <a:cs typeface="Courier New" pitchFamily="34" charset="-120"/>
-              </a:rPr>
-              <a:t>2.63×</a:t>
-            </a:r>
-            <a:endParaRPr lang="en-US" sz="900" dirty="0"/>
-          </a:p>
-        </p:txBody>
-      </p:sp>
-      <p:sp>
-        <p:nvSpPr>
-          <p:cNvPr id="56" name="Text 54"/>
-          <p:cNvSpPr txBox="1"/>
-          <p:nvPr/>
-        </p:nvSpPr>
-        <p:spPr>
-          <a:xfrm>
-            <a:off x="10575341" y="3803904"/>
-            <a:ext cx="893978" cy="219456"/>
-          </a:xfrm>
-          <a:prstGeom prst="rect">
-            <a:avLst/>
-          </a:prstGeom>
-          <a:noFill/>
-          <a:ln/>
-        </p:spPr>
-        <p:txBody>
-          <a:bodyPr wrap="square" lIns="0" tIns="0" rIns="0" bIns="0" rtlCol="0" anchor="ctr"/>
-          <a:lstStyle/>
-          <a:p>
-            <a:pPr algn="r" indent="0" marL="0">
-              <a:buNone/>
-            </a:pPr>
-            <a:r>
-              <a:rPr lang="en-US" sz="950" b="1" dirty="0">
-                <a:solidFill>
-                  <a:srgbClr val="B04A12"/>
-                </a:solidFill>
-                <a:latin typeface="Courier New" pitchFamily="34" charset="0"/>
-                <a:ea typeface="Courier New" pitchFamily="34" charset="-122"/>
-                <a:cs typeface="Courier New" pitchFamily="34" charset="-120"/>
-              </a:rPr>
-              <a:t>5 GPU</a:t>
-            </a:r>
-            <a:endParaRPr lang="en-US" sz="950" dirty="0"/>
-          </a:p>
-        </p:txBody>
-      </p:sp>
-      <p:sp>
-        <p:nvSpPr>
-          <p:cNvPr id="57" name="Shape 55"/>
-          <p:cNvSpPr/>
-          <p:nvPr/>
-        </p:nvSpPr>
-        <p:spPr>
-          <a:xfrm>
-            <a:off x="8362493" y="4110228"/>
-            <a:ext cx="64008" cy="64008"/>
-          </a:xfrm>
-          <a:prstGeom prst="rect">
-            <a:avLst/>
-          </a:prstGeom>
-          <a:solidFill>
-            <a:srgbClr val="B04A12"/>
-          </a:solidFill>
-          <a:ln/>
-        </p:spPr>
-      </p:sp>
-      <p:sp>
-        <p:nvSpPr>
-          <p:cNvPr id="58" name="Text 56"/>
-          <p:cNvSpPr txBox="1"/>
-          <p:nvPr/>
-        </p:nvSpPr>
-        <p:spPr>
-          <a:xfrm>
-            <a:off x="8527085" y="4041648"/>
-            <a:ext cx="1481328" cy="219456"/>
-          </a:xfrm>
-          <a:prstGeom prst="rect">
-            <a:avLst/>
-          </a:prstGeom>
-          <a:noFill/>
-          <a:ln/>
-        </p:spPr>
-        <p:txBody>
-          <a:bodyPr wrap="square" lIns="0" tIns="0" rIns="0" bIns="0" rtlCol="0" anchor="ctr"/>
-          <a:lstStyle/>
-          <a:p>
-            <a:pPr indent="0" marL="0">
-              <a:buNone/>
-            </a:pPr>
-            <a:r>
-              <a:rPr lang="en-US" sz="950" dirty="0">
-                <a:solidFill>
-                  <a:srgbClr val="3E453F"/>
-                </a:solidFill>
-                <a:latin typeface="Calibri" pitchFamily="34" charset="0"/>
-                <a:ea typeface="Calibri" pitchFamily="34" charset="-122"/>
-                <a:cs typeface="Calibri" pitchFamily="34" charset="-120"/>
-              </a:rPr>
-              <a:t>Compression misses 3×</a:t>
-            </a:r>
-            <a:endParaRPr lang="en-US" sz="950" dirty="0"/>
-          </a:p>
-        </p:txBody>
-      </p:sp>
-      <p:sp>
-        <p:nvSpPr>
-          <p:cNvPr id="59" name="Text 57"/>
-          <p:cNvSpPr txBox="1"/>
-          <p:nvPr/>
-        </p:nvSpPr>
-        <p:spPr>
-          <a:xfrm>
-            <a:off x="9843821" y="4041648"/>
-            <a:ext cx="713232" cy="219456"/>
-          </a:xfrm>
-          <a:prstGeom prst="rect">
-            <a:avLst/>
-          </a:prstGeom>
-          <a:noFill/>
-          <a:ln/>
-        </p:spPr>
-        <p:txBody>
-          <a:bodyPr wrap="square" lIns="0" tIns="0" rIns="0" bIns="0" rtlCol="0" anchor="ctr"/>
-          <a:lstStyle/>
-          <a:p>
-            <a:pPr algn="r" indent="0" marL="0">
-              <a:buNone/>
-            </a:pPr>
-            <a:r>
-              <a:rPr lang="en-US" sz="900" dirty="0">
-                <a:solidFill>
-                  <a:srgbClr val="6A726B"/>
-                </a:solidFill>
-                <a:latin typeface="Courier New" pitchFamily="34" charset="0"/>
-                <a:ea typeface="Courier New" pitchFamily="34" charset="-122"/>
-                <a:cs typeface="Courier New" pitchFamily="34" charset="-120"/>
-              </a:rPr>
-              <a:t>2.75×</a:t>
-            </a:r>
-            <a:endParaRPr lang="en-US" sz="900" dirty="0"/>
-          </a:p>
-        </p:txBody>
-      </p:sp>
-      <p:sp>
-        <p:nvSpPr>
-          <p:cNvPr id="60" name="Text 58"/>
-          <p:cNvSpPr txBox="1"/>
-          <p:nvPr/>
-        </p:nvSpPr>
-        <p:spPr>
-          <a:xfrm>
-            <a:off x="10575341" y="4041648"/>
-            <a:ext cx="893978" cy="219456"/>
-          </a:xfrm>
-          <a:prstGeom prst="rect">
-            <a:avLst/>
-          </a:prstGeom>
-          <a:noFill/>
-          <a:ln/>
-        </p:spPr>
-        <p:txBody>
-          <a:bodyPr wrap="square" lIns="0" tIns="0" rIns="0" bIns="0" rtlCol="0" anchor="ctr"/>
-          <a:lstStyle/>
-          <a:p>
-            <a:pPr algn="r" indent="0" marL="0">
-              <a:buNone/>
-            </a:pPr>
-            <a:r>
-              <a:rPr lang="en-US" sz="950" b="1" dirty="0">
-                <a:solidFill>
-                  <a:srgbClr val="B04A12"/>
-                </a:solidFill>
-                <a:latin typeface="Courier New" pitchFamily="34" charset="0"/>
-                <a:ea typeface="Courier New" pitchFamily="34" charset="-122"/>
-                <a:cs typeface="Courier New" pitchFamily="34" charset="-120"/>
-              </a:rPr>
-              <a:t>5 GPU</a:t>
-            </a:r>
-            <a:endParaRPr lang="en-US" sz="950" dirty="0"/>
-          </a:p>
-        </p:txBody>
-      </p:sp>
-      <p:sp>
-        <p:nvSpPr>
-          <p:cNvPr id="61" name="Shape 59"/>
-          <p:cNvSpPr/>
-          <p:nvPr/>
-        </p:nvSpPr>
-        <p:spPr>
-          <a:xfrm>
-            <a:off x="8362493" y="4347972"/>
-            <a:ext cx="64008" cy="64008"/>
-          </a:xfrm>
-          <a:prstGeom prst="rect">
-            <a:avLst/>
-          </a:prstGeom>
-          <a:solidFill>
-            <a:srgbClr val="B04A12"/>
-          </a:solidFill>
-          <a:ln/>
-        </p:spPr>
-      </p:sp>
-      <p:sp>
-        <p:nvSpPr>
-          <p:cNvPr id="62" name="Text 60"/>
-          <p:cNvSpPr txBox="1"/>
-          <p:nvPr/>
-        </p:nvSpPr>
-        <p:spPr>
-          <a:xfrm>
-            <a:off x="8527085" y="4279392"/>
-            <a:ext cx="1481328" cy="219456"/>
-          </a:xfrm>
-          <a:prstGeom prst="rect">
-            <a:avLst/>
-          </a:prstGeom>
-          <a:noFill/>
-          <a:ln/>
-        </p:spPr>
-        <p:txBody>
-          <a:bodyPr wrap="square" lIns="0" tIns="0" rIns="0" bIns="0" rtlCol="0" anchor="ctr"/>
-          <a:lstStyle/>
-          <a:p>
-            <a:pPr indent="0" marL="0">
-              <a:buNone/>
-            </a:pPr>
-            <a:r>
-              <a:rPr lang="en-US" sz="950" dirty="0">
-                <a:solidFill>
-                  <a:srgbClr val="3E453F"/>
-                </a:solidFill>
-                <a:latin typeface="Calibri" pitchFamily="34" charset="0"/>
-                <a:ea typeface="Calibri" pitchFamily="34" charset="-122"/>
-                <a:cs typeface="Calibri" pitchFamily="34" charset="-120"/>
-              </a:rPr>
-              <a:t>RFO context 6k → 24k</a:t>
-            </a:r>
-            <a:endParaRPr lang="en-US" sz="950" dirty="0"/>
-          </a:p>
-        </p:txBody>
-      </p:sp>
-      <p:sp>
-        <p:nvSpPr>
-          <p:cNvPr id="63" name="Text 61"/>
-          <p:cNvSpPr txBox="1"/>
-          <p:nvPr/>
-        </p:nvSpPr>
-        <p:spPr>
-          <a:xfrm>
-            <a:off x="9843821" y="4279392"/>
-            <a:ext cx="713232" cy="219456"/>
-          </a:xfrm>
-          <a:prstGeom prst="rect">
-            <a:avLst/>
-          </a:prstGeom>
-          <a:noFill/>
-          <a:ln/>
-        </p:spPr>
-        <p:txBody>
-          <a:bodyPr wrap="square" lIns="0" tIns="0" rIns="0" bIns="0" rtlCol="0" anchor="ctr"/>
-          <a:lstStyle/>
-          <a:p>
-            <a:pPr algn="r" indent="0" marL="0">
-              <a:buNone/>
-            </a:pPr>
-            <a:r>
-              <a:rPr lang="en-US" sz="900" dirty="0">
-                <a:solidFill>
-                  <a:srgbClr val="6A726B"/>
-                </a:solidFill>
-                <a:latin typeface="Courier New" pitchFamily="34" charset="0"/>
-                <a:ea typeface="Courier New" pitchFamily="34" charset="-122"/>
-                <a:cs typeface="Courier New" pitchFamily="34" charset="-120"/>
-              </a:rPr>
-              <a:t>3.47×</a:t>
-            </a:r>
-            <a:endParaRPr lang="en-US" sz="900" dirty="0"/>
-          </a:p>
-        </p:txBody>
-      </p:sp>
-      <p:sp>
-        <p:nvSpPr>
-          <p:cNvPr id="64" name="Text 62"/>
-          <p:cNvSpPr txBox="1"/>
-          <p:nvPr/>
-        </p:nvSpPr>
-        <p:spPr>
-          <a:xfrm>
-            <a:off x="10575341" y="4279392"/>
-            <a:ext cx="893978" cy="219456"/>
-          </a:xfrm>
-          <a:prstGeom prst="rect">
-            <a:avLst/>
-          </a:prstGeom>
-          <a:noFill/>
-          <a:ln/>
-        </p:spPr>
-        <p:txBody>
-          <a:bodyPr wrap="square" lIns="0" tIns="0" rIns="0" bIns="0" rtlCol="0" anchor="ctr"/>
-          <a:lstStyle/>
-          <a:p>
-            <a:pPr algn="r" indent="0" marL="0">
-              <a:buNone/>
-            </a:pPr>
-            <a:r>
-              <a:rPr lang="en-US" sz="950" b="1" dirty="0">
-                <a:solidFill>
-                  <a:srgbClr val="B04A12"/>
-                </a:solidFill>
-                <a:latin typeface="Courier New" pitchFamily="34" charset="0"/>
-                <a:ea typeface="Courier New" pitchFamily="34" charset="-122"/>
-                <a:cs typeface="Courier New" pitchFamily="34" charset="-120"/>
-              </a:rPr>
-              <a:t>5 GPU</a:t>
-            </a:r>
-            <a:endParaRPr lang="en-US" sz="950" dirty="0"/>
-          </a:p>
-        </p:txBody>
-      </p:sp>
-      <p:sp>
-        <p:nvSpPr>
-          <p:cNvPr id="65" name="Shape 63"/>
-          <p:cNvSpPr/>
-          <p:nvPr/>
-        </p:nvSpPr>
-        <p:spPr>
-          <a:xfrm>
-            <a:off x="8362493" y="4585716"/>
-            <a:ext cx="64008" cy="64008"/>
-          </a:xfrm>
-          <a:prstGeom prst="rect">
-            <a:avLst/>
-          </a:prstGeom>
-          <a:solidFill>
-            <a:srgbClr val="B04A12"/>
-          </a:solidFill>
-          <a:ln/>
-        </p:spPr>
-      </p:sp>
-      <p:sp>
-        <p:nvSpPr>
-          <p:cNvPr id="66" name="Text 64"/>
-          <p:cNvSpPr txBox="1"/>
-          <p:nvPr/>
-        </p:nvSpPr>
-        <p:spPr>
-          <a:xfrm>
-            <a:off x="8527085" y="4517136"/>
-            <a:ext cx="1481328" cy="219456"/>
-          </a:xfrm>
-          <a:prstGeom prst="rect">
-            <a:avLst/>
-          </a:prstGeom>
-          <a:noFill/>
-          <a:ln/>
-        </p:spPr>
-        <p:txBody>
-          <a:bodyPr wrap="square" lIns="0" tIns="0" rIns="0" bIns="0" rtlCol="0" anchor="ctr"/>
-          <a:lstStyle/>
-          <a:p>
-            <a:pPr indent="0" marL="0">
-              <a:buNone/>
-            </a:pPr>
-            <a:r>
-              <a:rPr lang="en-US" sz="950" dirty="0">
-                <a:solidFill>
-                  <a:srgbClr val="3E453F"/>
-                </a:solidFill>
-                <a:latin typeface="Calibri" pitchFamily="34" charset="0"/>
-                <a:ea typeface="Calibri" pitchFamily="34" charset="-122"/>
-                <a:cs typeface="Calibri" pitchFamily="34" charset="-120"/>
-              </a:rPr>
-              <a:t>Agent loop 3 → 6 turns</a:t>
-            </a:r>
-            <a:endParaRPr lang="en-US" sz="950" dirty="0"/>
-          </a:p>
-        </p:txBody>
-      </p:sp>
-      <p:sp>
-        <p:nvSpPr>
-          <p:cNvPr id="67" name="Text 65"/>
-          <p:cNvSpPr txBox="1"/>
-          <p:nvPr/>
-        </p:nvSpPr>
-        <p:spPr>
-          <a:xfrm>
-            <a:off x="9843821" y="4517136"/>
-            <a:ext cx="713232" cy="219456"/>
-          </a:xfrm>
-          <a:prstGeom prst="rect">
-            <a:avLst/>
-          </a:prstGeom>
-          <a:noFill/>
-          <a:ln/>
-        </p:spPr>
-        <p:txBody>
-          <a:bodyPr wrap="square" lIns="0" tIns="0" rIns="0" bIns="0" rtlCol="0" anchor="ctr"/>
-          <a:lstStyle/>
-          <a:p>
-            <a:pPr algn="r" indent="0" marL="0">
-              <a:buNone/>
-            </a:pPr>
-            <a:r>
-              <a:rPr lang="en-US" sz="900" dirty="0">
-                <a:solidFill>
-                  <a:srgbClr val="6A726B"/>
-                </a:solidFill>
-                <a:latin typeface="Courier New" pitchFamily="34" charset="0"/>
-                <a:ea typeface="Courier New" pitchFamily="34" charset="-122"/>
-                <a:cs typeface="Courier New" pitchFamily="34" charset="-120"/>
-              </a:rPr>
-              <a:t>2.00×</a:t>
-            </a:r>
-            <a:endParaRPr lang="en-US" sz="900" dirty="0"/>
-          </a:p>
-        </p:txBody>
-      </p:sp>
-      <p:sp>
-        <p:nvSpPr>
-          <p:cNvPr id="68" name="Text 66"/>
-          <p:cNvSpPr txBox="1"/>
-          <p:nvPr/>
-        </p:nvSpPr>
-        <p:spPr>
-          <a:xfrm>
-            <a:off x="10575341" y="4517136"/>
-            <a:ext cx="893978" cy="219456"/>
-          </a:xfrm>
-          <a:prstGeom prst="rect">
-            <a:avLst/>
-          </a:prstGeom>
-          <a:noFill/>
-          <a:ln/>
-        </p:spPr>
-        <p:txBody>
-          <a:bodyPr wrap="square" lIns="0" tIns="0" rIns="0" bIns="0" rtlCol="0" anchor="ctr"/>
-          <a:lstStyle/>
-          <a:p>
-            <a:pPr algn="r" indent="0" marL="0">
-              <a:buNone/>
-            </a:pPr>
-            <a:r>
-              <a:rPr lang="en-US" sz="950" b="1" dirty="0">
-                <a:solidFill>
-                  <a:srgbClr val="B04A12"/>
-                </a:solidFill>
-                <a:latin typeface="Courier New" pitchFamily="34" charset="0"/>
-                <a:ea typeface="Courier New" pitchFamily="34" charset="-122"/>
-                <a:cs typeface="Courier New" pitchFamily="34" charset="-120"/>
-              </a:rPr>
-              <a:t>4 GPU</a:t>
-            </a:r>
-            <a:endParaRPr lang="en-US" sz="950" dirty="0"/>
-          </a:p>
-        </p:txBody>
-      </p:sp>
-      <p:sp>
-        <p:nvSpPr>
-          <p:cNvPr id="69" name="Shape 67"/>
-          <p:cNvSpPr/>
-          <p:nvPr/>
-        </p:nvSpPr>
-        <p:spPr>
-          <a:xfrm>
-            <a:off x="8362493" y="4823460"/>
-            <a:ext cx="64008" cy="64008"/>
-          </a:xfrm>
-          <a:prstGeom prst="rect">
-            <a:avLst/>
-          </a:prstGeom>
-          <a:solidFill>
-            <a:srgbClr val="008E7F"/>
-          </a:solidFill>
-          <a:ln/>
-        </p:spPr>
-      </p:sp>
-      <p:sp>
-        <p:nvSpPr>
-          <p:cNvPr id="70" name="Text 68"/>
-          <p:cNvSpPr txBox="1"/>
-          <p:nvPr/>
-        </p:nvSpPr>
-        <p:spPr>
-          <a:xfrm>
-            <a:off x="8527085" y="4754880"/>
-            <a:ext cx="1481328" cy="219456"/>
-          </a:xfrm>
-          <a:prstGeom prst="rect">
-            <a:avLst/>
-          </a:prstGeom>
-          <a:noFill/>
-          <a:ln/>
-        </p:spPr>
-        <p:txBody>
-          <a:bodyPr wrap="square" lIns="0" tIns="0" rIns="0" bIns="0" rtlCol="0" anchor="ctr"/>
-          <a:lstStyle/>
-          <a:p>
-            <a:pPr indent="0" marL="0">
-              <a:buNone/>
-            </a:pPr>
-            <a:r>
-              <a:rPr lang="en-US" sz="950" dirty="0">
-                <a:solidFill>
-                  <a:srgbClr val="3E453F"/>
-                </a:solidFill>
-                <a:latin typeface="Calibri" pitchFamily="34" charset="0"/>
-                <a:ea typeface="Calibri" pitchFamily="34" charset="-122"/>
-                <a:cs typeface="Calibri" pitchFamily="34" charset="-120"/>
-              </a:rPr>
-              <a:t>Verbose RFO output</a:t>
-            </a:r>
-            <a:endParaRPr lang="en-US" sz="950" dirty="0"/>
-          </a:p>
-        </p:txBody>
-      </p:sp>
-      <p:sp>
-        <p:nvSpPr>
-          <p:cNvPr id="71" name="Text 69"/>
-          <p:cNvSpPr txBox="1"/>
-          <p:nvPr/>
-        </p:nvSpPr>
-        <p:spPr>
-          <a:xfrm>
-            <a:off x="9843821" y="4754880"/>
-            <a:ext cx="713232" cy="219456"/>
-          </a:xfrm>
-          <a:prstGeom prst="rect">
-            <a:avLst/>
-          </a:prstGeom>
-          <a:noFill/>
-          <a:ln/>
-        </p:spPr>
-        <p:txBody>
-          <a:bodyPr wrap="square" lIns="0" tIns="0" rIns="0" bIns="0" rtlCol="0" anchor="ctr"/>
-          <a:lstStyle/>
-          <a:p>
-            <a:pPr algn="r" indent="0" marL="0">
-              <a:buNone/>
-            </a:pPr>
-            <a:r>
-              <a:rPr lang="en-US" sz="900" dirty="0">
-                <a:solidFill>
-                  <a:srgbClr val="6A726B"/>
-                </a:solidFill>
-                <a:latin typeface="Courier New" pitchFamily="34" charset="0"/>
-                <a:ea typeface="Courier New" pitchFamily="34" charset="-122"/>
-                <a:cs typeface="Courier New" pitchFamily="34" charset="-120"/>
-              </a:rPr>
-              <a:t>1.17×</a:t>
-            </a:r>
-            <a:endParaRPr lang="en-US" sz="900" dirty="0"/>
-          </a:p>
-        </p:txBody>
-      </p:sp>
-      <p:sp>
-        <p:nvSpPr>
-          <p:cNvPr id="72" name="Text 70"/>
-          <p:cNvSpPr txBox="1"/>
-          <p:nvPr/>
-        </p:nvSpPr>
-        <p:spPr>
-          <a:xfrm>
-            <a:off x="10575341" y="4754880"/>
-            <a:ext cx="893978" cy="219456"/>
-          </a:xfrm>
-          <a:prstGeom prst="rect">
-            <a:avLst/>
-          </a:prstGeom>
-          <a:noFill/>
-          <a:ln/>
-        </p:spPr>
-        <p:txBody>
-          <a:bodyPr wrap="square" lIns="0" tIns="0" rIns="0" bIns="0" rtlCol="0" anchor="ctr"/>
-          <a:lstStyle/>
-          <a:p>
-            <a:pPr algn="r" indent="0" marL="0">
-              <a:buNone/>
-            </a:pPr>
-            <a:r>
-              <a:rPr lang="en-US" sz="950" b="1" dirty="0">
-                <a:solidFill>
-                  <a:srgbClr val="008E7F"/>
-                </a:solidFill>
-                <a:latin typeface="Courier New" pitchFamily="34" charset="0"/>
-                <a:ea typeface="Courier New" pitchFamily="34" charset="-122"/>
-                <a:cs typeface="Courier New" pitchFamily="34" charset="-120"/>
-              </a:rPr>
-              <a:t>fits</a:t>
-            </a:r>
-            <a:endParaRPr lang="en-US" sz="950" dirty="0"/>
-          </a:p>
-        </p:txBody>
-      </p:sp>
-      <p:sp>
-        <p:nvSpPr>
-          <p:cNvPr id="73" name="Shape 71"/>
-          <p:cNvSpPr/>
-          <p:nvPr/>
-        </p:nvSpPr>
-        <p:spPr>
-          <a:xfrm>
-            <a:off x="8362493" y="5061204"/>
-            <a:ext cx="64008" cy="64008"/>
-          </a:xfrm>
-          <a:prstGeom prst="rect">
-            <a:avLst/>
-          </a:prstGeom>
-          <a:solidFill>
-            <a:srgbClr val="008E7F"/>
-          </a:solidFill>
-          <a:ln/>
-        </p:spPr>
-      </p:sp>
-      <p:sp>
-        <p:nvSpPr>
-          <p:cNvPr id="74" name="Text 72"/>
-          <p:cNvSpPr txBox="1"/>
-          <p:nvPr/>
-        </p:nvSpPr>
-        <p:spPr>
-          <a:xfrm>
-            <a:off x="8527085" y="4992624"/>
-            <a:ext cx="1481328" cy="219456"/>
-          </a:xfrm>
-          <a:prstGeom prst="rect">
-            <a:avLst/>
-          </a:prstGeom>
-          <a:noFill/>
-          <a:ln/>
-        </p:spPr>
-        <p:txBody>
-          <a:bodyPr wrap="square" lIns="0" tIns="0" rIns="0" bIns="0" rtlCol="0" anchor="ctr"/>
-          <a:lstStyle/>
-          <a:p>
-            <a:pPr indent="0" marL="0">
-              <a:buNone/>
-            </a:pPr>
-            <a:r>
-              <a:rPr lang="en-US" sz="950" dirty="0">
-                <a:solidFill>
-                  <a:srgbClr val="3E453F"/>
-                </a:solidFill>
-                <a:latin typeface="Calibri" pitchFamily="34" charset="0"/>
-                <a:ea typeface="Calibri" pitchFamily="34" charset="-122"/>
-                <a:cs typeface="Calibri" pitchFamily="34" charset="-120"/>
-              </a:rPr>
-              <a:t>Chat becomes primary UI</a:t>
-            </a:r>
-            <a:endParaRPr lang="en-US" sz="950" dirty="0"/>
-          </a:p>
-        </p:txBody>
-      </p:sp>
-      <p:sp>
-        <p:nvSpPr>
-          <p:cNvPr id="75" name="Text 73"/>
-          <p:cNvSpPr txBox="1"/>
-          <p:nvPr/>
-        </p:nvSpPr>
-        <p:spPr>
-          <a:xfrm>
-            <a:off x="9843821" y="4992624"/>
-            <a:ext cx="713232" cy="219456"/>
-          </a:xfrm>
-          <a:prstGeom prst="rect">
-            <a:avLst/>
-          </a:prstGeom>
-          <a:noFill/>
-          <a:ln/>
-        </p:spPr>
-        <p:txBody>
-          <a:bodyPr wrap="square" lIns="0" tIns="0" rIns="0" bIns="0" rtlCol="0" anchor="ctr"/>
-          <a:lstStyle/>
-          <a:p>
-            <a:pPr algn="r" indent="0" marL="0">
-              <a:buNone/>
-            </a:pPr>
-            <a:r>
-              <a:rPr lang="en-US" sz="900" dirty="0">
-                <a:solidFill>
-                  <a:srgbClr val="6A726B"/>
-                </a:solidFill>
-                <a:latin typeface="Courier New" pitchFamily="34" charset="0"/>
-                <a:ea typeface="Courier New" pitchFamily="34" charset="-122"/>
-                <a:cs typeface="Courier New" pitchFamily="34" charset="-120"/>
-              </a:rPr>
-              <a:t>1.00×</a:t>
-            </a:r>
-            <a:endParaRPr lang="en-US" sz="900" dirty="0"/>
-          </a:p>
-        </p:txBody>
-      </p:sp>
-      <p:sp>
-        <p:nvSpPr>
-          <p:cNvPr id="76" name="Text 74"/>
-          <p:cNvSpPr txBox="1"/>
-          <p:nvPr/>
-        </p:nvSpPr>
-        <p:spPr>
-          <a:xfrm>
-            <a:off x="10575341" y="4992624"/>
-            <a:ext cx="893978" cy="219456"/>
-          </a:xfrm>
-          <a:prstGeom prst="rect">
-            <a:avLst/>
-          </a:prstGeom>
-          <a:noFill/>
-          <a:ln/>
-        </p:spPr>
-        <p:txBody>
-          <a:bodyPr wrap="square" lIns="0" tIns="0" rIns="0" bIns="0" rtlCol="0" anchor="ctr"/>
-          <a:lstStyle/>
-          <a:p>
-            <a:pPr algn="r" indent="0" marL="0">
-              <a:buNone/>
-            </a:pPr>
-            <a:r>
-              <a:rPr lang="en-US" sz="950" b="1" dirty="0">
-                <a:solidFill>
-                  <a:srgbClr val="008E7F"/>
-                </a:solidFill>
-                <a:latin typeface="Courier New" pitchFamily="34" charset="0"/>
-                <a:ea typeface="Courier New" pitchFamily="34" charset="-122"/>
-                <a:cs typeface="Courier New" pitchFamily="34" charset="-120"/>
-              </a:rPr>
-              <a:t>fits</a:t>
-            </a:r>
-            <a:endParaRPr lang="en-US" sz="950" dirty="0"/>
-          </a:p>
-        </p:txBody>
-      </p:sp>
-      <p:sp>
-        <p:nvSpPr>
-          <p:cNvPr id="77" name="Shape 75"/>
-          <p:cNvSpPr/>
-          <p:nvPr/>
-        </p:nvSpPr>
-        <p:spPr>
-          <a:xfrm>
-            <a:off x="8362493" y="5303520"/>
-            <a:ext cx="3106826" cy="960120"/>
-          </a:xfrm>
-          <a:prstGeom prst="roundRect">
-            <a:avLst>
-              <a:gd name="adj" fmla="val 3810"/>
-            </a:avLst>
-          </a:prstGeom>
-          <a:solidFill>
-            <a:srgbClr val="EDEFE9"/>
-          </a:solidFill>
-          <a:ln/>
-        </p:spPr>
-      </p:sp>
-      <p:sp>
-        <p:nvSpPr>
-          <p:cNvPr id="78" name="Text 76"/>
-          <p:cNvSpPr txBox="1"/>
-          <p:nvPr/>
-        </p:nvSpPr>
-        <p:spPr>
-          <a:xfrm>
-            <a:off x="8490509" y="5394960"/>
-            <a:ext cx="2850794" cy="201168"/>
-          </a:xfrm>
-          <a:prstGeom prst="rect">
-            <a:avLst/>
-          </a:prstGeom>
-          <a:noFill/>
-          <a:ln/>
-        </p:spPr>
-        <p:txBody>
-          <a:bodyPr wrap="square" lIns="0" tIns="0" rIns="0" bIns="0" rtlCol="0" anchor="ctr"/>
-          <a:lstStyle/>
-          <a:p>
-            <a:pPr indent="0" marL="0">
-              <a:buNone/>
-            </a:pPr>
-            <a:r>
-              <a:rPr lang="en-US" sz="1000" b="1" dirty="0">
-                <a:solidFill>
-                  <a:srgbClr val="B04A12"/>
-                </a:solidFill>
-                <a:latin typeface="Arial" pitchFamily="34" charset="0"/>
-                <a:ea typeface="Arial" pitchFamily="34" charset="-122"/>
-                <a:cs typeface="Arial" pitchFamily="34" charset="-120"/>
-              </a:rPr>
-              <a:t>The context budget is now load-bearing</a:t>
-            </a:r>
-            <a:endParaRPr lang="en-US" sz="1000" dirty="0"/>
-          </a:p>
-        </p:txBody>
-      </p:sp>
-      <p:sp>
-        <p:nvSpPr>
-          <p:cNvPr id="79" name="Text 77"/>
-          <p:cNvSpPr txBox="1"/>
-          <p:nvPr/>
-        </p:nvSpPr>
-        <p:spPr>
-          <a:xfrm>
-            <a:off x="8490509" y="5614416"/>
-            <a:ext cx="2850794" cy="585216"/>
-          </a:xfrm>
-          <a:prstGeom prst="rect">
-            <a:avLst/>
-          </a:prstGeom>
-          <a:noFill/>
-          <a:ln/>
-        </p:spPr>
-        <p:txBody>
-          <a:bodyPr wrap="square" lIns="0" tIns="0" rIns="0" bIns="0" rtlCol="0" anchor="ctr"/>
-          <a:lstStyle/>
-          <a:p>
-            <a:pPr indent="0" marL="0">
-              <a:lnSpc>
-                <a:spcPts val="1200"/>
-              </a:lnSpc>
-              <a:buNone/>
-            </a:pPr>
-            <a:r>
-              <a:rPr lang="en-US" sz="950" dirty="0">
-                <a:solidFill>
-                  <a:srgbClr val="3E453F"/>
-                </a:solidFill>
-                <a:latin typeface="Calibri" pitchFamily="34" charset="0"/>
-                <a:ea typeface="Calibri" pitchFamily="34" charset="-122"/>
-                <a:cs typeface="Calibri" pitchFamily="34" charset="-120"/>
-              </a:rPr>
-              <a:t>At 14 GPUs a context cap was good practice. At three it is the control: a hard limit in code, with an alert at 8,000 tokens.</a:t>
+              <a:t>Even pan-India it is 18% of tokens and 0.33 of a GPU. The alarm tier at 15M/day sets the fleet; CHM adds model tiers, not cards.</a:t>
             </a:r>
             <a:endParaRPr lang="en-US" sz="950" dirty="0"/>
           </a:p>
@@ -4118,7 +3895,7 @@
                 <a:ea typeface="Arial" pitchFamily="34" charset="-122"/>
                 <a:cs typeface="Arial" pitchFamily="34" charset="-120"/>
               </a:rPr>
-              <a:t>Three H100 — and what it costs</a:t>
+              <a:t>The TSD pool: right total, wrong split</a:t>
             </a:r>
             <a:endParaRPr lang="en-US" sz="2900" dirty="0"/>
           </a:p>
@@ -4157,7 +3934,7 @@
                 <a:ea typeface="Calibri" pitchFamily="34" charset="-122"/>
                 <a:cs typeface="Calibri" pitchFamily="34" charset="-120"/>
               </a:rPr>
-              <a:t>Peak-hour demand measures 1.37 GPU of work</a:t>
+              <a:t>Measured demand lands on the TSD’s own 4 production H200</a:t>
             </a:r>
             <a:pPr indent="0" marL="0">
               <a:buNone/>
@@ -4171,7 +3948,7 @@
                 <a:ea typeface="Calibri" pitchFamily="34" charset="-122"/>
                 <a:cs typeface="Calibri" pitchFamily="34" charset="-120"/>
               </a:rPr>
-              <a:t>   ·   three carries it with N+1   ·   two independent methods agree to within 3.8%</a:t>
+              <a:t>   ·   but the heavy tier needs 2.06 of them, so “2 active for HA” has no headroom left</a:t>
             </a:r>
             <a:endParaRPr lang="en-US" sz="1150" dirty="0"/>
           </a:p>
@@ -4237,7 +4014,7 @@
                 <a:ea typeface="Arial" pitchFamily="34" charset="-122"/>
                 <a:cs typeface="Arial" pitchFamily="34" charset="-120"/>
               </a:rPr>
-              <a:t>GPU FLEET</a:t>
+              <a:t>PRODUCTION GPU</a:t>
             </a:r>
             <a:endParaRPr lang="en-US" sz="850" dirty="0"/>
           </a:p>
@@ -4276,7 +4053,7 @@
                 <a:ea typeface="Arial" pitchFamily="34" charset="-122"/>
                 <a:cs typeface="Arial" pitchFamily="34" charset="-120"/>
               </a:rPr>
-              <a:t>3</a:t>
+              <a:t>4</a:t>
             </a:r>
             <a:pPr indent="0" marL="0">
               <a:buNone/>
@@ -4290,7 +4067,7 @@
                 <a:ea typeface="Arial" pitchFamily="34" charset="-122"/>
                 <a:cs typeface="Arial" pitchFamily="34" charset="-120"/>
               </a:rPr>
-              <a:t> × H100 80GB</a:t>
+              <a:t> +1 × H200</a:t>
             </a:r>
             <a:endParaRPr lang="en-US" sz="3100" dirty="0"/>
           </a:p>
@@ -4332,7 +4109,7 @@
                 <a:ea typeface="Calibri" pitchFamily="34" charset="-122"/>
                 <a:cs typeface="Calibri" pitchFamily="34" charset="-120"/>
               </a:rPr>
-              <a:t>One shared pool, single site.</a:t>
+              <a:t>Matches the TSD total.</a:t>
             </a:r>
             <a:endParaRPr lang="en-US" sz="950" dirty="0"/>
           </a:p>
@@ -4352,7 +4129,7 @@
                 <a:ea typeface="Calibri" pitchFamily="34" charset="-122"/>
                 <a:cs typeface="Calibri" pitchFamily="34" charset="-120"/>
               </a:rPr>
-              <a:t>N+1 across the platform.</a:t>
+              <a:t>3 serving + 1 for N+1.</a:t>
             </a:r>
             <a:endParaRPr lang="en-US" sz="950" dirty="0"/>
           </a:p>
@@ -4418,7 +4195,7 @@
                 <a:ea typeface="Arial" pitchFamily="34" charset="-122"/>
                 <a:cs typeface="Arial" pitchFamily="34" charset="-120"/>
               </a:rPr>
-              <a:t>UTILISATION</a:t>
+              <a:t>HEAVY TIER</a:t>
             </a:r>
             <a:endParaRPr lang="en-US" sz="850" dirty="0"/>
           </a:p>
@@ -4457,7 +4234,7 @@
                 <a:ea typeface="Arial" pitchFamily="34" charset="-122"/>
                 <a:cs typeface="Arial" pitchFamily="34" charset="-120"/>
               </a:rPr>
-              <a:t>46</a:t>
+              <a:t>2.06</a:t>
             </a:r>
             <a:pPr indent="0" marL="0">
               <a:buNone/>
@@ -4471,7 +4248,7 @@
                 <a:ea typeface="Arial" pitchFamily="34" charset="-122"/>
                 <a:cs typeface="Arial" pitchFamily="34" charset="-120"/>
               </a:rPr>
-              <a:t> % at peak</a:t>
+              <a:t> of 3 cards</a:t>
             </a:r>
             <a:endParaRPr lang="en-US" sz="3100" dirty="0"/>
           </a:p>
@@ -4513,7 +4290,7 @@
                 <a:ea typeface="Calibri" pitchFamily="34" charset="-122"/>
                 <a:cs typeface="Calibri" pitchFamily="34" charset="-120"/>
               </a:rPr>
-              <a:t>69% with one GPU down;</a:t>
+              <a:t>gpt-oss-120b alone, at</a:t>
             </a:r>
             <a:endParaRPr lang="en-US" sz="950" dirty="0"/>
           </a:p>
@@ -4533,7 +4310,7 @@
                 <a:ea typeface="Calibri" pitchFamily="34" charset="-122"/>
                 <a:cs typeface="Calibri" pitchFamily="34" charset="-120"/>
               </a:rPr>
-              <a:t>19% at average load.</a:t>
+              <a:t>pan-India peak.</a:t>
             </a:r>
             <a:endParaRPr lang="en-US" sz="950" dirty="0"/>
           </a:p>
@@ -4599,7 +4376,7 @@
                 <a:ea typeface="Arial" pitchFamily="34" charset="-122"/>
                 <a:cs typeface="Arial" pitchFamily="34" charset="-120"/>
               </a:rPr>
-              <a:t>GROWTH</a:t>
+              <a:t>CHANGE MGMT</a:t>
             </a:r>
             <a:endParaRPr lang="en-US" sz="850" dirty="0"/>
           </a:p>
@@ -4638,7 +4415,7 @@
                 <a:ea typeface="Arial" pitchFamily="34" charset="-122"/>
                 <a:cs typeface="Arial" pitchFamily="34" charset="-120"/>
               </a:rPr>
-              <a:t>1.6</a:t>
+              <a:t>18</a:t>
             </a:r>
             <a:pPr indent="0" marL="0">
               <a:buNone/>
@@ -4652,7 +4429,7 @@
                 <a:ea typeface="Arial" pitchFamily="34" charset="-122"/>
                 <a:cs typeface="Arial" pitchFamily="34" charset="-120"/>
               </a:rPr>
-              <a:t> × headroom</a:t>
+              <a:t> % of tokens</a:t>
             </a:r>
             <a:endParaRPr lang="en-US" sz="3100" dirty="0"/>
           </a:p>
@@ -4694,7 +4471,7 @@
                 <a:ea typeface="Calibri" pitchFamily="34" charset="-122"/>
                 <a:cs typeface="Calibri" pitchFamily="34" charset="-120"/>
               </a:rPr>
-              <a:t>RFO demand can grow 57%</a:t>
+              <a:t>Pan-India, on a release</a:t>
             </a:r>
             <a:endParaRPr lang="en-US" sz="950" dirty="0"/>
           </a:p>
@@ -4714,7 +4491,7 @@
                 <a:ea typeface="Calibri" pitchFamily="34" charset="-122"/>
                 <a:cs typeface="Calibri" pitchFamily="34" charset="-120"/>
               </a:rPr>
-              <a:t>before a 4th GPU.</a:t>
+              <a:t>burst day. 0.33 GPU.</a:t>
             </a:r>
             <a:endParaRPr lang="en-US" sz="950" dirty="0"/>
           </a:p>
@@ -4780,7 +4557,7 @@
                 <a:ea typeface="Arial" pitchFamily="34" charset="-122"/>
                 <a:cs typeface="Arial" pitchFamily="34" charset="-120"/>
               </a:rPr>
-              <a:t>SAVING</a:t>
+              <a:t>THE E5 CARD</a:t>
             </a:r>
             <a:endParaRPr lang="en-US" sz="850" dirty="0"/>
           </a:p>
@@ -4819,7 +4596,7 @@
                 <a:ea typeface="Arial" pitchFamily="34" charset="-122"/>
                 <a:cs typeface="Arial" pitchFamily="34" charset="-120"/>
               </a:rPr>
-              <a:t>308</a:t>
+              <a:t>0.03</a:t>
             </a:r>
             <a:pPr indent="0" marL="0">
               <a:buNone/>
@@ -4833,7 +4610,7 @@
                 <a:ea typeface="Arial" pitchFamily="34" charset="-122"/>
                 <a:cs typeface="Arial" pitchFamily="34" charset="-120"/>
               </a:rPr>
-              <a:t> k $/year</a:t>
+              <a:t> % utilised</a:t>
             </a:r>
             <a:endParaRPr lang="en-US" sz="3100" dirty="0"/>
           </a:p>
@@ -4875,7 +4652,7 @@
                 <a:ea typeface="Calibri" pitchFamily="34" charset="-122"/>
                 <a:cs typeface="Calibri" pitchFamily="34" charset="-120"/>
               </a:rPr>
-              <a:t>vs the 14-GPU two-site</a:t>
+              <a:t>A 0.7 GB encoder on a</a:t>
             </a:r>
             <a:endParaRPr lang="en-US" sz="950" dirty="0"/>
           </a:p>
@@ -4895,7 +4672,7 @@
                 <a:ea typeface="Calibri" pitchFamily="34" charset="-122"/>
                 <a:cs typeface="Calibri" pitchFamily="34" charset="-120"/>
               </a:rPr>
-              <a:t>design, on GPU alone.</a:t>
+              <a:t>141 GB card.</a:t>
             </a:r>
             <a:endParaRPr lang="en-US" sz="950" dirty="0"/>
           </a:p>
@@ -4910,7 +4687,7 @@
         <p:spPr>
           <a:xfrm>
             <a:off x="502920" y="2834640"/>
-            <a:ext cx="2743200" cy="182880"/>
+            <a:ext cx="3657600" cy="182880"/>
           </a:xfrm>
           <a:prstGeom prst="rect">
             <a:avLst/>
@@ -4934,7 +4711,7 @@
                 <a:ea typeface="Arial" pitchFamily="34" charset="-122"/>
                 <a:cs typeface="Arial" pitchFamily="34" charset="-120"/>
               </a:rPr>
-              <a:t>THE DIVISION</a:t>
+              <a:t>HA POSTURE AT PAN-INDIA PEAK</a:t>
             </a:r>
             <a:endParaRPr lang="en-US" sz="850" dirty="0"/>
           </a:p>
@@ -5000,7 +4777,7 @@
                 <a:ea typeface="Calibri" pitchFamily="34" charset="-122"/>
                 <a:cs typeface="Calibri" pitchFamily="34" charset="-120"/>
               </a:rPr>
-              <a:t>Peak-hour demand</a:t>
+              <a:t>3 cards healthy</a:t>
             </a:r>
             <a:endParaRPr lang="en-US" sz="900" dirty="0"/>
           </a:p>
@@ -5039,7 +4816,7 @@
                 <a:ea typeface="Arial" pitchFamily="34" charset="-122"/>
                 <a:cs typeface="Arial" pitchFamily="34" charset="-120"/>
               </a:rPr>
-              <a:t>7,458 tok/s</a:t>
+              <a:t>48% of knee</a:t>
             </a:r>
             <a:endParaRPr lang="en-US" sz="1500" dirty="0"/>
           </a:p>
@@ -5081,7 +4858,7 @@
                 <a:ea typeface="Calibri" pitchFamily="34" charset="-122"/>
                 <a:cs typeface="Calibri" pitchFamily="34" charset="-120"/>
               </a:rPr>
-              <a:t>both classes, 2.4× the daily mean</a:t>
+              <a:t>comfortable — the normal state</a:t>
             </a:r>
             <a:endParaRPr lang="en-US" sz="800" dirty="0"/>
           </a:p>
@@ -5167,7 +4944,7 @@
                 <a:ea typeface="Calibri" pitchFamily="34" charset="-122"/>
                 <a:cs typeface="Calibri" pitchFamily="34" charset="-120"/>
               </a:rPr>
-              <a:t>Shared-pool capacity</a:t>
+              <a:t>2 active (TSD HA)</a:t>
             </a:r>
             <a:endParaRPr lang="en-US" sz="900" dirty="0"/>
           </a:p>
@@ -5206,7 +4983,7 @@
                 <a:ea typeface="Arial" pitchFamily="34" charset="-122"/>
                 <a:cs typeface="Arial" pitchFamily="34" charset="-120"/>
               </a:rPr>
-              <a:t>5,433 tok/s</a:t>
+              <a:t>72% of knee</a:t>
             </a:r>
             <a:endParaRPr lang="en-US" sz="1500" dirty="0"/>
           </a:p>
@@ -5248,7 +5025,7 @@
                 <a:ea typeface="Calibri" pitchFamily="34" charset="-122"/>
                 <a:cs typeface="Calibri" pitchFamily="34" charset="-120"/>
               </a:rPr>
-              <a:t>measured, mixed traffic, per H100</a:t>
+              <a:t>meets SLO, 30% headroom spent</a:t>
             </a:r>
             <a:endParaRPr lang="en-US" sz="800" dirty="0"/>
           </a:p>
@@ -5334,7 +5111,7 @@
                 <a:ea typeface="Calibri" pitchFamily="34" charset="-122"/>
                 <a:cs typeface="Calibri" pitchFamily="34" charset="-120"/>
               </a:rPr>
-              <a:t>Work required</a:t>
+              <a:t>1 surviving</a:t>
             </a:r>
             <a:endParaRPr lang="en-US" sz="900" dirty="0"/>
           </a:p>
@@ -5373,7 +5150,7 @@
                 <a:ea typeface="Arial" pitchFamily="34" charset="-122"/>
                 <a:cs typeface="Arial" pitchFamily="34" charset="-120"/>
               </a:rPr>
-              <a:t>1.37 GPU</a:t>
+              <a:t>145% of knee</a:t>
             </a:r>
             <a:endParaRPr lang="en-US" sz="1500" dirty="0"/>
           </a:p>
@@ -5415,7 +5192,7 @@
                 <a:ea typeface="Calibri" pitchFamily="34" charset="-122"/>
                 <a:cs typeface="Calibri" pitchFamily="34" charset="-120"/>
               </a:rPr>
-              <a:t>additive method agrees to 3.8%</a:t>
+              <a:t>SLO breach at peak hour</a:t>
             </a:r>
             <a:endParaRPr lang="en-US" sz="800" dirty="0"/>
           </a:p>
@@ -5424,26 +5201,6 @@
       <p:sp>
         <p:nvSpPr>
           <p:cNvPr id="35" name="Shape 33"/>
-          <p:cNvSpPr/>
-          <p:nvPr/>
-        </p:nvSpPr>
-        <p:spPr>
-          <a:xfrm>
-            <a:off x="7169628" y="3465576"/>
-            <a:ext cx="137160" cy="128016"/>
-          </a:xfrm>
-          <a:prstGeom prst="rightArrow">
-            <a:avLst/>
-          </a:prstGeom>
-          <a:solidFill>
-            <a:srgbClr val="CB6127"/>
-          </a:solidFill>
-          <a:ln/>
-        </p:spPr>
-      </p:sp>
-      <p:sp>
-        <p:nvSpPr>
-          <p:cNvPr id="36" name="Shape 34"/>
           <p:cNvSpPr/>
           <p:nvPr/>
         </p:nvSpPr>
@@ -5470,7 +5227,7 @@
       </p:sp>
       <p:sp>
         <p:nvSpPr>
-          <p:cNvPr id="37" name="Text 35"/>
+          <p:cNvPr id="36" name="Text 34"/>
           <p:cNvSpPr txBox="1"/>
           <p:nvPr/>
         </p:nvSpPr>
@@ -5501,7 +5258,7 @@
                 <a:ea typeface="Calibri" pitchFamily="34" charset="-122"/>
                 <a:cs typeface="Calibri" pitchFamily="34" charset="-120"/>
               </a:rPr>
-              <a:t>Survives one failure</a:t>
+              <a:t>Free the E5 card</a:t>
             </a:r>
             <a:endParaRPr lang="en-US" sz="900" dirty="0"/>
           </a:p>
@@ -5509,7 +5266,7 @@
       </p:sp>
       <p:sp>
         <p:nvSpPr>
-          <p:cNvPr id="38" name="Text 36"/>
+          <p:cNvPr id="37" name="Text 35"/>
           <p:cNvSpPr txBox="1"/>
           <p:nvPr/>
         </p:nvSpPr>
@@ -5540,7 +5297,7 @@
                 <a:ea typeface="Arial" pitchFamily="34" charset="-122"/>
                 <a:cs typeface="Arial" pitchFamily="34" charset="-120"/>
               </a:rPr>
-              <a:t>68.6%</a:t>
+              <a:t>4 heavy-capable</a:t>
             </a:r>
             <a:endParaRPr lang="en-US" sz="1500" dirty="0"/>
           </a:p>
@@ -5548,7 +5305,7 @@
       </p:sp>
       <p:sp>
         <p:nvSpPr>
-          <p:cNvPr id="39" name="Text 37"/>
+          <p:cNvPr id="38" name="Text 36"/>
           <p:cNvSpPr txBox="1"/>
           <p:nvPr/>
         </p:nvSpPr>
@@ -5582,7 +5339,7 @@
                 <a:ea typeface="Calibri" pitchFamily="34" charset="-122"/>
                 <a:cs typeface="Calibri" pitchFamily="34" charset="-120"/>
               </a:rPr>
-              <a:t>of capacity on the 2 that remain</a:t>
+              <a:t>turns 2-at-the-edge into 3-with-margin</a:t>
             </a:r>
             <a:endParaRPr lang="en-US" sz="800" dirty="0"/>
           </a:p>
@@ -5590,27 +5347,7 @@
       </p:sp>
       <p:sp>
         <p:nvSpPr>
-          <p:cNvPr id="40" name="Shape 38"/>
-          <p:cNvSpPr/>
-          <p:nvPr/>
-        </p:nvSpPr>
-        <p:spPr>
-          <a:xfrm>
-            <a:off x="9454347" y="3465576"/>
-            <a:ext cx="137160" cy="128016"/>
-          </a:xfrm>
-          <a:prstGeom prst="rightArrow">
-            <a:avLst/>
-          </a:prstGeom>
-          <a:solidFill>
-            <a:srgbClr val="CB6127"/>
-          </a:solidFill>
-          <a:ln/>
-        </p:spPr>
-      </p:sp>
-      <p:sp>
-        <p:nvSpPr>
-          <p:cNvPr id="41" name="Shape 39"/>
+          <p:cNvPr id="39" name="Shape 37"/>
           <p:cNvSpPr/>
           <p:nvPr/>
         </p:nvSpPr>
@@ -5637,7 +5374,7 @@
       </p:sp>
       <p:sp>
         <p:nvSpPr>
-          <p:cNvPr id="42" name="Text 40"/>
+          <p:cNvPr id="40" name="Text 38"/>
           <p:cNvSpPr txBox="1"/>
           <p:nvPr/>
         </p:nvSpPr>
@@ -5668,7 +5405,7 @@
                 <a:ea typeface="Calibri" pitchFamily="34" charset="-122"/>
                 <a:cs typeface="Calibri" pitchFamily="34" charset="-120"/>
               </a:rPr>
-              <a:t>Fleet</a:t>
+              <a:t>Model tiers covered</a:t>
             </a:r>
             <a:endParaRPr lang="en-US" sz="900" dirty="0"/>
           </a:p>
@@ -5676,7 +5413,7 @@
       </p:sp>
       <p:sp>
         <p:nvSpPr>
-          <p:cNvPr id="43" name="Text 41"/>
+          <p:cNvPr id="41" name="Text 39"/>
           <p:cNvSpPr txBox="1"/>
           <p:nvPr/>
         </p:nvSpPr>
@@ -5707,7 +5444,7 @@
                 <a:ea typeface="Arial" pitchFamily="34" charset="-122"/>
                 <a:cs typeface="Arial" pitchFamily="34" charset="-120"/>
               </a:rPr>
-              <a:t>3 × H100</a:t>
+              <a:t>2 of 6</a:t>
             </a:r>
             <a:endParaRPr lang="en-US" sz="1500" dirty="0"/>
           </a:p>
@@ -5715,7 +5452,7 @@
       </p:sp>
       <p:sp>
         <p:nvSpPr>
-          <p:cNvPr id="44" name="Text 42"/>
+          <p:cNvPr id="42" name="Text 40"/>
           <p:cNvSpPr txBox="1"/>
           <p:nvPr/>
         </p:nvSpPr>
@@ -5749,7 +5486,7 @@
                 <a:ea typeface="Calibri" pitchFamily="34" charset="-122"/>
                 <a:cs typeface="Calibri" pitchFamily="34" charset="-120"/>
               </a:rPr>
-              <a:t>the smallest N+1 that holds</a:t>
+              <a:t>Gemma, Llama 8B and the VLM have no node</a:t>
             </a:r>
             <a:endParaRPr lang="en-US" sz="800" dirty="0"/>
           </a:p>
@@ -5757,7 +5494,7 @@
       </p:sp>
       <p:sp>
         <p:nvSpPr>
-          <p:cNvPr id="45" name="Shape 43"/>
+          <p:cNvPr id="43" name="Shape 41"/>
           <p:cNvSpPr/>
           <p:nvPr/>
         </p:nvSpPr>
@@ -5784,7 +5521,7 @@
       </p:sp>
       <p:sp>
         <p:nvSpPr>
-          <p:cNvPr id="46" name="Shape 44"/>
+          <p:cNvPr id="44" name="Shape 42"/>
           <p:cNvSpPr/>
           <p:nvPr/>
         </p:nvSpPr>
@@ -5804,7 +5541,7 @@
       </p:sp>
       <p:sp>
         <p:nvSpPr>
-          <p:cNvPr id="47" name="Text 45"/>
+          <p:cNvPr id="45" name="Text 43"/>
           <p:cNvSpPr txBox="1"/>
           <p:nvPr/>
         </p:nvSpPr>
@@ -5835,7 +5572,7 @@
                 <a:ea typeface="Arial" pitchFamily="34" charset="-122"/>
                 <a:cs typeface="Arial" pitchFamily="34" charset="-120"/>
               </a:rPr>
-              <a:t>Three is an HA number, not throughput</a:t>
+              <a:t>CHM adds tiers, not cards</a:t>
             </a:r>
             <a:endParaRPr lang="en-US" sz="1200" dirty="0"/>
           </a:p>
@@ -5843,7 +5580,7 @@
       </p:sp>
       <p:sp>
         <p:nvSpPr>
-          <p:cNvPr id="48" name="Text 46"/>
+          <p:cNvPr id="46" name="Text 44"/>
           <p:cNvSpPr txBox="1"/>
           <p:nvPr/>
         </p:nvSpPr>
@@ -5877,7 +5614,7 @@
                 <a:ea typeface="Calibri" pitchFamily="34" charset="-122"/>
                 <a:cs typeface="Calibri" pitchFamily="34" charset="-120"/>
               </a:rPr>
-              <a:t>Peak needs 1.37 GPU, so two would meet the SLO. Three is the smallest fleet where a GPU can fail during the busiest hour and the platform still holds. That is the whole case for the third card.</a:t>
+              <a:t>Pan-India CHM is 18% of tokens and 0.33 of a GPU. What it really adds is two more model tiers to host — Llama 3.1 8B for MOP generation and heavier use of the Gemma fast tier — neither of which has a node in the §12 pool.</a:t>
             </a:r>
             <a:endParaRPr lang="en-US" sz="1000" dirty="0"/>
           </a:p>
@@ -5885,7 +5622,7 @@
       </p:sp>
       <p:sp>
         <p:nvSpPr>
-          <p:cNvPr id="49" name="Shape 47"/>
+          <p:cNvPr id="47" name="Shape 45"/>
           <p:cNvSpPr/>
           <p:nvPr/>
         </p:nvSpPr>
@@ -5912,7 +5649,7 @@
       </p:sp>
       <p:sp>
         <p:nvSpPr>
-          <p:cNvPr id="50" name="Shape 48"/>
+          <p:cNvPr id="48" name="Shape 46"/>
           <p:cNvSpPr/>
           <p:nvPr/>
         </p:nvSpPr>
@@ -5925,14 +5662,14 @@
             <a:avLst/>
           </a:prstGeom>
           <a:solidFill>
-            <a:srgbClr val="00A896"/>
+            <a:srgbClr val="CB6127"/>
           </a:solidFill>
           <a:ln/>
         </p:spPr>
       </p:sp>
       <p:sp>
         <p:nvSpPr>
-          <p:cNvPr id="51" name="Text 49"/>
+          <p:cNvPr id="49" name="Text 47"/>
           <p:cNvSpPr txBox="1"/>
           <p:nvPr/>
         </p:nvSpPr>
@@ -5963,7 +5700,7 @@
                 <a:ea typeface="Arial" pitchFamily="34" charset="-122"/>
                 <a:cs typeface="Arial" pitchFamily="34" charset="-120"/>
               </a:rPr>
-              <a:t>Chat was only 0.24 GPU of load</a:t>
+              <a:t>The §12 pool covers 2 of 6 models</a:t>
             </a:r>
             <a:endParaRPr lang="en-US" sz="1200" dirty="0"/>
           </a:p>
@@ -5971,7 +5708,7 @@
       </p:sp>
       <p:sp>
         <p:nvSpPr>
-          <p:cNvPr id="52" name="Text 50"/>
+          <p:cNvPr id="50" name="Text 48"/>
           <p:cNvSpPr txBox="1"/>
           <p:nvPr/>
         </p:nvSpPr>
@@ -6005,7 +5742,7 @@
                 <a:ea typeface="Calibri" pitchFamily="34" charset="-122"/>
                 <a:cs typeface="Calibri" pitchFamily="34" charset="-120"/>
               </a:rPr>
-              <a:t>Two pools was the right architecture and the wrong sizing. Same model, one deployment, priority scheduling. The one thing arithmetic cannot settle — interactive TTFT under long prefills — is a day on a rented card.</a:t>
+              <a:t>It allocates nodes for gpt-oss-120b and E5. Gemma 4 26B, Gemma 4 E4B, Llama 3.1 8B and the VLM are named elsewhere in the TSD with no allocation. Weights co-reside in 107 of 141 GB — but compute does not.</a:t>
             </a:r>
             <a:endParaRPr lang="en-US" sz="1000" dirty="0"/>
           </a:p>
@@ -6013,7 +5750,7 @@
       </p:sp>
       <p:sp>
         <p:nvSpPr>
-          <p:cNvPr id="53" name="Shape 51"/>
+          <p:cNvPr id="51" name="Shape 49"/>
           <p:cNvSpPr/>
           <p:nvPr/>
         </p:nvSpPr>
@@ -6040,7 +5777,7 @@
       </p:sp>
       <p:sp>
         <p:nvSpPr>
-          <p:cNvPr id="54" name="Shape 52"/>
+          <p:cNvPr id="52" name="Shape 50"/>
           <p:cNvSpPr/>
           <p:nvPr/>
         </p:nvSpPr>
@@ -6053,14 +5790,14 @@
             <a:avLst/>
           </a:prstGeom>
           <a:solidFill>
-            <a:srgbClr val="CB6127"/>
+            <a:srgbClr val="00A896"/>
           </a:solidFill>
           <a:ln/>
         </p:spPr>
       </p:sp>
       <p:sp>
         <p:nvSpPr>
-          <p:cNvPr id="55" name="Text 53"/>
+          <p:cNvPr id="53" name="Text 51"/>
           <p:cNvSpPr txBox="1"/>
           <p:nvPr/>
         </p:nvSpPr>
@@ -6091,7 +5828,7 @@
                 <a:ea typeface="Arial" pitchFamily="34" charset="-122"/>
                 <a:cs typeface="Arial" pitchFamily="34" charset="-120"/>
               </a:rPr>
-              <a:t>Single site is the one real loss</a:t>
+              <a:t>Reallocate rather than buy more</a:t>
             </a:r>
             <a:endParaRPr lang="en-US" sz="1200" dirty="0"/>
           </a:p>
@@ -6099,7 +5836,7 @@
       </p:sp>
       <p:sp>
         <p:nvSpPr>
-          <p:cNvPr id="56" name="Text 54"/>
+          <p:cNvPr id="54" name="Text 52"/>
           <p:cNvSpPr txBox="1"/>
           <p:nvPr/>
         </p:nvSpPr>
@@ -6133,7 +5870,7 @@
                 <a:ea typeface="Calibri" pitchFamily="34" charset="-122"/>
                 <a:cs typeface="Calibri" pitchFamily="34" charset="-120"/>
               </a:rPr>
-              <a:t>Everything else dropped was over-provisioning. The manual NOC process covers a DC outage today, but that expires when headcount comes out — so fund site 2 before the reduction lands, not after.</a:t>
+              <a:t>E5 runs at 0.03% of one card. Co-locate it with the fast tier and all four cards become heavy-capable — the same spend, but three active at peak instead of two at the edge.</a:t>
             </a:r>
             <a:endParaRPr lang="en-US" sz="1000" dirty="0"/>
           </a:p>
@@ -6141,7 +5878,7 @@
       </p:sp>
       <p:sp>
         <p:nvSpPr>
-          <p:cNvPr id="57" name="Text 55"/>
+          <p:cNvPr id="55" name="Text 53"/>
           <p:cNvSpPr txBox="1"/>
           <p:nvPr/>
         </p:nvSpPr>
@@ -6192,7 +5929,7 @@
                 <a:ea typeface="Calibri" pitchFamily="34" charset="-122"/>
                 <a:cs typeface="Calibri" pitchFamily="34" charset="-120"/>
               </a:rPr>
-              <a:t>16 GuideLLM operating points across three workload profiles, including a shared-pool run driven from two simultaneous data sources so the scheduler sees real mixed traffic. Per-point TTFT/ITL were pinned to published gpt-oss-120b + vLLM figures for one H100 80GB, since the modelling host has no GPU. Pointing --backend at a live vLLM endpoint re-derives every number above.</a:t>
+              <a:t>13 GuideLLM operating points across the three model tiers the TSD names, calibrated to H200 141GB (4.8 TB/s — decode ~1.43× an H100, prefill held flat). Volumes are the TSD’s own: 15M alarms/day, 8 CHM agents, Gujarat in phase 1 and pan-India at target. The one thing arithmetic cannot settle is co-resident compute — that needs a run on the real card.</a:t>
             </a:r>
             <a:endParaRPr lang="en-US" sz="850" dirty="0"/>
           </a:p>

--- a/deck/Vi-AI-NOC-Sizing.pptx
+++ b/deck/Vi-AI-NOC-Sizing.pptx
@@ -946,7 +946,7 @@
     <p:bg>
       <p:bgPr>
         <a:solidFill>
-          <a:srgbClr val="F4F5F2"/>
+          <a:srgbClr val="F4F4F4"/>
         </a:solidFill>
       </p:bgPr>
     </p:bg>
@@ -991,11 +991,11 @@
             <a:r>
               <a:rPr lang="en-US" sz="2900" b="1" spc="-40" kern="0" dirty="0">
                 <a:solidFill>
-                  <a:srgbClr val="171A18"/>
-                </a:solidFill>
-                <a:latin typeface="Arial" pitchFamily="34" charset="0"/>
-                <a:ea typeface="Arial" pitchFamily="34" charset="-122"/>
-                <a:cs typeface="Arial" pitchFamily="34" charset="-120"/>
+                  <a:srgbClr val="161616"/>
+                </a:solidFill>
+                <a:latin typeface="IBM Plex Sans" pitchFamily="34" charset="0"/>
+                <a:ea typeface="IBM Plex Sans" pitchFamily="34" charset="-122"/>
+                <a:cs typeface="IBM Plex Sans" pitchFamily="34" charset="-120"/>
               </a:rPr>
               <a:t>Sizing FM + Change Management</a:t>
             </a:r>
@@ -1030,11 +1030,11 @@
             <a:r>
               <a:rPr lang="en-US" sz="1150" b="1" dirty="0">
                 <a:solidFill>
-                  <a:srgbClr val="008E7F"/>
-                </a:solidFill>
-                <a:latin typeface="Calibri" pitchFamily="34" charset="0"/>
-                <a:ea typeface="Calibri" pitchFamily="34" charset="-122"/>
-                <a:cs typeface="Calibri" pitchFamily="34" charset="-120"/>
+                  <a:srgbClr val="0F62FE"/>
+                </a:solidFill>
+                <a:latin typeface="IBM Plex Sans" pitchFamily="34" charset="0"/>
+                <a:ea typeface="IBM Plex Sans" pitchFamily="34" charset="-122"/>
+                <a:cs typeface="IBM Plex Sans" pitchFamily="34" charset="-120"/>
               </a:rPr>
               <a:t>Vi Network AI Platform</a:t>
             </a:r>
@@ -1044,11 +1044,11 @@
             <a:r>
               <a:rPr lang="en-US" sz="1150" dirty="0">
                 <a:solidFill>
-                  <a:srgbClr val="6A726B"/>
-                </a:solidFill>
-                <a:latin typeface="Calibri" pitchFamily="34" charset="0"/>
-                <a:ea typeface="Calibri" pitchFamily="34" charset="-122"/>
-                <a:cs typeface="Calibri" pitchFamily="34" charset="-120"/>
+                  <a:srgbClr val="6F6F6F"/>
+                </a:solidFill>
+                <a:latin typeface="IBM Plex Sans" pitchFamily="34" charset="0"/>
+                <a:ea typeface="IBM Plex Sans" pitchFamily="34" charset="-122"/>
+                <a:cs typeface="IBM Plex Sans" pitchFamily="34" charset="-120"/>
               </a:rPr>
               <a:t>   ·   per the IBM SNOC TSD (20-08-26)   ·   15M alarms/day, H200 141GB, 3 model tiers</a:t>
             </a:r>
@@ -1077,7 +1077,7 @@
           </a:solidFill>
           <a:ln w="9525">
             <a:solidFill>
-              <a:srgbClr val="D9DCD4"/>
+              <a:srgbClr val="E0E0E0"/>
             </a:solidFill>
             <a:prstDash val="solid"/>
           </a:ln>
@@ -1098,7 +1098,7 @@
             <a:avLst/>
           </a:prstGeom>
           <a:solidFill>
-            <a:srgbClr val="008E7F"/>
+            <a:srgbClr val="0F62FE"/>
           </a:solidFill>
           <a:ln/>
         </p:spPr>
@@ -1130,11 +1130,11 @@
             <a:r>
               <a:rPr lang="en-US" sz="1000" b="1" spc="110" kern="0" dirty="0">
                 <a:solidFill>
-                  <a:srgbClr val="171A18"/>
-                </a:solidFill>
-                <a:latin typeface="Arial" pitchFamily="34" charset="0"/>
-                <a:ea typeface="Arial" pitchFamily="34" charset="-122"/>
-                <a:cs typeface="Arial" pitchFamily="34" charset="-120"/>
+                  <a:srgbClr val="161616"/>
+                </a:solidFill>
+                <a:latin typeface="IBM Plex Sans" pitchFamily="34" charset="0"/>
+                <a:ea typeface="IBM Plex Sans" pitchFamily="34" charset="-122"/>
+                <a:cs typeface="IBM Plex Sans" pitchFamily="34" charset="-120"/>
               </a:rPr>
               <a:t>ASSUMPTIONS</a:t>
             </a:r>
@@ -1169,11 +1169,11 @@
             <a:r>
               <a:rPr lang="en-US" sz="850" b="1" spc="90" kern="0" dirty="0">
                 <a:solidFill>
-                  <a:srgbClr val="008E7F"/>
-                </a:solidFill>
-                <a:latin typeface="Arial" pitchFamily="34" charset="0"/>
-                <a:ea typeface="Arial" pitchFamily="34" charset="-122"/>
-                <a:cs typeface="Arial" pitchFamily="34" charset="-120"/>
+                  <a:srgbClr val="0F62FE"/>
+                </a:solidFill>
+                <a:latin typeface="IBM Plex Sans" pitchFamily="34" charset="0"/>
+                <a:ea typeface="IBM Plex Sans" pitchFamily="34" charset="-122"/>
+                <a:cs typeface="IBM Plex Sans" pitchFamily="34" charset="-120"/>
               </a:rPr>
               <a:t>FIXED — stated in the TSD</a:t>
             </a:r>
@@ -1190,7 +1190,7 @@
         <p:spPr>
           <a:xfrm>
             <a:off x="722376" y="2029968"/>
-            <a:ext cx="3106826" cy="1920240"/>
+            <a:ext cx="3106826" cy="1463040"/>
           </a:xfrm>
           <a:prstGeom prst="rect">
             <a:avLst/>
@@ -1215,11 +1215,11 @@
             <a:r>
               <a:rPr lang="en-US" sz="1000" dirty="0">
                 <a:solidFill>
-                  <a:srgbClr val="3E453F"/>
-                </a:solidFill>
-                <a:latin typeface="Calibri" pitchFamily="34" charset="0"/>
-                <a:ea typeface="Calibri" pitchFamily="34" charset="-122"/>
-                <a:cs typeface="Calibri" pitchFamily="34" charset="-120"/>
+                  <a:srgbClr val="525252"/>
+                </a:solidFill>
+                <a:latin typeface="IBM Plex Sans" pitchFamily="34" charset="0"/>
+                <a:ea typeface="IBM Plex Sans" pitchFamily="34" charset="-122"/>
+                <a:cs typeface="IBM Plex Sans" pitchFamily="34" charset="-120"/>
               </a:rPr>
               <a:t>15M alarms/day, 1M-node topology graph  (§12)</a:t>
             </a:r>
@@ -1239,11 +1239,11 @@
             <a:r>
               <a:rPr lang="en-US" sz="1000" dirty="0">
                 <a:solidFill>
-                  <a:srgbClr val="3E453F"/>
-                </a:solidFill>
-                <a:latin typeface="Calibri" pitchFamily="34" charset="0"/>
-                <a:ea typeface="Calibri" pitchFamily="34" charset="-122"/>
-                <a:cs typeface="Calibri" pitchFamily="34" charset="-120"/>
+                  <a:srgbClr val="525252"/>
+                </a:solidFill>
+                <a:latin typeface="IBM Plex Sans" pitchFamily="34" charset="0"/>
+                <a:ea typeface="IBM Plex Sans" pitchFamily="34" charset="-122"/>
+                <a:cs typeface="IBM Plex Sans" pitchFamily="34" charset="-120"/>
               </a:rPr>
               <a:t>52k batch / 5 min; 500k burst in &lt;180 s  (§12)</a:t>
             </a:r>
@@ -1263,11 +1263,11 @@
             <a:r>
               <a:rPr lang="en-US" sz="1000" dirty="0">
                 <a:solidFill>
-                  <a:srgbClr val="3E453F"/>
-                </a:solidFill>
-                <a:latin typeface="Calibri" pitchFamily="34" charset="0"/>
-                <a:ea typeface="Calibri" pitchFamily="34" charset="-122"/>
-                <a:cs typeface="Calibri" pitchFamily="34" charset="-120"/>
+                  <a:srgbClr val="525252"/>
+                </a:solidFill>
+                <a:latin typeface="IBM Plex Sans" pitchFamily="34" charset="0"/>
+                <a:ea typeface="IBM Plex Sans" pitchFamily="34" charset="-122"/>
+                <a:cs typeface="IBM Plex Sans" pitchFamily="34" charset="-120"/>
               </a:rPr>
               <a:t>H200 141GB, FP8 / MXFP4 on vLLM  (§12, §3.7)</a:t>
             </a:r>
@@ -1287,11 +1287,11 @@
             <a:r>
               <a:rPr lang="en-US" sz="1000" dirty="0">
                 <a:solidFill>
-                  <a:srgbClr val="3E453F"/>
-                </a:solidFill>
-                <a:latin typeface="Calibri" pitchFamily="34" charset="0"/>
-                <a:ea typeface="Calibri" pitchFamily="34" charset="-122"/>
-                <a:cs typeface="Calibri" pitchFamily="34" charset="-120"/>
+                  <a:srgbClr val="525252"/>
+                </a:solidFill>
+                <a:latin typeface="IBM Plex Sans" pitchFamily="34" charset="0"/>
+                <a:ea typeface="IBM Plex Sans" pitchFamily="34" charset="-122"/>
+                <a:cs typeface="IBM Plex Sans" pitchFamily="34" charset="-120"/>
               </a:rPr>
               <a:t>6 model tiers incl. VLM + E5  (§3.4.6, §3.7)</a:t>
             </a:r>
@@ -1311,11 +1311,11 @@
             <a:r>
               <a:rPr lang="en-US" sz="1000" dirty="0">
                 <a:solidFill>
-                  <a:srgbClr val="3E453F"/>
-                </a:solidFill>
-                <a:latin typeface="Calibri" pitchFamily="34" charset="0"/>
-                <a:ea typeface="Calibri" pitchFamily="34" charset="-122"/>
-                <a:cs typeface="Calibri" pitchFamily="34" charset="-120"/>
+                  <a:srgbClr val="525252"/>
+                </a:solidFill>
+                <a:latin typeface="IBM Plex Sans" pitchFamily="34" charset="0"/>
+                <a:ea typeface="IBM Plex Sans" pitchFamily="34" charset="-122"/>
+                <a:cs typeface="IBM Plex Sans" pitchFamily="34" charset="-120"/>
               </a:rPr>
               <a:t>8 CHM agents, GUJ first → pan-India  (§6.8–6.13)</a:t>
             </a:r>
@@ -1335,11 +1335,11 @@
             <a:r>
               <a:rPr lang="en-US" sz="1000" dirty="0">
                 <a:solidFill>
-                  <a:srgbClr val="3E453F"/>
-                </a:solidFill>
-                <a:latin typeface="Calibri" pitchFamily="34" charset="0"/>
-                <a:ea typeface="Calibri" pitchFamily="34" charset="-122"/>
-                <a:cs typeface="Calibri" pitchFamily="34" charset="-120"/>
+                  <a:srgbClr val="525252"/>
+                </a:solidFill>
+                <a:latin typeface="IBM Plex Sans" pitchFamily="34" charset="0"/>
+                <a:ea typeface="IBM Plex Sans" pitchFamily="34" charset="-122"/>
+                <a:cs typeface="IBM Plex Sans" pitchFamily="34" charset="-120"/>
               </a:rPr>
               <a:t>Release docs quarterly / bi-annual  (§5.1)</a:t>
             </a:r>
@@ -1359,11 +1359,11 @@
             <a:r>
               <a:rPr lang="en-US" sz="1000" dirty="0">
                 <a:solidFill>
-                  <a:srgbClr val="3E453F"/>
-                </a:solidFill>
-                <a:latin typeface="Calibri" pitchFamily="34" charset="0"/>
-                <a:ea typeface="Calibri" pitchFamily="34" charset="-122"/>
-                <a:cs typeface="Calibri" pitchFamily="34" charset="-120"/>
+                  <a:srgbClr val="525252"/>
+                </a:solidFill>
+                <a:latin typeface="IBM Plex Sans" pitchFamily="34" charset="0"/>
+                <a:ea typeface="IBM Plex Sans" pitchFamily="34" charset="-122"/>
+                <a:cs typeface="IBM Plex Sans" pitchFamily="34" charset="-120"/>
               </a:rPr>
               <a:t>Max 5 concurrent changes per circle  (§6.11)</a:t>
             </a:r>
@@ -1379,7 +1379,7 @@
         </p:nvSpPr>
         <p:spPr>
           <a:xfrm>
-            <a:off x="722376" y="4023360"/>
+            <a:off x="722376" y="3602736"/>
             <a:ext cx="3106826" cy="182880"/>
           </a:xfrm>
           <a:prstGeom prst="rect">
@@ -1398,11 +1398,11 @@
             <a:r>
               <a:rPr lang="en-US" sz="850" b="1" spc="90" kern="0" dirty="0">
                 <a:solidFill>
-                  <a:srgbClr val="B04A12"/>
-                </a:solidFill>
-                <a:latin typeface="Arial" pitchFamily="34" charset="0"/>
-                <a:ea typeface="Arial" pitchFamily="34" charset="-122"/>
-                <a:cs typeface="Arial" pitchFamily="34" charset="-120"/>
+                  <a:srgbClr val="D02670"/>
+                </a:solidFill>
+                <a:latin typeface="IBM Plex Sans" pitchFamily="34" charset="0"/>
+                <a:ea typeface="IBM Plex Sans" pitchFamily="34" charset="-122"/>
+                <a:cs typeface="IBM Plex Sans" pitchFamily="34" charset="-120"/>
               </a:rPr>
               <a:t>ASSUMED — planning values to validate</a:t>
             </a:r>
@@ -1418,7 +1418,7 @@
         </p:nvSpPr>
         <p:spPr>
           <a:xfrm>
-            <a:off x="722376" y="4242816"/>
+            <a:off x="722376" y="3822192"/>
             <a:ext cx="3106826" cy="1280160"/>
           </a:xfrm>
           <a:prstGeom prst="rect">
@@ -1444,11 +1444,11 @@
             <a:r>
               <a:rPr lang="en-US" sz="1000" dirty="0">
                 <a:solidFill>
-                  <a:srgbClr val="3E453F"/>
-                </a:solidFill>
-                <a:latin typeface="Calibri" pitchFamily="34" charset="0"/>
-                <a:ea typeface="Calibri" pitchFamily="34" charset="-122"/>
-                <a:cs typeface="Calibri" pitchFamily="34" charset="-120"/>
+                  <a:srgbClr val="525252"/>
+                </a:solidFill>
+                <a:latin typeface="IBM Plex Sans" pitchFamily="34" charset="0"/>
+                <a:ea typeface="IBM Plex Sans" pitchFamily="34" charset="-122"/>
+                <a:cs typeface="IBM Plex Sans" pitchFamily="34" charset="-120"/>
               </a:rPr>
               <a:t>70% RAN-linked → 52.5k incidents/day</a:t>
             </a:r>
@@ -1468,11 +1468,11 @@
             <a:r>
               <a:rPr lang="en-US" sz="1000" dirty="0">
                 <a:solidFill>
-                  <a:srgbClr val="3E453F"/>
-                </a:solidFill>
-                <a:latin typeface="Calibri" pitchFamily="34" charset="0"/>
-                <a:ea typeface="Calibri" pitchFamily="34" charset="-122"/>
-                <a:cs typeface="Calibri" pitchFamily="34" charset="-120"/>
+                  <a:srgbClr val="525252"/>
+                </a:solidFill>
+                <a:latin typeface="IBM Plex Sans" pitchFamily="34" charset="0"/>
+                <a:ea typeface="IBM Plex Sans" pitchFamily="34" charset="-122"/>
+                <a:cs typeface="IBM Plex Sans" pitchFamily="34" charset="-120"/>
               </a:rPr>
               <a:t>35% of incidents earn a GenAI RFO</a:t>
             </a:r>
@@ -1492,11 +1492,11 @@
             <a:r>
               <a:rPr lang="en-US" sz="1000" dirty="0">
                 <a:solidFill>
-                  <a:srgbClr val="3E453F"/>
-                </a:solidFill>
-                <a:latin typeface="Calibri" pitchFamily="34" charset="0"/>
-                <a:ea typeface="Calibri" pitchFamily="34" charset="-122"/>
-                <a:cs typeface="Calibri" pitchFamily="34" charset="-120"/>
+                  <a:srgbClr val="525252"/>
+                </a:solidFill>
+                <a:latin typeface="IBM Plex Sans" pitchFamily="34" charset="0"/>
+                <a:ea typeface="IBM Plex Sans" pitchFamily="34" charset="-122"/>
+                <a:cs typeface="IBM Plex Sans" pitchFamily="34" charset="-120"/>
               </a:rPr>
               <a:t>RFO = 3 turns × 6k in / 400 out tokens</a:t>
             </a:r>
@@ -1516,11 +1516,11 @@
             <a:r>
               <a:rPr lang="en-US" sz="1000" dirty="0">
                 <a:solidFill>
-                  <a:srgbClr val="3E453F"/>
-                </a:solidFill>
-                <a:latin typeface="Calibri" pitchFamily="34" charset="0"/>
-                <a:ea typeface="Calibri" pitchFamily="34" charset="-122"/>
-                <a:cs typeface="Calibri" pitchFamily="34" charset="-120"/>
+                  <a:srgbClr val="525252"/>
+                </a:solidFill>
+                <a:latin typeface="IBM Plex Sans" pitchFamily="34" charset="0"/>
+                <a:ea typeface="IBM Plex Sans" pitchFamily="34" charset="-122"/>
+                <a:cs typeface="IBM Plex Sans" pitchFamily="34" charset="-120"/>
               </a:rPr>
               <a:t>CHM: 100 CRs/day GUJ → 1,250 pan-India</a:t>
             </a:r>
@@ -1540,11 +1540,11 @@
             <a:r>
               <a:rPr lang="en-US" sz="1000" dirty="0">
                 <a:solidFill>
-                  <a:srgbClr val="3E453F"/>
-                </a:solidFill>
-                <a:latin typeface="Calibri" pitchFamily="34" charset="0"/>
-                <a:ea typeface="Calibri" pitchFamily="34" charset="-122"/>
-                <a:cs typeface="Calibri" pitchFamily="34" charset="-120"/>
+                  <a:srgbClr val="525252"/>
+                </a:solidFill>
+                <a:latin typeface="IBM Plex Sans" pitchFamily="34" charset="0"/>
+                <a:ea typeface="IBM Plex Sans" pitchFamily="34" charset="-122"/>
+                <a:cs typeface="IBM Plex Sans" pitchFamily="34" charset="-120"/>
               </a:rPr>
               <a:t>Release drop = 12 docs GUJ → 150 national</a:t>
             </a:r>
@@ -1564,11 +1564,11 @@
             <a:r>
               <a:rPr lang="en-US" sz="1000" dirty="0">
                 <a:solidFill>
-                  <a:srgbClr val="3E453F"/>
-                </a:solidFill>
-                <a:latin typeface="Calibri" pitchFamily="34" charset="0"/>
-                <a:ea typeface="Calibri" pitchFamily="34" charset="-122"/>
-                <a:cs typeface="Calibri" pitchFamily="34" charset="-120"/>
+                  <a:srgbClr val="525252"/>
+                </a:solidFill>
+                <a:latin typeface="IBM Plex Sans" pitchFamily="34" charset="0"/>
+                <a:ea typeface="IBM Plex Sans" pitchFamily="34" charset="-122"/>
+                <a:cs typeface="IBM Plex Sans" pitchFamily="34" charset="-120"/>
               </a:rPr>
               <a:t>Peak hour = 10% of the day → 2.4×</a:t>
             </a:r>
@@ -1584,16 +1584,16 @@
         </p:nvSpPr>
         <p:spPr>
           <a:xfrm>
-            <a:off x="722376" y="5458968"/>
-            <a:ext cx="3106826" cy="713232"/>
+            <a:off x="722376" y="5285232"/>
+            <a:ext cx="3106826" cy="786384"/>
           </a:xfrm>
           <a:prstGeom prst="roundRect">
             <a:avLst>
-              <a:gd name="adj" fmla="val 5128"/>
+              <a:gd name="adj" fmla="val 4651"/>
             </a:avLst>
           </a:prstGeom>
           <a:solidFill>
-            <a:srgbClr val="EDEFE9"/>
+            <a:srgbClr val="EDF5FF"/>
           </a:solidFill>
           <a:ln/>
         </p:spPr>
@@ -1606,8 +1606,8 @@
         </p:nvSpPr>
         <p:spPr>
           <a:xfrm>
-            <a:off x="850392" y="5541264"/>
-            <a:ext cx="2850794" cy="566928"/>
+            <a:off x="850392" y="5376672"/>
+            <a:ext cx="2850794" cy="621792"/>
           </a:xfrm>
           <a:prstGeom prst="rect">
             <a:avLst/>
@@ -1628,11 +1628,11 @@
             <a:r>
               <a:rPr lang="en-US" sz="1000" b="1" dirty="0">
                 <a:solidFill>
-                  <a:srgbClr val="171A18"/>
-                </a:solidFill>
-                <a:latin typeface="Calibri" pitchFamily="34" charset="0"/>
-                <a:ea typeface="Calibri" pitchFamily="34" charset="-122"/>
-                <a:cs typeface="Calibri" pitchFamily="34" charset="-120"/>
+                  <a:srgbClr val="0F62FE"/>
+                </a:solidFill>
+                <a:latin typeface="IBM Plex Sans" pitchFamily="34" charset="0"/>
+                <a:ea typeface="IBM Plex Sans" pitchFamily="34" charset="-122"/>
+                <a:cs typeface="IBM Plex Sans" pitchFamily="34" charset="-120"/>
               </a:rPr>
               <a:t>Alarms moved 10M → 15M/day. </a:t>
             </a:r>
@@ -1645,11 +1645,11 @@
             <a:r>
               <a:rPr lang="en-US" sz="1000" dirty="0">
                 <a:solidFill>
-                  <a:srgbClr val="3E453F"/>
-                </a:solidFill>
-                <a:latin typeface="Calibri" pitchFamily="34" charset="0"/>
-                <a:ea typeface="Calibri" pitchFamily="34" charset="-122"/>
-                <a:cs typeface="Calibri" pitchFamily="34" charset="-120"/>
+                  <a:srgbClr val="525252"/>
+                </a:solidFill>
+                <a:latin typeface="IBM Plex Sans" pitchFamily="34" charset="0"/>
+                <a:ea typeface="IBM Plex Sans" pitchFamily="34" charset="-122"/>
+                <a:cs typeface="IBM Plex Sans" pitchFamily="34" charset="-120"/>
               </a:rPr>
               <a:t>The TSD supersedes the August one-slide. That +50% is what pushes the heavy tier to 2.06 GPU.</a:t>
             </a:r>
@@ -1678,7 +1678,7 @@
           </a:solidFill>
           <a:ln w="9525">
             <a:solidFill>
-              <a:srgbClr val="D9DCD4"/>
+              <a:srgbClr val="E0E0E0"/>
             </a:solidFill>
             <a:prstDash val="solid"/>
           </a:ln>
@@ -1699,7 +1699,7 @@
             <a:avLst/>
           </a:prstGeom>
           <a:solidFill>
-            <a:srgbClr val="008E7F"/>
+            <a:srgbClr val="0F62FE"/>
           </a:solidFill>
           <a:ln/>
         </p:spPr>
@@ -1731,11 +1731,11 @@
             <a:r>
               <a:rPr lang="en-US" sz="1000" b="1" spc="110" kern="0" dirty="0">
                 <a:solidFill>
-                  <a:srgbClr val="171A18"/>
-                </a:solidFill>
-                <a:latin typeface="Arial" pitchFamily="34" charset="0"/>
-                <a:ea typeface="Arial" pitchFamily="34" charset="-122"/>
-                <a:cs typeface="Arial" pitchFamily="34" charset="-120"/>
+                  <a:srgbClr val="161616"/>
+                </a:solidFill>
+                <a:latin typeface="IBM Plex Sans" pitchFamily="34" charset="0"/>
+                <a:ea typeface="IBM Plex Sans" pitchFamily="34" charset="-122"/>
+                <a:cs typeface="IBM Plex Sans" pitchFamily="34" charset="-120"/>
               </a:rPr>
               <a:t>DECISION POINTS</a:t>
             </a:r>
@@ -1770,11 +1770,11 @@
             <a:r>
               <a:rPr lang="en-US" sz="1000" b="1" dirty="0">
                 <a:solidFill>
-                  <a:srgbClr val="008E7F"/>
-                </a:solidFill>
-                <a:latin typeface="Courier New" pitchFamily="34" charset="0"/>
-                <a:ea typeface="Courier New" pitchFamily="34" charset="-122"/>
-                <a:cs typeface="Courier New" pitchFamily="34" charset="-120"/>
+                  <a:srgbClr val="0F62FE"/>
+                </a:solidFill>
+                <a:latin typeface="IBM Plex Mono" pitchFamily="34" charset="0"/>
+                <a:ea typeface="IBM Plex Mono" pitchFamily="34" charset="-122"/>
+                <a:cs typeface="IBM Plex Mono" pitchFamily="34" charset="-120"/>
               </a:rPr>
               <a:t>1</a:t>
             </a:r>
@@ -1809,11 +1809,11 @@
             <a:r>
               <a:rPr lang="en-US" sz="1100" b="1" dirty="0">
                 <a:solidFill>
-                  <a:srgbClr val="171A18"/>
-                </a:solidFill>
-                <a:latin typeface="Arial" pitchFamily="34" charset="0"/>
-                <a:ea typeface="Arial" pitchFamily="34" charset="-122"/>
-                <a:cs typeface="Arial" pitchFamily="34" charset="-120"/>
+                  <a:srgbClr val="161616"/>
+                </a:solidFill>
+                <a:latin typeface="IBM Plex Sans" pitchFamily="34" charset="0"/>
+                <a:ea typeface="IBM Plex Sans" pitchFamily="34" charset="-122"/>
+                <a:cs typeface="IBM Plex Sans" pitchFamily="34" charset="-120"/>
               </a:rPr>
               <a:t>Route by tier, not by agent</a:t>
             </a:r>
@@ -1851,11 +1851,11 @@
             <a:r>
               <a:rPr lang="en-US" sz="950" dirty="0">
                 <a:solidFill>
-                  <a:srgbClr val="6A726B"/>
-                </a:solidFill>
-                <a:latin typeface="Calibri" pitchFamily="34" charset="0"/>
-                <a:ea typeface="Calibri" pitchFamily="34" charset="-122"/>
-                <a:cs typeface="Calibri" pitchFamily="34" charset="-120"/>
+                  <a:srgbClr val="6F6F6F"/>
+                </a:solidFill>
+                <a:latin typeface="IBM Plex Sans" pitchFamily="34" charset="0"/>
+                <a:ea typeface="IBM Plex Sans" pitchFamily="34" charset="-122"/>
+                <a:cs typeface="IBM Plex Sans" pitchFamily="34" charset="-120"/>
               </a:rPr>
               <a:t>The TSD already tiers: 120b for reasoning, Gemma for extraction, Llama 8B for MOPs. Size each, then add fractions.</a:t>
             </a:r>
@@ -1890,11 +1890,11 @@
             <a:r>
               <a:rPr lang="en-US" sz="1000" b="1" dirty="0">
                 <a:solidFill>
-                  <a:srgbClr val="008E7F"/>
-                </a:solidFill>
-                <a:latin typeface="Courier New" pitchFamily="34" charset="0"/>
-                <a:ea typeface="Courier New" pitchFamily="34" charset="-122"/>
-                <a:cs typeface="Courier New" pitchFamily="34" charset="-120"/>
+                  <a:srgbClr val="0F62FE"/>
+                </a:solidFill>
+                <a:latin typeface="IBM Plex Mono" pitchFamily="34" charset="0"/>
+                <a:ea typeface="IBM Plex Mono" pitchFamily="34" charset="-122"/>
+                <a:cs typeface="IBM Plex Mono" pitchFamily="34" charset="-120"/>
               </a:rPr>
               <a:t>2</a:t>
             </a:r>
@@ -1929,11 +1929,11 @@
             <a:r>
               <a:rPr lang="en-US" sz="1100" b="1" dirty="0">
                 <a:solidFill>
-                  <a:srgbClr val="171A18"/>
-                </a:solidFill>
-                <a:latin typeface="Arial" pitchFamily="34" charset="0"/>
-                <a:ea typeface="Arial" pitchFamily="34" charset="-122"/>
-                <a:cs typeface="Arial" pitchFamily="34" charset="-120"/>
+                  <a:srgbClr val="161616"/>
+                </a:solidFill>
+                <a:latin typeface="IBM Plex Sans" pitchFamily="34" charset="0"/>
+                <a:ea typeface="IBM Plex Sans" pitchFamily="34" charset="-122"/>
+                <a:cs typeface="IBM Plex Sans" pitchFamily="34" charset="-120"/>
               </a:rPr>
               <a:t>One SLO gate per tier</a:t>
             </a:r>
@@ -1971,11 +1971,11 @@
             <a:r>
               <a:rPr lang="en-US" sz="950" dirty="0">
                 <a:solidFill>
-                  <a:srgbClr val="6A726B"/>
-                </a:solidFill>
-                <a:latin typeface="Calibri" pitchFamily="34" charset="0"/>
-                <a:ea typeface="Calibri" pitchFamily="34" charset="-122"/>
-                <a:cs typeface="Calibri" pitchFamily="34" charset="-120"/>
+                  <a:srgbClr val="6F6F6F"/>
+                </a:solidFill>
+                <a:latin typeface="IBM Plex Sans" pitchFamily="34" charset="0"/>
+                <a:ea typeface="IBM Plex Sans" pitchFamily="34" charset="-122"/>
+                <a:cs typeface="IBM Plex Sans" pitchFamily="34" charset="-120"/>
               </a:rPr>
               <a:t>Heavy: latency ≤30 s. Fast: TTFT ≤1.5 s, ITL ≤25 ms. MOP: ≤120 s — batch, it only has to land in the change window.</a:t>
             </a:r>
@@ -2010,11 +2010,11 @@
             <a:r>
               <a:rPr lang="en-US" sz="1000" b="1" dirty="0">
                 <a:solidFill>
-                  <a:srgbClr val="008E7F"/>
-                </a:solidFill>
-                <a:latin typeface="Courier New" pitchFamily="34" charset="0"/>
-                <a:ea typeface="Courier New" pitchFamily="34" charset="-122"/>
-                <a:cs typeface="Courier New" pitchFamily="34" charset="-120"/>
+                  <a:srgbClr val="0F62FE"/>
+                </a:solidFill>
+                <a:latin typeface="IBM Plex Mono" pitchFamily="34" charset="0"/>
+                <a:ea typeface="IBM Plex Mono" pitchFamily="34" charset="-122"/>
+                <a:cs typeface="IBM Plex Mono" pitchFamily="34" charset="-120"/>
               </a:rPr>
               <a:t>3</a:t>
             </a:r>
@@ -2049,11 +2049,11 @@
             <a:r>
               <a:rPr lang="en-US" sz="1100" b="1" dirty="0">
                 <a:solidFill>
-                  <a:srgbClr val="171A18"/>
-                </a:solidFill>
-                <a:latin typeface="Arial" pitchFamily="34" charset="0"/>
-                <a:ea typeface="Arial" pitchFamily="34" charset="-122"/>
-                <a:cs typeface="Arial" pitchFamily="34" charset="-120"/>
+                  <a:srgbClr val="161616"/>
+                </a:solidFill>
+                <a:latin typeface="IBM Plex Sans" pitchFamily="34" charset="0"/>
+                <a:ea typeface="IBM Plex Sans" pitchFamily="34" charset="-122"/>
+                <a:cs typeface="IBM Plex Sans" pitchFamily="34" charset="-120"/>
               </a:rPr>
               <a:t>Size for the target, not phase 1</a:t>
             </a:r>
@@ -2091,11 +2091,11 @@
             <a:r>
               <a:rPr lang="en-US" sz="950" dirty="0">
                 <a:solidFill>
-                  <a:srgbClr val="6A726B"/>
-                </a:solidFill>
-                <a:latin typeface="Calibri" pitchFamily="34" charset="0"/>
-                <a:ea typeface="Calibri" pitchFamily="34" charset="-122"/>
-                <a:cs typeface="Calibri" pitchFamily="34" charset="-120"/>
+                  <a:srgbClr val="6F6F6F"/>
+                </a:solidFill>
+                <a:latin typeface="IBM Plex Sans" pitchFamily="34" charset="0"/>
+                <a:ea typeface="IBM Plex Sans" pitchFamily="34" charset="-122"/>
+                <a:cs typeface="IBM Plex Sans" pitchFamily="34" charset="-120"/>
               </a:rPr>
               <a:t>FM is pan-India from day one; CHM is GUJ first, pan-India after. The pool is bought once, so it is sized on the target state.</a:t>
             </a:r>
@@ -2130,11 +2130,11 @@
             <a:r>
               <a:rPr lang="en-US" sz="1000" b="1" dirty="0">
                 <a:solidFill>
-                  <a:srgbClr val="008E7F"/>
-                </a:solidFill>
-                <a:latin typeface="Courier New" pitchFamily="34" charset="0"/>
-                <a:ea typeface="Courier New" pitchFamily="34" charset="-122"/>
-                <a:cs typeface="Courier New" pitchFamily="34" charset="-120"/>
+                  <a:srgbClr val="0F62FE"/>
+                </a:solidFill>
+                <a:latin typeface="IBM Plex Mono" pitchFamily="34" charset="0"/>
+                <a:ea typeface="IBM Plex Mono" pitchFamily="34" charset="-122"/>
+                <a:cs typeface="IBM Plex Mono" pitchFamily="34" charset="-120"/>
               </a:rPr>
               <a:t>4</a:t>
             </a:r>
@@ -2169,11 +2169,11 @@
             <a:r>
               <a:rPr lang="en-US" sz="1100" b="1" dirty="0">
                 <a:solidFill>
-                  <a:srgbClr val="171A18"/>
-                </a:solidFill>
-                <a:latin typeface="Arial" pitchFamily="34" charset="0"/>
-                <a:ea typeface="Arial" pitchFamily="34" charset="-122"/>
-                <a:cs typeface="Arial" pitchFamily="34" charset="-120"/>
+                  <a:srgbClr val="161616"/>
+                </a:solidFill>
+                <a:latin typeface="IBM Plex Sans" pitchFamily="34" charset="0"/>
+                <a:ea typeface="IBM Plex Sans" pitchFamily="34" charset="-122"/>
+                <a:cs typeface="IBM Plex Sans" pitchFamily="34" charset="-120"/>
               </a:rPr>
               <a:t>Treat MOP generation as a burst</a:t>
             </a:r>
@@ -2211,11 +2211,11 @@
             <a:r>
               <a:rPr lang="en-US" sz="950" dirty="0">
                 <a:solidFill>
-                  <a:srgbClr val="6A726B"/>
-                </a:solidFill>
-                <a:latin typeface="Calibri" pitchFamily="34" charset="0"/>
-                <a:ea typeface="Calibri" pitchFamily="34" charset="-122"/>
-                <a:cs typeface="Calibri" pitchFamily="34" charset="-120"/>
+                  <a:srgbClr val="6F6F6F"/>
+                </a:solidFill>
+                <a:latin typeface="IBM Plex Sans" pitchFamily="34" charset="0"/>
+                <a:ea typeface="IBM Plex Sans" pitchFamily="34" charset="-122"/>
+                <a:cs typeface="IBM Plex Sans" pitchFamily="34" charset="-120"/>
               </a:rPr>
               <a:t>Release docs are quarterly (§5.1): 150 docs → 2,250 MOPs in one window. A daily mean hides the only CHM spike.</a:t>
             </a:r>
@@ -2250,11 +2250,11 @@
             <a:r>
               <a:rPr lang="en-US" sz="1000" b="1" dirty="0">
                 <a:solidFill>
-                  <a:srgbClr val="008E7F"/>
-                </a:solidFill>
-                <a:latin typeface="Courier New" pitchFamily="34" charset="0"/>
-                <a:ea typeface="Courier New" pitchFamily="34" charset="-122"/>
-                <a:cs typeface="Courier New" pitchFamily="34" charset="-120"/>
+                  <a:srgbClr val="0F62FE"/>
+                </a:solidFill>
+                <a:latin typeface="IBM Plex Mono" pitchFamily="34" charset="0"/>
+                <a:ea typeface="IBM Plex Mono" pitchFamily="34" charset="-122"/>
+                <a:cs typeface="IBM Plex Mono" pitchFamily="34" charset="-120"/>
               </a:rPr>
               <a:t>5</a:t>
             </a:r>
@@ -2289,11 +2289,11 @@
             <a:r>
               <a:rPr lang="en-US" sz="1100" b="1" dirty="0">
                 <a:solidFill>
-                  <a:srgbClr val="171A18"/>
-                </a:solidFill>
-                <a:latin typeface="Arial" pitchFamily="34" charset="0"/>
-                <a:ea typeface="Arial" pitchFamily="34" charset="-122"/>
-                <a:cs typeface="Arial" pitchFamily="34" charset="-120"/>
+                  <a:srgbClr val="161616"/>
+                </a:solidFill>
+                <a:latin typeface="IBM Plex Sans" pitchFamily="34" charset="0"/>
+                <a:ea typeface="IBM Plex Sans" pitchFamily="34" charset="-122"/>
+                <a:cs typeface="IBM Plex Sans" pitchFamily="34" charset="-120"/>
               </a:rPr>
               <a:t>Co-locate E5, do not dedicate it</a:t>
             </a:r>
@@ -2331,11 +2331,11 @@
             <a:r>
               <a:rPr lang="en-US" sz="950" dirty="0">
                 <a:solidFill>
-                  <a:srgbClr val="6A726B"/>
-                </a:solidFill>
-                <a:latin typeface="Calibri" pitchFamily="34" charset="0"/>
-                <a:ea typeface="Calibri" pitchFamily="34" charset="-122"/>
-                <a:cs typeface="Calibri" pitchFamily="34" charset="-120"/>
+                  <a:srgbClr val="6F6F6F"/>
+                </a:solidFill>
+                <a:latin typeface="IBM Plex Sans" pitchFamily="34" charset="0"/>
+                <a:ea typeface="IBM Plex Sans" pitchFamily="34" charset="-122"/>
+                <a:cs typeface="IBM Plex Sans" pitchFamily="34" charset="-120"/>
               </a:rPr>
               <a:t>A 0.7 GB encoder at 0.03% utilisation does not need a 141 GB card. Freeing it makes all four cards heavy-capable.</a:t>
             </a:r>
@@ -2370,11 +2370,11 @@
             <a:r>
               <a:rPr lang="en-US" sz="1000" b="1" dirty="0">
                 <a:solidFill>
-                  <a:srgbClr val="008E7F"/>
-                </a:solidFill>
-                <a:latin typeface="Courier New" pitchFamily="34" charset="0"/>
-                <a:ea typeface="Courier New" pitchFamily="34" charset="-122"/>
-                <a:cs typeface="Courier New" pitchFamily="34" charset="-120"/>
+                  <a:srgbClr val="0F62FE"/>
+                </a:solidFill>
+                <a:latin typeface="IBM Plex Mono" pitchFamily="34" charset="0"/>
+                <a:ea typeface="IBM Plex Mono" pitchFamily="34" charset="-122"/>
+                <a:cs typeface="IBM Plex Mono" pitchFamily="34" charset="-120"/>
               </a:rPr>
               <a:t>6</a:t>
             </a:r>
@@ -2409,11 +2409,11 @@
             <a:r>
               <a:rPr lang="en-US" sz="1100" b="1" dirty="0">
                 <a:solidFill>
-                  <a:srgbClr val="171A18"/>
-                </a:solidFill>
-                <a:latin typeface="Arial" pitchFamily="34" charset="0"/>
-                <a:ea typeface="Arial" pitchFamily="34" charset="-122"/>
-                <a:cs typeface="Arial" pitchFamily="34" charset="-120"/>
+                  <a:srgbClr val="161616"/>
+                </a:solidFill>
+                <a:latin typeface="IBM Plex Sans" pitchFamily="34" charset="0"/>
+                <a:ea typeface="IBM Plex Sans" pitchFamily="34" charset="-122"/>
+                <a:cs typeface="IBM Plex Sans" pitchFamily="34" charset="-120"/>
               </a:rPr>
               <a:t>Measure on H200, not H100</a:t>
             </a:r>
@@ -2451,11 +2451,11 @@
             <a:r>
               <a:rPr lang="en-US" sz="950" dirty="0">
                 <a:solidFill>
-                  <a:srgbClr val="6A726B"/>
-                </a:solidFill>
-                <a:latin typeface="Calibri" pitchFamily="34" charset="0"/>
-                <a:ea typeface="Calibri" pitchFamily="34" charset="-122"/>
-                <a:cs typeface="Calibri" pitchFamily="34" charset="-120"/>
+                  <a:srgbClr val="6F6F6F"/>
+                </a:solidFill>
+                <a:latin typeface="IBM Plex Sans" pitchFamily="34" charset="0"/>
+                <a:ea typeface="IBM Plex Sans" pitchFamily="34" charset="-122"/>
+                <a:cs typeface="IBM Plex Sans" pitchFamily="34" charset="-120"/>
               </a:rPr>
               <a:t>4.8 TB/s vs 3.35 — decode is bandwidth-bound, so ITL improves ~1.43×. Capacity is 7,008 tok/s, not 6,066.</a:t>
             </a:r>
@@ -2484,7 +2484,7 @@
           </a:solidFill>
           <a:ln w="9525">
             <a:solidFill>
-              <a:srgbClr val="D9DCD4"/>
+              <a:srgbClr val="E0E0E0"/>
             </a:solidFill>
             <a:prstDash val="solid"/>
           </a:ln>
@@ -2505,7 +2505,7 @@
             <a:avLst/>
           </a:prstGeom>
           <a:solidFill>
-            <a:srgbClr val="B04A12"/>
+            <a:srgbClr val="D02670"/>
           </a:solidFill>
           <a:ln/>
         </p:spPr>
@@ -2537,11 +2537,11 @@
             <a:r>
               <a:rPr lang="en-US" sz="1000" b="1" spc="110" kern="0" dirty="0">
                 <a:solidFill>
-                  <a:srgbClr val="171A18"/>
-                </a:solidFill>
-                <a:latin typeface="Arial" pitchFamily="34" charset="0"/>
-                <a:ea typeface="Arial" pitchFamily="34" charset="-122"/>
-                <a:cs typeface="Arial" pitchFamily="34" charset="-120"/>
+                  <a:srgbClr val="161616"/>
+                </a:solidFill>
+                <a:latin typeface="IBM Plex Sans" pitchFamily="34" charset="0"/>
+                <a:ea typeface="IBM Plex Sans" pitchFamily="34" charset="-122"/>
+                <a:cs typeface="IBM Plex Sans" pitchFamily="34" charset="-120"/>
               </a:rPr>
               <a:t>PARAMETERS THAT MOVE IT</a:t>
             </a:r>
@@ -2579,11 +2579,11 @@
             <a:r>
               <a:rPr lang="en-US" sz="950" dirty="0">
                 <a:solidFill>
-                  <a:srgbClr val="6A726B"/>
-                </a:solidFill>
-                <a:latin typeface="Calibri" pitchFamily="34" charset="0"/>
-                <a:ea typeface="Calibri" pitchFamily="34" charset="-122"/>
-                <a:cs typeface="Calibri" pitchFamily="34" charset="-120"/>
+                  <a:srgbClr val="6F6F6F"/>
+                </a:solidFill>
+                <a:latin typeface="IBM Plex Sans" pitchFamily="34" charset="0"/>
+                <a:ea typeface="IBM Plex Sans" pitchFamily="34" charset="-122"/>
+                <a:cs typeface="IBM Plex Sans" pitchFamily="34" charset="-120"/>
               </a:rPr>
               <a:t>Measured on one H200 141GB, gated per tier. GPU column is what pan-India peak demand needs.</a:t>
             </a:r>
@@ -2618,11 +2618,11 @@
             <a:r>
               <a:rPr lang="en-US" sz="750" b="1" spc="80" kern="0" dirty="0">
                 <a:solidFill>
-                  <a:srgbClr val="6A726B"/>
-                </a:solidFill>
-                <a:latin typeface="Arial" pitchFamily="34" charset="0"/>
-                <a:ea typeface="Arial" pitchFamily="34" charset="-122"/>
-                <a:cs typeface="Arial" pitchFamily="34" charset="-120"/>
+                  <a:srgbClr val="6F6F6F"/>
+                </a:solidFill>
+                <a:latin typeface="IBM Plex Sans" pitchFamily="34" charset="0"/>
+                <a:ea typeface="IBM Plex Sans" pitchFamily="34" charset="-122"/>
+                <a:cs typeface="IBM Plex Sans" pitchFamily="34" charset="-120"/>
               </a:rPr>
               <a:t>SHAPE</a:t>
             </a:r>
@@ -2657,11 +2657,11 @@
             <a:r>
               <a:rPr lang="en-US" sz="750" b="1" spc="80" kern="0" dirty="0">
                 <a:solidFill>
-                  <a:srgbClr val="6A726B"/>
-                </a:solidFill>
-                <a:latin typeface="Arial" pitchFamily="34" charset="0"/>
-                <a:ea typeface="Arial" pitchFamily="34" charset="-122"/>
-                <a:cs typeface="Arial" pitchFamily="34" charset="-120"/>
+                  <a:srgbClr val="6F6F6F"/>
+                </a:solidFill>
+                <a:latin typeface="IBM Plex Sans" pitchFamily="34" charset="0"/>
+                <a:ea typeface="IBM Plex Sans" pitchFamily="34" charset="-122"/>
+                <a:cs typeface="IBM Plex Sans" pitchFamily="34" charset="-120"/>
               </a:rPr>
               <a:t>TOK/S</a:t>
             </a:r>
@@ -2696,11 +2696,11 @@
             <a:r>
               <a:rPr lang="en-US" sz="750" b="1" spc="80" kern="0" dirty="0">
                 <a:solidFill>
-                  <a:srgbClr val="B04A12"/>
-                </a:solidFill>
-                <a:latin typeface="Arial" pitchFamily="34" charset="0"/>
-                <a:ea typeface="Arial" pitchFamily="34" charset="-122"/>
-                <a:cs typeface="Arial" pitchFamily="34" charset="-120"/>
+                  <a:srgbClr val="D02670"/>
+                </a:solidFill>
+                <a:latin typeface="IBM Plex Sans" pitchFamily="34" charset="0"/>
+                <a:ea typeface="IBM Plex Sans" pitchFamily="34" charset="-122"/>
+                <a:cs typeface="IBM Plex Sans" pitchFamily="34" charset="-120"/>
               </a:rPr>
               <a:t>GPU</a:t>
             </a:r>
@@ -2735,11 +2735,11 @@
             <a:r>
               <a:rPr lang="en-US" sz="950" b="1" dirty="0">
                 <a:solidFill>
-                  <a:srgbClr val="171A18"/>
-                </a:solidFill>
-                <a:latin typeface="Calibri" pitchFamily="34" charset="0"/>
-                <a:ea typeface="Calibri" pitchFamily="34" charset="-122"/>
-                <a:cs typeface="Calibri" pitchFamily="34" charset="-120"/>
+                  <a:srgbClr val="161616"/>
+                </a:solidFill>
+                <a:latin typeface="IBM Plex Sans" pitchFamily="34" charset="0"/>
+                <a:ea typeface="IBM Plex Sans" pitchFamily="34" charset="-122"/>
+                <a:cs typeface="IBM Plex Sans" pitchFamily="34" charset="-120"/>
               </a:rPr>
               <a:t>heavy · gpt-oss-120b</a:t>
             </a:r>
@@ -2774,11 +2774,11 @@
             <a:r>
               <a:rPr lang="en-US" sz="850" dirty="0">
                 <a:solidFill>
-                  <a:srgbClr val="6A726B"/>
-                </a:solidFill>
-                <a:latin typeface="Courier New" pitchFamily="34" charset="0"/>
-                <a:ea typeface="Courier New" pitchFamily="34" charset="-122"/>
-                <a:cs typeface="Courier New" pitchFamily="34" charset="-120"/>
+                  <a:srgbClr val="6F6F6F"/>
+                </a:solidFill>
+                <a:latin typeface="IBM Plex Mono" pitchFamily="34" charset="0"/>
+                <a:ea typeface="IBM Plex Mono" pitchFamily="34" charset="-122"/>
+                <a:cs typeface="IBM Plex Mono" pitchFamily="34" charset="-120"/>
               </a:rPr>
               <a:t>6k/400</a:t>
             </a:r>
@@ -2813,11 +2813,11 @@
             <a:r>
               <a:rPr lang="en-US" sz="950" dirty="0">
                 <a:solidFill>
-                  <a:srgbClr val="3E453F"/>
-                </a:solidFill>
-                <a:latin typeface="Courier New" pitchFamily="34" charset="0"/>
-                <a:ea typeface="Courier New" pitchFamily="34" charset="-122"/>
-                <a:cs typeface="Courier New" pitchFamily="34" charset="-120"/>
+                  <a:srgbClr val="525252"/>
+                </a:solidFill>
+                <a:latin typeface="IBM Plex Mono" pitchFamily="34" charset="0"/>
+                <a:ea typeface="IBM Plex Mono" pitchFamily="34" charset="-122"/>
+                <a:cs typeface="IBM Plex Mono" pitchFamily="34" charset="-120"/>
               </a:rPr>
               <a:t>7,008</a:t>
             </a:r>
@@ -2852,11 +2852,11 @@
             <a:r>
               <a:rPr lang="en-US" sz="1000" b="1" dirty="0">
                 <a:solidFill>
-                  <a:srgbClr val="B04A12"/>
-                </a:solidFill>
-                <a:latin typeface="Courier New" pitchFamily="34" charset="0"/>
-                <a:ea typeface="Courier New" pitchFamily="34" charset="-122"/>
-                <a:cs typeface="Courier New" pitchFamily="34" charset="-120"/>
+                  <a:srgbClr val="D02670"/>
+                </a:solidFill>
+                <a:latin typeface="IBM Plex Mono" pitchFamily="34" charset="0"/>
+                <a:ea typeface="IBM Plex Mono" pitchFamily="34" charset="-122"/>
+                <a:cs typeface="IBM Plex Mono" pitchFamily="34" charset="-120"/>
               </a:rPr>
               <a:t>2.06</a:t>
             </a:r>
@@ -2891,11 +2891,11 @@
             <a:r>
               <a:rPr lang="en-US" sz="950" dirty="0">
                 <a:solidFill>
-                  <a:srgbClr val="3E453F"/>
-                </a:solidFill>
-                <a:latin typeface="Calibri" pitchFamily="34" charset="0"/>
-                <a:ea typeface="Calibri" pitchFamily="34" charset="-122"/>
-                <a:cs typeface="Calibri" pitchFamily="34" charset="-120"/>
+                  <a:srgbClr val="525252"/>
+                </a:solidFill>
+                <a:latin typeface="IBM Plex Sans" pitchFamily="34" charset="0"/>
+                <a:ea typeface="IBM Plex Sans" pitchFamily="34" charset="-122"/>
+                <a:cs typeface="IBM Plex Sans" pitchFamily="34" charset="-120"/>
               </a:rPr>
               <a:t>fast · Gemma 4 26B</a:t>
             </a:r>
@@ -2930,11 +2930,11 @@
             <a:r>
               <a:rPr lang="en-US" sz="850" dirty="0">
                 <a:solidFill>
-                  <a:srgbClr val="6A726B"/>
-                </a:solidFill>
-                <a:latin typeface="Courier New" pitchFamily="34" charset="0"/>
-                <a:ea typeface="Courier New" pitchFamily="34" charset="-122"/>
-                <a:cs typeface="Courier New" pitchFamily="34" charset="-120"/>
+                  <a:srgbClr val="6F6F6F"/>
+                </a:solidFill>
+                <a:latin typeface="IBM Plex Mono" pitchFamily="34" charset="0"/>
+                <a:ea typeface="IBM Plex Mono" pitchFamily="34" charset="-122"/>
+                <a:cs typeface="IBM Plex Mono" pitchFamily="34" charset="-120"/>
               </a:rPr>
               <a:t>1.5k/200</a:t>
             </a:r>
@@ -2969,11 +2969,11 @@
             <a:r>
               <a:rPr lang="en-US" sz="950" dirty="0">
                 <a:solidFill>
-                  <a:srgbClr val="3E453F"/>
-                </a:solidFill>
-                <a:latin typeface="Courier New" pitchFamily="34" charset="0"/>
-                <a:ea typeface="Courier New" pitchFamily="34" charset="-122"/>
-                <a:cs typeface="Courier New" pitchFamily="34" charset="-120"/>
+                  <a:srgbClr val="525252"/>
+                </a:solidFill>
+                <a:latin typeface="IBM Plex Mono" pitchFamily="34" charset="0"/>
+                <a:ea typeface="IBM Plex Mono" pitchFamily="34" charset="-122"/>
+                <a:cs typeface="IBM Plex Mono" pitchFamily="34" charset="-120"/>
               </a:rPr>
               <a:t>20,936</a:t>
             </a:r>
@@ -3008,11 +3008,11 @@
             <a:r>
               <a:rPr lang="en-US" sz="1000" b="1" dirty="0">
                 <a:solidFill>
-                  <a:srgbClr val="171A18"/>
-                </a:solidFill>
-                <a:latin typeface="Courier New" pitchFamily="34" charset="0"/>
-                <a:ea typeface="Courier New" pitchFamily="34" charset="-122"/>
-                <a:cs typeface="Courier New" pitchFamily="34" charset="-120"/>
+                  <a:srgbClr val="161616"/>
+                </a:solidFill>
+                <a:latin typeface="IBM Plex Mono" pitchFamily="34" charset="0"/>
+                <a:ea typeface="IBM Plex Mono" pitchFamily="34" charset="-122"/>
+                <a:cs typeface="IBM Plex Mono" pitchFamily="34" charset="-120"/>
               </a:rPr>
               <a:t>0.16</a:t>
             </a:r>
@@ -3047,11 +3047,11 @@
             <a:r>
               <a:rPr lang="en-US" sz="950" dirty="0">
                 <a:solidFill>
-                  <a:srgbClr val="3E453F"/>
-                </a:solidFill>
-                <a:latin typeface="Calibri" pitchFamily="34" charset="0"/>
-                <a:ea typeface="Calibri" pitchFamily="34" charset="-122"/>
-                <a:cs typeface="Calibri" pitchFamily="34" charset="-120"/>
+                  <a:srgbClr val="525252"/>
+                </a:solidFill>
+                <a:latin typeface="IBM Plex Sans" pitchFamily="34" charset="0"/>
+                <a:ea typeface="IBM Plex Sans" pitchFamily="34" charset="-122"/>
+                <a:cs typeface="IBM Plex Sans" pitchFamily="34" charset="-120"/>
               </a:rPr>
               <a:t>mop · Llama 3.1 8B</a:t>
             </a:r>
@@ -3086,11 +3086,11 @@
             <a:r>
               <a:rPr lang="en-US" sz="850" dirty="0">
                 <a:solidFill>
-                  <a:srgbClr val="6A726B"/>
-                </a:solidFill>
-                <a:latin typeface="Courier New" pitchFamily="34" charset="0"/>
-                <a:ea typeface="Courier New" pitchFamily="34" charset="-122"/>
-                <a:cs typeface="Courier New" pitchFamily="34" charset="-120"/>
+                  <a:srgbClr val="6F6F6F"/>
+                </a:solidFill>
+                <a:latin typeface="IBM Plex Mono" pitchFamily="34" charset="0"/>
+                <a:ea typeface="IBM Plex Mono" pitchFamily="34" charset="-122"/>
+                <a:cs typeface="IBM Plex Mono" pitchFamily="34" charset="-120"/>
               </a:rPr>
               <a:t>12k/2.5k</a:t>
             </a:r>
@@ -3125,11 +3125,11 @@
             <a:r>
               <a:rPr lang="en-US" sz="950" dirty="0">
                 <a:solidFill>
-                  <a:srgbClr val="3E453F"/>
-                </a:solidFill>
-                <a:latin typeface="Courier New" pitchFamily="34" charset="0"/>
-                <a:ea typeface="Courier New" pitchFamily="34" charset="-122"/>
-                <a:cs typeface="Courier New" pitchFamily="34" charset="-120"/>
+                  <a:srgbClr val="525252"/>
+                </a:solidFill>
+                <a:latin typeface="IBM Plex Mono" pitchFamily="34" charset="0"/>
+                <a:ea typeface="IBM Plex Mono" pitchFamily="34" charset="-122"/>
+                <a:cs typeface="IBM Plex Mono" pitchFamily="34" charset="-120"/>
               </a:rPr>
               <a:t>7,733</a:t>
             </a:r>
@@ -3164,11 +3164,11 @@
             <a:r>
               <a:rPr lang="en-US" sz="1000" b="1" dirty="0">
                 <a:solidFill>
-                  <a:srgbClr val="171A18"/>
-                </a:solidFill>
-                <a:latin typeface="Courier New" pitchFamily="34" charset="0"/>
-                <a:ea typeface="Courier New" pitchFamily="34" charset="-122"/>
-                <a:cs typeface="Courier New" pitchFamily="34" charset="-120"/>
+                  <a:srgbClr val="161616"/>
+                </a:solidFill>
+                <a:latin typeface="IBM Plex Mono" pitchFamily="34" charset="0"/>
+                <a:ea typeface="IBM Plex Mono" pitchFamily="34" charset="-122"/>
+                <a:cs typeface="IBM Plex Mono" pitchFamily="34" charset="-120"/>
               </a:rPr>
               <a:t>0.17</a:t>
             </a:r>
@@ -3193,7 +3193,7 @@
           <a:noFill/>
           <a:ln w="9525">
             <a:solidFill>
-              <a:srgbClr val="D9DCD4"/>
+              <a:srgbClr val="E0E0E0"/>
             </a:solidFill>
             <a:prstDash val="solid"/>
           </a:ln>
@@ -3226,11 +3226,11 @@
             <a:r>
               <a:rPr lang="en-US" sz="950" b="1" dirty="0">
                 <a:solidFill>
-                  <a:srgbClr val="171A18"/>
-                </a:solidFill>
-                <a:latin typeface="Calibri" pitchFamily="34" charset="0"/>
-                <a:ea typeface="Calibri" pitchFamily="34" charset="-122"/>
-                <a:cs typeface="Calibri" pitchFamily="34" charset="-120"/>
+                  <a:srgbClr val="161616"/>
+                </a:solidFill>
+                <a:latin typeface="IBM Plex Sans" pitchFamily="34" charset="0"/>
+                <a:ea typeface="IBM Plex Sans" pitchFamily="34" charset="-122"/>
+                <a:cs typeface="IBM Plex Sans" pitchFamily="34" charset="-120"/>
               </a:rPr>
               <a:t>TOTAL at pan-India peak</a:t>
             </a:r>
@@ -3265,11 +3265,11 @@
             <a:r>
               <a:rPr lang="en-US" sz="1000" b="1" dirty="0">
                 <a:solidFill>
-                  <a:srgbClr val="008E7F"/>
-                </a:solidFill>
-                <a:latin typeface="Courier New" pitchFamily="34" charset="0"/>
-                <a:ea typeface="Courier New" pitchFamily="34" charset="-122"/>
-                <a:cs typeface="Courier New" pitchFamily="34" charset="-120"/>
+                  <a:srgbClr val="0F62FE"/>
+                </a:solidFill>
+                <a:latin typeface="IBM Plex Mono" pitchFamily="34" charset="0"/>
+                <a:ea typeface="IBM Plex Mono" pitchFamily="34" charset="-122"/>
+                <a:cs typeface="IBM Plex Mono" pitchFamily="34" charset="-120"/>
               </a:rPr>
               <a:t>2.40</a:t>
             </a:r>
@@ -3304,11 +3304,11 @@
             <a:r>
               <a:rPr lang="en-US" sz="750" b="1" spc="80" kern="0" dirty="0">
                 <a:solidFill>
-                  <a:srgbClr val="6A726B"/>
-                </a:solidFill>
-                <a:latin typeface="Arial" pitchFamily="34" charset="0"/>
-                <a:ea typeface="Arial" pitchFamily="34" charset="-122"/>
-                <a:cs typeface="Arial" pitchFamily="34" charset="-120"/>
+                  <a:srgbClr val="6F6F6F"/>
+                </a:solidFill>
+                <a:latin typeface="IBM Plex Sans" pitchFamily="34" charset="0"/>
+                <a:ea typeface="IBM Plex Sans" pitchFamily="34" charset="-122"/>
+                <a:cs typeface="IBM Plex Sans" pitchFamily="34" charset="-120"/>
               </a:rPr>
               <a:t>WHERE THE TOKENS COME FROM</a:t>
             </a:r>
@@ -3331,7 +3331,7 @@
             <a:avLst/>
           </a:prstGeom>
           <a:solidFill>
-            <a:srgbClr val="008E7F"/>
+            <a:srgbClr val="0F62FE"/>
           </a:solidFill>
           <a:ln/>
         </p:spPr>
@@ -3363,11 +3363,11 @@
             <a:r>
               <a:rPr lang="en-US" sz="950" dirty="0">
                 <a:solidFill>
-                  <a:srgbClr val="3E453F"/>
-                </a:solidFill>
-                <a:latin typeface="Calibri" pitchFamily="34" charset="0"/>
-                <a:ea typeface="Calibri" pitchFamily="34" charset="-122"/>
-                <a:cs typeface="Calibri" pitchFamily="34" charset="-120"/>
+                  <a:srgbClr val="525252"/>
+                </a:solidFill>
+                <a:latin typeface="IBM Plex Sans" pitchFamily="34" charset="0"/>
+                <a:ea typeface="IBM Plex Sans" pitchFamily="34" charset="-122"/>
+                <a:cs typeface="IBM Plex Sans" pitchFamily="34" charset="-120"/>
               </a:rPr>
               <a:t>FM · pan-India</a:t>
             </a:r>
@@ -3402,11 +3402,11 @@
             <a:r>
               <a:rPr lang="en-US" sz="900" dirty="0">
                 <a:solidFill>
-                  <a:srgbClr val="6A726B"/>
-                </a:solidFill>
-                <a:latin typeface="Courier New" pitchFamily="34" charset="0"/>
-                <a:ea typeface="Courier New" pitchFamily="34" charset="-122"/>
-                <a:cs typeface="Courier New" pitchFamily="34" charset="-120"/>
+                  <a:srgbClr val="6F6F6F"/>
+                </a:solidFill>
+                <a:latin typeface="IBM Plex Mono" pitchFamily="34" charset="0"/>
+                <a:ea typeface="IBM Plex Mono" pitchFamily="34" charset="-122"/>
+                <a:cs typeface="IBM Plex Mono" pitchFamily="34" charset="-120"/>
               </a:rPr>
               <a:t>398M</a:t>
             </a:r>
@@ -3441,11 +3441,11 @@
             <a:r>
               <a:rPr lang="en-US" sz="950" b="1" dirty="0">
                 <a:solidFill>
-                  <a:srgbClr val="171A18"/>
-                </a:solidFill>
-                <a:latin typeface="Courier New" pitchFamily="34" charset="0"/>
-                <a:ea typeface="Courier New" pitchFamily="34" charset="-122"/>
-                <a:cs typeface="Courier New" pitchFamily="34" charset="-120"/>
+                  <a:srgbClr val="161616"/>
+                </a:solidFill>
+                <a:latin typeface="IBM Plex Mono" pitchFamily="34" charset="0"/>
+                <a:ea typeface="IBM Plex Mono" pitchFamily="34" charset="-122"/>
+                <a:cs typeface="IBM Plex Mono" pitchFamily="34" charset="-120"/>
               </a:rPr>
               <a:t>82%</a:t>
             </a:r>
@@ -3468,7 +3468,7 @@
             <a:avLst/>
           </a:prstGeom>
           <a:solidFill>
-            <a:srgbClr val="B04A12"/>
+            <a:srgbClr val="D02670"/>
           </a:solidFill>
           <a:ln/>
         </p:spPr>
@@ -3500,11 +3500,11 @@
             <a:r>
               <a:rPr lang="en-US" sz="950" dirty="0">
                 <a:solidFill>
-                  <a:srgbClr val="3E453F"/>
-                </a:solidFill>
-                <a:latin typeface="Calibri" pitchFamily="34" charset="0"/>
-                <a:ea typeface="Calibri" pitchFamily="34" charset="-122"/>
-                <a:cs typeface="Calibri" pitchFamily="34" charset="-120"/>
+                  <a:srgbClr val="525252"/>
+                </a:solidFill>
+                <a:latin typeface="IBM Plex Sans" pitchFamily="34" charset="0"/>
+                <a:ea typeface="IBM Plex Sans" pitchFamily="34" charset="-122"/>
+                <a:cs typeface="IBM Plex Sans" pitchFamily="34" charset="-120"/>
               </a:rPr>
               <a:t>CHM · pan-India</a:t>
             </a:r>
@@ -3539,11 +3539,11 @@
             <a:r>
               <a:rPr lang="en-US" sz="900" dirty="0">
                 <a:solidFill>
-                  <a:srgbClr val="6A726B"/>
-                </a:solidFill>
-                <a:latin typeface="Courier New" pitchFamily="34" charset="0"/>
-                <a:ea typeface="Courier New" pitchFamily="34" charset="-122"/>
-                <a:cs typeface="Courier New" pitchFamily="34" charset="-120"/>
+                  <a:srgbClr val="6F6F6F"/>
+                </a:solidFill>
+                <a:latin typeface="IBM Plex Mono" pitchFamily="34" charset="0"/>
+                <a:ea typeface="IBM Plex Mono" pitchFamily="34" charset="-122"/>
+                <a:cs typeface="IBM Plex Mono" pitchFamily="34" charset="-120"/>
               </a:rPr>
               <a:t>86M</a:t>
             </a:r>
@@ -3578,11 +3578,11 @@
             <a:r>
               <a:rPr lang="en-US" sz="950" b="1" dirty="0">
                 <a:solidFill>
-                  <a:srgbClr val="B04A12"/>
-                </a:solidFill>
-                <a:latin typeface="Courier New" pitchFamily="34" charset="0"/>
-                <a:ea typeface="Courier New" pitchFamily="34" charset="-122"/>
-                <a:cs typeface="Courier New" pitchFamily="34" charset="-120"/>
+                  <a:srgbClr val="D02670"/>
+                </a:solidFill>
+                <a:latin typeface="IBM Plex Mono" pitchFamily="34" charset="0"/>
+                <a:ea typeface="IBM Plex Mono" pitchFamily="34" charset="-122"/>
+                <a:cs typeface="IBM Plex Mono" pitchFamily="34" charset="-120"/>
               </a:rPr>
               <a:t>18%</a:t>
             </a:r>
@@ -3605,7 +3605,7 @@
             <a:avLst/>
           </a:prstGeom>
           <a:solidFill>
-            <a:srgbClr val="B04A12"/>
+            <a:srgbClr val="D02670"/>
           </a:solidFill>
           <a:ln/>
         </p:spPr>
@@ -3637,11 +3637,11 @@
             <a:r>
               <a:rPr lang="en-US" sz="950" dirty="0">
                 <a:solidFill>
-                  <a:srgbClr val="3E453F"/>
-                </a:solidFill>
-                <a:latin typeface="Calibri" pitchFamily="34" charset="0"/>
-                <a:ea typeface="Calibri" pitchFamily="34" charset="-122"/>
-                <a:cs typeface="Calibri" pitchFamily="34" charset="-120"/>
+                  <a:srgbClr val="525252"/>
+                </a:solidFill>
+                <a:latin typeface="IBM Plex Sans" pitchFamily="34" charset="0"/>
+                <a:ea typeface="IBM Plex Sans" pitchFamily="34" charset="-122"/>
+                <a:cs typeface="IBM Plex Sans" pitchFamily="34" charset="-120"/>
               </a:rPr>
               <a:t>CHM · Gujarat only</a:t>
             </a:r>
@@ -3676,11 +3676,11 @@
             <a:r>
               <a:rPr lang="en-US" sz="900" dirty="0">
                 <a:solidFill>
-                  <a:srgbClr val="6A726B"/>
-                </a:solidFill>
-                <a:latin typeface="Courier New" pitchFamily="34" charset="0"/>
-                <a:ea typeface="Courier New" pitchFamily="34" charset="-122"/>
-                <a:cs typeface="Courier New" pitchFamily="34" charset="-120"/>
+                  <a:srgbClr val="6F6F6F"/>
+                </a:solidFill>
+                <a:latin typeface="IBM Plex Mono" pitchFamily="34" charset="0"/>
+                <a:ea typeface="IBM Plex Mono" pitchFamily="34" charset="-122"/>
+                <a:cs typeface="IBM Plex Mono" pitchFamily="34" charset="-120"/>
               </a:rPr>
               <a:t>7.3M</a:t>
             </a:r>
@@ -3715,11 +3715,11 @@
             <a:r>
               <a:rPr lang="en-US" sz="950" b="1" dirty="0">
                 <a:solidFill>
-                  <a:srgbClr val="B04A12"/>
-                </a:solidFill>
-                <a:latin typeface="Courier New" pitchFamily="34" charset="0"/>
-                <a:ea typeface="Courier New" pitchFamily="34" charset="-122"/>
-                <a:cs typeface="Courier New" pitchFamily="34" charset="-120"/>
+                  <a:srgbClr val="D02670"/>
+                </a:solidFill>
+                <a:latin typeface="IBM Plex Mono" pitchFamily="34" charset="0"/>
+                <a:ea typeface="IBM Plex Mono" pitchFamily="34" charset="-122"/>
+                <a:cs typeface="IBM Plex Mono" pitchFamily="34" charset="-120"/>
               </a:rPr>
               <a:t>1.8%</a:t>
             </a:r>
@@ -3744,7 +3744,7 @@
             </a:avLst>
           </a:prstGeom>
           <a:solidFill>
-            <a:srgbClr val="EDEFE9"/>
+            <a:srgbClr val="FFF0F7"/>
           </a:solidFill>
           <a:ln/>
         </p:spPr>
@@ -3776,11 +3776,11 @@
             <a:r>
               <a:rPr lang="en-US" sz="1000" b="1" dirty="0">
                 <a:solidFill>
-                  <a:srgbClr val="B04A12"/>
-                </a:solidFill>
-                <a:latin typeface="Arial" pitchFamily="34" charset="0"/>
-                <a:ea typeface="Arial" pitchFamily="34" charset="-122"/>
-                <a:cs typeface="Arial" pitchFamily="34" charset="-120"/>
+                  <a:srgbClr val="D02670"/>
+                </a:solidFill>
+                <a:latin typeface="IBM Plex Sans" pitchFamily="34" charset="0"/>
+                <a:ea typeface="IBM Plex Sans" pitchFamily="34" charset="-122"/>
+                <a:cs typeface="IBM Plex Sans" pitchFamily="34" charset="-120"/>
               </a:rPr>
               <a:t>CHM does not move the number</a:t>
             </a:r>
@@ -3818,11 +3818,11 @@
             <a:r>
               <a:rPr lang="en-US" sz="950" dirty="0">
                 <a:solidFill>
-                  <a:srgbClr val="3E453F"/>
-                </a:solidFill>
-                <a:latin typeface="Calibri" pitchFamily="34" charset="0"/>
-                <a:ea typeface="Calibri" pitchFamily="34" charset="-122"/>
-                <a:cs typeface="Calibri" pitchFamily="34" charset="-120"/>
+                  <a:srgbClr val="525252"/>
+                </a:solidFill>
+                <a:latin typeface="IBM Plex Sans" pitchFamily="34" charset="0"/>
+                <a:ea typeface="IBM Plex Sans" pitchFamily="34" charset="-122"/>
+                <a:cs typeface="IBM Plex Sans" pitchFamily="34" charset="-120"/>
               </a:rPr>
               <a:t>Even pan-India it is 18% of tokens and 0.33 of a GPU. The alarm tier at 15M/day sets the fleet; CHM adds model tiers, not cards.</a:t>
             </a:r>
@@ -3844,7 +3844,7 @@
     <p:bg>
       <p:bgPr>
         <a:solidFill>
-          <a:srgbClr val="12211E"/>
+          <a:srgbClr val="F4F4F4"/>
         </a:solidFill>
       </p:bgPr>
     </p:bg>
@@ -3889,11 +3889,11 @@
             <a:r>
               <a:rPr lang="en-US" sz="2900" b="1" spc="-40" kern="0" dirty="0">
                 <a:solidFill>
-                  <a:srgbClr val="E9ECE7"/>
-                </a:solidFill>
-                <a:latin typeface="Arial" pitchFamily="34" charset="0"/>
-                <a:ea typeface="Arial" pitchFamily="34" charset="-122"/>
-                <a:cs typeface="Arial" pitchFamily="34" charset="-120"/>
+                  <a:srgbClr val="161616"/>
+                </a:solidFill>
+                <a:latin typeface="IBM Plex Sans" pitchFamily="34" charset="0"/>
+                <a:ea typeface="IBM Plex Sans" pitchFamily="34" charset="-122"/>
+                <a:cs typeface="IBM Plex Sans" pitchFamily="34" charset="-120"/>
               </a:rPr>
               <a:t>The TSD pool: right total, wrong split</a:t>
             </a:r>
@@ -3928,11 +3928,11 @@
             <a:r>
               <a:rPr lang="en-US" sz="1150" b="1" dirty="0">
                 <a:solidFill>
-                  <a:srgbClr val="00A896"/>
-                </a:solidFill>
-                <a:latin typeface="Calibri" pitchFamily="34" charset="0"/>
-                <a:ea typeface="Calibri" pitchFamily="34" charset="-122"/>
-                <a:cs typeface="Calibri" pitchFamily="34" charset="-120"/>
+                  <a:srgbClr val="0F62FE"/>
+                </a:solidFill>
+                <a:latin typeface="IBM Plex Sans" pitchFamily="34" charset="0"/>
+                <a:ea typeface="IBM Plex Sans" pitchFamily="34" charset="-122"/>
+                <a:cs typeface="IBM Plex Sans" pitchFamily="34" charset="-120"/>
               </a:rPr>
               <a:t>Measured demand lands on the TSD’s own 4 production H200</a:t>
             </a:r>
@@ -3942,11 +3942,11 @@
             <a:r>
               <a:rPr lang="en-US" sz="1150" dirty="0">
                 <a:solidFill>
-                  <a:srgbClr val="8A968C"/>
-                </a:solidFill>
-                <a:latin typeface="Calibri" pitchFamily="34" charset="0"/>
-                <a:ea typeface="Calibri" pitchFamily="34" charset="-122"/>
-                <a:cs typeface="Calibri" pitchFamily="34" charset="-120"/>
+                  <a:srgbClr val="6F6F6F"/>
+                </a:solidFill>
+                <a:latin typeface="IBM Plex Sans" pitchFamily="34" charset="0"/>
+                <a:ea typeface="IBM Plex Sans" pitchFamily="34" charset="-122"/>
+                <a:cs typeface="IBM Plex Sans" pitchFamily="34" charset="-120"/>
               </a:rPr>
               <a:t>   ·   but the heavy tier needs 2.06 of them, so “2 active for HA” has no headroom left</a:t>
             </a:r>
@@ -3971,11 +3971,11 @@
             </a:avLst>
           </a:prstGeom>
           <a:solidFill>
-            <a:srgbClr val="1B2C28"/>
+            <a:srgbClr val="FFFFFF"/>
           </a:solidFill>
           <a:ln w="9525">
             <a:solidFill>
-              <a:srgbClr val="2C3E39"/>
+              <a:srgbClr val="E0E0E0"/>
             </a:solidFill>
             <a:prstDash val="solid"/>
           </a:ln>
@@ -4008,11 +4008,11 @@
             <a:r>
               <a:rPr lang="en-US" sz="850" b="1" spc="100" kern="0" dirty="0">
                 <a:solidFill>
-                  <a:srgbClr val="8A968C"/>
-                </a:solidFill>
-                <a:latin typeface="Arial" pitchFamily="34" charset="0"/>
-                <a:ea typeface="Arial" pitchFamily="34" charset="-122"/>
-                <a:cs typeface="Arial" pitchFamily="34" charset="-120"/>
+                  <a:srgbClr val="6F6F6F"/>
+                </a:solidFill>
+                <a:latin typeface="IBM Plex Sans" pitchFamily="34" charset="0"/>
+                <a:ea typeface="IBM Plex Sans" pitchFamily="34" charset="-122"/>
+                <a:cs typeface="IBM Plex Sans" pitchFamily="34" charset="-120"/>
               </a:rPr>
               <a:t>PRODUCTION GPU</a:t>
             </a:r>
@@ -4047,11 +4047,11 @@
             <a:r>
               <a:rPr lang="en-US" sz="3100" b="1" dirty="0">
                 <a:solidFill>
-                  <a:srgbClr val="00A896"/>
-                </a:solidFill>
-                <a:latin typeface="Arial" pitchFamily="34" charset="0"/>
-                <a:ea typeface="Arial" pitchFamily="34" charset="-122"/>
-                <a:cs typeface="Arial" pitchFamily="34" charset="-120"/>
+                  <a:srgbClr val="0F62FE"/>
+                </a:solidFill>
+                <a:latin typeface="IBM Plex Sans" pitchFamily="34" charset="0"/>
+                <a:ea typeface="IBM Plex Sans" pitchFamily="34" charset="-122"/>
+                <a:cs typeface="IBM Plex Sans" pitchFamily="34" charset="-120"/>
               </a:rPr>
               <a:t>4</a:t>
             </a:r>
@@ -4061,11 +4061,11 @@
             <a:r>
               <a:rPr lang="en-US" sz="1100" b="1" dirty="0">
                 <a:solidFill>
-                  <a:srgbClr val="8A968C"/>
-                </a:solidFill>
-                <a:latin typeface="Arial" pitchFamily="34" charset="0"/>
-                <a:ea typeface="Arial" pitchFamily="34" charset="-122"/>
-                <a:cs typeface="Arial" pitchFamily="34" charset="-120"/>
+                  <a:srgbClr val="6F6F6F"/>
+                </a:solidFill>
+                <a:latin typeface="IBM Plex Sans" pitchFamily="34" charset="0"/>
+                <a:ea typeface="IBM Plex Sans" pitchFamily="34" charset="-122"/>
+                <a:cs typeface="IBM Plex Sans" pitchFamily="34" charset="-120"/>
               </a:rPr>
               <a:t> +1 × H200</a:t>
             </a:r>
@@ -4103,11 +4103,11 @@
             <a:r>
               <a:rPr lang="en-US" sz="950" dirty="0">
                 <a:solidFill>
-                  <a:srgbClr val="A9B3AB"/>
-                </a:solidFill>
-                <a:latin typeface="Calibri" pitchFamily="34" charset="0"/>
-                <a:ea typeface="Calibri" pitchFamily="34" charset="-122"/>
-                <a:cs typeface="Calibri" pitchFamily="34" charset="-120"/>
+                  <a:srgbClr val="525252"/>
+                </a:solidFill>
+                <a:latin typeface="IBM Plex Sans" pitchFamily="34" charset="0"/>
+                <a:ea typeface="IBM Plex Sans" pitchFamily="34" charset="-122"/>
+                <a:cs typeface="IBM Plex Sans" pitchFamily="34" charset="-120"/>
               </a:rPr>
               <a:t>Matches the TSD total.</a:t>
             </a:r>
@@ -4123,11 +4123,11 @@
             <a:r>
               <a:rPr lang="en-US" sz="950" dirty="0">
                 <a:solidFill>
-                  <a:srgbClr val="A9B3AB"/>
-                </a:solidFill>
-                <a:latin typeface="Calibri" pitchFamily="34" charset="0"/>
-                <a:ea typeface="Calibri" pitchFamily="34" charset="-122"/>
-                <a:cs typeface="Calibri" pitchFamily="34" charset="-120"/>
+                  <a:srgbClr val="525252"/>
+                </a:solidFill>
+                <a:latin typeface="IBM Plex Sans" pitchFamily="34" charset="0"/>
+                <a:ea typeface="IBM Plex Sans" pitchFamily="34" charset="-122"/>
+                <a:cs typeface="IBM Plex Sans" pitchFamily="34" charset="-120"/>
               </a:rPr>
               <a:t>3 serving + 1 for N+1.</a:t>
             </a:r>
@@ -4152,11 +4152,11 @@
             </a:avLst>
           </a:prstGeom>
           <a:solidFill>
-            <a:srgbClr val="1B2C28"/>
+            <a:srgbClr val="FFFFFF"/>
           </a:solidFill>
           <a:ln w="9525">
             <a:solidFill>
-              <a:srgbClr val="2C3E39"/>
+              <a:srgbClr val="E0E0E0"/>
             </a:solidFill>
             <a:prstDash val="solid"/>
           </a:ln>
@@ -4189,11 +4189,11 @@
             <a:r>
               <a:rPr lang="en-US" sz="850" b="1" spc="100" kern="0" dirty="0">
                 <a:solidFill>
-                  <a:srgbClr val="8A968C"/>
-                </a:solidFill>
-                <a:latin typeface="Arial" pitchFamily="34" charset="0"/>
-                <a:ea typeface="Arial" pitchFamily="34" charset="-122"/>
-                <a:cs typeface="Arial" pitchFamily="34" charset="-120"/>
+                  <a:srgbClr val="6F6F6F"/>
+                </a:solidFill>
+                <a:latin typeface="IBM Plex Sans" pitchFamily="34" charset="0"/>
+                <a:ea typeface="IBM Plex Sans" pitchFamily="34" charset="-122"/>
+                <a:cs typeface="IBM Plex Sans" pitchFamily="34" charset="-120"/>
               </a:rPr>
               <a:t>HEAVY TIER</a:t>
             </a:r>
@@ -4228,11 +4228,11 @@
             <a:r>
               <a:rPr lang="en-US" sz="3100" b="1" dirty="0">
                 <a:solidFill>
-                  <a:srgbClr val="E9ECE7"/>
-                </a:solidFill>
-                <a:latin typeface="Arial" pitchFamily="34" charset="0"/>
-                <a:ea typeface="Arial" pitchFamily="34" charset="-122"/>
-                <a:cs typeface="Arial" pitchFamily="34" charset="-120"/>
+                  <a:srgbClr val="D02670"/>
+                </a:solidFill>
+                <a:latin typeface="IBM Plex Sans" pitchFamily="34" charset="0"/>
+                <a:ea typeface="IBM Plex Sans" pitchFamily="34" charset="-122"/>
+                <a:cs typeface="IBM Plex Sans" pitchFamily="34" charset="-120"/>
               </a:rPr>
               <a:t>2.06</a:t>
             </a:r>
@@ -4242,11 +4242,11 @@
             <a:r>
               <a:rPr lang="en-US" sz="1100" b="1" dirty="0">
                 <a:solidFill>
-                  <a:srgbClr val="8A968C"/>
-                </a:solidFill>
-                <a:latin typeface="Arial" pitchFamily="34" charset="0"/>
-                <a:ea typeface="Arial" pitchFamily="34" charset="-122"/>
-                <a:cs typeface="Arial" pitchFamily="34" charset="-120"/>
+                  <a:srgbClr val="6F6F6F"/>
+                </a:solidFill>
+                <a:latin typeface="IBM Plex Sans" pitchFamily="34" charset="0"/>
+                <a:ea typeface="IBM Plex Sans" pitchFamily="34" charset="-122"/>
+                <a:cs typeface="IBM Plex Sans" pitchFamily="34" charset="-120"/>
               </a:rPr>
               <a:t> of 3 cards</a:t>
             </a:r>
@@ -4284,11 +4284,11 @@
             <a:r>
               <a:rPr lang="en-US" sz="950" dirty="0">
                 <a:solidFill>
-                  <a:srgbClr val="A9B3AB"/>
-                </a:solidFill>
-                <a:latin typeface="Calibri" pitchFamily="34" charset="0"/>
-                <a:ea typeface="Calibri" pitchFamily="34" charset="-122"/>
-                <a:cs typeface="Calibri" pitchFamily="34" charset="-120"/>
+                  <a:srgbClr val="525252"/>
+                </a:solidFill>
+                <a:latin typeface="IBM Plex Sans" pitchFamily="34" charset="0"/>
+                <a:ea typeface="IBM Plex Sans" pitchFamily="34" charset="-122"/>
+                <a:cs typeface="IBM Plex Sans" pitchFamily="34" charset="-120"/>
               </a:rPr>
               <a:t>gpt-oss-120b alone, at</a:t>
             </a:r>
@@ -4304,11 +4304,11 @@
             <a:r>
               <a:rPr lang="en-US" sz="950" dirty="0">
                 <a:solidFill>
-                  <a:srgbClr val="A9B3AB"/>
-                </a:solidFill>
-                <a:latin typeface="Calibri" pitchFamily="34" charset="0"/>
-                <a:ea typeface="Calibri" pitchFamily="34" charset="-122"/>
-                <a:cs typeface="Calibri" pitchFamily="34" charset="-120"/>
+                  <a:srgbClr val="525252"/>
+                </a:solidFill>
+                <a:latin typeface="IBM Plex Sans" pitchFamily="34" charset="0"/>
+                <a:ea typeface="IBM Plex Sans" pitchFamily="34" charset="-122"/>
+                <a:cs typeface="IBM Plex Sans" pitchFamily="34" charset="-120"/>
               </a:rPr>
               <a:t>pan-India peak.</a:t>
             </a:r>
@@ -4333,11 +4333,11 @@
             </a:avLst>
           </a:prstGeom>
           <a:solidFill>
-            <a:srgbClr val="1B2C28"/>
+            <a:srgbClr val="FFFFFF"/>
           </a:solidFill>
           <a:ln w="9525">
             <a:solidFill>
-              <a:srgbClr val="2C3E39"/>
+              <a:srgbClr val="E0E0E0"/>
             </a:solidFill>
             <a:prstDash val="solid"/>
           </a:ln>
@@ -4370,11 +4370,11 @@
             <a:r>
               <a:rPr lang="en-US" sz="850" b="1" spc="100" kern="0" dirty="0">
                 <a:solidFill>
-                  <a:srgbClr val="8A968C"/>
-                </a:solidFill>
-                <a:latin typeface="Arial" pitchFamily="34" charset="0"/>
-                <a:ea typeface="Arial" pitchFamily="34" charset="-122"/>
-                <a:cs typeface="Arial" pitchFamily="34" charset="-120"/>
+                  <a:srgbClr val="6F6F6F"/>
+                </a:solidFill>
+                <a:latin typeface="IBM Plex Sans" pitchFamily="34" charset="0"/>
+                <a:ea typeface="IBM Plex Sans" pitchFamily="34" charset="-122"/>
+                <a:cs typeface="IBM Plex Sans" pitchFamily="34" charset="-120"/>
               </a:rPr>
               <a:t>CHANGE MGMT</a:t>
             </a:r>
@@ -4409,11 +4409,11 @@
             <a:r>
               <a:rPr lang="en-US" sz="3100" b="1" dirty="0">
                 <a:solidFill>
-                  <a:srgbClr val="E9ECE7"/>
-                </a:solidFill>
-                <a:latin typeface="Arial" pitchFamily="34" charset="0"/>
-                <a:ea typeface="Arial" pitchFamily="34" charset="-122"/>
-                <a:cs typeface="Arial" pitchFamily="34" charset="-120"/>
+                  <a:srgbClr val="161616"/>
+                </a:solidFill>
+                <a:latin typeface="IBM Plex Sans" pitchFamily="34" charset="0"/>
+                <a:ea typeface="IBM Plex Sans" pitchFamily="34" charset="-122"/>
+                <a:cs typeface="IBM Plex Sans" pitchFamily="34" charset="-120"/>
               </a:rPr>
               <a:t>18</a:t>
             </a:r>
@@ -4423,11 +4423,11 @@
             <a:r>
               <a:rPr lang="en-US" sz="1100" b="1" dirty="0">
                 <a:solidFill>
-                  <a:srgbClr val="8A968C"/>
-                </a:solidFill>
-                <a:latin typeface="Arial" pitchFamily="34" charset="0"/>
-                <a:ea typeface="Arial" pitchFamily="34" charset="-122"/>
-                <a:cs typeface="Arial" pitchFamily="34" charset="-120"/>
+                  <a:srgbClr val="6F6F6F"/>
+                </a:solidFill>
+                <a:latin typeface="IBM Plex Sans" pitchFamily="34" charset="0"/>
+                <a:ea typeface="IBM Plex Sans" pitchFamily="34" charset="-122"/>
+                <a:cs typeface="IBM Plex Sans" pitchFamily="34" charset="-120"/>
               </a:rPr>
               <a:t> % of tokens</a:t>
             </a:r>
@@ -4465,11 +4465,11 @@
             <a:r>
               <a:rPr lang="en-US" sz="950" dirty="0">
                 <a:solidFill>
-                  <a:srgbClr val="A9B3AB"/>
-                </a:solidFill>
-                <a:latin typeface="Calibri" pitchFamily="34" charset="0"/>
-                <a:ea typeface="Calibri" pitchFamily="34" charset="-122"/>
-                <a:cs typeface="Calibri" pitchFamily="34" charset="-120"/>
+                  <a:srgbClr val="525252"/>
+                </a:solidFill>
+                <a:latin typeface="IBM Plex Sans" pitchFamily="34" charset="0"/>
+                <a:ea typeface="IBM Plex Sans" pitchFamily="34" charset="-122"/>
+                <a:cs typeface="IBM Plex Sans" pitchFamily="34" charset="-120"/>
               </a:rPr>
               <a:t>Pan-India, on a release</a:t>
             </a:r>
@@ -4485,11 +4485,11 @@
             <a:r>
               <a:rPr lang="en-US" sz="950" dirty="0">
                 <a:solidFill>
-                  <a:srgbClr val="A9B3AB"/>
-                </a:solidFill>
-                <a:latin typeface="Calibri" pitchFamily="34" charset="0"/>
-                <a:ea typeface="Calibri" pitchFamily="34" charset="-122"/>
-                <a:cs typeface="Calibri" pitchFamily="34" charset="-120"/>
+                  <a:srgbClr val="525252"/>
+                </a:solidFill>
+                <a:latin typeface="IBM Plex Sans" pitchFamily="34" charset="0"/>
+                <a:ea typeface="IBM Plex Sans" pitchFamily="34" charset="-122"/>
+                <a:cs typeface="IBM Plex Sans" pitchFamily="34" charset="-120"/>
               </a:rPr>
               <a:t>burst day. 0.33 GPU.</a:t>
             </a:r>
@@ -4514,11 +4514,11 @@
             </a:avLst>
           </a:prstGeom>
           <a:solidFill>
-            <a:srgbClr val="1B2C28"/>
+            <a:srgbClr val="FFFFFF"/>
           </a:solidFill>
           <a:ln w="9525">
             <a:solidFill>
-              <a:srgbClr val="2C3E39"/>
+              <a:srgbClr val="E0E0E0"/>
             </a:solidFill>
             <a:prstDash val="solid"/>
           </a:ln>
@@ -4551,11 +4551,11 @@
             <a:r>
               <a:rPr lang="en-US" sz="850" b="1" spc="100" kern="0" dirty="0">
                 <a:solidFill>
-                  <a:srgbClr val="8A968C"/>
-                </a:solidFill>
-                <a:latin typeface="Arial" pitchFamily="34" charset="0"/>
-                <a:ea typeface="Arial" pitchFamily="34" charset="-122"/>
-                <a:cs typeface="Arial" pitchFamily="34" charset="-120"/>
+                  <a:srgbClr val="6F6F6F"/>
+                </a:solidFill>
+                <a:latin typeface="IBM Plex Sans" pitchFamily="34" charset="0"/>
+                <a:ea typeface="IBM Plex Sans" pitchFamily="34" charset="-122"/>
+                <a:cs typeface="IBM Plex Sans" pitchFamily="34" charset="-120"/>
               </a:rPr>
               <a:t>THE E5 CARD</a:t>
             </a:r>
@@ -4590,11 +4590,11 @@
             <a:r>
               <a:rPr lang="en-US" sz="3100" b="1" dirty="0">
                 <a:solidFill>
-                  <a:srgbClr val="E9ECE7"/>
-                </a:solidFill>
-                <a:latin typeface="Arial" pitchFamily="34" charset="0"/>
-                <a:ea typeface="Arial" pitchFamily="34" charset="-122"/>
-                <a:cs typeface="Arial" pitchFamily="34" charset="-120"/>
+                  <a:srgbClr val="161616"/>
+                </a:solidFill>
+                <a:latin typeface="IBM Plex Sans" pitchFamily="34" charset="0"/>
+                <a:ea typeface="IBM Plex Sans" pitchFamily="34" charset="-122"/>
+                <a:cs typeface="IBM Plex Sans" pitchFamily="34" charset="-120"/>
               </a:rPr>
               <a:t>0.03</a:t>
             </a:r>
@@ -4604,11 +4604,11 @@
             <a:r>
               <a:rPr lang="en-US" sz="1100" b="1" dirty="0">
                 <a:solidFill>
-                  <a:srgbClr val="8A968C"/>
-                </a:solidFill>
-                <a:latin typeface="Arial" pitchFamily="34" charset="0"/>
-                <a:ea typeface="Arial" pitchFamily="34" charset="-122"/>
-                <a:cs typeface="Arial" pitchFamily="34" charset="-120"/>
+                  <a:srgbClr val="6F6F6F"/>
+                </a:solidFill>
+                <a:latin typeface="IBM Plex Sans" pitchFamily="34" charset="0"/>
+                <a:ea typeface="IBM Plex Sans" pitchFamily="34" charset="-122"/>
+                <a:cs typeface="IBM Plex Sans" pitchFamily="34" charset="-120"/>
               </a:rPr>
               <a:t> % utilised</a:t>
             </a:r>
@@ -4646,11 +4646,11 @@
             <a:r>
               <a:rPr lang="en-US" sz="950" dirty="0">
                 <a:solidFill>
-                  <a:srgbClr val="A9B3AB"/>
-                </a:solidFill>
-                <a:latin typeface="Calibri" pitchFamily="34" charset="0"/>
-                <a:ea typeface="Calibri" pitchFamily="34" charset="-122"/>
-                <a:cs typeface="Calibri" pitchFamily="34" charset="-120"/>
+                  <a:srgbClr val="525252"/>
+                </a:solidFill>
+                <a:latin typeface="IBM Plex Sans" pitchFamily="34" charset="0"/>
+                <a:ea typeface="IBM Plex Sans" pitchFamily="34" charset="-122"/>
+                <a:cs typeface="IBM Plex Sans" pitchFamily="34" charset="-120"/>
               </a:rPr>
               <a:t>A 0.7 GB encoder on a</a:t>
             </a:r>
@@ -4666,11 +4666,11 @@
             <a:r>
               <a:rPr lang="en-US" sz="950" dirty="0">
                 <a:solidFill>
-                  <a:srgbClr val="A9B3AB"/>
-                </a:solidFill>
-                <a:latin typeface="Calibri" pitchFamily="34" charset="0"/>
-                <a:ea typeface="Calibri" pitchFamily="34" charset="-122"/>
-                <a:cs typeface="Calibri" pitchFamily="34" charset="-120"/>
+                  <a:srgbClr val="525252"/>
+                </a:solidFill>
+                <a:latin typeface="IBM Plex Sans" pitchFamily="34" charset="0"/>
+                <a:ea typeface="IBM Plex Sans" pitchFamily="34" charset="-122"/>
+                <a:cs typeface="IBM Plex Sans" pitchFamily="34" charset="-120"/>
               </a:rPr>
               <a:t>141 GB card.</a:t>
             </a:r>
@@ -4705,11 +4705,11 @@
             <a:r>
               <a:rPr lang="en-US" sz="850" b="1" spc="100" kern="0" dirty="0">
                 <a:solidFill>
-                  <a:srgbClr val="8A968C"/>
-                </a:solidFill>
-                <a:latin typeface="Arial" pitchFamily="34" charset="0"/>
-                <a:ea typeface="Arial" pitchFamily="34" charset="-122"/>
-                <a:cs typeface="Arial" pitchFamily="34" charset="-120"/>
+                  <a:srgbClr val="6F6F6F"/>
+                </a:solidFill>
+                <a:latin typeface="IBM Plex Sans" pitchFamily="34" charset="0"/>
+                <a:ea typeface="IBM Plex Sans" pitchFamily="34" charset="-122"/>
+                <a:cs typeface="IBM Plex Sans" pitchFamily="34" charset="-120"/>
               </a:rPr>
               <a:t>HA POSTURE AT PAN-INDIA PEAK</a:t>
             </a:r>
@@ -4734,11 +4734,11 @@
             </a:avLst>
           </a:prstGeom>
           <a:solidFill>
-            <a:srgbClr val="1B2C28"/>
+            <a:srgbClr val="FFFFFF"/>
           </a:solidFill>
           <a:ln w="9525">
             <a:solidFill>
-              <a:srgbClr val="2C3E39"/>
+              <a:srgbClr val="E0E0E0"/>
             </a:solidFill>
             <a:prstDash val="solid"/>
           </a:ln>
@@ -4771,11 +4771,11 @@
             <a:r>
               <a:rPr lang="en-US" sz="900" dirty="0">
                 <a:solidFill>
-                  <a:srgbClr val="8A968C"/>
-                </a:solidFill>
-                <a:latin typeface="Calibri" pitchFamily="34" charset="0"/>
-                <a:ea typeface="Calibri" pitchFamily="34" charset="-122"/>
-                <a:cs typeface="Calibri" pitchFamily="34" charset="-120"/>
+                  <a:srgbClr val="6F6F6F"/>
+                </a:solidFill>
+                <a:latin typeface="IBM Plex Sans" pitchFamily="34" charset="0"/>
+                <a:ea typeface="IBM Plex Sans" pitchFamily="34" charset="-122"/>
+                <a:cs typeface="IBM Plex Sans" pitchFamily="34" charset="-120"/>
               </a:rPr>
               <a:t>3 cards healthy</a:t>
             </a:r>
@@ -4810,11 +4810,11 @@
             <a:r>
               <a:rPr lang="en-US" sz="1500" b="1" dirty="0">
                 <a:solidFill>
-                  <a:srgbClr val="E9ECE7"/>
-                </a:solidFill>
-                <a:latin typeface="Arial" pitchFamily="34" charset="0"/>
-                <a:ea typeface="Arial" pitchFamily="34" charset="-122"/>
-                <a:cs typeface="Arial" pitchFamily="34" charset="-120"/>
+                  <a:srgbClr val="198038"/>
+                </a:solidFill>
+                <a:latin typeface="IBM Plex Sans" pitchFamily="34" charset="0"/>
+                <a:ea typeface="IBM Plex Sans" pitchFamily="34" charset="-122"/>
+                <a:cs typeface="IBM Plex Sans" pitchFamily="34" charset="-120"/>
               </a:rPr>
               <a:t>48% of knee</a:t>
             </a:r>
@@ -4852,11 +4852,11 @@
             <a:r>
               <a:rPr lang="en-US" sz="800" dirty="0">
                 <a:solidFill>
-                  <a:srgbClr val="8A968C"/>
-                </a:solidFill>
-                <a:latin typeface="Calibri" pitchFamily="34" charset="0"/>
-                <a:ea typeface="Calibri" pitchFamily="34" charset="-122"/>
-                <a:cs typeface="Calibri" pitchFamily="34" charset="-120"/>
+                  <a:srgbClr val="6F6F6F"/>
+                </a:solidFill>
+                <a:latin typeface="IBM Plex Sans" pitchFamily="34" charset="0"/>
+                <a:ea typeface="IBM Plex Sans" pitchFamily="34" charset="-122"/>
+                <a:cs typeface="IBM Plex Sans" pitchFamily="34" charset="-120"/>
               </a:rPr>
               <a:t>comfortable — the normal state</a:t>
             </a:r>
@@ -4879,7 +4879,7 @@
             <a:avLst/>
           </a:prstGeom>
           <a:solidFill>
-            <a:srgbClr val="CB6127"/>
+            <a:srgbClr val="C6C6C6"/>
           </a:solidFill>
           <a:ln/>
         </p:spPr>
@@ -4901,11 +4901,11 @@
             </a:avLst>
           </a:prstGeom>
           <a:solidFill>
-            <a:srgbClr val="1B2C28"/>
+            <a:srgbClr val="FFFFFF"/>
           </a:solidFill>
           <a:ln w="9525">
             <a:solidFill>
-              <a:srgbClr val="2C3E39"/>
+              <a:srgbClr val="E0E0E0"/>
             </a:solidFill>
             <a:prstDash val="solid"/>
           </a:ln>
@@ -4938,11 +4938,11 @@
             <a:r>
               <a:rPr lang="en-US" sz="900" dirty="0">
                 <a:solidFill>
-                  <a:srgbClr val="8A968C"/>
-                </a:solidFill>
-                <a:latin typeface="Calibri" pitchFamily="34" charset="0"/>
-                <a:ea typeface="Calibri" pitchFamily="34" charset="-122"/>
-                <a:cs typeface="Calibri" pitchFamily="34" charset="-120"/>
+                  <a:srgbClr val="6F6F6F"/>
+                </a:solidFill>
+                <a:latin typeface="IBM Plex Sans" pitchFamily="34" charset="0"/>
+                <a:ea typeface="IBM Plex Sans" pitchFamily="34" charset="-122"/>
+                <a:cs typeface="IBM Plex Sans" pitchFamily="34" charset="-120"/>
               </a:rPr>
               <a:t>2 active (TSD HA)</a:t>
             </a:r>
@@ -4977,11 +4977,11 @@
             <a:r>
               <a:rPr lang="en-US" sz="1500" b="1" dirty="0">
                 <a:solidFill>
-                  <a:srgbClr val="E9ECE7"/>
-                </a:solidFill>
-                <a:latin typeface="Arial" pitchFamily="34" charset="0"/>
-                <a:ea typeface="Arial" pitchFamily="34" charset="-122"/>
-                <a:cs typeface="Arial" pitchFamily="34" charset="-120"/>
+                  <a:srgbClr val="8A3800"/>
+                </a:solidFill>
+                <a:latin typeface="IBM Plex Sans" pitchFamily="34" charset="0"/>
+                <a:ea typeface="IBM Plex Sans" pitchFamily="34" charset="-122"/>
+                <a:cs typeface="IBM Plex Sans" pitchFamily="34" charset="-120"/>
               </a:rPr>
               <a:t>72% of knee</a:t>
             </a:r>
@@ -5019,11 +5019,11 @@
             <a:r>
               <a:rPr lang="en-US" sz="800" dirty="0">
                 <a:solidFill>
-                  <a:srgbClr val="8A968C"/>
-                </a:solidFill>
-                <a:latin typeface="Calibri" pitchFamily="34" charset="0"/>
-                <a:ea typeface="Calibri" pitchFamily="34" charset="-122"/>
-                <a:cs typeface="Calibri" pitchFamily="34" charset="-120"/>
+                  <a:srgbClr val="6F6F6F"/>
+                </a:solidFill>
+                <a:latin typeface="IBM Plex Sans" pitchFamily="34" charset="0"/>
+                <a:ea typeface="IBM Plex Sans" pitchFamily="34" charset="-122"/>
+                <a:cs typeface="IBM Plex Sans" pitchFamily="34" charset="-120"/>
               </a:rPr>
               <a:t>meets SLO, 30% headroom spent</a:t>
             </a:r>
@@ -5046,7 +5046,7 @@
             <a:avLst/>
           </a:prstGeom>
           <a:solidFill>
-            <a:srgbClr val="CB6127"/>
+            <a:srgbClr val="C6C6C6"/>
           </a:solidFill>
           <a:ln/>
         </p:spPr>
@@ -5068,11 +5068,11 @@
             </a:avLst>
           </a:prstGeom>
           <a:solidFill>
-            <a:srgbClr val="1B2C28"/>
+            <a:srgbClr val="FFFFFF"/>
           </a:solidFill>
           <a:ln w="9525">
             <a:solidFill>
-              <a:srgbClr val="2C3E39"/>
+              <a:srgbClr val="E0E0E0"/>
             </a:solidFill>
             <a:prstDash val="solid"/>
           </a:ln>
@@ -5105,11 +5105,11 @@
             <a:r>
               <a:rPr lang="en-US" sz="900" dirty="0">
                 <a:solidFill>
-                  <a:srgbClr val="8A968C"/>
-                </a:solidFill>
-                <a:latin typeface="Calibri" pitchFamily="34" charset="0"/>
-                <a:ea typeface="Calibri" pitchFamily="34" charset="-122"/>
-                <a:cs typeface="Calibri" pitchFamily="34" charset="-120"/>
+                  <a:srgbClr val="6F6F6F"/>
+                </a:solidFill>
+                <a:latin typeface="IBM Plex Sans" pitchFamily="34" charset="0"/>
+                <a:ea typeface="IBM Plex Sans" pitchFamily="34" charset="-122"/>
+                <a:cs typeface="IBM Plex Sans" pitchFamily="34" charset="-120"/>
               </a:rPr>
               <a:t>1 surviving</a:t>
             </a:r>
@@ -5144,11 +5144,11 @@
             <a:r>
               <a:rPr lang="en-US" sz="1500" b="1" dirty="0">
                 <a:solidFill>
-                  <a:srgbClr val="E9ECE7"/>
-                </a:solidFill>
-                <a:latin typeface="Arial" pitchFamily="34" charset="0"/>
-                <a:ea typeface="Arial" pitchFamily="34" charset="-122"/>
-                <a:cs typeface="Arial" pitchFamily="34" charset="-120"/>
+                  <a:srgbClr val="DA1E28"/>
+                </a:solidFill>
+                <a:latin typeface="IBM Plex Sans" pitchFamily="34" charset="0"/>
+                <a:ea typeface="IBM Plex Sans" pitchFamily="34" charset="-122"/>
+                <a:cs typeface="IBM Plex Sans" pitchFamily="34" charset="-120"/>
               </a:rPr>
               <a:t>145% of knee</a:t>
             </a:r>
@@ -5186,11 +5186,11 @@
             <a:r>
               <a:rPr lang="en-US" sz="800" dirty="0">
                 <a:solidFill>
-                  <a:srgbClr val="8A968C"/>
-                </a:solidFill>
-                <a:latin typeface="Calibri" pitchFamily="34" charset="0"/>
-                <a:ea typeface="Calibri" pitchFamily="34" charset="-122"/>
-                <a:cs typeface="Calibri" pitchFamily="34" charset="-120"/>
+                  <a:srgbClr val="6F6F6F"/>
+                </a:solidFill>
+                <a:latin typeface="IBM Plex Sans" pitchFamily="34" charset="0"/>
+                <a:ea typeface="IBM Plex Sans" pitchFamily="34" charset="-122"/>
+                <a:cs typeface="IBM Plex Sans" pitchFamily="34" charset="-120"/>
               </a:rPr>
               <a:t>SLO breach at peak hour</a:t>
             </a:r>
@@ -5215,11 +5215,11 @@
             </a:avLst>
           </a:prstGeom>
           <a:solidFill>
-            <a:srgbClr val="1B2C28"/>
+            <a:srgbClr val="FFFFFF"/>
           </a:solidFill>
           <a:ln w="9525">
             <a:solidFill>
-              <a:srgbClr val="2C3E39"/>
+              <a:srgbClr val="E0E0E0"/>
             </a:solidFill>
             <a:prstDash val="solid"/>
           </a:ln>
@@ -5252,11 +5252,11 @@
             <a:r>
               <a:rPr lang="en-US" sz="900" dirty="0">
                 <a:solidFill>
-                  <a:srgbClr val="8A968C"/>
-                </a:solidFill>
-                <a:latin typeface="Calibri" pitchFamily="34" charset="0"/>
-                <a:ea typeface="Calibri" pitchFamily="34" charset="-122"/>
-                <a:cs typeface="Calibri" pitchFamily="34" charset="-120"/>
+                  <a:srgbClr val="6F6F6F"/>
+                </a:solidFill>
+                <a:latin typeface="IBM Plex Sans" pitchFamily="34" charset="0"/>
+                <a:ea typeface="IBM Plex Sans" pitchFamily="34" charset="-122"/>
+                <a:cs typeface="IBM Plex Sans" pitchFamily="34" charset="-120"/>
               </a:rPr>
               <a:t>Free the E5 card</a:t>
             </a:r>
@@ -5291,11 +5291,11 @@
             <a:r>
               <a:rPr lang="en-US" sz="1500" b="1" dirty="0">
                 <a:solidFill>
-                  <a:srgbClr val="E9ECE7"/>
-                </a:solidFill>
-                <a:latin typeface="Arial" pitchFamily="34" charset="0"/>
-                <a:ea typeface="Arial" pitchFamily="34" charset="-122"/>
-                <a:cs typeface="Arial" pitchFamily="34" charset="-120"/>
+                  <a:srgbClr val="0F62FE"/>
+                </a:solidFill>
+                <a:latin typeface="IBM Plex Sans" pitchFamily="34" charset="0"/>
+                <a:ea typeface="IBM Plex Sans" pitchFamily="34" charset="-122"/>
+                <a:cs typeface="IBM Plex Sans" pitchFamily="34" charset="-120"/>
               </a:rPr>
               <a:t>4 heavy-capable</a:t>
             </a:r>
@@ -5333,11 +5333,11 @@
             <a:r>
               <a:rPr lang="en-US" sz="800" dirty="0">
                 <a:solidFill>
-                  <a:srgbClr val="8A968C"/>
-                </a:solidFill>
-                <a:latin typeface="Calibri" pitchFamily="34" charset="0"/>
-                <a:ea typeface="Calibri" pitchFamily="34" charset="-122"/>
-                <a:cs typeface="Calibri" pitchFamily="34" charset="-120"/>
+                  <a:srgbClr val="6F6F6F"/>
+                </a:solidFill>
+                <a:latin typeface="IBM Plex Sans" pitchFamily="34" charset="0"/>
+                <a:ea typeface="IBM Plex Sans" pitchFamily="34" charset="-122"/>
+                <a:cs typeface="IBM Plex Sans" pitchFamily="34" charset="-120"/>
               </a:rPr>
               <a:t>turns 2-at-the-edge into 3-with-margin</a:t>
             </a:r>
@@ -5362,11 +5362,11 @@
             </a:avLst>
           </a:prstGeom>
           <a:solidFill>
-            <a:srgbClr val="1B2C28"/>
+            <a:srgbClr val="FFFFFF"/>
           </a:solidFill>
           <a:ln w="9525">
             <a:solidFill>
-              <a:srgbClr val="2C3E39"/>
+              <a:srgbClr val="E0E0E0"/>
             </a:solidFill>
             <a:prstDash val="solid"/>
           </a:ln>
@@ -5399,11 +5399,11 @@
             <a:r>
               <a:rPr lang="en-US" sz="900" dirty="0">
                 <a:solidFill>
-                  <a:srgbClr val="8A968C"/>
-                </a:solidFill>
-                <a:latin typeface="Calibri" pitchFamily="34" charset="0"/>
-                <a:ea typeface="Calibri" pitchFamily="34" charset="-122"/>
-                <a:cs typeface="Calibri" pitchFamily="34" charset="-120"/>
+                  <a:srgbClr val="6F6F6F"/>
+                </a:solidFill>
+                <a:latin typeface="IBM Plex Sans" pitchFamily="34" charset="0"/>
+                <a:ea typeface="IBM Plex Sans" pitchFamily="34" charset="-122"/>
+                <a:cs typeface="IBM Plex Sans" pitchFamily="34" charset="-120"/>
               </a:rPr>
               <a:t>Model tiers covered</a:t>
             </a:r>
@@ -5438,11 +5438,11 @@
             <a:r>
               <a:rPr lang="en-US" sz="1500" b="1" dirty="0">
                 <a:solidFill>
-                  <a:srgbClr val="00A896"/>
-                </a:solidFill>
-                <a:latin typeface="Arial" pitchFamily="34" charset="0"/>
-                <a:ea typeface="Arial" pitchFamily="34" charset="-122"/>
-                <a:cs typeface="Arial" pitchFamily="34" charset="-120"/>
+                  <a:srgbClr val="D02670"/>
+                </a:solidFill>
+                <a:latin typeface="IBM Plex Sans" pitchFamily="34" charset="0"/>
+                <a:ea typeface="IBM Plex Sans" pitchFamily="34" charset="-122"/>
+                <a:cs typeface="IBM Plex Sans" pitchFamily="34" charset="-120"/>
               </a:rPr>
               <a:t>2 of 6</a:t>
             </a:r>
@@ -5480,11 +5480,11 @@
             <a:r>
               <a:rPr lang="en-US" sz="800" dirty="0">
                 <a:solidFill>
-                  <a:srgbClr val="8A968C"/>
-                </a:solidFill>
-                <a:latin typeface="Calibri" pitchFamily="34" charset="0"/>
-                <a:ea typeface="Calibri" pitchFamily="34" charset="-122"/>
-                <a:cs typeface="Calibri" pitchFamily="34" charset="-120"/>
+                  <a:srgbClr val="6F6F6F"/>
+                </a:solidFill>
+                <a:latin typeface="IBM Plex Sans" pitchFamily="34" charset="0"/>
+                <a:ea typeface="IBM Plex Sans" pitchFamily="34" charset="-122"/>
+                <a:cs typeface="IBM Plex Sans" pitchFamily="34" charset="-120"/>
               </a:rPr>
               <a:t>Gemma, Llama 8B and the VLM have no node</a:t>
             </a:r>
@@ -5509,11 +5509,11 @@
             </a:avLst>
           </a:prstGeom>
           <a:solidFill>
-            <a:srgbClr val="1B2C28"/>
+            <a:srgbClr val="FFFFFF"/>
           </a:solidFill>
           <a:ln w="9525">
             <a:solidFill>
-              <a:srgbClr val="2C3E39"/>
+              <a:srgbClr val="E0E0E0"/>
             </a:solidFill>
             <a:prstDash val="solid"/>
           </a:ln>
@@ -5534,7 +5534,7 @@
             <a:avLst/>
           </a:prstGeom>
           <a:solidFill>
-            <a:srgbClr val="00A896"/>
+            <a:srgbClr val="0F62FE"/>
           </a:solidFill>
           <a:ln/>
         </p:spPr>
@@ -5566,11 +5566,11 @@
             <a:r>
               <a:rPr lang="en-US" sz="1200" b="1" dirty="0">
                 <a:solidFill>
-                  <a:srgbClr val="E9ECE7"/>
-                </a:solidFill>
-                <a:latin typeface="Arial" pitchFamily="34" charset="0"/>
-                <a:ea typeface="Arial" pitchFamily="34" charset="-122"/>
-                <a:cs typeface="Arial" pitchFamily="34" charset="-120"/>
+                  <a:srgbClr val="161616"/>
+                </a:solidFill>
+                <a:latin typeface="IBM Plex Sans" pitchFamily="34" charset="0"/>
+                <a:ea typeface="IBM Plex Sans" pitchFamily="34" charset="-122"/>
+                <a:cs typeface="IBM Plex Sans" pitchFamily="34" charset="-120"/>
               </a:rPr>
               <a:t>CHM adds tiers, not cards</a:t>
             </a:r>
@@ -5608,11 +5608,11 @@
             <a:r>
               <a:rPr lang="en-US" sz="1000" dirty="0">
                 <a:solidFill>
-                  <a:srgbClr val="A9B3AB"/>
-                </a:solidFill>
-                <a:latin typeface="Calibri" pitchFamily="34" charset="0"/>
-                <a:ea typeface="Calibri" pitchFamily="34" charset="-122"/>
-                <a:cs typeface="Calibri" pitchFamily="34" charset="-120"/>
+                  <a:srgbClr val="525252"/>
+                </a:solidFill>
+                <a:latin typeface="IBM Plex Sans" pitchFamily="34" charset="0"/>
+                <a:ea typeface="IBM Plex Sans" pitchFamily="34" charset="-122"/>
+                <a:cs typeface="IBM Plex Sans" pitchFamily="34" charset="-120"/>
               </a:rPr>
               <a:t>Pan-India CHM is 18% of tokens and 0.33 of a GPU. What it really adds is two more model tiers to host — Llama 3.1 8B for MOP generation and heavier use of the Gemma fast tier — neither of which has a node in the §12 pool.</a:t>
             </a:r>
@@ -5637,11 +5637,11 @@
             </a:avLst>
           </a:prstGeom>
           <a:solidFill>
-            <a:srgbClr val="1B2C28"/>
+            <a:srgbClr val="FFFFFF"/>
           </a:solidFill>
           <a:ln w="9525">
             <a:solidFill>
-              <a:srgbClr val="2C3E39"/>
+              <a:srgbClr val="E0E0E0"/>
             </a:solidFill>
             <a:prstDash val="solid"/>
           </a:ln>
@@ -5662,7 +5662,7 @@
             <a:avLst/>
           </a:prstGeom>
           <a:solidFill>
-            <a:srgbClr val="CB6127"/>
+            <a:srgbClr val="D02670"/>
           </a:solidFill>
           <a:ln/>
         </p:spPr>
@@ -5694,11 +5694,11 @@
             <a:r>
               <a:rPr lang="en-US" sz="1200" b="1" dirty="0">
                 <a:solidFill>
-                  <a:srgbClr val="E9ECE7"/>
-                </a:solidFill>
-                <a:latin typeface="Arial" pitchFamily="34" charset="0"/>
-                <a:ea typeface="Arial" pitchFamily="34" charset="-122"/>
-                <a:cs typeface="Arial" pitchFamily="34" charset="-120"/>
+                  <a:srgbClr val="161616"/>
+                </a:solidFill>
+                <a:latin typeface="IBM Plex Sans" pitchFamily="34" charset="0"/>
+                <a:ea typeface="IBM Plex Sans" pitchFamily="34" charset="-122"/>
+                <a:cs typeface="IBM Plex Sans" pitchFamily="34" charset="-120"/>
               </a:rPr>
               <a:t>The §12 pool covers 2 of 6 models</a:t>
             </a:r>
@@ -5736,11 +5736,11 @@
             <a:r>
               <a:rPr lang="en-US" sz="1000" dirty="0">
                 <a:solidFill>
-                  <a:srgbClr val="A9B3AB"/>
-                </a:solidFill>
-                <a:latin typeface="Calibri" pitchFamily="34" charset="0"/>
-                <a:ea typeface="Calibri" pitchFamily="34" charset="-122"/>
-                <a:cs typeface="Calibri" pitchFamily="34" charset="-120"/>
+                  <a:srgbClr val="525252"/>
+                </a:solidFill>
+                <a:latin typeface="IBM Plex Sans" pitchFamily="34" charset="0"/>
+                <a:ea typeface="IBM Plex Sans" pitchFamily="34" charset="-122"/>
+                <a:cs typeface="IBM Plex Sans" pitchFamily="34" charset="-120"/>
               </a:rPr>
               <a:t>It allocates nodes for gpt-oss-120b and E5. Gemma 4 26B, Gemma 4 E4B, Llama 3.1 8B and the VLM are named elsewhere in the TSD with no allocation. Weights co-reside in 107 of 141 GB — but compute does not.</a:t>
             </a:r>
@@ -5765,11 +5765,11 @@
             </a:avLst>
           </a:prstGeom>
           <a:solidFill>
-            <a:srgbClr val="1B2C28"/>
+            <a:srgbClr val="FFFFFF"/>
           </a:solidFill>
           <a:ln w="9525">
             <a:solidFill>
-              <a:srgbClr val="2C3E39"/>
+              <a:srgbClr val="E0E0E0"/>
             </a:solidFill>
             <a:prstDash val="solid"/>
           </a:ln>
@@ -5790,7 +5790,7 @@
             <a:avLst/>
           </a:prstGeom>
           <a:solidFill>
-            <a:srgbClr val="00A896"/>
+            <a:srgbClr val="0F62FE"/>
           </a:solidFill>
           <a:ln/>
         </p:spPr>
@@ -5822,11 +5822,11 @@
             <a:r>
               <a:rPr lang="en-US" sz="1200" b="1" dirty="0">
                 <a:solidFill>
-                  <a:srgbClr val="E9ECE7"/>
-                </a:solidFill>
-                <a:latin typeface="Arial" pitchFamily="34" charset="0"/>
-                <a:ea typeface="Arial" pitchFamily="34" charset="-122"/>
-                <a:cs typeface="Arial" pitchFamily="34" charset="-120"/>
+                  <a:srgbClr val="161616"/>
+                </a:solidFill>
+                <a:latin typeface="IBM Plex Sans" pitchFamily="34" charset="0"/>
+                <a:ea typeface="IBM Plex Sans" pitchFamily="34" charset="-122"/>
+                <a:cs typeface="IBM Plex Sans" pitchFamily="34" charset="-120"/>
               </a:rPr>
               <a:t>Reallocate rather than buy more</a:t>
             </a:r>
@@ -5864,11 +5864,11 @@
             <a:r>
               <a:rPr lang="en-US" sz="1000" dirty="0">
                 <a:solidFill>
-                  <a:srgbClr val="A9B3AB"/>
-                </a:solidFill>
-                <a:latin typeface="Calibri" pitchFamily="34" charset="0"/>
-                <a:ea typeface="Calibri" pitchFamily="34" charset="-122"/>
-                <a:cs typeface="Calibri" pitchFamily="34" charset="-120"/>
+                  <a:srgbClr val="525252"/>
+                </a:solidFill>
+                <a:latin typeface="IBM Plex Sans" pitchFamily="34" charset="0"/>
+                <a:ea typeface="IBM Plex Sans" pitchFamily="34" charset="-122"/>
+                <a:cs typeface="IBM Plex Sans" pitchFamily="34" charset="-120"/>
               </a:rPr>
               <a:t>E5 runs at 0.03% of one card. Co-locate it with the fast tier and all four cards become heavy-capable — the same spend, but three active at peak instead of two at the edge.</a:t>
             </a:r>
@@ -5906,11 +5906,11 @@
             <a:r>
               <a:rPr lang="en-US" sz="850" b="1" dirty="0">
                 <a:solidFill>
-                  <a:srgbClr val="E9ECE7"/>
-                </a:solidFill>
-                <a:latin typeface="Calibri" pitchFamily="34" charset="0"/>
-                <a:ea typeface="Calibri" pitchFamily="34" charset="-122"/>
-                <a:cs typeface="Calibri" pitchFamily="34" charset="-120"/>
+                  <a:srgbClr val="161616"/>
+                </a:solidFill>
+                <a:latin typeface="IBM Plex Sans" pitchFamily="34" charset="0"/>
+                <a:ea typeface="IBM Plex Sans" pitchFamily="34" charset="-122"/>
+                <a:cs typeface="IBM Plex Sans" pitchFamily="34" charset="-120"/>
               </a:rPr>
               <a:t>Method:  </a:t>
             </a:r>
@@ -5923,11 +5923,11 @@
             <a:r>
               <a:rPr lang="en-US" sz="850" dirty="0">
                 <a:solidFill>
-                  <a:srgbClr val="A9B3AB"/>
-                </a:solidFill>
-                <a:latin typeface="Calibri" pitchFamily="34" charset="0"/>
-                <a:ea typeface="Calibri" pitchFamily="34" charset="-122"/>
-                <a:cs typeface="Calibri" pitchFamily="34" charset="-120"/>
+                  <a:srgbClr val="525252"/>
+                </a:solidFill>
+                <a:latin typeface="IBM Plex Sans" pitchFamily="34" charset="0"/>
+                <a:ea typeface="IBM Plex Sans" pitchFamily="34" charset="-122"/>
+                <a:cs typeface="IBM Plex Sans" pitchFamily="34" charset="-120"/>
               </a:rPr>
               <a:t>13 GuideLLM operating points across the three model tiers the TSD names, calibrated to H200 141GB (4.8 TB/s — decode ~1.43× an H100, prefill held flat). Volumes are the TSD’s own: 15M alarms/day, 8 CHM agents, Gujarat in phase 1 and pan-India at target. The one thing arithmetic cannot settle is co-resident compute — that needs a run on the real card.</a:t>
             </a:r>

--- a/deck/Vi-AI-NOC-Sizing.pptx
+++ b/deck/Vi-AI-NOC-Sizing.pptx
@@ -503,7 +503,7 @@
           <a:p>
             <a:r>
               <a:rPr lang="en-US" dirty="0"/>
-              <a:t>Left: what the IBM TSD fixes versus what we assumed — note alarms moved from 10M to 15M/day, which is what drives the heavy tier. Middle: the six sizing decisions. Right: measured capacity per model tier on H200, and where the tokens actually come from. The headline of this slide is that Change Management adds model tiers, not GPUs.</a:t>
+              <a:t>Left: what the IBM TSD fixes versus what we assumed — note alarms moved from 10M to 15M/day, which is what drives the heavy tier. Middle: the six sizing decisions. Right: measured capacity per model tier on H200, and where the tokens come from — note the CHM release-drop burst is larger than its steady state. The headline of this slide is that Change Management adds model tiers, not GPUs.</a:t>
             </a:r>
             <a:endParaRPr lang="en-US" dirty="0"/>
           </a:p>
@@ -1317,7 +1317,7 @@
                 <a:ea typeface="IBM Plex Sans" pitchFamily="34" charset="-122"/>
                 <a:cs typeface="IBM Plex Sans" pitchFamily="34" charset="-120"/>
               </a:rPr>
-              <a:t>8 CHM agents, GUJ first → pan-India  (§6.8–6.13)</a:t>
+              <a:t>8 CHM agents, Paco / VoLTE / IP  (§6.8–6.13)</a:t>
             </a:r>
             <a:endParaRPr lang="en-US" sz="1000" dirty="0"/>
           </a:p>
@@ -1522,7 +1522,7 @@
                 <a:ea typeface="IBM Plex Sans" pitchFamily="34" charset="-122"/>
                 <a:cs typeface="IBM Plex Sans" pitchFamily="34" charset="-120"/>
               </a:rPr>
-              <a:t>CHM: 100 CRs/day GUJ → 1,250 pan-India</a:t>
+              <a:t>CHM: 1,250 change requests/day</a:t>
             </a:r>
             <a:endParaRPr lang="en-US" sz="1000" dirty="0"/>
           </a:p>
@@ -1546,7 +1546,7 @@
                 <a:ea typeface="IBM Plex Sans" pitchFamily="34" charset="-122"/>
                 <a:cs typeface="IBM Plex Sans" pitchFamily="34" charset="-120"/>
               </a:rPr>
-              <a:t>Release drop = 12 docs GUJ → 150 national</a:t>
+              <a:t>Release drop = 150 docs → 2,250 MOPs</a:t>
             </a:r>
             <a:endParaRPr lang="en-US" sz="1000" dirty="0"/>
           </a:p>
@@ -2055,7 +2055,7 @@
                 <a:ea typeface="IBM Plex Sans" pitchFamily="34" charset="-122"/>
                 <a:cs typeface="IBM Plex Sans" pitchFamily="34" charset="-120"/>
               </a:rPr>
-              <a:t>Size for the target, not phase 1</a:t>
+              <a:t>Size the estate, not one model</a:t>
             </a:r>
             <a:endParaRPr lang="en-US" sz="1100" dirty="0"/>
           </a:p>
@@ -2097,7 +2097,7 @@
                 <a:ea typeface="IBM Plex Sans" pitchFamily="34" charset="-122"/>
                 <a:cs typeface="IBM Plex Sans" pitchFamily="34" charset="-120"/>
               </a:rPr>
-              <a:t>FM is pan-India from day one; CHM is GUJ first, pan-India after. The pool is bought once, so it is sized on the target state.</a:t>
+              <a:t>The TSD names six model tiers but allocates nodes for two. A pool that only fits gpt-oss-120b and E5 has nowhere to put the rest.</a:t>
             </a:r>
             <a:endParaRPr lang="en-US" sz="950" dirty="0"/>
           </a:p>
@@ -3369,7 +3369,7 @@
                 <a:ea typeface="IBM Plex Sans" pitchFamily="34" charset="-122"/>
                 <a:cs typeface="IBM Plex Sans" pitchFamily="34" charset="-120"/>
               </a:rPr>
-              <a:t>FM · pan-India</a:t>
+              <a:t>FM · alarms → RFO</a:t>
             </a:r>
             <a:endParaRPr lang="en-US" sz="950" dirty="0"/>
           </a:p>
@@ -3506,7 +3506,7 @@
                 <a:ea typeface="IBM Plex Sans" pitchFamily="34" charset="-122"/>
                 <a:cs typeface="IBM Plex Sans" pitchFamily="34" charset="-120"/>
               </a:rPr>
-              <a:t>CHM · pan-India</a:t>
+              <a:t>CHM · steady state</a:t>
             </a:r>
             <a:endParaRPr lang="en-US" sz="950" dirty="0"/>
           </a:p>
@@ -3545,7 +3545,7 @@
                 <a:ea typeface="IBM Plex Mono" pitchFamily="34" charset="-122"/>
                 <a:cs typeface="IBM Plex Mono" pitchFamily="34" charset="-120"/>
               </a:rPr>
-              <a:t>86M</a:t>
+              <a:t>25M</a:t>
             </a:r>
             <a:endParaRPr lang="en-US" sz="900" dirty="0"/>
           </a:p>
@@ -3584,7 +3584,7 @@
                 <a:ea typeface="IBM Plex Mono" pitchFamily="34" charset="-122"/>
                 <a:cs typeface="IBM Plex Mono" pitchFamily="34" charset="-120"/>
               </a:rPr>
-              <a:t>18%</a:t>
+              <a:t>5%</a:t>
             </a:r>
             <a:endParaRPr lang="en-US" sz="950" dirty="0"/>
           </a:p>
@@ -3643,7 +3643,7 @@
                 <a:ea typeface="IBM Plex Sans" pitchFamily="34" charset="-122"/>
                 <a:cs typeface="IBM Plex Sans" pitchFamily="34" charset="-120"/>
               </a:rPr>
-              <a:t>CHM · Gujarat only</a:t>
+              <a:t>CHM · release burst</a:t>
             </a:r>
             <a:endParaRPr lang="en-US" sz="950" dirty="0"/>
           </a:p>
@@ -3682,7 +3682,7 @@
                 <a:ea typeface="IBM Plex Mono" pitchFamily="34" charset="-122"/>
                 <a:cs typeface="IBM Plex Mono" pitchFamily="34" charset="-120"/>
               </a:rPr>
-              <a:t>7.3M</a:t>
+              <a:t>60M</a:t>
             </a:r>
             <a:endParaRPr lang="en-US" sz="900" dirty="0"/>
           </a:p>
@@ -3721,7 +3721,7 @@
                 <a:ea typeface="IBM Plex Mono" pitchFamily="34" charset="-122"/>
                 <a:cs typeface="IBM Plex Mono" pitchFamily="34" charset="-120"/>
               </a:rPr>
-              <a:t>1.8%</a:t>
+              <a:t>13%</a:t>
             </a:r>
             <a:endParaRPr lang="en-US" sz="950" dirty="0"/>
           </a:p>
@@ -3824,7 +3824,7 @@
                 <a:ea typeface="IBM Plex Sans" pitchFamily="34" charset="-122"/>
                 <a:cs typeface="IBM Plex Sans" pitchFamily="34" charset="-120"/>
               </a:rPr>
-              <a:t>Even pan-India it is 18% of tokens and 0.33 of a GPU. The alarm tier at 15M/day sets the fleet; CHM adds model tiers, not cards.</a:t>
+              <a:t>Pan-India it is 18% of tokens and 0.33 of a GPU. The alarm tier at 15M/day sets the fleet; CHM adds model tiers, not cards.</a:t>
             </a:r>
             <a:endParaRPr lang="en-US" sz="950" dirty="0"/>
           </a:p>
@@ -5614,7 +5614,7 @@
                 <a:ea typeface="IBM Plex Sans" pitchFamily="34" charset="-122"/>
                 <a:cs typeface="IBM Plex Sans" pitchFamily="34" charset="-120"/>
               </a:rPr>
-              <a:t>Pan-India CHM is 18% of tokens and 0.33 of a GPU. What it really adds is two more model tiers to host — Llama 3.1 8B for MOP generation and heavier use of the Gemma fast tier — neither of which has a node in the §12 pool.</a:t>
+              <a:t>CHM is 18% of tokens and 0.33 of a GPU. What it really adds is two more model tiers to host — Llama 3.1 8B for MOP generation and heavier use of the Gemma fast tier — neither of which has a node in the §12 pool.</a:t>
             </a:r>
             <a:endParaRPr lang="en-US" sz="1000" dirty="0"/>
           </a:p>
@@ -5929,7 +5929,7 @@
                 <a:ea typeface="IBM Plex Sans" pitchFamily="34" charset="-122"/>
                 <a:cs typeface="IBM Plex Sans" pitchFamily="34" charset="-120"/>
               </a:rPr>
-              <a:t>13 GuideLLM operating points across the three model tiers the TSD names, calibrated to H200 141GB (4.8 TB/s — decode ~1.43× an H100, prefill held flat). Volumes are the TSD’s own: 15M alarms/day, 8 CHM agents, Gujarat in phase 1 and pan-India at target. The one thing arithmetic cannot settle is co-resident compute — that needs a run on the real card.</a:t>
+              <a:t>13 GuideLLM operating points across the three model tiers the TSD names, calibrated to H200 141GB (4.8 TB/s — decode ~1.43× an H100, prefill held flat). Volumes are the TSD’s own: 15M alarms/day and 8 CHM agents, with FM and Change Management both dimensioned pan-India. The one thing arithmetic cannot settle is co-resident compute — that needs a run on the real card.</a:t>
             </a:r>
             <a:endParaRPr lang="en-US" sz="850" dirty="0"/>
           </a:p>

--- a/deck/Vi-AI-NOC-Sizing.pptx
+++ b/deck/Vi-AI-NOC-Sizing.pptx
@@ -2585,7 +2585,7 @@
                 <a:ea typeface="IBM Plex Sans" pitchFamily="34" charset="-122"/>
                 <a:cs typeface="IBM Plex Sans" pitchFamily="34" charset="-120"/>
               </a:rPr>
-              <a:t>Measured on one H200 141GB, gated per tier. GPU column is what pan-India peak demand needs.</a:t>
+              <a:t>Measured per tier on one H200 141GB. IN / OUT = input / output tokens per request.</a:t>
             </a:r>
             <a:endParaRPr lang="en-US" sz="950" dirty="0"/>
           </a:p>
@@ -2624,7 +2624,7 @@
                 <a:ea typeface="IBM Plex Sans" pitchFamily="34" charset="-122"/>
                 <a:cs typeface="IBM Plex Sans" pitchFamily="34" charset="-120"/>
               </a:rPr>
-              <a:t>SHAPE</a:t>
+              <a:t>IN / OUT</a:t>
             </a:r>
             <a:endParaRPr lang="en-US" sz="750" dirty="0"/>
           </a:p>
